--- a/deliverables/模块一测试工作汇报/模块一测试工作汇报.pptx
+++ b/deliverables/模块一测试工作汇报/模块一测试工作汇报.pptx
@@ -5,17 +5,20 @@
     <p:sldMasterId id="2147483648" r:id="rId1"/>
   </p:sldMasterIdLst>
   <p:sldIdLst>
-    <p:sldId id="256" r:id="rId101"/>
-    <p:sldId id="257" r:id="rId102"/>
-    <p:sldId id="258" r:id="rId103"/>
-    <p:sldId id="259" r:id="rId104"/>
-    <p:sldId id="260" r:id="rId105"/>
-    <p:sldId id="261" r:id="rId106"/>
-    <p:sldId id="262" r:id="rId107"/>
-    <p:sldId id="263" r:id="rId108"/>
-    <p:sldId id="264" r:id="rId109"/>
-    <p:sldId id="265" r:id="rId110"/>
-    <p:sldId id="266" r:id="rId111"/>
+    <p:sldId id="257" r:id="rIdSlide1"/>
+    <p:sldId id="258" r:id="rIdSlide2"/>
+    <p:sldId id="259" r:id="rIdSlide3"/>
+    <p:sldId id="260" r:id="rIdSlide4"/>
+    <p:sldId id="261" r:id="rIdSlide5"/>
+    <p:sldId id="262" r:id="rIdSlide6"/>
+    <p:sldId id="263" r:id="rIdSlide7"/>
+    <p:sldId id="264" r:id="rIdSlide8"/>
+    <p:sldId id="265" r:id="rIdSlide9"/>
+    <p:sldId id="266" r:id="rIdSlide10"/>
+    <p:sldId id="267" r:id="rIdSlide11"/>
+    <p:sldId id="268" r:id="rIdSlide12"/>
+    <p:sldId id="269" r:id="rIdSlide13"/>
+    <p:sldId id="270" r:id="rIdSlide14"/>
   </p:sldIdLst>
   <p:sldSz cx="12192000" cy="6858000"/>
   <p:notesSz cx="6858000" cy="9144000"/>
@@ -5266,7 +5269,7 @@
                   <a:cs typeface="微软雅黑" panose="020B0503020204020204" charset="-122"/>
                   <a:sym typeface="Times New Roman" panose="02020603050405020304"/>
                 </a:rPr>
-                <a:t>汇报人丨小组成员</a:t>
+                <a:t>汇报人丨黄国宸 曹钧杰</a:t>
               </a:r>
               <a:r>
                 <a:rPr lang="en-US" altLang="zh-CN" sz="1600" kern="100">
@@ -5281,7 +5284,7 @@
                   <a:cs typeface="微软雅黑" panose="020B0503020204020204" charset="-122"/>
                   <a:sym typeface="Times New Roman" panose="02020603050405020304"/>
                 </a:rPr>
-                <a:t>    </a:t>
+                <a:t>  </a:t>
               </a:r>
               <a:r>
                 <a:rPr lang="zh-CN" altLang="en-US" sz="1600" kern="100">
@@ -5326,7 +5329,7 @@
                   <a:cs typeface="微软雅黑" panose="020B0503020204020204" charset="-122"/>
                   <a:sym typeface="Times New Roman" panose="02020603050405020304"/>
                 </a:rPr>
-                <a:t>年</a:t>
+                <a:t>.</a:t>
               </a:r>
               <a:r>
                 <a:rPr lang="en-US" altLang="zh-CN" sz="1600" kern="100">
@@ -5356,7 +5359,7 @@
                   <a:cs typeface="微软雅黑" panose="020B0503020204020204" charset="-122"/>
                   <a:sym typeface="Times New Roman" panose="02020603050405020304"/>
                 </a:rPr>
-                <a:t>月</a:t>
+                <a:t/>
               </a:r>
               <a:endParaRPr lang="zh-CN" altLang="en-US" sz="1600" kern="100">
                 <a:solidFill>
@@ -5413,7 +5416,7 @@
                   <a:cs typeface="微软雅黑" panose="020B0503020204020204" charset="-122"/>
                   <a:sym typeface="Times New Roman" panose="02020603050405020304"/>
                 </a:rPr>
-                <a:t>33 条用例</a:t>
+                <a:t>32 条用例 · 2 种方法</a:t>
               </a:r>
               <a:r>
                 <a:rPr lang="en-US" altLang="zh-CN" sz="2000" b="1" kern="100">
@@ -5461,7 +5464,7 @@
                   <a:cs typeface="微软雅黑" panose="020B0503020204020204" charset="-122"/>
                   <a:sym typeface="Times New Roman" panose="02020603050405020304"/>
                 </a:rPr>
-                <a:t>1 个已定位缺陷</a:t>
+                <a:t>1 个缺陷</a:t>
               </a:r>
               <a:endParaRPr lang="en-US" altLang="zh-CN" sz="2000" b="1" kern="100">
                 <a:solidFill>
@@ -5669,9 +5672,17 @@
 </p:sld>
 </file>
 
-<file path=ppt/slides/slide15.xml><?xml version="1.0" encoding="utf-8"?>
+<file path=ppt/slides/slide10.xml><?xml version="1.0" encoding="utf-8"?>
 <p:sld xmlns:a="http://schemas.openxmlformats.org/drawingml/2006/main" xmlns:r="http://schemas.openxmlformats.org/officeDocument/2006/relationships" xmlns:p="http://schemas.openxmlformats.org/presentationml/2006/main">
   <p:cSld>
+    <p:bg>
+      <p:bgPr>
+        <a:solidFill>
+          <a:schemeClr val="bg1"/>
+        </a:solidFill>
+        <a:effectLst/>
+      </p:bgPr>
+    </p:bg>
     <p:spTree>
       <p:nvGrpSpPr>
         <p:cNvPr id="1" name=""/>
@@ -5686,474 +5697,49 @@
           <a:chExt cx="0" cy="0"/>
         </a:xfrm>
       </p:grpSpPr>
-      <p:pic>
-        <p:nvPicPr>
-          <p:cNvPr id="9" name="图片 8" descr="1037"/>
-          <p:cNvPicPr>
-            <a:picLocks noChangeAspect="1"/>
-          </p:cNvPicPr>
-          <p:nvPr/>
-        </p:nvPicPr>
-        <p:blipFill>
-          <a:blip r:embed="rId1">
-            <a:alphaModFix amt="30000"/>
-          </a:blip>
-          <a:stretch>
-            <a:fillRect/>
-          </a:stretch>
-        </p:blipFill>
-        <p:spPr>
-          <a:xfrm>
-            <a:off x="9106535" y="5777865"/>
-            <a:ext cx="3085714" cy="1080000"/>
-          </a:xfrm>
-          <a:prstGeom prst="rect">
-            <a:avLst/>
-          </a:prstGeom>
-        </p:spPr>
-      </p:pic>
       <p:grpSp>
         <p:nvGrpSpPr>
-          <p:cNvPr id="11" name="组合 10"/>
+          <p:cNvPr id="6" name="组合 5"/>
           <p:cNvGrpSpPr/>
           <p:nvPr/>
         </p:nvGrpSpPr>
         <p:grpSpPr>
           <a:xfrm>
-            <a:off x="2151380" y="2035175"/>
-            <a:ext cx="7889240" cy="2787650"/>
-            <a:chOff x="4143" y="4637"/>
-            <a:chExt cx="12424" cy="4390"/>
-          </a:xfrm>
-        </p:grpSpPr>
-        <p:sp>
-          <p:nvSpPr>
-            <p:cNvPr id="27" name="文本框 1"/>
-            <p:cNvSpPr txBox="1"/>
-            <p:nvPr/>
-          </p:nvSpPr>
-          <p:spPr>
-            <a:xfrm>
-              <a:off x="4143" y="4637"/>
-              <a:ext cx="12424" cy="1598"/>
-            </a:xfrm>
-            <a:prstGeom prst="rect">
-              <a:avLst/>
-            </a:prstGeom>
-            <a:noFill/>
-            <a:ln w="6350">
-              <a:noFill/>
-            </a:ln>
-            <a:effectLst/>
-          </p:spPr>
-          <p:txBody>
-            <a:bodyPr rot="0" spcFirstLastPara="0" vertOverflow="overflow" horzOverflow="overflow" vert="horz" wrap="square" lIns="91440" tIns="45720" rIns="91440" bIns="45720" numCol="1" spcCol="0" rtlCol="0" fromWordArt="0" anchor="t" anchorCtr="0" forceAA="0" compatLnSpc="1">
-              <a:spAutoFit/>
-            </a:bodyPr>
-            <a:p>
-              <a:pPr algn="ctr" rtl="0" eaLnBrk="1" fontAlgn="auto" latinLnBrk="0" hangingPunct="1"/>
-              <a:r>
-                <a:rPr lang="zh-CN" sz="6000" b="1" kern="100">
-                  <a:solidFill>
-                    <a:srgbClr val="25557A"/>
-                  </a:solidFill>
-                  <a:latin typeface="微软雅黑" panose="020B0503020204020204" charset="-122"/>
-                  <a:ea typeface="微软雅黑" panose="020B0503020204020204" charset="-122"/>
-                  <a:cs typeface="微软雅黑" panose="020B0503020204020204" charset="-122"/>
-                  <a:sym typeface="Times New Roman" panose="02020603050405020304"/>
-                </a:rPr>
-                <a:t>谢谢观看</a:t>
-              </a:r>
-              <a:endParaRPr lang="zh-CN" sz="6000" b="1" kern="100">
-                <a:solidFill>
-                  <a:srgbClr val="25557A"/>
-                </a:solidFill>
-                <a:latin typeface="微软雅黑" panose="020B0503020204020204" charset="-122"/>
-                <a:ea typeface="微软雅黑" panose="020B0503020204020204" charset="-122"/>
-                <a:cs typeface="微软雅黑" panose="020B0503020204020204" charset="-122"/>
-                <a:sym typeface="Times New Roman" panose="02020603050405020304"/>
-              </a:endParaRPr>
-            </a:p>
-          </p:txBody>
-        </p:sp>
-        <p:sp>
-          <p:nvSpPr>
-            <p:cNvPr id="28" name="文本框 1"/>
-            <p:cNvSpPr txBox="1"/>
-            <p:nvPr/>
-          </p:nvSpPr>
-          <p:spPr>
-            <a:xfrm>
-              <a:off x="7636" y="8530"/>
-              <a:ext cx="5913" cy="497"/>
-            </a:xfrm>
-            <a:prstGeom prst="rect">
-              <a:avLst/>
-            </a:prstGeom>
-            <a:noFill/>
-            <a:ln w="6350">
-              <a:noFill/>
-            </a:ln>
-            <a:effectLst/>
-          </p:spPr>
-          <p:txBody>
-            <a:bodyPr rot="0" spcFirstLastPara="0" vertOverflow="overflow" horzOverflow="overflow" vert="horz" wrap="square" lIns="91440" tIns="45720" rIns="91440" bIns="45720" numCol="1" spcCol="0" rtlCol="0" fromWordArt="0" anchor="t" anchorCtr="0" forceAA="0" compatLnSpc="1">
-              <a:noAutofit/>
-            </a:bodyPr>
-            <a:p>
-              <a:pPr algn="l" rtl="0" eaLnBrk="1" fontAlgn="auto" latinLnBrk="0" hangingPunct="1">
-                <a:lnSpc>
-                  <a:spcPts val="1800"/>
-                </a:lnSpc>
-              </a:pPr>
-              <a:r>
-                <a:rPr lang="zh-CN" altLang="en-US" sz="1600" kern="100">
-                  <a:solidFill>
-                    <a:schemeClr val="tx1">
-                      <a:lumMod val="65000"/>
-                      <a:lumOff val="35000"/>
-                    </a:schemeClr>
-                  </a:solidFill>
-                  <a:latin typeface="微软雅黑" panose="020B0503020204020204" charset="-122"/>
-                  <a:ea typeface="微软雅黑" panose="020B0503020204020204" charset="-122"/>
-                  <a:cs typeface="微软雅黑" panose="020B0503020204020204" charset="-122"/>
-                  <a:sym typeface="Times New Roman" panose="02020603050405020304"/>
-                </a:rPr>
-                <a:t>汇报人丨小组成员</a:t>
-              </a:r>
-              <a:r>
-                <a:rPr lang="en-US" altLang="zh-CN" sz="1600" kern="100">
-                  <a:solidFill>
-                    <a:schemeClr val="tx1">
-                      <a:lumMod val="65000"/>
-                      <a:lumOff val="35000"/>
-                    </a:schemeClr>
-                  </a:solidFill>
-                  <a:latin typeface="微软雅黑" panose="020B0503020204020204" charset="-122"/>
-                  <a:ea typeface="微软雅黑" panose="020B0503020204020204" charset="-122"/>
-                  <a:cs typeface="微软雅黑" panose="020B0503020204020204" charset="-122"/>
-                  <a:sym typeface="Times New Roman" panose="02020603050405020304"/>
-                </a:rPr>
-                <a:t>    </a:t>
-              </a:r>
-              <a:r>
-                <a:rPr lang="zh-CN" altLang="en-US" sz="1600" kern="100">
-                  <a:solidFill>
-                    <a:schemeClr val="tx1">
-                      <a:lumMod val="65000"/>
-                      <a:lumOff val="35000"/>
-                    </a:schemeClr>
-                  </a:solidFill>
-                  <a:latin typeface="微软雅黑" panose="020B0503020204020204" charset="-122"/>
-                  <a:ea typeface="微软雅黑" panose="020B0503020204020204" charset="-122"/>
-                  <a:cs typeface="微软雅黑" panose="020B0503020204020204" charset="-122"/>
-                  <a:sym typeface="Times New Roman" panose="02020603050405020304"/>
-                </a:rPr>
-                <a:t>时间丨</a:t>
-              </a:r>
-              <a:r>
-                <a:rPr lang="en-US" altLang="zh-CN" sz="1600" kern="100">
-                  <a:solidFill>
-                    <a:schemeClr val="tx1">
-                      <a:lumMod val="65000"/>
-                      <a:lumOff val="35000"/>
-                    </a:schemeClr>
-                  </a:solidFill>
-                  <a:latin typeface="微软雅黑" panose="020B0503020204020204" charset="-122"/>
-                  <a:ea typeface="微软雅黑" panose="020B0503020204020204" charset="-122"/>
-                  <a:cs typeface="微软雅黑" panose="020B0503020204020204" charset="-122"/>
-                  <a:sym typeface="Times New Roman" panose="02020603050405020304"/>
-                </a:rPr>
-                <a:t>2026</a:t>
-              </a:r>
-              <a:r>
-                <a:rPr lang="zh-CN" altLang="en-US" sz="1600" kern="100">
-                  <a:solidFill>
-                    <a:schemeClr val="tx1">
-                      <a:lumMod val="65000"/>
-                      <a:lumOff val="35000"/>
-                    </a:schemeClr>
-                  </a:solidFill>
-                  <a:latin typeface="微软雅黑" panose="020B0503020204020204" charset="-122"/>
-                  <a:ea typeface="微软雅黑" panose="020B0503020204020204" charset="-122"/>
-                  <a:cs typeface="微软雅黑" panose="020B0503020204020204" charset="-122"/>
-                  <a:sym typeface="Times New Roman" panose="02020603050405020304"/>
-                </a:rPr>
-                <a:t>年</a:t>
-              </a:r>
-              <a:r>
-                <a:rPr lang="en-US" altLang="zh-CN" sz="1600" kern="100">
-                  <a:solidFill>
-                    <a:schemeClr val="tx1">
-                      <a:lumMod val="65000"/>
-                      <a:lumOff val="35000"/>
-                    </a:schemeClr>
-                  </a:solidFill>
-                  <a:latin typeface="微软雅黑" panose="020B0503020204020204" charset="-122"/>
-                  <a:ea typeface="微软雅黑" panose="020B0503020204020204" charset="-122"/>
-                  <a:cs typeface="微软雅黑" panose="020B0503020204020204" charset="-122"/>
-                  <a:sym typeface="Times New Roman" panose="02020603050405020304"/>
-                </a:rPr>
-                <a:t>9</a:t>
-              </a:r>
-              <a:r>
-                <a:rPr lang="zh-CN" altLang="en-US" sz="1600" kern="100">
-                  <a:solidFill>
-                    <a:schemeClr val="tx1">
-                      <a:lumMod val="65000"/>
-                      <a:lumOff val="35000"/>
-                    </a:schemeClr>
-                  </a:solidFill>
-                  <a:latin typeface="微软雅黑" panose="020B0503020204020204" charset="-122"/>
-                  <a:ea typeface="微软雅黑" panose="020B0503020204020204" charset="-122"/>
-                  <a:cs typeface="微软雅黑" panose="020B0503020204020204" charset="-122"/>
-                  <a:sym typeface="Times New Roman" panose="02020603050405020304"/>
-                </a:rPr>
-                <a:t>月</a:t>
-              </a:r>
-              <a:endParaRPr lang="zh-CN" altLang="en-US" sz="1600" kern="100">
-                <a:solidFill>
-                  <a:schemeClr val="tx1">
-                    <a:lumMod val="65000"/>
-                    <a:lumOff val="35000"/>
-                  </a:schemeClr>
-                </a:solidFill>
-                <a:latin typeface="微软雅黑" panose="020B0503020204020204" charset="-122"/>
-                <a:ea typeface="微软雅黑" panose="020B0503020204020204" charset="-122"/>
-                <a:cs typeface="微软雅黑" panose="020B0503020204020204" charset="-122"/>
-                <a:sym typeface="Times New Roman" panose="02020603050405020304"/>
-              </a:endParaRPr>
-            </a:p>
-          </p:txBody>
-        </p:sp>
-        <p:sp>
-          <p:nvSpPr>
-            <p:cNvPr id="29" name="文本框 32"/>
-            <p:cNvSpPr txBox="1"/>
-            <p:nvPr/>
-          </p:nvSpPr>
-          <p:spPr>
-            <a:xfrm>
-              <a:off x="5781" y="6564"/>
-              <a:ext cx="9129" cy="564"/>
-            </a:xfrm>
-            <a:prstGeom prst="rect">
-              <a:avLst/>
-            </a:prstGeom>
-            <a:noFill/>
-            <a:ln w="6350">
-              <a:noFill/>
-            </a:ln>
-            <a:effectLst/>
-          </p:spPr>
-          <p:txBody>
-            <a:bodyPr rot="0" spcFirstLastPara="0" vertOverflow="overflow" horzOverflow="overflow" vert="horz" wrap="square" lIns="91440" tIns="45720" rIns="91440" bIns="45720" numCol="1" spcCol="0" rtlCol="0" fromWordArt="0" anchor="t" anchorCtr="0" forceAA="0" compatLnSpc="1">
-              <a:noAutofit/>
-            </a:bodyPr>
-            <a:p>
-              <a:pPr algn="ctr" rtl="0" eaLnBrk="1" fontAlgn="auto" latinLnBrk="0" hangingPunct="1">
-                <a:lnSpc>
-                  <a:spcPts val="2000"/>
-                </a:lnSpc>
-              </a:pPr>
-              <a:r>
-                <a:rPr lang="zh-CN" altLang="en-US" sz="2000" b="1" kern="100">
-                  <a:solidFill>
-                    <a:srgbClr val="595959"/>
-                  </a:solidFill>
-                  <a:latin typeface="微软雅黑" panose="020B0503020204020204" charset="-122"/>
-                  <a:ea typeface="微软雅黑" panose="020B0503020204020204" charset="-122"/>
-                  <a:cs typeface="微软雅黑" panose="020B0503020204020204" charset="-122"/>
-                  <a:sym typeface="Times New Roman" panose="02020603050405020304"/>
-                </a:rPr>
-                <a:t>脱离权重单测</a:t>
-              </a:r>
-              <a:r>
-                <a:rPr lang="en-US" altLang="zh-CN" sz="2000" b="1" kern="100">
-                  <a:solidFill>
-                    <a:srgbClr val="595959"/>
-                  </a:solidFill>
-                  <a:latin typeface="微软雅黑" panose="020B0503020204020204" charset="-122"/>
-                  <a:ea typeface="微软雅黑" panose="020B0503020204020204" charset="-122"/>
-                  <a:cs typeface="微软雅黑" panose="020B0503020204020204" charset="-122"/>
-                  <a:sym typeface="Times New Roman" panose="02020603050405020304"/>
-                </a:rPr>
-                <a:t> | </a:t>
-              </a:r>
-              <a:r>
-                <a:rPr lang="zh-CN" altLang="en-US" sz="2000" b="1" kern="100">
-                  <a:solidFill>
-                    <a:srgbClr val="595959"/>
-                  </a:solidFill>
-                  <a:latin typeface="微软雅黑" panose="020B0503020204020204" charset="-122"/>
-                  <a:ea typeface="微软雅黑" panose="020B0503020204020204" charset="-122"/>
-                  <a:cs typeface="微软雅黑" panose="020B0503020204020204" charset="-122"/>
-                  <a:sym typeface="Times New Roman" panose="02020603050405020304"/>
-                </a:rPr>
-                <a:t>用例自动转绿</a:t>
-              </a:r>
-              <a:r>
-                <a:rPr lang="en-US" altLang="zh-CN" sz="2000" b="1" kern="100">
-                  <a:solidFill>
-                    <a:srgbClr val="595959"/>
-                  </a:solidFill>
-                  <a:latin typeface="微软雅黑" panose="020B0503020204020204" charset="-122"/>
-                  <a:ea typeface="微软雅黑" panose="020B0503020204020204" charset="-122"/>
-                  <a:cs typeface="微软雅黑" panose="020B0503020204020204" charset="-122"/>
-                  <a:sym typeface="Times New Roman" panose="02020603050405020304"/>
-                </a:rPr>
-                <a:t> | </a:t>
-              </a:r>
-              <a:r>
-                <a:rPr lang="zh-CN" altLang="en-US" sz="2000" b="1" kern="100">
-                  <a:solidFill>
-                    <a:srgbClr val="595959"/>
-                  </a:solidFill>
-                  <a:latin typeface="微软雅黑" panose="020B0503020204020204" charset="-122"/>
-                  <a:ea typeface="微软雅黑" panose="020B0503020204020204" charset="-122"/>
-                  <a:cs typeface="微软雅黑" panose="020B0503020204020204" charset="-122"/>
-                  <a:sym typeface="Times New Roman" panose="02020603050405020304"/>
-                </a:rPr>
-                <a:t>复现一条命令</a:t>
-              </a:r>
-              <a:endParaRPr lang="en-US" altLang="zh-CN" sz="2000" b="1" kern="100">
-                <a:solidFill>
-                  <a:srgbClr val="595959"/>
-                </a:solidFill>
-                <a:latin typeface="微软雅黑" panose="020B0503020204020204" charset="-122"/>
-                <a:ea typeface="微软雅黑" panose="020B0503020204020204" charset="-122"/>
-                <a:cs typeface="微软雅黑" panose="020B0503020204020204" charset="-122"/>
-                <a:sym typeface="Times New Roman" panose="02020603050405020304"/>
-              </a:endParaRPr>
-            </a:p>
-          </p:txBody>
-        </p:sp>
-      </p:grpSp>
-      <p:grpSp>
-        <p:nvGrpSpPr>
-          <p:cNvPr id="2" name="组合 1"/>
-          <p:cNvGrpSpPr/>
-          <p:nvPr/>
-        </p:nvGrpSpPr>
-        <p:grpSpPr>
-          <a:xfrm>
-            <a:off x="7454900" y="-1959610"/>
-            <a:ext cx="4737100" cy="5091430"/>
-            <a:chOff x="11740" y="-3086"/>
-            <a:chExt cx="7460" cy="8018"/>
+            <a:off x="351155" y="325120"/>
+            <a:ext cx="4559300" cy="1015365"/>
+            <a:chOff x="1572" y="494"/>
+            <a:chExt cx="7180" cy="1599"/>
           </a:xfrm>
         </p:grpSpPr>
         <p:grpSp>
           <p:nvGrpSpPr>
-            <p:cNvPr id="3" name="组合 2"/>
+            <p:cNvPr id="8" name="组合 7"/>
             <p:cNvGrpSpPr/>
             <p:nvPr/>
           </p:nvGrpSpPr>
           <p:grpSpPr>
             <a:xfrm>
-              <a:off x="11740" y="-3086"/>
-              <a:ext cx="7460" cy="8018"/>
-              <a:chOff x="8135783" y="-1669981"/>
-              <a:chExt cx="4056217" cy="4359393"/>
+              <a:off x="1572" y="494"/>
+              <a:ext cx="2047" cy="1599"/>
+              <a:chOff x="2761095" y="2248418"/>
+              <a:chExt cx="1948563" cy="1522661"/>
             </a:xfrm>
           </p:grpSpPr>
           <p:sp>
             <p:nvSpPr>
-              <p:cNvPr id="7" name="任意多边形: 形状 12"/>
+              <p:cNvPr id="9" name="矩形: 圆角 24"/>
               <p:cNvSpPr/>
               <p:nvPr/>
             </p:nvSpPr>
             <p:spPr>
-              <a:xfrm rot="18900000">
-                <a:off x="8135783" y="-1669981"/>
-                <a:ext cx="3339963" cy="3339962"/>
+              <a:xfrm rot="2244181">
+                <a:off x="2903192" y="2466308"/>
+                <a:ext cx="1156758" cy="366949"/>
               </a:xfrm>
-              <a:custGeom>
-                <a:avLst/>
-                <a:gdLst>
-                  <a:gd name="connsiteX0" fmla="*/ 0 w 3339963"/>
-                  <a:gd name="connsiteY0" fmla="*/ 0 h 3339962"/>
-                  <a:gd name="connsiteX1" fmla="*/ 3339963 w 3339963"/>
-                  <a:gd name="connsiteY1" fmla="*/ 3339962 h 3339962"/>
-                  <a:gd name="connsiteX2" fmla="*/ 1099563 w 3339963"/>
-                  <a:gd name="connsiteY2" fmla="*/ 3339962 h 3339962"/>
-                </a:gdLst>
-                <a:ahLst/>
-                <a:cxnLst>
-                  <a:cxn ang="0">
-                    <a:pos x="connsiteX0" y="connsiteY0"/>
-                  </a:cxn>
-                  <a:cxn ang="0">
-                    <a:pos x="connsiteX1" y="connsiteY1"/>
-                  </a:cxn>
-                  <a:cxn ang="0">
-                    <a:pos x="connsiteX2" y="connsiteY2"/>
-                  </a:cxn>
-                </a:cxnLst>
-                <a:rect l="l" t="t" r="r" b="b"/>
-                <a:pathLst>
-                  <a:path w="3339963" h="3339962">
-                    <a:moveTo>
-                      <a:pt x="0" y="0"/>
-                    </a:moveTo>
-                    <a:lnTo>
-                      <a:pt x="3339963" y="3339962"/>
-                    </a:lnTo>
-                    <a:lnTo>
-                      <a:pt x="1099563" y="3339962"/>
-                    </a:lnTo>
-                    <a:close/>
-                  </a:path>
-                </a:pathLst>
-              </a:custGeom>
-              <a:solidFill>
-                <a:schemeClr val="accent1">
-                  <a:lumMod val="40000"/>
-                  <a:lumOff val="60000"/>
-                  <a:alpha val="60000"/>
-                </a:schemeClr>
-              </a:solidFill>
-              <a:ln>
-                <a:noFill/>
-              </a:ln>
-            </p:spPr>
-            <p:style>
-              <a:lnRef idx="2">
-                <a:schemeClr val="accent1">
-                  <a:shade val="50000"/>
-                </a:schemeClr>
-              </a:lnRef>
-              <a:fillRef idx="1">
-                <a:schemeClr val="accent1"/>
-              </a:fillRef>
-              <a:effectRef idx="0">
-                <a:schemeClr val="accent1"/>
-              </a:effectRef>
-              <a:fontRef idx="minor">
-                <a:schemeClr val="lt1"/>
-              </a:fontRef>
-            </p:style>
-            <p:txBody>
-              <a:bodyPr rtlCol="0" anchor="ctr"/>
-              <a:p>
-                <a:pPr algn="ctr"/>
-                <a:endParaRPr lang="zh-CN" altLang="en-US"/>
-              </a:p>
-            </p:txBody>
-          </p:sp>
-          <p:sp>
-            <p:nvSpPr>
-              <p:cNvPr id="8" name="直角三角形 7"/>
-              <p:cNvSpPr/>
-              <p:nvPr/>
-            </p:nvSpPr>
-            <p:spPr>
-              <a:xfrm rot="10800000">
-                <a:off x="9502588" y="0"/>
-                <a:ext cx="2689412" cy="2689412"/>
-              </a:xfrm>
-              <a:prstGeom prst="rtTriangle">
-                <a:avLst/>
+              <a:prstGeom prst="roundRect">
+                <a:avLst>
+                  <a:gd name="adj" fmla="val 33648"/>
+                </a:avLst>
               </a:prstGeom>
               <a:solidFill>
                 <a:srgbClr val="25557A"/>
@@ -6179,56 +5765,1337 @@
               </a:fontRef>
             </p:style>
             <p:txBody>
-              <a:bodyPr rtlCol="0" anchor="ctr"/>
+              <a:bodyPr rot="0" spcFirstLastPara="0" vertOverflow="overflow" horzOverflow="overflow" vert="horz" wrap="square" lIns="91440" tIns="45720" rIns="91440" bIns="45720" numCol="1" spcCol="0" rtlCol="0" fromWordArt="0" anchor="ctr" anchorCtr="0" forceAA="0" compatLnSpc="1">
+                <a:noAutofit/>
+              </a:bodyPr>
               <a:p>
                 <a:pPr algn="ctr"/>
-                <a:endParaRPr lang="zh-CN" altLang="en-US"/>
+                <a:endParaRPr lang="zh-CN" altLang="en-US" sz="1100">
+                  <a:latin typeface="微软雅黑" panose="020B0503020204020204" charset="-122"/>
+                  <a:ea typeface="微软雅黑" panose="020B0503020204020204" charset="-122"/>
+                  <a:cs typeface="+mn-ea"/>
+                  <a:sym typeface="+mn-lt"/>
+                </a:endParaRPr>
+              </a:p>
+            </p:txBody>
+          </p:sp>
+          <p:sp>
+            <p:nvSpPr>
+              <p:cNvPr id="26" name="矩形: 圆角 25"/>
+              <p:cNvSpPr/>
+              <p:nvPr/>
+            </p:nvSpPr>
+            <p:spPr>
+              <a:xfrm rot="2244181">
+                <a:off x="2761095" y="2996622"/>
+                <a:ext cx="1156758" cy="366949"/>
+              </a:xfrm>
+              <a:prstGeom prst="roundRect">
+                <a:avLst>
+                  <a:gd name="adj" fmla="val 33648"/>
+                </a:avLst>
+              </a:prstGeom>
+              <a:solidFill>
+                <a:srgbClr val="25557A"/>
+              </a:solidFill>
+              <a:ln>
+                <a:noFill/>
+              </a:ln>
+            </p:spPr>
+            <p:style>
+              <a:lnRef idx="2">
+                <a:schemeClr val="accent1">
+                  <a:shade val="50000"/>
+                </a:schemeClr>
+              </a:lnRef>
+              <a:fillRef idx="1">
+                <a:schemeClr val="accent1"/>
+              </a:fillRef>
+              <a:effectRef idx="0">
+                <a:schemeClr val="accent1"/>
+              </a:effectRef>
+              <a:fontRef idx="minor">
+                <a:schemeClr val="lt1"/>
+              </a:fontRef>
+            </p:style>
+            <p:txBody>
+              <a:bodyPr rot="0" spcFirstLastPara="0" vertOverflow="overflow" horzOverflow="overflow" vert="horz" wrap="square" lIns="91440" tIns="45720" rIns="91440" bIns="45720" numCol="1" spcCol="0" rtlCol="0" fromWordArt="0" anchor="ctr" anchorCtr="0" forceAA="0" compatLnSpc="1">
+                <a:noAutofit/>
+              </a:bodyPr>
+              <a:p>
+                <a:pPr algn="ctr"/>
+                <a:endParaRPr lang="zh-CN" altLang="en-US" sz="1100">
+                  <a:latin typeface="微软雅黑" panose="020B0503020204020204" charset="-122"/>
+                  <a:ea typeface="微软雅黑" panose="020B0503020204020204" charset="-122"/>
+                  <a:cs typeface="+mn-ea"/>
+                  <a:sym typeface="+mn-lt"/>
+                </a:endParaRPr>
+              </a:p>
+            </p:txBody>
+          </p:sp>
+          <p:sp>
+            <p:nvSpPr>
+              <p:cNvPr id="10" name="文本框 9"/>
+              <p:cNvSpPr txBox="1"/>
+              <p:nvPr/>
+            </p:nvSpPr>
+            <p:spPr>
+              <a:xfrm>
+                <a:off x="2910670" y="2248418"/>
+                <a:ext cx="1798988" cy="1522661"/>
+              </a:xfrm>
+              <a:prstGeom prst="rect">
+                <a:avLst/>
+              </a:prstGeom>
+              <a:noFill/>
+            </p:spPr>
+            <p:txBody>
+              <a:bodyPr wrap="square" rtlCol="0">
+                <a:spAutoFit/>
+              </a:bodyPr>
+              <a:p>
+                <a:r>
+                  <a:rPr lang="en-US" altLang="zh-CN" sz="6000" dirty="0">
+                    <a:solidFill>
+                      <a:schemeClr val="bg1"/>
+                    </a:solidFill>
+                    <a:effectLst>
+                      <a:outerShdw blurRad="38100" dist="38100" dir="2700000" algn="tl">
+                        <a:srgbClr val="000000">
+                          <a:alpha val="43137"/>
+                        </a:srgbClr>
+                      </a:outerShdw>
+                    </a:effectLst>
+                    <a:latin typeface="微软雅黑" panose="020B0503020204020204" charset="-122"/>
+                    <a:ea typeface="微软雅黑" panose="020B0503020204020204" charset="-122"/>
+                  </a:rPr>
+                  <a:t>P</a:t>
+                </a:r>
+                <a:endParaRPr lang="en-US" altLang="zh-CN" sz="6000" dirty="0">
+                  <a:solidFill>
+                    <a:schemeClr val="bg1"/>
+                  </a:solidFill>
+                  <a:effectLst>
+                    <a:outerShdw blurRad="38100" dist="38100" dir="2700000" algn="tl">
+                      <a:srgbClr val="000000">
+                        <a:alpha val="43137"/>
+                      </a:srgbClr>
+                    </a:outerShdw>
+                  </a:effectLst>
+                  <a:latin typeface="微软雅黑" panose="020B0503020204020204" charset="-122"/>
+                  <a:ea typeface="微软雅黑" panose="020B0503020204020204" charset="-122"/>
+                </a:endParaRPr>
               </a:p>
             </p:txBody>
           </p:sp>
         </p:grpSp>
-        <p:pic>
-          <p:nvPicPr>
-            <p:cNvPr id="12" name="图片 11" descr="校徽"/>
-            <p:cNvPicPr>
-              <a:picLocks noChangeAspect="1"/>
-            </p:cNvPicPr>
+        <p:sp>
+          <p:nvSpPr>
+            <p:cNvPr id="11" name="矩形 10"/>
+            <p:cNvSpPr/>
             <p:nvPr/>
-          </p:nvPicPr>
-          <p:blipFill>
-            <a:blip r:embed="rId2"/>
-            <a:stretch>
-              <a:fillRect/>
-            </a:stretch>
-          </p:blipFill>
+          </p:nvSpPr>
           <p:spPr>
             <a:xfrm>
-              <a:off x="16399" y="293"/>
-              <a:ext cx="2240" cy="1701"/>
+              <a:off x="3078" y="751"/>
+              <a:ext cx="3788" cy="919"/>
             </a:xfrm>
             <a:prstGeom prst="rect">
               <a:avLst/>
             </a:prstGeom>
           </p:spPr>
-        </p:pic>
+          <p:txBody>
+            <a:bodyPr wrap="none">
+              <a:spAutoFit/>
+            </a:bodyPr>
+            <a:p>
+              <a:r>
+                <a:rPr lang="zh-CN" altLang="en-US" sz="3200" b="1" spc="300" dirty="0">
+                  <a:latin typeface="微软雅黑" panose="020B0503020204020204" charset="-122"/>
+                  <a:ea typeface="微软雅黑" panose="020B0503020204020204" charset="-122"/>
+                </a:rPr>
+                <a:t>一条命令跑完的自动化测试工程</a:t>
+              </a:r>
+              <a:endParaRPr lang="zh-CN" altLang="en-US" sz="3200" b="1" spc="300" dirty="0">
+                <a:latin typeface="微软雅黑" panose="020B0503020204020204" charset="-122"/>
+                <a:ea typeface="微软雅黑" panose="020B0503020204020204" charset="-122"/>
+              </a:endParaRPr>
+            </a:p>
+          </p:txBody>
+        </p:sp>
+        <p:sp>
+          <p:nvSpPr>
+            <p:cNvPr id="29" name="文本框 28"/>
+            <p:cNvSpPr txBox="1"/>
+            <p:nvPr/>
+          </p:nvSpPr>
+          <p:spPr>
+            <a:xfrm>
+              <a:off x="3107" y="1365"/>
+              <a:ext cx="5645" cy="580"/>
+            </a:xfrm>
+            <a:prstGeom prst="rect">
+              <a:avLst/>
+            </a:prstGeom>
+            <a:noFill/>
+          </p:spPr>
+          <p:txBody>
+            <a:bodyPr wrap="square">
+              <a:spAutoFit/>
+            </a:bodyPr>
+            <a:p>
+              <a:endParaRPr lang="en-US" altLang="zh-CN" sz="900" spc="300" dirty="0">
+                <a:solidFill>
+                  <a:schemeClr val="bg1">
+                    <a:lumMod val="50000"/>
+                  </a:schemeClr>
+                </a:solidFill>
+                <a:latin typeface="微软雅黑" panose="020B0503020204020204" charset="-122"/>
+                <a:ea typeface="微软雅黑" panose="020B0503020204020204" charset="-122"/>
+              </a:endParaRPr>
+            </a:p>
+            <a:p>
+              <a:r>
+                <a:rPr lang="en-US" altLang="zh-CN" sz="900" spc="300" dirty="0">
+                  <a:solidFill>
+                    <a:schemeClr val="bg1">
+                      <a:lumMod val="50000"/>
+                    </a:schemeClr>
+                  </a:solidFill>
+                  <a:latin typeface="微软雅黑" panose="020B0503020204020204" charset="-122"/>
+                  <a:ea typeface="微软雅黑" panose="020B0503020204020204" charset="-122"/>
+                </a:rPr>
+                <a:t>TEST AUTOMATION</a:t>
+              </a:r>
+              <a:endParaRPr lang="en-US" altLang="zh-CN" sz="900" spc="300" dirty="0">
+                <a:solidFill>
+                  <a:schemeClr val="bg1">
+                    <a:lumMod val="50000"/>
+                  </a:schemeClr>
+                </a:solidFill>
+                <a:latin typeface="微软雅黑" panose="020B0503020204020204" charset="-122"/>
+                <a:ea typeface="微软雅黑" panose="020B0503020204020204" charset="-122"/>
+              </a:endParaRPr>
+            </a:p>
+          </p:txBody>
+        </p:sp>
       </p:grpSp>
+      <p:sp>
+        <p:nvSpPr>
+          <p:cNvPr id="19" name="矩形: 圆角 18"/>
+          <p:cNvSpPr/>
+          <p:nvPr/>
+        </p:nvSpPr>
+        <p:spPr>
+          <a:xfrm>
+            <a:off x="977900" y="1648460"/>
+            <a:ext cx="10236200" cy="4583430"/>
+          </a:xfrm>
+          <a:prstGeom prst="roundRect">
+            <a:avLst>
+              <a:gd name="adj" fmla="val 0"/>
+            </a:avLst>
+          </a:prstGeom>
+          <a:solidFill>
+            <a:schemeClr val="bg1"/>
+          </a:solidFill>
+          <a:ln>
+            <a:solidFill>
+              <a:schemeClr val="bg1">
+                <a:lumMod val="85000"/>
+              </a:schemeClr>
+            </a:solidFill>
+          </a:ln>
+        </p:spPr>
+        <p:style>
+          <a:lnRef idx="2">
+            <a:schemeClr val="accent1">
+              <a:shade val="50000"/>
+            </a:schemeClr>
+          </a:lnRef>
+          <a:fillRef idx="1">
+            <a:schemeClr val="accent1"/>
+          </a:fillRef>
+          <a:effectRef idx="0">
+            <a:schemeClr val="accent1"/>
+          </a:effectRef>
+          <a:fontRef idx="minor">
+            <a:schemeClr val="lt1"/>
+          </a:fontRef>
+        </p:style>
+        <p:txBody>
+          <a:bodyPr rtlCol="0" anchor="ctr"/>
+          <a:p>
+            <a:pPr algn="ctr"/>
+            <a:endParaRPr lang="zh-CN" altLang="en-US" dirty="0">
+              <a:latin typeface="微软雅黑" panose="020B0503020204020204" charset="-122"/>
+              <a:ea typeface="微软雅黑" panose="020B0503020204020204" charset="-122"/>
+              <a:sym typeface="+mn-lt"/>
+            </a:endParaRPr>
+          </a:p>
+        </p:txBody>
+      </p:sp>
+      <p:sp>
+        <p:nvSpPr>
+          <p:cNvPr id="13" name="任意多边形: 形状 21"/>
+          <p:cNvSpPr/>
+          <p:nvPr/>
+        </p:nvSpPr>
+        <p:spPr>
+          <a:xfrm>
+            <a:off x="977900" y="2575560"/>
+            <a:ext cx="1675765" cy="2781300"/>
+          </a:xfrm>
+          <a:custGeom>
+            <a:avLst/>
+            <a:gdLst>
+              <a:gd name="connsiteX0" fmla="*/ 284837 w 1675487"/>
+              <a:gd name="connsiteY0" fmla="*/ 0 h 2781300"/>
+              <a:gd name="connsiteX1" fmla="*/ 1675487 w 1675487"/>
+              <a:gd name="connsiteY1" fmla="*/ 1390650 h 2781300"/>
+              <a:gd name="connsiteX2" fmla="*/ 284837 w 1675487"/>
+              <a:gd name="connsiteY2" fmla="*/ 2781300 h 2781300"/>
+              <a:gd name="connsiteX3" fmla="*/ 4573 w 1675487"/>
+              <a:gd name="connsiteY3" fmla="*/ 2753047 h 2781300"/>
+              <a:gd name="connsiteX4" fmla="*/ 0 w 1675487"/>
+              <a:gd name="connsiteY4" fmla="*/ 2751872 h 2781300"/>
+              <a:gd name="connsiteX5" fmla="*/ 0 w 1675487"/>
+              <a:gd name="connsiteY5" fmla="*/ 29429 h 2781300"/>
+              <a:gd name="connsiteX6" fmla="*/ 4573 w 1675487"/>
+              <a:gd name="connsiteY6" fmla="*/ 28253 h 2781300"/>
+              <a:gd name="connsiteX7" fmla="*/ 284837 w 1675487"/>
+              <a:gd name="connsiteY7" fmla="*/ 0 h 2781300"/>
+            </a:gdLst>
+            <a:ahLst/>
+            <a:cxnLst>
+              <a:cxn ang="0">
+                <a:pos x="connsiteX0" y="connsiteY0"/>
+              </a:cxn>
+              <a:cxn ang="0">
+                <a:pos x="connsiteX1" y="connsiteY1"/>
+              </a:cxn>
+              <a:cxn ang="0">
+                <a:pos x="connsiteX2" y="connsiteY2"/>
+              </a:cxn>
+              <a:cxn ang="0">
+                <a:pos x="connsiteX3" y="connsiteY3"/>
+              </a:cxn>
+              <a:cxn ang="0">
+                <a:pos x="connsiteX4" y="connsiteY4"/>
+              </a:cxn>
+              <a:cxn ang="0">
+                <a:pos x="connsiteX5" y="connsiteY5"/>
+              </a:cxn>
+              <a:cxn ang="0">
+                <a:pos x="connsiteX6" y="connsiteY6"/>
+              </a:cxn>
+              <a:cxn ang="0">
+                <a:pos x="connsiteX7" y="connsiteY7"/>
+              </a:cxn>
+            </a:cxnLst>
+            <a:rect l="l" t="t" r="r" b="b"/>
+            <a:pathLst>
+              <a:path w="1675487" h="2781300">
+                <a:moveTo>
+                  <a:pt x="284837" y="0"/>
+                </a:moveTo>
+                <a:cubicBezTo>
+                  <a:pt x="1052872" y="0"/>
+                  <a:pt x="1675487" y="622615"/>
+                  <a:pt x="1675487" y="1390650"/>
+                </a:cubicBezTo>
+                <a:cubicBezTo>
+                  <a:pt x="1675487" y="2158685"/>
+                  <a:pt x="1052872" y="2781300"/>
+                  <a:pt x="284837" y="2781300"/>
+                </a:cubicBezTo>
+                <a:cubicBezTo>
+                  <a:pt x="188833" y="2781300"/>
+                  <a:pt x="95101" y="2771572"/>
+                  <a:pt x="4573" y="2753047"/>
+                </a:cubicBezTo>
+                <a:lnTo>
+                  <a:pt x="0" y="2751872"/>
+                </a:lnTo>
+                <a:lnTo>
+                  <a:pt x="0" y="29429"/>
+                </a:lnTo>
+                <a:lnTo>
+                  <a:pt x="4573" y="28253"/>
+                </a:lnTo>
+                <a:cubicBezTo>
+                  <a:pt x="95101" y="9729"/>
+                  <a:pt x="188833" y="0"/>
+                  <a:pt x="284837" y="0"/>
+                </a:cubicBezTo>
+                <a:close/>
+              </a:path>
+            </a:pathLst>
+          </a:custGeom>
+          <a:solidFill>
+            <a:srgbClr val="25557A"/>
+          </a:solidFill>
+          <a:ln>
+            <a:noFill/>
+          </a:ln>
+        </p:spPr>
+        <p:style>
+          <a:lnRef idx="2">
+            <a:schemeClr val="accent1">
+              <a:shade val="50000"/>
+            </a:schemeClr>
+          </a:lnRef>
+          <a:fillRef idx="1">
+            <a:schemeClr val="accent1"/>
+          </a:fillRef>
+          <a:effectRef idx="0">
+            <a:schemeClr val="accent1"/>
+          </a:effectRef>
+          <a:fontRef idx="minor">
+            <a:schemeClr val="lt1"/>
+          </a:fontRef>
+        </p:style>
+        <p:txBody>
+          <a:bodyPr rot="0" spcFirstLastPara="0" vertOverflow="overflow" horzOverflow="overflow" vert="horz" wrap="square" lIns="91440" tIns="45720" rIns="91440" bIns="45720" numCol="1" spcCol="0" rtlCol="0" fromWordArt="0" anchor="ctr" anchorCtr="0" forceAA="0" compatLnSpc="1">
+            <a:noAutofit/>
+          </a:bodyPr>
+          <a:p>
+            <a:pPr algn="ctr"/>
+            <a:endParaRPr lang="zh-CN" altLang="en-US">
+              <a:latin typeface="微软雅黑" panose="020B0503020204020204" charset="-122"/>
+              <a:ea typeface="微软雅黑" panose="020B0503020204020204" charset="-122"/>
+              <a:cs typeface="+mn-ea"/>
+              <a:sym typeface="+mn-lt"/>
+            </a:endParaRPr>
+          </a:p>
+        </p:txBody>
+      </p:sp>
+      <p:sp>
+        <p:nvSpPr>
+          <p:cNvPr id="30" name="矩形 29"/>
+          <p:cNvSpPr/>
+          <p:nvPr/>
+        </p:nvSpPr>
+        <p:spPr>
+          <a:xfrm>
+            <a:off x="1169035" y="3429000"/>
+            <a:ext cx="1071880" cy="1076325"/>
+          </a:xfrm>
+          <a:prstGeom prst="rect">
+            <a:avLst/>
+          </a:prstGeom>
+        </p:spPr>
+        <p:txBody>
+          <a:bodyPr wrap="none">
+            <a:spAutoFit/>
+          </a:bodyPr>
+          <a:p>
+            <a:r>
+              <a:rPr lang="zh-CN" sz="3200" b="1" spc="300" dirty="0">
+                <a:solidFill>
+                  <a:schemeClr val="bg1"/>
+                </a:solidFill>
+                <a:effectLst>
+                  <a:outerShdw blurRad="38100" dist="38100" dir="2700000" algn="tl">
+                    <a:srgbClr val="000000">
+                      <a:alpha val="43137"/>
+                    </a:srgbClr>
+                  </a:outerShdw>
+                </a:effectLst>
+                <a:latin typeface="微软雅黑" panose="020B0503020204020204" charset="-122"/>
+                <a:ea typeface="微软雅黑" panose="020B0503020204020204" charset="-122"/>
+              </a:rPr>
+              <a:t>自动</a:t>
+            </a:r>
+            <a:endParaRPr lang="zh-CN" sz="3200" b="1" spc="300" dirty="0">
+              <a:solidFill>
+                <a:schemeClr val="bg1"/>
+              </a:solidFill>
+              <a:effectLst>
+                <a:outerShdw blurRad="38100" dist="38100" dir="2700000" algn="tl">
+                  <a:srgbClr val="000000">
+                    <a:alpha val="43137"/>
+                  </a:srgbClr>
+                </a:outerShdw>
+              </a:effectLst>
+              <a:latin typeface="微软雅黑" panose="020B0503020204020204" charset="-122"/>
+              <a:ea typeface="微软雅黑" panose="020B0503020204020204" charset="-122"/>
+            </a:endParaRPr>
+          </a:p>
+          <a:p>
+            <a:r>
+              <a:rPr lang="zh-CN" sz="3200" b="1" spc="300" dirty="0">
+                <a:solidFill>
+                  <a:schemeClr val="bg1"/>
+                </a:solidFill>
+                <a:effectLst>
+                  <a:outerShdw blurRad="38100" dist="38100" dir="2700000" algn="tl">
+                    <a:srgbClr val="000000">
+                      <a:alpha val="43137"/>
+                    </a:srgbClr>
+                  </a:outerShdw>
+                </a:effectLst>
+                <a:latin typeface="微软雅黑" panose="020B0503020204020204" charset="-122"/>
+                <a:ea typeface="微软雅黑" panose="020B0503020204020204" charset="-122"/>
+              </a:rPr>
+              <a:t>化</a:t>
+            </a:r>
+            <a:endParaRPr lang="zh-CN" sz="3200" b="1" spc="300" dirty="0">
+              <a:solidFill>
+                <a:schemeClr val="bg1"/>
+              </a:solidFill>
+              <a:effectLst>
+                <a:outerShdw blurRad="38100" dist="38100" dir="2700000" algn="tl">
+                  <a:srgbClr val="000000">
+                    <a:alpha val="43137"/>
+                  </a:srgbClr>
+                </a:outerShdw>
+              </a:effectLst>
+              <a:latin typeface="微软雅黑" panose="020B0503020204020204" charset="-122"/>
+              <a:ea typeface="微软雅黑" panose="020B0503020204020204" charset="-122"/>
+            </a:endParaRPr>
+          </a:p>
+        </p:txBody>
+      </p:sp>
       <p:grpSp>
         <p:nvGrpSpPr>
-          <p:cNvPr id="13" name="组合 12"/>
+          <p:cNvPr id="15" name="组合 14"/>
           <p:cNvGrpSpPr/>
           <p:nvPr/>
         </p:nvGrpSpPr>
         <p:grpSpPr>
-          <a:xfrm rot="10800000">
-            <a:off x="-28575" y="3766688"/>
-            <a:ext cx="4737100" cy="5091168"/>
+          <a:xfrm rot="0">
+            <a:off x="2890520" y="2061845"/>
+            <a:ext cx="7985125" cy="1217930"/>
+            <a:chOff x="3134969" y="2228849"/>
+            <a:chExt cx="7984866" cy="1218108"/>
+          </a:xfrm>
+        </p:grpSpPr>
+        <p:sp>
+          <p:nvSpPr>
+            <p:cNvPr id="18" name="椭圆 17"/>
+            <p:cNvSpPr/>
+            <p:nvPr/>
+          </p:nvSpPr>
+          <p:spPr>
+            <a:xfrm>
+              <a:off x="3134969" y="2228849"/>
+              <a:ext cx="435661" cy="435661"/>
+            </a:xfrm>
+            <a:prstGeom prst="ellipse">
+              <a:avLst/>
+            </a:prstGeom>
+            <a:solidFill>
+              <a:srgbClr val="25557A"/>
+            </a:solidFill>
+            <a:ln>
+              <a:noFill/>
+            </a:ln>
+          </p:spPr>
+          <p:style>
+            <a:lnRef idx="2">
+              <a:schemeClr val="accent1">
+                <a:shade val="50000"/>
+              </a:schemeClr>
+            </a:lnRef>
+            <a:fillRef idx="1">
+              <a:schemeClr val="accent1"/>
+            </a:fillRef>
+            <a:effectRef idx="0">
+              <a:schemeClr val="accent1"/>
+            </a:effectRef>
+            <a:fontRef idx="minor">
+              <a:schemeClr val="lt1"/>
+            </a:fontRef>
+          </p:style>
+          <p:txBody>
+            <a:bodyPr rot="0" spcFirstLastPara="0" vertOverflow="overflow" horzOverflow="overflow" vert="horz" wrap="square" lIns="91440" tIns="45720" rIns="91440" bIns="45720" numCol="1" spcCol="0" rtlCol="0" fromWordArt="0" anchor="ctr" anchorCtr="0" forceAA="0" compatLnSpc="1">
+              <a:noAutofit/>
+            </a:bodyPr>
+            <a:p>
+              <a:pPr algn="ctr"/>
+              <a:r>
+                <a:rPr lang="en-US" altLang="zh-CN" sz="1600" dirty="0">
+                  <a:latin typeface="微软雅黑" panose="020B0503020204020204" charset="-122"/>
+                  <a:ea typeface="微软雅黑" panose="020B0503020204020204" charset="-122"/>
+                  <a:cs typeface="+mn-ea"/>
+                  <a:sym typeface="+mn-lt"/>
+                </a:rPr>
+                <a:t>1</a:t>
+              </a:r>
+              <a:endParaRPr lang="en-US" altLang="zh-CN" sz="1600" dirty="0">
+                <a:latin typeface="微软雅黑" panose="020B0503020204020204" charset="-122"/>
+                <a:ea typeface="微软雅黑" panose="020B0503020204020204" charset="-122"/>
+                <a:cs typeface="+mn-ea"/>
+                <a:sym typeface="+mn-lt"/>
+              </a:endParaRPr>
+            </a:p>
+          </p:txBody>
+        </p:sp>
+        <p:grpSp>
+          <p:nvGrpSpPr>
+            <p:cNvPr id="31" name="组合 30"/>
+            <p:cNvGrpSpPr/>
+            <p:nvPr/>
+          </p:nvGrpSpPr>
+          <p:grpSpPr>
+            <a:xfrm>
+              <a:off x="3765265" y="2243632"/>
+              <a:ext cx="7354570" cy="1203325"/>
+              <a:chOff x="7893455" y="4126834"/>
+              <a:chExt cx="7354570" cy="1203325"/>
+            </a:xfrm>
+          </p:grpSpPr>
+          <p:sp>
+            <p:nvSpPr>
+              <p:cNvPr id="32" name="矩形 31"/>
+              <p:cNvSpPr/>
+              <p:nvPr/>
+            </p:nvSpPr>
+            <p:spPr>
+              <a:xfrm>
+                <a:off x="7893455" y="4126834"/>
+                <a:ext cx="2240242" cy="368300"/>
+              </a:xfrm>
+              <a:prstGeom prst="rect">
+                <a:avLst/>
+              </a:prstGeom>
+            </p:spPr>
+            <p:txBody>
+              <a:bodyPr wrap="square">
+                <a:spAutoFit/>
+              </a:bodyPr>
+              <a:p>
+                <a:r>
+                  <a:rPr lang="zh-CN" altLang="en-US" b="1" dirty="0">
+                    <a:solidFill>
+                      <a:srgbClr val="25557A"/>
+                    </a:solidFill>
+                    <a:latin typeface="微软雅黑" panose="020B0503020204020204" charset="-122"/>
+                    <a:ea typeface="微软雅黑" panose="020B0503020204020204" charset="-122"/>
+                    <a:cs typeface="+mn-ea"/>
+                    <a:sym typeface="+mn-lt"/>
+                  </a:rPr>
+                  <a:t>一键运行的测试工程</a:t>
+                </a:r>
+                <a:endParaRPr lang="zh-CN" altLang="en-US" b="1" dirty="0">
+                  <a:solidFill>
+                    <a:srgbClr val="25557A"/>
+                  </a:solidFill>
+                  <a:latin typeface="微软雅黑" panose="020B0503020204020204" charset="-122"/>
+                  <a:ea typeface="微软雅黑" panose="020B0503020204020204" charset="-122"/>
+                  <a:cs typeface="+mn-ea"/>
+                  <a:sym typeface="+mn-lt"/>
+                </a:endParaRPr>
+              </a:p>
+            </p:txBody>
+          </p:sp>
+          <p:sp>
+            <p:nvSpPr>
+              <p:cNvPr id="33" name="文本框 32"/>
+              <p:cNvSpPr txBox="1"/>
+              <p:nvPr/>
+            </p:nvSpPr>
+            <p:spPr>
+              <a:xfrm>
+                <a:off x="9465708" y="4220231"/>
+                <a:ext cx="2665723" cy="215444"/>
+              </a:xfrm>
+              <a:prstGeom prst="rect">
+                <a:avLst/>
+              </a:prstGeom>
+              <a:noFill/>
+            </p:spPr>
+            <p:txBody>
+              <a:bodyPr wrap="square">
+                <a:spAutoFit/>
+              </a:bodyPr>
+              <a:p>
+                <a:r>
+                  <a:rPr lang="zh-CN" altLang="en-US" sz="800" dirty="0">
+                    <a:solidFill>
+                      <a:schemeClr val="bg1">
+                        <a:lumMod val="65000"/>
+                      </a:schemeClr>
+                    </a:solidFill>
+                    <a:latin typeface="微软雅黑" panose="020B0503020204020204" charset="-122"/>
+                    <a:ea typeface="微软雅黑" panose="020B0503020204020204" charset="-122"/>
+                    <a:cs typeface="+mn-ea"/>
+                    <a:sym typeface="+mn-lt"/>
+                  </a:rPr>
+                  <a:t>8 FILES</a:t>
+                </a:r>
+                <a:r>
+                  <a:rPr lang="en-US" altLang="zh-CN" sz="800" dirty="0">
+                    <a:solidFill>
+                      <a:schemeClr val="bg1">
+                        <a:lumMod val="65000"/>
+                      </a:schemeClr>
+                    </a:solidFill>
+                    <a:latin typeface="微软雅黑" panose="020B0503020204020204" charset="-122"/>
+                    <a:ea typeface="微软雅黑" panose="020B0503020204020204" charset="-122"/>
+                    <a:cs typeface="+mn-ea"/>
+                    <a:sym typeface="+mn-lt"/>
+                  </a:rPr>
+                  <a:t> | </a:t>
+                </a:r>
+                <a:r>
+                  <a:rPr lang="zh-CN" altLang="en-US" sz="800" dirty="0">
+                    <a:solidFill>
+                      <a:schemeClr val="bg1">
+                        <a:lumMod val="65000"/>
+                      </a:schemeClr>
+                    </a:solidFill>
+                    <a:latin typeface="微软雅黑" panose="020B0503020204020204" charset="-122"/>
+                    <a:ea typeface="微软雅黑" panose="020B0503020204020204" charset="-122"/>
+                    <a:cs typeface="+mn-ea"/>
+                    <a:sym typeface="+mn-lt"/>
+                  </a:rPr>
+                  <a:t>33 EXECUTIONS</a:t>
+                </a:r>
+                <a:endParaRPr lang="zh-CN" altLang="en-US" sz="800" dirty="0">
+                  <a:solidFill>
+                    <a:schemeClr val="bg1">
+                      <a:lumMod val="65000"/>
+                    </a:schemeClr>
+                  </a:solidFill>
+                  <a:latin typeface="微软雅黑" panose="020B0503020204020204" charset="-122"/>
+                  <a:ea typeface="微软雅黑" panose="020B0503020204020204" charset="-122"/>
+                  <a:cs typeface="+mn-ea"/>
+                  <a:sym typeface="+mn-lt"/>
+                </a:endParaRPr>
+              </a:p>
+            </p:txBody>
+          </p:sp>
+          <p:sp>
+            <p:nvSpPr>
+              <p:cNvPr id="34" name="文本框 33"/>
+              <p:cNvSpPr txBox="1"/>
+              <p:nvPr/>
+            </p:nvSpPr>
+            <p:spPr>
+              <a:xfrm>
+                <a:off x="7893455" y="4377024"/>
+                <a:ext cx="7354570" cy="953135"/>
+              </a:xfrm>
+              <a:prstGeom prst="rect">
+                <a:avLst/>
+              </a:prstGeom>
+              <a:noFill/>
+            </p:spPr>
+            <p:txBody>
+              <a:bodyPr wrap="square">
+                <a:spAutoFit/>
+              </a:bodyPr>
+              <a:p>
+                <a:pPr>
+                  <a:lnSpc>
+                    <a:spcPct val="200000"/>
+                  </a:lnSpc>
+                </a:pPr>
+                <a:r>
+                  <a:rPr lang="zh-CN" altLang="en-US" sz="1400" dirty="0">
+                    <a:solidFill>
+                      <a:schemeClr val="tx1">
+                        <a:lumMod val="75000"/>
+                        <a:lumOff val="25000"/>
+                      </a:schemeClr>
+                    </a:solidFill>
+                    <a:latin typeface="微软雅黑" panose="020B0503020204020204" charset="-122"/>
+                    <a:ea typeface="微软雅黑" panose="020B0503020204020204" charset="-122"/>
+                  </a:rPr>
+                  <a:t>tests/module1_coordinate/ 下 8 个用例文件对应 8 个函数；run_tests.ps1 一键运行 33 条用例（32 清单 + 1 对照），PYTHONPATH 注入被测模块，不改基线一行代码。</a:t>
+                </a:r>
+                <a:endParaRPr lang="zh-CN" altLang="en-US" sz="1400" dirty="0">
+                  <a:solidFill>
+                    <a:schemeClr val="tx1">
+                      <a:lumMod val="75000"/>
+                      <a:lumOff val="25000"/>
+                    </a:schemeClr>
+                  </a:solidFill>
+                  <a:latin typeface="微软雅黑" panose="020B0503020204020204" charset="-122"/>
+                  <a:ea typeface="微软雅黑" panose="020B0503020204020204" charset="-122"/>
+                </a:endParaRPr>
+              </a:p>
+            </p:txBody>
+          </p:sp>
+        </p:grpSp>
+      </p:grpSp>
+      <p:grpSp>
+        <p:nvGrpSpPr>
+          <p:cNvPr id="35" name="组合 34"/>
+          <p:cNvGrpSpPr/>
+          <p:nvPr/>
+        </p:nvGrpSpPr>
+        <p:grpSpPr>
+          <a:xfrm rot="0">
+            <a:off x="3521075" y="3430905"/>
+            <a:ext cx="7355205" cy="1217930"/>
+            <a:chOff x="3134969" y="2228849"/>
+            <a:chExt cx="7354946" cy="1218108"/>
+          </a:xfrm>
+        </p:grpSpPr>
+        <p:sp>
+          <p:nvSpPr>
+            <p:cNvPr id="36" name="椭圆 35"/>
+            <p:cNvSpPr/>
+            <p:nvPr/>
+          </p:nvSpPr>
+          <p:spPr>
+            <a:xfrm>
+              <a:off x="3134969" y="2228849"/>
+              <a:ext cx="435661" cy="435661"/>
+            </a:xfrm>
+            <a:prstGeom prst="ellipse">
+              <a:avLst/>
+            </a:prstGeom>
+            <a:solidFill>
+              <a:srgbClr val="25557A"/>
+            </a:solidFill>
+            <a:ln>
+              <a:noFill/>
+            </a:ln>
+          </p:spPr>
+          <p:style>
+            <a:lnRef idx="2">
+              <a:schemeClr val="accent1">
+                <a:shade val="50000"/>
+              </a:schemeClr>
+            </a:lnRef>
+            <a:fillRef idx="1">
+              <a:schemeClr val="accent1"/>
+            </a:fillRef>
+            <a:effectRef idx="0">
+              <a:schemeClr val="accent1"/>
+            </a:effectRef>
+            <a:fontRef idx="minor">
+              <a:schemeClr val="lt1"/>
+            </a:fontRef>
+          </p:style>
+          <p:txBody>
+            <a:bodyPr rot="0" spcFirstLastPara="0" vertOverflow="overflow" horzOverflow="overflow" vert="horz" wrap="square" lIns="91440" tIns="45720" rIns="91440" bIns="45720" numCol="1" spcCol="0" rtlCol="0" fromWordArt="0" anchor="ctr" anchorCtr="0" forceAA="0" compatLnSpc="1">
+              <a:noAutofit/>
+            </a:bodyPr>
+            <a:p>
+              <a:pPr algn="ctr"/>
+              <a:r>
+                <a:rPr lang="en-US" altLang="zh-CN" sz="1600" dirty="0">
+                  <a:latin typeface="微软雅黑" panose="020B0503020204020204" charset="-122"/>
+                  <a:ea typeface="微软雅黑" panose="020B0503020204020204" charset="-122"/>
+                  <a:cs typeface="+mn-ea"/>
+                  <a:sym typeface="+mn-lt"/>
+                </a:rPr>
+                <a:t>2</a:t>
+              </a:r>
+              <a:endParaRPr lang="en-US" altLang="zh-CN" sz="1600" dirty="0">
+                <a:latin typeface="微软雅黑" panose="020B0503020204020204" charset="-122"/>
+                <a:ea typeface="微软雅黑" panose="020B0503020204020204" charset="-122"/>
+                <a:cs typeface="+mn-ea"/>
+                <a:sym typeface="+mn-lt"/>
+              </a:endParaRPr>
+            </a:p>
+          </p:txBody>
+        </p:sp>
+        <p:grpSp>
+          <p:nvGrpSpPr>
+            <p:cNvPr id="37" name="组合 36"/>
+            <p:cNvGrpSpPr/>
+            <p:nvPr/>
+          </p:nvGrpSpPr>
+          <p:grpSpPr>
+            <a:xfrm>
+              <a:off x="3765265" y="2243632"/>
+              <a:ext cx="6724650" cy="1203325"/>
+              <a:chOff x="7893455" y="4126834"/>
+              <a:chExt cx="6724650" cy="1203325"/>
+            </a:xfrm>
+          </p:grpSpPr>
+          <p:sp>
+            <p:nvSpPr>
+              <p:cNvPr id="38" name="矩形 37"/>
+              <p:cNvSpPr/>
+              <p:nvPr/>
+            </p:nvSpPr>
+            <p:spPr>
+              <a:xfrm>
+                <a:off x="7893455" y="4126834"/>
+                <a:ext cx="2240242" cy="368300"/>
+              </a:xfrm>
+              <a:prstGeom prst="rect">
+                <a:avLst/>
+              </a:prstGeom>
+            </p:spPr>
+            <p:txBody>
+              <a:bodyPr wrap="square">
+                <a:spAutoFit/>
+              </a:bodyPr>
+              <a:p>
+                <a:r>
+                  <a:rPr lang="zh-CN" altLang="en-US" b="1" dirty="0">
+                    <a:solidFill>
+                      <a:srgbClr val="25557A"/>
+                    </a:solidFill>
+                    <a:latin typeface="微软雅黑" panose="020B0503020204020204" charset="-122"/>
+                    <a:ea typeface="微软雅黑" panose="020B0503020204020204" charset="-122"/>
+                    <a:cs typeface="+mn-ea"/>
+                    <a:sym typeface="+mn-lt"/>
+                  </a:rPr>
+                  <a:t>一次运行双产出</a:t>
+                </a:r>
+                <a:endParaRPr lang="zh-CN" altLang="en-US" dirty="0">
+                  <a:solidFill>
+                    <a:schemeClr val="accent5">
+                      <a:lumMod val="50000"/>
+                    </a:schemeClr>
+                  </a:solidFill>
+                  <a:latin typeface="微软雅黑" panose="020B0503020204020204" charset="-122"/>
+                  <a:ea typeface="微软雅黑" panose="020B0503020204020204" charset="-122"/>
+                  <a:cs typeface="+mn-ea"/>
+                  <a:sym typeface="+mn-lt"/>
+                </a:endParaRPr>
+              </a:p>
+            </p:txBody>
+          </p:sp>
+          <p:sp>
+            <p:nvSpPr>
+              <p:cNvPr id="39" name="文本框 38"/>
+              <p:cNvSpPr txBox="1"/>
+              <p:nvPr/>
+            </p:nvSpPr>
+            <p:spPr>
+              <a:xfrm>
+                <a:off x="9465708" y="4220231"/>
+                <a:ext cx="2665723" cy="215444"/>
+              </a:xfrm>
+              <a:prstGeom prst="rect">
+                <a:avLst/>
+              </a:prstGeom>
+              <a:noFill/>
+            </p:spPr>
+            <p:txBody>
+              <a:bodyPr wrap="square">
+                <a:spAutoFit/>
+              </a:bodyPr>
+              <a:p>
+                <a:r>
+                  <a:rPr lang="zh-CN" altLang="en-US" sz="800" dirty="0">
+                    <a:solidFill>
+                      <a:schemeClr val="bg1">
+                        <a:lumMod val="65000"/>
+                      </a:schemeClr>
+                    </a:solidFill>
+                    <a:latin typeface="微软雅黑" panose="020B0503020204020204" charset="-122"/>
+                    <a:ea typeface="微软雅黑" panose="020B0503020204020204" charset="-122"/>
+                    <a:cs typeface="+mn-ea"/>
+                    <a:sym typeface="+mn-lt"/>
+                  </a:rPr>
+                  <a:t>JUNIT XML</a:t>
+                </a:r>
+                <a:r>
+                  <a:rPr lang="en-US" altLang="zh-CN" sz="800" dirty="0">
+                    <a:solidFill>
+                      <a:schemeClr val="bg1">
+                        <a:lumMod val="65000"/>
+                      </a:schemeClr>
+                    </a:solidFill>
+                    <a:latin typeface="微软雅黑" panose="020B0503020204020204" charset="-122"/>
+                    <a:ea typeface="微软雅黑" panose="020B0503020204020204" charset="-122"/>
+                    <a:cs typeface="+mn-ea"/>
+                    <a:sym typeface="+mn-lt"/>
+                  </a:rPr>
+                  <a:t> | </a:t>
+                </a:r>
+                <a:r>
+                  <a:rPr lang="zh-CN" altLang="en-US" sz="800" dirty="0">
+                    <a:solidFill>
+                      <a:schemeClr val="bg1">
+                        <a:lumMod val="65000"/>
+                      </a:schemeClr>
+                    </a:solidFill>
+                    <a:latin typeface="微软雅黑" panose="020B0503020204020204" charset="-122"/>
+                    <a:ea typeface="微软雅黑" panose="020B0503020204020204" charset="-122"/>
+                    <a:cs typeface="+mn-ea"/>
+                    <a:sym typeface="+mn-lt"/>
+                  </a:rPr>
+                  <a:t>UTF-8 LOG</a:t>
+                </a:r>
+                <a:endParaRPr lang="zh-CN" altLang="en-US" sz="800" dirty="0">
+                  <a:solidFill>
+                    <a:schemeClr val="bg1">
+                      <a:lumMod val="65000"/>
+                    </a:schemeClr>
+                  </a:solidFill>
+                  <a:latin typeface="微软雅黑" panose="020B0503020204020204" charset="-122"/>
+                  <a:ea typeface="微软雅黑" panose="020B0503020204020204" charset="-122"/>
+                  <a:cs typeface="+mn-ea"/>
+                  <a:sym typeface="+mn-lt"/>
+                </a:endParaRPr>
+              </a:p>
+            </p:txBody>
+          </p:sp>
+          <p:sp>
+            <p:nvSpPr>
+              <p:cNvPr id="40" name="文本框 39"/>
+              <p:cNvSpPr txBox="1"/>
+              <p:nvPr/>
+            </p:nvSpPr>
+            <p:spPr>
+              <a:xfrm>
+                <a:off x="7893455" y="4377024"/>
+                <a:ext cx="6724650" cy="953135"/>
+              </a:xfrm>
+              <a:prstGeom prst="rect">
+                <a:avLst/>
+              </a:prstGeom>
+              <a:noFill/>
+            </p:spPr>
+            <p:txBody>
+              <a:bodyPr wrap="square">
+                <a:spAutoFit/>
+              </a:bodyPr>
+              <a:p>
+                <a:pPr>
+                  <a:lnSpc>
+                    <a:spcPct val="200000"/>
+                  </a:lnSpc>
+                </a:pPr>
+                <a:r>
+                  <a:rPr lang="zh-CN" altLang="en-US" sz="1400" dirty="0">
+                    <a:solidFill>
+                      <a:schemeClr val="tx1">
+                        <a:lumMod val="75000"/>
+                        <a:lumOff val="25000"/>
+                      </a:schemeClr>
+                    </a:solidFill>
+                    <a:latin typeface="微软雅黑" panose="020B0503020204020204" charset="-122"/>
+                    <a:ea typeface="微软雅黑" panose="020B0503020204020204" charset="-122"/>
+                  </a:rPr>
+                  <a:t>junit_report.py 单次运行同时产出 JUnit XML 与 UTF-8 运行日志；单次执行约 0.02 秒；退出码 0/1/2/3 明确区分全过、有失败、无工程、不可导入四种状态。</a:t>
+                </a:r>
+                <a:endParaRPr lang="zh-CN" altLang="en-US" sz="1400" dirty="0">
+                  <a:solidFill>
+                    <a:schemeClr val="tx1">
+                      <a:lumMod val="75000"/>
+                      <a:lumOff val="25000"/>
+                    </a:schemeClr>
+                  </a:solidFill>
+                  <a:latin typeface="微软雅黑" panose="020B0503020204020204" charset="-122"/>
+                  <a:ea typeface="微软雅黑" panose="020B0503020204020204" charset="-122"/>
+                </a:endParaRPr>
+              </a:p>
+            </p:txBody>
+          </p:sp>
+        </p:grpSp>
+      </p:grpSp>
+      <p:grpSp>
+        <p:nvGrpSpPr>
+          <p:cNvPr id="41" name="组合 40"/>
+          <p:cNvGrpSpPr/>
+          <p:nvPr/>
+        </p:nvGrpSpPr>
+        <p:grpSpPr>
+          <a:xfrm rot="0">
+            <a:off x="2890520" y="4800600"/>
+            <a:ext cx="7985125" cy="1217930"/>
+            <a:chOff x="3134969" y="2228849"/>
+            <a:chExt cx="7984866" cy="1218108"/>
+          </a:xfrm>
+        </p:grpSpPr>
+        <p:sp>
+          <p:nvSpPr>
+            <p:cNvPr id="28" name="椭圆 27"/>
+            <p:cNvSpPr/>
+            <p:nvPr/>
+          </p:nvSpPr>
+          <p:spPr>
+            <a:xfrm>
+              <a:off x="3134969" y="2228849"/>
+              <a:ext cx="435661" cy="435661"/>
+            </a:xfrm>
+            <a:prstGeom prst="ellipse">
+              <a:avLst/>
+            </a:prstGeom>
+            <a:solidFill>
+              <a:srgbClr val="25557A"/>
+            </a:solidFill>
+            <a:ln>
+              <a:noFill/>
+            </a:ln>
+          </p:spPr>
+          <p:style>
+            <a:lnRef idx="2">
+              <a:schemeClr val="accent1">
+                <a:shade val="50000"/>
+              </a:schemeClr>
+            </a:lnRef>
+            <a:fillRef idx="1">
+              <a:schemeClr val="accent1"/>
+            </a:fillRef>
+            <a:effectRef idx="0">
+              <a:schemeClr val="accent1"/>
+            </a:effectRef>
+            <a:fontRef idx="minor">
+              <a:schemeClr val="lt1"/>
+            </a:fontRef>
+          </p:style>
+          <p:txBody>
+            <a:bodyPr rot="0" spcFirstLastPara="0" vertOverflow="overflow" horzOverflow="overflow" vert="horz" wrap="square" lIns="91440" tIns="45720" rIns="91440" bIns="45720" numCol="1" spcCol="0" rtlCol="0" fromWordArt="0" anchor="ctr" anchorCtr="0" forceAA="0" compatLnSpc="1">
+              <a:noAutofit/>
+            </a:bodyPr>
+            <a:p>
+              <a:pPr algn="ctr"/>
+              <a:r>
+                <a:rPr lang="en-US" altLang="zh-CN" sz="1600" dirty="0">
+                  <a:latin typeface="微软雅黑" panose="020B0503020204020204" charset="-122"/>
+                  <a:ea typeface="微软雅黑" panose="020B0503020204020204" charset="-122"/>
+                  <a:cs typeface="+mn-ea"/>
+                  <a:sym typeface="+mn-lt"/>
+                </a:rPr>
+                <a:t>3</a:t>
+              </a:r>
+              <a:endParaRPr lang="en-US" altLang="zh-CN" sz="1600" dirty="0">
+                <a:latin typeface="微软雅黑" panose="020B0503020204020204" charset="-122"/>
+                <a:ea typeface="微软雅黑" panose="020B0503020204020204" charset="-122"/>
+                <a:cs typeface="+mn-ea"/>
+                <a:sym typeface="+mn-lt"/>
+              </a:endParaRPr>
+            </a:p>
+          </p:txBody>
+        </p:sp>
+        <p:grpSp>
+          <p:nvGrpSpPr>
+            <p:cNvPr id="43" name="组合 42"/>
+            <p:cNvGrpSpPr/>
+            <p:nvPr/>
+          </p:nvGrpSpPr>
+          <p:grpSpPr>
+            <a:xfrm>
+              <a:off x="3765265" y="2243632"/>
+              <a:ext cx="7354570" cy="1203325"/>
+              <a:chOff x="7893455" y="4126834"/>
+              <a:chExt cx="7354570" cy="1203325"/>
+            </a:xfrm>
+          </p:grpSpPr>
+          <p:sp>
+            <p:nvSpPr>
+              <p:cNvPr id="44" name="矩形 43"/>
+              <p:cNvSpPr/>
+              <p:nvPr/>
+            </p:nvSpPr>
+            <p:spPr>
+              <a:xfrm>
+                <a:off x="7893455" y="4126834"/>
+                <a:ext cx="2240242" cy="368300"/>
+              </a:xfrm>
+              <a:prstGeom prst="rect">
+                <a:avLst/>
+              </a:prstGeom>
+            </p:spPr>
+            <p:txBody>
+              <a:bodyPr wrap="square">
+                <a:spAutoFit/>
+              </a:bodyPr>
+              <a:p>
+                <a:r>
+                  <a:rPr lang="zh-CN" altLang="en-US" b="1" dirty="0">
+                    <a:solidFill>
+                      <a:srgbClr val="25557A"/>
+                    </a:solidFill>
+                    <a:latin typeface="微软雅黑" panose="020B0503020204020204" charset="-122"/>
+                    <a:ea typeface="微软雅黑" panose="020B0503020204020204" charset="-122"/>
+                    <a:cs typeface="+mn-ea"/>
+                    <a:sym typeface="+mn-lt"/>
+                  </a:rPr>
+                  <a:t>结果逐位一致</a:t>
+                </a:r>
+                <a:endParaRPr lang="zh-CN" altLang="en-US" dirty="0">
+                  <a:solidFill>
+                    <a:schemeClr val="accent5">
+                      <a:lumMod val="50000"/>
+                    </a:schemeClr>
+                  </a:solidFill>
+                  <a:latin typeface="微软雅黑" panose="020B0503020204020204" charset="-122"/>
+                  <a:ea typeface="微软雅黑" panose="020B0503020204020204" charset="-122"/>
+                  <a:cs typeface="+mn-ea"/>
+                  <a:sym typeface="+mn-lt"/>
+                </a:endParaRPr>
+              </a:p>
+            </p:txBody>
+          </p:sp>
+          <p:sp>
+            <p:nvSpPr>
+              <p:cNvPr id="45" name="文本框 44"/>
+              <p:cNvSpPr txBox="1"/>
+              <p:nvPr/>
+            </p:nvSpPr>
+            <p:spPr>
+              <a:xfrm>
+                <a:off x="9465708" y="4220231"/>
+                <a:ext cx="2665723" cy="215444"/>
+              </a:xfrm>
+              <a:prstGeom prst="rect">
+                <a:avLst/>
+              </a:prstGeom>
+              <a:noFill/>
+            </p:spPr>
+            <p:txBody>
+              <a:bodyPr wrap="square">
+                <a:spAutoFit/>
+              </a:bodyPr>
+              <a:p>
+                <a:r>
+                  <a:rPr lang="zh-CN" altLang="en-US" sz="800" dirty="0">
+                    <a:solidFill>
+                      <a:schemeClr val="bg1">
+                        <a:lumMod val="65000"/>
+                      </a:schemeClr>
+                    </a:solidFill>
+                    <a:latin typeface="微软雅黑" panose="020B0503020204020204" charset="-122"/>
+                    <a:ea typeface="微软雅黑" panose="020B0503020204020204" charset="-122"/>
+                    <a:cs typeface="+mn-ea"/>
+                    <a:sym typeface="+mn-lt"/>
+                  </a:rPr>
+                  <a:t>CPU ONLY</a:t>
+                </a:r>
+                <a:r>
+                  <a:rPr lang="en-US" altLang="zh-CN" sz="800" dirty="0">
+                    <a:solidFill>
+                      <a:schemeClr val="bg1">
+                        <a:lumMod val="65000"/>
+                      </a:schemeClr>
+                    </a:solidFill>
+                    <a:latin typeface="微软雅黑" panose="020B0503020204020204" charset="-122"/>
+                    <a:ea typeface="微软雅黑" panose="020B0503020204020204" charset="-122"/>
+                    <a:cs typeface="+mn-ea"/>
+                    <a:sym typeface="+mn-lt"/>
+                  </a:rPr>
+                  <a:t> | </a:t>
+                </a:r>
+                <a:r>
+                  <a:rPr lang="zh-CN" altLang="en-US" sz="800" dirty="0">
+                    <a:solidFill>
+                      <a:schemeClr val="bg1">
+                        <a:lumMod val="65000"/>
+                      </a:schemeClr>
+                    </a:solidFill>
+                    <a:latin typeface="微软雅黑" panose="020B0503020204020204" charset="-122"/>
+                    <a:ea typeface="微软雅黑" panose="020B0503020204020204" charset="-122"/>
+                    <a:cs typeface="+mn-ea"/>
+                    <a:sym typeface="+mn-lt"/>
+                  </a:rPr>
+                  <a:t>DETERMINISTIC</a:t>
+                </a:r>
+                <a:endParaRPr lang="zh-CN" altLang="en-US" sz="800" dirty="0">
+                  <a:solidFill>
+                    <a:schemeClr val="bg1">
+                      <a:lumMod val="65000"/>
+                    </a:schemeClr>
+                  </a:solidFill>
+                  <a:latin typeface="微软雅黑" panose="020B0503020204020204" charset="-122"/>
+                  <a:ea typeface="微软雅黑" panose="020B0503020204020204" charset="-122"/>
+                  <a:cs typeface="+mn-ea"/>
+                  <a:sym typeface="+mn-lt"/>
+                </a:endParaRPr>
+              </a:p>
+            </p:txBody>
+          </p:sp>
+          <p:sp>
+            <p:nvSpPr>
+              <p:cNvPr id="47" name="文本框 46"/>
+              <p:cNvSpPr txBox="1"/>
+              <p:nvPr/>
+            </p:nvSpPr>
+            <p:spPr>
+              <a:xfrm>
+                <a:off x="7893455" y="4377024"/>
+                <a:ext cx="7354570" cy="953135"/>
+              </a:xfrm>
+              <a:prstGeom prst="rect">
+                <a:avLst/>
+              </a:prstGeom>
+              <a:noFill/>
+            </p:spPr>
+            <p:txBody>
+              <a:bodyPr wrap="square">
+                <a:spAutoFit/>
+              </a:bodyPr>
+              <a:p>
+                <a:pPr>
+                  <a:lnSpc>
+                    <a:spcPct val="200000"/>
+                  </a:lnSpc>
+                </a:pPr>
+                <a:r>
+                  <a:rPr lang="zh-CN" altLang="en-US" sz="1400" dirty="0">
+                    <a:solidFill>
+                      <a:schemeClr val="tx1">
+                        <a:lumMod val="75000"/>
+                        <a:lumOff val="25000"/>
+                      </a:schemeClr>
+                    </a:solidFill>
+                    <a:latin typeface="微软雅黑" panose="020B0503020204020204" charset="-122"/>
+                    <a:ea typeface="微软雅黑" panose="020B0503020204020204" charset="-122"/>
+                  </a:rPr>
+                  <a:t>测试不依赖模型权重与 GPU；跨运行结果逐位一致，任何人一条命令即可复现全部 33 次执行与 2 个错误的现场。</a:t>
+                </a:r>
+                <a:endParaRPr lang="zh-CN" altLang="en-US" sz="1400" dirty="0">
+                  <a:solidFill>
+                    <a:schemeClr val="tx1">
+                      <a:lumMod val="75000"/>
+                      <a:lumOff val="25000"/>
+                    </a:schemeClr>
+                  </a:solidFill>
+                  <a:latin typeface="微软雅黑" panose="020B0503020204020204" charset="-122"/>
+                  <a:ea typeface="微软雅黑" panose="020B0503020204020204" charset="-122"/>
+                </a:endParaRPr>
+              </a:p>
+            </p:txBody>
+          </p:sp>
+        </p:grpSp>
+      </p:grpSp>
+      <p:pic>
+        <p:nvPicPr>
+          <p:cNvPr id="12" name="图片 11" descr="图书馆"/>
+          <p:cNvPicPr>
+            <a:picLocks noChangeAspect="1"/>
+          </p:cNvPicPr>
+          <p:nvPr/>
+        </p:nvPicPr>
+        <p:blipFill>
+          <a:blip r:embed="rId1">
+            <a:alphaModFix amt="25000"/>
+          </a:blip>
+          <a:stretch>
+            <a:fillRect/>
+          </a:stretch>
+        </p:blipFill>
+        <p:spPr>
+          <a:xfrm>
+            <a:off x="8452485" y="5777865"/>
+            <a:ext cx="3739585" cy="1080000"/>
+          </a:xfrm>
+          <a:prstGeom prst="rect">
+            <a:avLst/>
+          </a:prstGeom>
+        </p:spPr>
+      </p:pic>
+      <p:grpSp>
+        <p:nvGrpSpPr>
+          <p:cNvPr id="16" name="组合 15"/>
+          <p:cNvGrpSpPr/>
+          <p:nvPr userDrawn="1"/>
+        </p:nvGrpSpPr>
+        <p:grpSpPr>
+          <a:xfrm>
+            <a:off x="10289667" y="-801077"/>
+            <a:ext cx="1902333" cy="2044520"/>
             <a:chOff x="8135783" y="-1669981"/>
             <a:chExt cx="4056217" cy="4359393"/>
           </a:xfrm>
         </p:grpSpPr>
         <p:sp>
           <p:nvSpPr>
-            <p:cNvPr id="14" name="任意多边形: 形状 64"/>
+            <p:cNvPr id="17" name="任意多边形: 形状 10"/>
             <p:cNvSpPr/>
             <p:nvPr/>
           </p:nvSpPr>
@@ -6311,7 +7178,7 @@
         </p:sp>
         <p:sp>
           <p:nvSpPr>
-            <p:cNvPr id="16" name="直角三角形 15"/>
+            <p:cNvPr id="20" name="直角三角形 19"/>
             <p:cNvSpPr/>
             <p:nvPr/>
           </p:nvSpPr>
@@ -6357,7 +7224,7 @@
       </p:grpSp>
     </p:spTree>
     <p:custDataLst>
-      <p:tags r:id="rId3"/>
+      <p:tags r:id="rId2"/>
     </p:custDataLst>
   </p:cSld>
   <p:clrMapOvr>
@@ -6366,7 +7233,7 @@
 </p:sld>
 </file>
 
-<file path=ppt/slides/slide16.xml><?xml version="1.0" encoding="utf-8"?>
+<file path=ppt/slides/slide11.xml><?xml version="1.0" encoding="utf-8"?>
 <p:sld xmlns:a="http://schemas.openxmlformats.org/drawingml/2006/main" xmlns:r="http://schemas.openxmlformats.org/officeDocument/2006/relationships" xmlns:p="http://schemas.openxmlformats.org/presentationml/2006/main">
   <p:cSld>
     <p:spTree>
@@ -6880,7 +7747,7 @@
           <a:p>
             <a:pPr algn="ctr"/>
             <a:r>
-              <a:rPr sz="2600" lang="zh-CN" altLang="en-US" b="1">
+              <a:rPr lang="zh-CN" altLang="en-US" sz="2400" b="1">
                 <a:solidFill>
                   <a:schemeClr val="bg1"/>
                 </a:solidFill>
@@ -6889,7 +7756,7 @@
               </a:rPr>
               <a:t>33</a:t>
             </a:r>
-            <a:endParaRPr sz="2600" lang="zh-CN" altLang="en-US" b="1">
+            <a:endParaRPr lang="zh-CN" altLang="en-US" sz="2400" b="1">
               <a:solidFill>
                 <a:schemeClr val="bg1"/>
               </a:solidFill>
@@ -7070,7 +7937,7 @@
           <a:p>
             <a:pPr algn="ctr"/>
             <a:r>
-              <a:rPr sz="2600" lang="zh-CN" altLang="en-US" b="1">
+              <a:rPr lang="zh-CN" altLang="en-US" sz="2400" b="1">
                 <a:solidFill>
                   <a:schemeClr val="tx1">
                     <a:lumMod val="85000"/>
@@ -7082,7 +7949,7 @@
               </a:rPr>
               <a:t>31</a:t>
             </a:r>
-            <a:endParaRPr sz="2600" lang="zh-CN" altLang="en-US" b="1">
+            <a:endParaRPr lang="zh-CN" altLang="en-US" sz="2400" b="1">
               <a:solidFill>
                 <a:schemeClr val="tx1">
                   <a:lumMod val="85000"/>
@@ -7269,7 +8136,7 @@
           <a:p>
             <a:pPr algn="ctr"/>
             <a:r>
-              <a:rPr sz="2600" lang="zh-CN" altLang="en-US" b="1">
+              <a:rPr lang="zh-CN" altLang="en-US" sz="2400" b="1">
                 <a:solidFill>
                   <a:schemeClr val="bg1"/>
                 </a:solidFill>
@@ -7278,7 +8145,7 @@
               </a:rPr>
               <a:t>2</a:t>
             </a:r>
-            <a:endParaRPr sz="2600" lang="zh-CN" altLang="en-US" b="1">
+            <a:endParaRPr lang="zh-CN" altLang="en-US" sz="2400" b="1">
               <a:solidFill>
                 <a:schemeClr val="bg1"/>
               </a:solidFill>
@@ -7459,7 +8326,7 @@
           <a:p>
             <a:pPr algn="ctr"/>
             <a:r>
-              <a:rPr sz="2600" lang="zh-CN" altLang="en-US" b="1">
+              <a:rPr lang="zh-CN" altLang="en-US" sz="2400" b="1">
                 <a:solidFill>
                   <a:schemeClr val="tx1">
                     <a:lumMod val="85000"/>
@@ -7471,7 +8338,7 @@
               </a:rPr>
               <a:t>93.9%</a:t>
             </a:r>
-            <a:endParaRPr sz="2600" lang="zh-CN" altLang="en-US" b="1">
+            <a:endParaRPr lang="zh-CN" altLang="en-US" sz="2400" b="1">
               <a:solidFill>
                 <a:schemeClr val="tx1">
                   <a:lumMod val="85000"/>
@@ -7624,7 +8491,7 @@
 </p:sld>
 </file>
 
-<file path=ppt/slides/slide17.xml><?xml version="1.0" encoding="utf-8"?>
+<file path=ppt/slides/slide12.xml><?xml version="1.0" encoding="utf-8"?>
 <p:sld xmlns:a="http://schemas.openxmlformats.org/drawingml/2006/main" xmlns:r="http://schemas.openxmlformats.org/officeDocument/2006/relationships" xmlns:p="http://schemas.openxmlformats.org/presentationml/2006/main">
   <p:cSld>
     <p:spTree>
@@ -8270,74 +9137,74 @@
                   </a:lnSpc>
                 </a:pPr>
                 <a:r>
-                  <a:rPr sz="1400" lang="zh-CN" altLang="en-US" dirty="0"/>
+                  <a:rPr lang="zh-CN" altLang="en-US" dirty="0"/>
                   <a:t>输入 (2, 1, 1) 三维深度图即抛 ValueError；docstring 声明的全部 (S, H, W) 输入都不可用。</a:t>
                 </a:r>
                 <a:r>
-                  <a:rPr sz="1400" lang="en-US" altLang="zh-CN" dirty="0"/>
+                  <a:rPr lang="en-US" altLang="zh-CN" dirty="0"/>
                   <a:t/>
                 </a:r>
                 <a:r>
-                  <a:rPr sz="1400" lang="zh-CN" altLang="en-US" dirty="0"/>
+                  <a:rPr lang="zh-CN" altLang="en-US" dirty="0"/>
                   <a:t/>
                 </a:r>
                 <a:r>
-                  <a:rPr sz="1400" lang="en-US" altLang="zh-CN" dirty="0"/>
+                  <a:rPr lang="en-US" altLang="zh-CN" dirty="0"/>
                   <a:t/>
                 </a:r>
                 <a:r>
-                  <a:rPr sz="1400" lang="zh-CN" altLang="en-US" dirty="0"/>
+                  <a:rPr lang="zh-CN" altLang="en-US" dirty="0"/>
                   <a:t/>
                 </a:r>
                 <a:r>
-                  <a:rPr sz="1400" lang="en-US" altLang="zh-CN" dirty="0"/>
+                  <a:rPr lang="en-US" altLang="zh-CN" dirty="0"/>
                   <a:t/>
                 </a:r>
                 <a:r>
-                  <a:rPr sz="1400" lang="zh-CN" altLang="en-US" dirty="0"/>
+                  <a:rPr lang="zh-CN" altLang="en-US" dirty="0"/>
                   <a:t/>
                 </a:r>
                 <a:r>
-                  <a:rPr sz="1400" lang="en-US" altLang="zh-CN" dirty="0"/>
+                  <a:rPr lang="en-US" altLang="zh-CN" dirty="0"/>
                   <a:t/>
                 </a:r>
                 <a:r>
-                  <a:rPr sz="1400" lang="zh-CN" altLang="en-US" dirty="0"/>
+                  <a:rPr lang="zh-CN" altLang="en-US" dirty="0"/>
                   <a:t/>
                 </a:r>
                 <a:r>
-                  <a:rPr sz="1400" lang="en-US" altLang="zh-CN" dirty="0"/>
+                  <a:rPr lang="en-US" altLang="zh-CN" dirty="0"/>
                   <a:t/>
                 </a:r>
                 <a:r>
-                  <a:rPr sz="1400" lang="zh-CN" altLang="en-US" dirty="0"/>
+                  <a:rPr lang="zh-CN" altLang="en-US" dirty="0"/>
                   <a:t/>
                 </a:r>
                 <a:r>
-                  <a:rPr sz="1400" lang="en-US" altLang="zh-CN" dirty="0"/>
+                  <a:rPr lang="en-US" altLang="zh-CN" dirty="0"/>
                   <a:t/>
                 </a:r>
                 <a:r>
-                  <a:rPr sz="1400" lang="zh-CN" altLang="en-US" dirty="0"/>
+                  <a:rPr lang="zh-CN" altLang="en-US" dirty="0"/>
                   <a:t/>
                 </a:r>
                 <a:r>
-                  <a:rPr sz="1400" lang="en-US" altLang="zh-CN" dirty="0"/>
+                  <a:rPr lang="en-US" altLang="zh-CN" dirty="0"/>
                   <a:t/>
                 </a:r>
                 <a:r>
-                  <a:rPr sz="1400" lang="zh-CN" altLang="en-US" dirty="0"/>
+                  <a:rPr lang="zh-CN" altLang="en-US" dirty="0"/>
                   <a:t/>
                 </a:r>
                 <a:r>
-                  <a:rPr sz="1400" lang="en-US" altLang="zh-CN" dirty="0"/>
+                  <a:rPr lang="en-US" altLang="zh-CN" dirty="0"/>
                   <a:t/>
                 </a:r>
                 <a:r>
-                  <a:rPr sz="1400" lang="zh-CN" altLang="en-US" dirty="0"/>
+                  <a:rPr lang="zh-CN" altLang="en-US" dirty="0"/>
                   <a:t/>
                 </a:r>
-                <a:endParaRPr sz="1400" lang="zh-CN" altLang="en-US" dirty="0"/>
+                <a:endParaRPr lang="zh-CN" altLang="en-US" dirty="0"/>
               </a:p>
             </p:txBody>
           </p:sp>
@@ -8543,74 +9410,74 @@
                   </a:lnSpc>
                 </a:pPr>
                 <a:r>
-                  <a:rPr sz="1400" lang="zh-CN" altLang="en-US" dirty="0"/>
+                  <a:rPr lang="zh-CN" altLang="en-US" dirty="0"/>
                   <a:t>根因是第 39 行无条件 squeeze(-1)。已登记并给出修复建议，按约定未改动基线。</a:t>
                 </a:r>
                 <a:r>
-                  <a:rPr sz="1400" lang="en-US" altLang="zh-CN" dirty="0"/>
+                  <a:rPr lang="en-US" altLang="zh-CN" dirty="0"/>
                   <a:t/>
                 </a:r>
                 <a:r>
-                  <a:rPr sz="1400" lang="zh-CN" altLang="en-US" dirty="0"/>
+                  <a:rPr lang="zh-CN" altLang="en-US" dirty="0"/>
                   <a:t/>
                 </a:r>
                 <a:r>
-                  <a:rPr sz="1400" lang="en-US" altLang="zh-CN" dirty="0"/>
+                  <a:rPr lang="en-US" altLang="zh-CN" dirty="0"/>
                   <a:t/>
                 </a:r>
                 <a:r>
-                  <a:rPr sz="1400" lang="zh-CN" altLang="en-US" dirty="0"/>
+                  <a:rPr lang="zh-CN" altLang="en-US" dirty="0"/>
                   <a:t/>
                 </a:r>
                 <a:r>
-                  <a:rPr sz="1400" lang="en-US" altLang="zh-CN" dirty="0"/>
+                  <a:rPr lang="en-US" altLang="zh-CN" dirty="0"/>
                   <a:t/>
                 </a:r>
                 <a:r>
-                  <a:rPr sz="1400" lang="zh-CN" altLang="en-US" dirty="0"/>
+                  <a:rPr lang="zh-CN" altLang="en-US" dirty="0"/>
                   <a:t/>
                 </a:r>
                 <a:r>
-                  <a:rPr sz="1400" lang="en-US" altLang="zh-CN" dirty="0"/>
+                  <a:rPr lang="en-US" altLang="zh-CN" dirty="0"/>
                   <a:t/>
                 </a:r>
                 <a:r>
-                  <a:rPr sz="1400" lang="zh-CN" altLang="en-US" dirty="0"/>
+                  <a:rPr lang="zh-CN" altLang="en-US" dirty="0"/>
                   <a:t/>
                 </a:r>
                 <a:r>
-                  <a:rPr sz="1400" lang="en-US" altLang="zh-CN" dirty="0"/>
+                  <a:rPr lang="en-US" altLang="zh-CN" dirty="0"/>
                   <a:t/>
                 </a:r>
                 <a:r>
-                  <a:rPr sz="1400" lang="zh-CN" altLang="en-US" dirty="0"/>
+                  <a:rPr lang="zh-CN" altLang="en-US" dirty="0"/>
                   <a:t/>
                 </a:r>
                 <a:r>
-                  <a:rPr sz="1400" lang="en-US" altLang="zh-CN" dirty="0"/>
+                  <a:rPr lang="en-US" altLang="zh-CN" dirty="0"/>
                   <a:t/>
                 </a:r>
                 <a:r>
-                  <a:rPr sz="1400" lang="zh-CN" altLang="en-US" dirty="0"/>
+                  <a:rPr lang="zh-CN" altLang="en-US" dirty="0"/>
                   <a:t/>
                 </a:r>
                 <a:r>
-                  <a:rPr sz="1400" lang="en-US" altLang="zh-CN" dirty="0"/>
+                  <a:rPr lang="en-US" altLang="zh-CN" dirty="0"/>
                   <a:t/>
                 </a:r>
                 <a:r>
-                  <a:rPr sz="1400" lang="zh-CN" altLang="en-US" dirty="0"/>
+                  <a:rPr lang="zh-CN" altLang="en-US" dirty="0"/>
                   <a:t/>
                 </a:r>
                 <a:r>
-                  <a:rPr sz="1400" lang="en-US" altLang="zh-CN" dirty="0"/>
+                  <a:rPr lang="en-US" altLang="zh-CN" dirty="0"/>
                   <a:t/>
                 </a:r>
                 <a:r>
-                  <a:rPr sz="1400" lang="zh-CN" altLang="en-US" dirty="0"/>
+                  <a:rPr lang="zh-CN" altLang="en-US" dirty="0"/>
                   <a:t/>
                 </a:r>
-                <a:endParaRPr sz="1400" lang="zh-CN" altLang="en-US" dirty="0"/>
+                <a:endParaRPr lang="zh-CN" altLang="en-US" dirty="0"/>
               </a:p>
             </p:txBody>
           </p:sp>
@@ -8705,6 +9572,1961 @@
     </p:spTree>
     <p:custDataLst>
       <p:tags r:id="rId5"/>
+    </p:custDataLst>
+  </p:cSld>
+  <p:clrMapOvr>
+    <a:masterClrMapping/>
+  </p:clrMapOvr>
+</p:sld>
+</file>
+
+<file path=ppt/slides/slide13.xml><?xml version="1.0" encoding="utf-8"?>
+<p:sld xmlns:a="http://schemas.openxmlformats.org/drawingml/2006/main" xmlns:r="http://schemas.openxmlformats.org/officeDocument/2006/relationships" xmlns:p="http://schemas.openxmlformats.org/presentationml/2006/main">
+  <p:cSld>
+    <p:spTree>
+      <p:nvGrpSpPr>
+        <p:cNvPr id="1" name=""/>
+        <p:cNvGrpSpPr/>
+        <p:nvPr/>
+      </p:nvGrpSpPr>
+      <p:grpSpPr>
+        <a:xfrm>
+          <a:off x="0" y="0"/>
+          <a:ext cx="0" cy="0"/>
+          <a:chOff x="0" y="0"/>
+          <a:chExt cx="0" cy="0"/>
+        </a:xfrm>
+      </p:grpSpPr>
+      <p:grpSp>
+        <p:nvGrpSpPr>
+          <p:cNvPr id="4" name="组合 3"/>
+          <p:cNvGrpSpPr/>
+          <p:nvPr userDrawn="1"/>
+        </p:nvGrpSpPr>
+        <p:grpSpPr>
+          <a:xfrm>
+            <a:off x="10289667" y="-801077"/>
+            <a:ext cx="1902333" cy="2044520"/>
+            <a:chOff x="8135783" y="-1669981"/>
+            <a:chExt cx="4056217" cy="4359393"/>
+          </a:xfrm>
+        </p:grpSpPr>
+        <p:sp>
+          <p:nvSpPr>
+            <p:cNvPr id="7" name="任意多边形: 形状 10"/>
+            <p:cNvSpPr/>
+            <p:nvPr/>
+          </p:nvSpPr>
+          <p:spPr>
+            <a:xfrm rot="18900000">
+              <a:off x="8135783" y="-1669981"/>
+              <a:ext cx="3339963" cy="3339962"/>
+            </a:xfrm>
+            <a:custGeom>
+              <a:avLst/>
+              <a:gdLst>
+                <a:gd name="connsiteX0" fmla="*/ 0 w 3339963"/>
+                <a:gd name="connsiteY0" fmla="*/ 0 h 3339962"/>
+                <a:gd name="connsiteX1" fmla="*/ 3339963 w 3339963"/>
+                <a:gd name="connsiteY1" fmla="*/ 3339962 h 3339962"/>
+                <a:gd name="connsiteX2" fmla="*/ 1099563 w 3339963"/>
+                <a:gd name="connsiteY2" fmla="*/ 3339962 h 3339962"/>
+              </a:gdLst>
+              <a:ahLst/>
+              <a:cxnLst>
+                <a:cxn ang="0">
+                  <a:pos x="connsiteX0" y="connsiteY0"/>
+                </a:cxn>
+                <a:cxn ang="0">
+                  <a:pos x="connsiteX1" y="connsiteY1"/>
+                </a:cxn>
+                <a:cxn ang="0">
+                  <a:pos x="connsiteX2" y="connsiteY2"/>
+                </a:cxn>
+              </a:cxnLst>
+              <a:rect l="l" t="t" r="r" b="b"/>
+              <a:pathLst>
+                <a:path w="3339963" h="3339962">
+                  <a:moveTo>
+                    <a:pt x="0" y="0"/>
+                  </a:moveTo>
+                  <a:lnTo>
+                    <a:pt x="3339963" y="3339962"/>
+                  </a:lnTo>
+                  <a:lnTo>
+                    <a:pt x="1099563" y="3339962"/>
+                  </a:lnTo>
+                  <a:close/>
+                </a:path>
+              </a:pathLst>
+            </a:custGeom>
+            <a:solidFill>
+              <a:schemeClr val="accent1">
+                <a:lumMod val="20000"/>
+                <a:lumOff val="80000"/>
+              </a:schemeClr>
+            </a:solidFill>
+            <a:ln>
+              <a:noFill/>
+            </a:ln>
+          </p:spPr>
+          <p:style>
+            <a:lnRef idx="2">
+              <a:schemeClr val="accent1">
+                <a:shade val="50000"/>
+              </a:schemeClr>
+            </a:lnRef>
+            <a:fillRef idx="1">
+              <a:schemeClr val="accent1"/>
+            </a:fillRef>
+            <a:effectRef idx="0">
+              <a:schemeClr val="accent1"/>
+            </a:effectRef>
+            <a:fontRef idx="minor">
+              <a:schemeClr val="lt1"/>
+            </a:fontRef>
+          </p:style>
+          <p:txBody>
+            <a:bodyPr rtlCol="0" anchor="ctr"/>
+            <a:p>
+              <a:pPr algn="ctr"/>
+              <a:endParaRPr lang="zh-CN" altLang="en-US"/>
+            </a:p>
+          </p:txBody>
+        </p:sp>
+        <p:sp>
+          <p:nvSpPr>
+            <p:cNvPr id="5" name="直角三角形 4"/>
+            <p:cNvSpPr/>
+            <p:nvPr/>
+          </p:nvSpPr>
+          <p:spPr>
+            <a:xfrm rot="10800000">
+              <a:off x="9502588" y="0"/>
+              <a:ext cx="2689412" cy="2689412"/>
+            </a:xfrm>
+            <a:prstGeom prst="rtTriangle">
+              <a:avLst/>
+            </a:prstGeom>
+            <a:solidFill>
+              <a:srgbClr val="25557A"/>
+            </a:solidFill>
+            <a:ln>
+              <a:noFill/>
+            </a:ln>
+          </p:spPr>
+          <p:style>
+            <a:lnRef idx="2">
+              <a:schemeClr val="accent1">
+                <a:shade val="50000"/>
+              </a:schemeClr>
+            </a:lnRef>
+            <a:fillRef idx="1">
+              <a:schemeClr val="accent1"/>
+            </a:fillRef>
+            <a:effectRef idx="0">
+              <a:schemeClr val="accent1"/>
+            </a:effectRef>
+            <a:fontRef idx="minor">
+              <a:schemeClr val="lt1"/>
+            </a:fontRef>
+          </p:style>
+          <p:txBody>
+            <a:bodyPr rtlCol="0" anchor="ctr"/>
+            <a:p>
+              <a:pPr algn="ctr"/>
+              <a:endParaRPr lang="zh-CN" altLang="en-US"/>
+            </a:p>
+          </p:txBody>
+        </p:sp>
+      </p:grpSp>
+      <p:grpSp>
+        <p:nvGrpSpPr>
+          <p:cNvPr id="6" name="组合 5"/>
+          <p:cNvGrpSpPr/>
+          <p:nvPr/>
+        </p:nvGrpSpPr>
+        <p:grpSpPr>
+          <a:xfrm>
+            <a:off x="351155" y="325120"/>
+            <a:ext cx="4559300" cy="1015365"/>
+            <a:chOff x="1572" y="494"/>
+            <a:chExt cx="7180" cy="1599"/>
+          </a:xfrm>
+        </p:grpSpPr>
+        <p:grpSp>
+          <p:nvGrpSpPr>
+            <p:cNvPr id="8" name="组合 7"/>
+            <p:cNvGrpSpPr/>
+            <p:nvPr/>
+          </p:nvGrpSpPr>
+          <p:grpSpPr>
+            <a:xfrm>
+              <a:off x="1572" y="494"/>
+              <a:ext cx="2047" cy="1599"/>
+              <a:chOff x="2761095" y="2248418"/>
+              <a:chExt cx="1948563" cy="1522661"/>
+            </a:xfrm>
+          </p:grpSpPr>
+          <p:sp>
+            <p:nvSpPr>
+              <p:cNvPr id="9" name="矩形: 圆角 24"/>
+              <p:cNvSpPr/>
+              <p:nvPr/>
+            </p:nvSpPr>
+            <p:spPr>
+              <a:xfrm rot="2244181">
+                <a:off x="2903192" y="2466308"/>
+                <a:ext cx="1156758" cy="366949"/>
+              </a:xfrm>
+              <a:prstGeom prst="roundRect">
+                <a:avLst>
+                  <a:gd name="adj" fmla="val 33648"/>
+                </a:avLst>
+              </a:prstGeom>
+              <a:solidFill>
+                <a:srgbClr val="25557A"/>
+              </a:solidFill>
+              <a:ln>
+                <a:noFill/>
+              </a:ln>
+            </p:spPr>
+            <p:style>
+              <a:lnRef idx="2">
+                <a:schemeClr val="accent1">
+                  <a:shade val="50000"/>
+                </a:schemeClr>
+              </a:lnRef>
+              <a:fillRef idx="1">
+                <a:schemeClr val="accent1"/>
+              </a:fillRef>
+              <a:effectRef idx="0">
+                <a:schemeClr val="accent1"/>
+              </a:effectRef>
+              <a:fontRef idx="minor">
+                <a:schemeClr val="lt1"/>
+              </a:fontRef>
+            </p:style>
+            <p:txBody>
+              <a:bodyPr rot="0" spcFirstLastPara="0" vertOverflow="overflow" horzOverflow="overflow" vert="horz" wrap="square" lIns="91440" tIns="45720" rIns="91440" bIns="45720" numCol="1" spcCol="0" rtlCol="0" fromWordArt="0" anchor="ctr" anchorCtr="0" forceAA="0" compatLnSpc="1">
+                <a:noAutofit/>
+              </a:bodyPr>
+              <a:p>
+                <a:pPr algn="ctr"/>
+                <a:endParaRPr lang="zh-CN" altLang="en-US" sz="1100">
+                  <a:latin typeface="微软雅黑" panose="020B0503020204020204" charset="-122"/>
+                  <a:ea typeface="微软雅黑" panose="020B0503020204020204" charset="-122"/>
+                  <a:cs typeface="+mn-ea"/>
+                  <a:sym typeface="+mn-lt"/>
+                </a:endParaRPr>
+              </a:p>
+            </p:txBody>
+          </p:sp>
+          <p:sp>
+            <p:nvSpPr>
+              <p:cNvPr id="26" name="矩形: 圆角 25"/>
+              <p:cNvSpPr/>
+              <p:nvPr/>
+            </p:nvSpPr>
+            <p:spPr>
+              <a:xfrm rot="2244181">
+                <a:off x="2761095" y="2996622"/>
+                <a:ext cx="1156758" cy="366949"/>
+              </a:xfrm>
+              <a:prstGeom prst="roundRect">
+                <a:avLst>
+                  <a:gd name="adj" fmla="val 33648"/>
+                </a:avLst>
+              </a:prstGeom>
+              <a:solidFill>
+                <a:srgbClr val="25557A"/>
+              </a:solidFill>
+              <a:ln>
+                <a:noFill/>
+              </a:ln>
+            </p:spPr>
+            <p:style>
+              <a:lnRef idx="2">
+                <a:schemeClr val="accent1">
+                  <a:shade val="50000"/>
+                </a:schemeClr>
+              </a:lnRef>
+              <a:fillRef idx="1">
+                <a:schemeClr val="accent1"/>
+              </a:fillRef>
+              <a:effectRef idx="0">
+                <a:schemeClr val="accent1"/>
+              </a:effectRef>
+              <a:fontRef idx="minor">
+                <a:schemeClr val="lt1"/>
+              </a:fontRef>
+            </p:style>
+            <p:txBody>
+              <a:bodyPr rot="0" spcFirstLastPara="0" vertOverflow="overflow" horzOverflow="overflow" vert="horz" wrap="square" lIns="91440" tIns="45720" rIns="91440" bIns="45720" numCol="1" spcCol="0" rtlCol="0" fromWordArt="0" anchor="ctr" anchorCtr="0" forceAA="0" compatLnSpc="1">
+                <a:noAutofit/>
+              </a:bodyPr>
+              <a:p>
+                <a:pPr algn="ctr"/>
+                <a:endParaRPr lang="zh-CN" altLang="en-US" sz="1100">
+                  <a:latin typeface="微软雅黑" panose="020B0503020204020204" charset="-122"/>
+                  <a:ea typeface="微软雅黑" panose="020B0503020204020204" charset="-122"/>
+                  <a:cs typeface="+mn-ea"/>
+                  <a:sym typeface="+mn-lt"/>
+                </a:endParaRPr>
+              </a:p>
+            </p:txBody>
+          </p:sp>
+          <p:sp>
+            <p:nvSpPr>
+              <p:cNvPr id="10" name="文本框 9"/>
+              <p:cNvSpPr txBox="1"/>
+              <p:nvPr/>
+            </p:nvSpPr>
+            <p:spPr>
+              <a:xfrm>
+                <a:off x="2910670" y="2248418"/>
+                <a:ext cx="1798988" cy="1522661"/>
+              </a:xfrm>
+              <a:prstGeom prst="rect">
+                <a:avLst/>
+              </a:prstGeom>
+              <a:noFill/>
+            </p:spPr>
+            <p:txBody>
+              <a:bodyPr wrap="square" rtlCol="0">
+                <a:spAutoFit/>
+              </a:bodyPr>
+              <a:p>
+                <a:r>
+                  <a:rPr lang="en-US" altLang="zh-CN" sz="6000" dirty="0">
+                    <a:solidFill>
+                      <a:schemeClr val="bg1"/>
+                    </a:solidFill>
+                    <a:effectLst>
+                      <a:outerShdw blurRad="38100" dist="38100" dir="2700000" algn="tl">
+                        <a:srgbClr val="000000">
+                          <a:alpha val="43137"/>
+                        </a:srgbClr>
+                      </a:outerShdw>
+                    </a:effectLst>
+                    <a:latin typeface="微软雅黑" panose="020B0503020204020204" charset="-122"/>
+                    <a:ea typeface="微软雅黑" panose="020B0503020204020204" charset="-122"/>
+                  </a:rPr>
+                  <a:t>P</a:t>
+                </a:r>
+                <a:endParaRPr lang="en-US" altLang="zh-CN" sz="6000" dirty="0">
+                  <a:solidFill>
+                    <a:schemeClr val="bg1"/>
+                  </a:solidFill>
+                  <a:effectLst>
+                    <a:outerShdw blurRad="38100" dist="38100" dir="2700000" algn="tl">
+                      <a:srgbClr val="000000">
+                        <a:alpha val="43137"/>
+                      </a:srgbClr>
+                    </a:outerShdw>
+                  </a:effectLst>
+                  <a:latin typeface="微软雅黑" panose="020B0503020204020204" charset="-122"/>
+                  <a:ea typeface="微软雅黑" panose="020B0503020204020204" charset="-122"/>
+                </a:endParaRPr>
+              </a:p>
+            </p:txBody>
+          </p:sp>
+        </p:grpSp>
+        <p:sp>
+          <p:nvSpPr>
+            <p:cNvPr id="11" name="矩形 10"/>
+            <p:cNvSpPr/>
+            <p:nvPr/>
+          </p:nvSpPr>
+          <p:spPr>
+            <a:xfrm>
+              <a:off x="3078" y="751"/>
+              <a:ext cx="3788" cy="919"/>
+            </a:xfrm>
+            <a:prstGeom prst="rect">
+              <a:avLst/>
+            </a:prstGeom>
+          </p:spPr>
+          <p:txBody>
+            <a:bodyPr wrap="none">
+              <a:spAutoFit/>
+            </a:bodyPr>
+            <a:p>
+              <a:r>
+                <a:rPr lang="zh-CN" altLang="en-US" sz="3200" b="1" spc="300" dirty="0">
+                  <a:latin typeface="微软雅黑" panose="020B0503020204020204" charset="-122"/>
+                  <a:ea typeface="微软雅黑" panose="020B0503020204020204" charset="-122"/>
+                </a:rPr>
+                <a:t>四条结论，每条都有数据支撑</a:t>
+              </a:r>
+              <a:endParaRPr lang="zh-CN" altLang="en-US" sz="3200" b="1" spc="300" dirty="0">
+                <a:latin typeface="微软雅黑" panose="020B0503020204020204" charset="-122"/>
+                <a:ea typeface="微软雅黑" panose="020B0503020204020204" charset="-122"/>
+              </a:endParaRPr>
+            </a:p>
+          </p:txBody>
+        </p:sp>
+        <p:sp>
+          <p:nvSpPr>
+            <p:cNvPr id="29" name="文本框 28"/>
+            <p:cNvSpPr txBox="1"/>
+            <p:nvPr/>
+          </p:nvSpPr>
+          <p:spPr>
+            <a:xfrm>
+              <a:off x="3107" y="1365"/>
+              <a:ext cx="5645" cy="580"/>
+            </a:xfrm>
+            <a:prstGeom prst="rect">
+              <a:avLst/>
+            </a:prstGeom>
+            <a:noFill/>
+          </p:spPr>
+          <p:txBody>
+            <a:bodyPr wrap="square">
+              <a:spAutoFit/>
+            </a:bodyPr>
+            <a:p>
+              <a:endParaRPr lang="en-US" altLang="zh-CN" sz="900" spc="300" dirty="0">
+                <a:solidFill>
+                  <a:schemeClr val="bg1">
+                    <a:lumMod val="50000"/>
+                  </a:schemeClr>
+                </a:solidFill>
+                <a:latin typeface="微软雅黑" panose="020B0503020204020204" charset="-122"/>
+                <a:ea typeface="微软雅黑" panose="020B0503020204020204" charset="-122"/>
+              </a:endParaRPr>
+            </a:p>
+            <a:p>
+              <a:r>
+                <a:rPr lang="en-US" altLang="zh-CN" sz="900" spc="300" dirty="0">
+                  <a:solidFill>
+                    <a:schemeClr val="bg1">
+                      <a:lumMod val="50000"/>
+                    </a:schemeClr>
+                  </a:solidFill>
+                  <a:latin typeface="微软雅黑" panose="020B0503020204020204" charset="-122"/>
+                  <a:ea typeface="微软雅黑" panose="020B0503020204020204" charset="-122"/>
+                </a:rPr>
+                <a:t>CONCLUSIONS</a:t>
+              </a:r>
+              <a:endParaRPr lang="en-US" altLang="zh-CN" sz="900" spc="300" dirty="0">
+                <a:solidFill>
+                  <a:schemeClr val="bg1">
+                    <a:lumMod val="50000"/>
+                  </a:schemeClr>
+                </a:solidFill>
+                <a:latin typeface="微软雅黑" panose="020B0503020204020204" charset="-122"/>
+                <a:ea typeface="微软雅黑" panose="020B0503020204020204" charset="-122"/>
+              </a:endParaRPr>
+            </a:p>
+          </p:txBody>
+        </p:sp>
+      </p:grpSp>
+      <p:sp>
+        <p:nvSpPr>
+          <p:cNvPr id="2" name="矩形 1"/>
+          <p:cNvSpPr/>
+          <p:nvPr/>
+        </p:nvSpPr>
+        <p:spPr>
+          <a:xfrm>
+            <a:off x="1092200" y="1900980"/>
+            <a:ext cx="2299929" cy="3559277"/>
+          </a:xfrm>
+          <a:prstGeom prst="rect">
+            <a:avLst/>
+          </a:prstGeom>
+          <a:solidFill>
+            <a:srgbClr val="25557A"/>
+          </a:solidFill>
+          <a:ln>
+            <a:noFill/>
+          </a:ln>
+        </p:spPr>
+        <p:style>
+          <a:lnRef idx="2">
+            <a:schemeClr val="accent1">
+              <a:shade val="50000"/>
+            </a:schemeClr>
+          </a:lnRef>
+          <a:fillRef idx="1">
+            <a:schemeClr val="accent1"/>
+          </a:fillRef>
+          <a:effectRef idx="0">
+            <a:schemeClr val="accent1"/>
+          </a:effectRef>
+          <a:fontRef idx="minor">
+            <a:schemeClr val="lt1"/>
+          </a:fontRef>
+        </p:style>
+        <p:txBody>
+          <a:bodyPr rtlCol="0" anchor="ctr"/>
+          <a:p>
+            <a:pPr algn="ctr"/>
+            <a:endParaRPr lang="zh-CN" altLang="en-US">
+              <a:latin typeface="微软雅黑" panose="020B0503020204020204" charset="-122"/>
+              <a:ea typeface="微软雅黑" panose="020B0503020204020204" charset="-122"/>
+            </a:endParaRPr>
+          </a:p>
+        </p:txBody>
+      </p:sp>
+      <p:sp>
+        <p:nvSpPr>
+          <p:cNvPr id="3" name="文本框 2"/>
+          <p:cNvSpPr txBox="1"/>
+          <p:nvPr/>
+        </p:nvSpPr>
+        <p:spPr>
+          <a:xfrm>
+            <a:off x="1693522" y="2200283"/>
+            <a:ext cx="1097280" cy="460375"/>
+          </a:xfrm>
+          <a:prstGeom prst="rect">
+            <a:avLst/>
+          </a:prstGeom>
+          <a:noFill/>
+        </p:spPr>
+        <p:txBody>
+          <a:bodyPr wrap="none" rtlCol="0">
+            <a:spAutoFit/>
+          </a:bodyPr>
+          <a:p>
+            <a:pPr algn="ctr"/>
+            <a:r>
+              <a:rPr lang="zh-CN" altLang="en-US" sz="2400" b="1">
+                <a:solidFill>
+                  <a:schemeClr val="bg1"/>
+                </a:solidFill>
+                <a:latin typeface="微软雅黑" panose="020B0503020204020204" charset="-122"/>
+                <a:ea typeface="微软雅黑" panose="020B0503020204020204" charset="-122"/>
+              </a:rPr>
+              <a:t>质量结论</a:t>
+            </a:r>
+            <a:endParaRPr lang="zh-CN" altLang="en-US" sz="2400" b="1">
+              <a:solidFill>
+                <a:schemeClr val="bg1"/>
+              </a:solidFill>
+              <a:latin typeface="微软雅黑" panose="020B0503020204020204" charset="-122"/>
+              <a:ea typeface="微软雅黑" panose="020B0503020204020204" charset="-122"/>
+            </a:endParaRPr>
+          </a:p>
+        </p:txBody>
+      </p:sp>
+      <p:sp>
+        <p:nvSpPr>
+          <p:cNvPr id="17" name="文本框 16"/>
+          <p:cNvSpPr txBox="1"/>
+          <p:nvPr/>
+        </p:nvSpPr>
+        <p:spPr>
+          <a:xfrm>
+            <a:off x="1263853" y="2961251"/>
+            <a:ext cx="1956619" cy="2267865"/>
+          </a:xfrm>
+          <a:prstGeom prst="rect">
+            <a:avLst/>
+          </a:prstGeom>
+          <a:noFill/>
+        </p:spPr>
+        <p:txBody>
+          <a:bodyPr wrap="square" rtlCol="0">
+            <a:spAutoFit/>
+          </a:bodyPr>
+          <a:p>
+            <a:pPr algn="just">
+              <a:lnSpc>
+                <a:spcPct val="150000"/>
+              </a:lnSpc>
+            </a:pPr>
+            <a:r>
+              <a:rPr lang="zh-CN" altLang="en-US" sz="1600">
+                <a:solidFill>
+                  <a:schemeClr val="bg1"/>
+                </a:solidFill>
+                <a:latin typeface="微软雅黑" panose="020B0503020204020204" charset="-122"/>
+                <a:ea typeface="微软雅黑" panose="020B0503020204020204" charset="-122"/>
+              </a:rPr>
+              <a:t>31/33 通过，唯一失败同源于一个缺陷；被测模块质量整体可信。</a:t>
+            </a:r>
+            <a:endParaRPr lang="zh-CN" altLang="en-US" sz="1600">
+              <a:solidFill>
+                <a:schemeClr val="bg1"/>
+              </a:solidFill>
+              <a:latin typeface="微软雅黑" panose="020B0503020204020204" charset="-122"/>
+              <a:ea typeface="微软雅黑" panose="020B0503020204020204" charset="-122"/>
+            </a:endParaRPr>
+          </a:p>
+        </p:txBody>
+      </p:sp>
+      <p:cxnSp>
+        <p:nvCxnSpPr>
+          <p:cNvPr id="14" name="直接连接符 13"/>
+          <p:cNvCxnSpPr/>
+          <p:nvPr/>
+        </p:nvCxnSpPr>
+        <p:spPr>
+          <a:xfrm>
+            <a:off x="1466630" y="2811599"/>
+            <a:ext cx="1551069" cy="0"/>
+          </a:xfrm>
+          <a:prstGeom prst="line">
+            <a:avLst/>
+          </a:prstGeom>
+          <a:ln w="19050">
+            <a:gradFill flip="none" rotWithShape="1">
+              <a:gsLst>
+                <a:gs pos="0">
+                  <a:srgbClr val="32416B">
+                    <a:alpha val="0"/>
+                  </a:srgbClr>
+                </a:gs>
+                <a:gs pos="50000">
+                  <a:schemeClr val="bg1"/>
+                </a:gs>
+                <a:gs pos="100000">
+                  <a:srgbClr val="32416B">
+                    <a:alpha val="0"/>
+                  </a:srgbClr>
+                </a:gs>
+              </a:gsLst>
+              <a:lin ang="0" scaled="1"/>
+              <a:tileRect/>
+            </a:gradFill>
+          </a:ln>
+        </p:spPr>
+        <p:style>
+          <a:lnRef idx="1">
+            <a:schemeClr val="accent1"/>
+          </a:lnRef>
+          <a:fillRef idx="0">
+            <a:schemeClr val="accent1"/>
+          </a:fillRef>
+          <a:effectRef idx="0">
+            <a:schemeClr val="accent1"/>
+          </a:effectRef>
+          <a:fontRef idx="minor">
+            <a:schemeClr val="tx1"/>
+          </a:fontRef>
+        </p:style>
+      </p:cxnSp>
+      <p:sp>
+        <p:nvSpPr>
+          <p:cNvPr id="16" name="矩形 15"/>
+          <p:cNvSpPr/>
+          <p:nvPr/>
+        </p:nvSpPr>
+        <p:spPr>
+          <a:xfrm>
+            <a:off x="3661424" y="1900980"/>
+            <a:ext cx="2299929" cy="3559277"/>
+          </a:xfrm>
+          <a:prstGeom prst="rect">
+            <a:avLst/>
+          </a:prstGeom>
+          <a:solidFill>
+            <a:schemeClr val="accent1">
+              <a:lumMod val="20000"/>
+              <a:lumOff val="80000"/>
+            </a:schemeClr>
+          </a:solidFill>
+          <a:ln>
+            <a:noFill/>
+          </a:ln>
+        </p:spPr>
+        <p:style>
+          <a:lnRef idx="2">
+            <a:schemeClr val="accent1">
+              <a:shade val="50000"/>
+            </a:schemeClr>
+          </a:lnRef>
+          <a:fillRef idx="1">
+            <a:schemeClr val="accent1"/>
+          </a:fillRef>
+          <a:effectRef idx="0">
+            <a:schemeClr val="accent1"/>
+          </a:effectRef>
+          <a:fontRef idx="minor">
+            <a:schemeClr val="lt1"/>
+          </a:fontRef>
+        </p:style>
+        <p:txBody>
+          <a:bodyPr rtlCol="0" anchor="ctr"/>
+          <a:p>
+            <a:pPr algn="ctr"/>
+            <a:endParaRPr lang="zh-CN" altLang="en-US">
+              <a:latin typeface="微软雅黑" panose="020B0503020204020204" charset="-122"/>
+              <a:ea typeface="微软雅黑" panose="020B0503020204020204" charset="-122"/>
+            </a:endParaRPr>
+          </a:p>
+        </p:txBody>
+      </p:sp>
+      <p:sp>
+        <p:nvSpPr>
+          <p:cNvPr id="20" name="文本框 19"/>
+          <p:cNvSpPr txBox="1"/>
+          <p:nvPr/>
+        </p:nvSpPr>
+        <p:spPr>
+          <a:xfrm>
+            <a:off x="4262745" y="2200283"/>
+            <a:ext cx="1097280" cy="460375"/>
+          </a:xfrm>
+          <a:prstGeom prst="rect">
+            <a:avLst/>
+          </a:prstGeom>
+          <a:noFill/>
+        </p:spPr>
+        <p:txBody>
+          <a:bodyPr wrap="none" rtlCol="0">
+            <a:spAutoFit/>
+          </a:bodyPr>
+          <a:p>
+            <a:pPr algn="ctr"/>
+            <a:r>
+              <a:rPr lang="zh-CN" altLang="en-US" sz="2400" b="1">
+                <a:solidFill>
+                  <a:schemeClr val="tx1">
+                    <a:lumMod val="85000"/>
+                    <a:lumOff val="15000"/>
+                  </a:schemeClr>
+                </a:solidFill>
+                <a:latin typeface="微软雅黑" panose="020B0503020204020204" charset="-122"/>
+                <a:ea typeface="微软雅黑" panose="020B0503020204020204" charset="-122"/>
+              </a:rPr>
+              <a:t>缺陷处置</a:t>
+            </a:r>
+            <a:endParaRPr lang="zh-CN" altLang="en-US" sz="2400" b="1">
+              <a:solidFill>
+                <a:schemeClr val="tx1">
+                  <a:lumMod val="85000"/>
+                  <a:lumOff val="15000"/>
+                </a:schemeClr>
+              </a:solidFill>
+              <a:latin typeface="微软雅黑" panose="020B0503020204020204" charset="-122"/>
+              <a:ea typeface="微软雅黑" panose="020B0503020204020204" charset="-122"/>
+            </a:endParaRPr>
+          </a:p>
+        </p:txBody>
+      </p:sp>
+      <p:sp>
+        <p:nvSpPr>
+          <p:cNvPr id="42" name="文本框 41"/>
+          <p:cNvSpPr txBox="1"/>
+          <p:nvPr/>
+        </p:nvSpPr>
+        <p:spPr>
+          <a:xfrm>
+            <a:off x="3833077" y="2961251"/>
+            <a:ext cx="1956619" cy="2267865"/>
+          </a:xfrm>
+          <a:prstGeom prst="rect">
+            <a:avLst/>
+          </a:prstGeom>
+          <a:noFill/>
+        </p:spPr>
+        <p:txBody>
+          <a:bodyPr wrap="square" rtlCol="0">
+            <a:spAutoFit/>
+          </a:bodyPr>
+          <a:p>
+            <a:pPr algn="just">
+              <a:lnSpc>
+                <a:spcPct val="150000"/>
+              </a:lnSpc>
+            </a:pPr>
+            <a:r>
+              <a:rPr lang="zh-CN" altLang="en-US" sz="1600">
+                <a:solidFill>
+                  <a:schemeClr val="tx1">
+                    <a:lumMod val="85000"/>
+                    <a:lumOff val="15000"/>
+                  </a:schemeClr>
+                </a:solidFill>
+                <a:latin typeface="微软雅黑" panose="020B0503020204020204" charset="-122"/>
+                <a:ea typeface="微软雅黑" panose="020B0503020204020204" charset="-122"/>
+              </a:rPr>
+              <a:t>DEF-M1-001 已登记并给出修复建议；按约定未改动被测基线。</a:t>
+            </a:r>
+            <a:endParaRPr lang="zh-CN" altLang="en-US" sz="1600">
+              <a:solidFill>
+                <a:schemeClr val="tx1">
+                  <a:lumMod val="85000"/>
+                  <a:lumOff val="15000"/>
+                </a:schemeClr>
+              </a:solidFill>
+              <a:latin typeface="微软雅黑" panose="020B0503020204020204" charset="-122"/>
+              <a:ea typeface="微软雅黑" panose="020B0503020204020204" charset="-122"/>
+            </a:endParaRPr>
+          </a:p>
+        </p:txBody>
+      </p:sp>
+      <p:cxnSp>
+        <p:nvCxnSpPr>
+          <p:cNvPr id="21" name="直接连接符 20"/>
+          <p:cNvCxnSpPr/>
+          <p:nvPr/>
+        </p:nvCxnSpPr>
+        <p:spPr>
+          <a:xfrm>
+            <a:off x="4035854" y="2811599"/>
+            <a:ext cx="1551069" cy="0"/>
+          </a:xfrm>
+          <a:prstGeom prst="line">
+            <a:avLst/>
+          </a:prstGeom>
+          <a:ln w="19050">
+            <a:gradFill flip="none" rotWithShape="1">
+              <a:gsLst>
+                <a:gs pos="0">
+                  <a:srgbClr val="32416B">
+                    <a:alpha val="0"/>
+                  </a:srgbClr>
+                </a:gs>
+                <a:gs pos="50000">
+                  <a:srgbClr val="32416B"/>
+                </a:gs>
+                <a:gs pos="100000">
+                  <a:srgbClr val="32416B">
+                    <a:alpha val="0"/>
+                  </a:srgbClr>
+                </a:gs>
+              </a:gsLst>
+              <a:lin ang="0" scaled="1"/>
+              <a:tileRect/>
+            </a:gradFill>
+          </a:ln>
+        </p:spPr>
+        <p:style>
+          <a:lnRef idx="1">
+            <a:schemeClr val="accent1"/>
+          </a:lnRef>
+          <a:fillRef idx="0">
+            <a:schemeClr val="accent1"/>
+          </a:fillRef>
+          <a:effectRef idx="0">
+            <a:schemeClr val="accent1"/>
+          </a:effectRef>
+          <a:fontRef idx="minor">
+            <a:schemeClr val="tx1"/>
+          </a:fontRef>
+        </p:style>
+      </p:cxnSp>
+      <p:sp>
+        <p:nvSpPr>
+          <p:cNvPr id="46" name="矩形 45"/>
+          <p:cNvSpPr/>
+          <p:nvPr/>
+        </p:nvSpPr>
+        <p:spPr>
+          <a:xfrm>
+            <a:off x="6230648" y="1900980"/>
+            <a:ext cx="2299929" cy="3559277"/>
+          </a:xfrm>
+          <a:prstGeom prst="rect">
+            <a:avLst/>
+          </a:prstGeom>
+          <a:solidFill>
+            <a:srgbClr val="25557A"/>
+          </a:solidFill>
+          <a:ln>
+            <a:noFill/>
+          </a:ln>
+        </p:spPr>
+        <p:style>
+          <a:lnRef idx="2">
+            <a:schemeClr val="accent1">
+              <a:shade val="50000"/>
+            </a:schemeClr>
+          </a:lnRef>
+          <a:fillRef idx="1">
+            <a:schemeClr val="accent1"/>
+          </a:fillRef>
+          <a:effectRef idx="0">
+            <a:schemeClr val="accent1"/>
+          </a:effectRef>
+          <a:fontRef idx="minor">
+            <a:schemeClr val="lt1"/>
+          </a:fontRef>
+        </p:style>
+        <p:txBody>
+          <a:bodyPr rtlCol="0" anchor="ctr"/>
+          <a:p>
+            <a:pPr algn="ctr"/>
+            <a:endParaRPr lang="zh-CN" altLang="en-US">
+              <a:latin typeface="微软雅黑" panose="020B0503020204020204" charset="-122"/>
+              <a:ea typeface="微软雅黑" panose="020B0503020204020204" charset="-122"/>
+            </a:endParaRPr>
+          </a:p>
+        </p:txBody>
+      </p:sp>
+      <p:sp>
+        <p:nvSpPr>
+          <p:cNvPr id="22" name="文本框 21"/>
+          <p:cNvSpPr txBox="1"/>
+          <p:nvPr/>
+        </p:nvSpPr>
+        <p:spPr>
+          <a:xfrm>
+            <a:off x="6831970" y="2200283"/>
+            <a:ext cx="1097280" cy="460375"/>
+          </a:xfrm>
+          <a:prstGeom prst="rect">
+            <a:avLst/>
+          </a:prstGeom>
+          <a:noFill/>
+        </p:spPr>
+        <p:txBody>
+          <a:bodyPr wrap="none" rtlCol="0">
+            <a:spAutoFit/>
+          </a:bodyPr>
+          <a:p>
+            <a:pPr algn="ctr"/>
+            <a:r>
+              <a:rPr lang="zh-CN" altLang="en-US" sz="2400" b="1">
+                <a:solidFill>
+                  <a:schemeClr val="bg1"/>
+                </a:solidFill>
+                <a:latin typeface="微软雅黑" panose="020B0503020204020204" charset="-122"/>
+                <a:ea typeface="微软雅黑" panose="020B0503020204020204" charset="-122"/>
+              </a:rPr>
+              <a:t>方法结论</a:t>
+            </a:r>
+            <a:endParaRPr lang="zh-CN" altLang="en-US" sz="2400" b="1">
+              <a:solidFill>
+                <a:schemeClr val="bg1"/>
+              </a:solidFill>
+              <a:latin typeface="微软雅黑" panose="020B0503020204020204" charset="-122"/>
+              <a:ea typeface="微软雅黑" panose="020B0503020204020204" charset="-122"/>
+            </a:endParaRPr>
+          </a:p>
+        </p:txBody>
+      </p:sp>
+      <p:sp>
+        <p:nvSpPr>
+          <p:cNvPr id="48" name="文本框 47"/>
+          <p:cNvSpPr txBox="1"/>
+          <p:nvPr/>
+        </p:nvSpPr>
+        <p:spPr>
+          <a:xfrm>
+            <a:off x="6402301" y="2961251"/>
+            <a:ext cx="1956619" cy="2267865"/>
+          </a:xfrm>
+          <a:prstGeom prst="rect">
+            <a:avLst/>
+          </a:prstGeom>
+          <a:noFill/>
+        </p:spPr>
+        <p:txBody>
+          <a:bodyPr wrap="square" rtlCol="0">
+            <a:spAutoFit/>
+          </a:bodyPr>
+          <a:p>
+            <a:pPr algn="just">
+              <a:lnSpc>
+                <a:spcPct val="150000"/>
+              </a:lnSpc>
+            </a:pPr>
+            <a:r>
+              <a:rPr lang="zh-CN" altLang="en-US" sz="1600">
+                <a:solidFill>
+                  <a:schemeClr val="bg1"/>
+                </a:solidFill>
+                <a:latin typeface="微软雅黑" panose="020B0503020204020204" charset="-122"/>
+                <a:ea typeface="微软雅黑" panose="020B0503020204020204" charset="-122"/>
+              </a:rPr>
+              <a:t>等价类 + 边界值满足 ≥2 种要求，五类标注 32 条全部对得上账。</a:t>
+            </a:r>
+            <a:endParaRPr lang="zh-CN" altLang="en-US" sz="1600">
+              <a:solidFill>
+                <a:schemeClr val="bg1"/>
+              </a:solidFill>
+              <a:latin typeface="微软雅黑" panose="020B0503020204020204" charset="-122"/>
+              <a:ea typeface="微软雅黑" panose="020B0503020204020204" charset="-122"/>
+            </a:endParaRPr>
+          </a:p>
+        </p:txBody>
+      </p:sp>
+      <p:cxnSp>
+        <p:nvCxnSpPr>
+          <p:cNvPr id="49" name="直接连接符 48"/>
+          <p:cNvCxnSpPr/>
+          <p:nvPr/>
+        </p:nvCxnSpPr>
+        <p:spPr>
+          <a:xfrm>
+            <a:off x="6605078" y="2811599"/>
+            <a:ext cx="1551069" cy="0"/>
+          </a:xfrm>
+          <a:prstGeom prst="line">
+            <a:avLst/>
+          </a:prstGeom>
+          <a:ln w="19050">
+            <a:gradFill flip="none" rotWithShape="1">
+              <a:gsLst>
+                <a:gs pos="0">
+                  <a:srgbClr val="32416B">
+                    <a:alpha val="0"/>
+                  </a:srgbClr>
+                </a:gs>
+                <a:gs pos="50000">
+                  <a:schemeClr val="bg1"/>
+                </a:gs>
+                <a:gs pos="100000">
+                  <a:srgbClr val="32416B">
+                    <a:alpha val="0"/>
+                  </a:srgbClr>
+                </a:gs>
+              </a:gsLst>
+              <a:lin ang="0" scaled="1"/>
+              <a:tileRect/>
+            </a:gradFill>
+          </a:ln>
+        </p:spPr>
+        <p:style>
+          <a:lnRef idx="1">
+            <a:schemeClr val="accent1"/>
+          </a:lnRef>
+          <a:fillRef idx="0">
+            <a:schemeClr val="accent1"/>
+          </a:fillRef>
+          <a:effectRef idx="0">
+            <a:schemeClr val="accent1"/>
+          </a:effectRef>
+          <a:fontRef idx="minor">
+            <a:schemeClr val="tx1"/>
+          </a:fontRef>
+        </p:style>
+      </p:cxnSp>
+      <p:sp>
+        <p:nvSpPr>
+          <p:cNvPr id="51" name="矩形 50"/>
+          <p:cNvSpPr/>
+          <p:nvPr/>
+        </p:nvSpPr>
+        <p:spPr>
+          <a:xfrm>
+            <a:off x="8799871" y="1900980"/>
+            <a:ext cx="2299929" cy="3559277"/>
+          </a:xfrm>
+          <a:prstGeom prst="rect">
+            <a:avLst/>
+          </a:prstGeom>
+          <a:solidFill>
+            <a:schemeClr val="accent1">
+              <a:lumMod val="20000"/>
+              <a:lumOff val="80000"/>
+            </a:schemeClr>
+          </a:solidFill>
+          <a:ln>
+            <a:noFill/>
+          </a:ln>
+        </p:spPr>
+        <p:style>
+          <a:lnRef idx="2">
+            <a:schemeClr val="accent1">
+              <a:shade val="50000"/>
+            </a:schemeClr>
+          </a:lnRef>
+          <a:fillRef idx="1">
+            <a:schemeClr val="accent1"/>
+          </a:fillRef>
+          <a:effectRef idx="0">
+            <a:schemeClr val="accent1"/>
+          </a:effectRef>
+          <a:fontRef idx="minor">
+            <a:schemeClr val="lt1"/>
+          </a:fontRef>
+        </p:style>
+        <p:txBody>
+          <a:bodyPr rtlCol="0" anchor="ctr"/>
+          <a:p>
+            <a:pPr algn="ctr"/>
+            <a:endParaRPr lang="zh-CN" altLang="en-US">
+              <a:latin typeface="微软雅黑" panose="020B0503020204020204" charset="-122"/>
+              <a:ea typeface="微软雅黑" panose="020B0503020204020204" charset="-122"/>
+            </a:endParaRPr>
+          </a:p>
+        </p:txBody>
+      </p:sp>
+      <p:sp>
+        <p:nvSpPr>
+          <p:cNvPr id="52" name="文本框 51"/>
+          <p:cNvSpPr txBox="1"/>
+          <p:nvPr/>
+        </p:nvSpPr>
+        <p:spPr>
+          <a:xfrm>
+            <a:off x="9401193" y="2200283"/>
+            <a:ext cx="1097280" cy="460375"/>
+          </a:xfrm>
+          <a:prstGeom prst="rect">
+            <a:avLst/>
+          </a:prstGeom>
+          <a:noFill/>
+        </p:spPr>
+        <p:txBody>
+          <a:bodyPr wrap="none" rtlCol="0">
+            <a:spAutoFit/>
+          </a:bodyPr>
+          <a:p>
+            <a:pPr algn="ctr"/>
+            <a:r>
+              <a:rPr lang="zh-CN" altLang="en-US" sz="2400" b="1">
+                <a:solidFill>
+                  <a:schemeClr val="tx1">
+                    <a:lumMod val="85000"/>
+                    <a:lumOff val="15000"/>
+                  </a:schemeClr>
+                </a:solidFill>
+                <a:latin typeface="微软雅黑" panose="020B0503020204020204" charset="-122"/>
+                <a:ea typeface="微软雅黑" panose="020B0503020204020204" charset="-122"/>
+              </a:rPr>
+              <a:t>工程结论</a:t>
+            </a:r>
+            <a:endParaRPr lang="zh-CN" altLang="en-US" sz="2400" b="1">
+              <a:solidFill>
+                <a:schemeClr val="tx1">
+                  <a:lumMod val="85000"/>
+                  <a:lumOff val="15000"/>
+                </a:schemeClr>
+              </a:solidFill>
+              <a:latin typeface="微软雅黑" panose="020B0503020204020204" charset="-122"/>
+              <a:ea typeface="微软雅黑" panose="020B0503020204020204" charset="-122"/>
+            </a:endParaRPr>
+          </a:p>
+        </p:txBody>
+      </p:sp>
+      <p:sp>
+        <p:nvSpPr>
+          <p:cNvPr id="53" name="文本框 52"/>
+          <p:cNvSpPr txBox="1"/>
+          <p:nvPr/>
+        </p:nvSpPr>
+        <p:spPr>
+          <a:xfrm>
+            <a:off x="8971524" y="2961251"/>
+            <a:ext cx="1956619" cy="2267865"/>
+          </a:xfrm>
+          <a:prstGeom prst="rect">
+            <a:avLst/>
+          </a:prstGeom>
+          <a:noFill/>
+        </p:spPr>
+        <p:txBody>
+          <a:bodyPr wrap="square" rtlCol="0">
+            <a:spAutoFit/>
+          </a:bodyPr>
+          <a:p>
+            <a:pPr algn="just">
+              <a:lnSpc>
+                <a:spcPct val="150000"/>
+              </a:lnSpc>
+            </a:pPr>
+            <a:r>
+              <a:rPr lang="zh-CN" altLang="en-US" sz="1600">
+                <a:solidFill>
+                  <a:schemeClr val="tx1">
+                    <a:lumMod val="85000"/>
+                    <a:lumOff val="15000"/>
+                  </a:schemeClr>
+                </a:solidFill>
+                <a:latin typeface="微软雅黑" panose="020B0503020204020204" charset="-122"/>
+                <a:ea typeface="微软雅黑" panose="020B0503020204020204" charset="-122"/>
+              </a:rPr>
+              <a:t>一条命令复现、逐位一致，可长期作为该模块的回归基线。</a:t>
+            </a:r>
+            <a:endParaRPr lang="zh-CN" altLang="en-US" sz="1600">
+              <a:solidFill>
+                <a:schemeClr val="tx1">
+                  <a:lumMod val="85000"/>
+                  <a:lumOff val="15000"/>
+                </a:schemeClr>
+              </a:solidFill>
+              <a:latin typeface="微软雅黑" panose="020B0503020204020204" charset="-122"/>
+              <a:ea typeface="微软雅黑" panose="020B0503020204020204" charset="-122"/>
+            </a:endParaRPr>
+          </a:p>
+        </p:txBody>
+      </p:sp>
+      <p:cxnSp>
+        <p:nvCxnSpPr>
+          <p:cNvPr id="54" name="直接连接符 53"/>
+          <p:cNvCxnSpPr/>
+          <p:nvPr/>
+        </p:nvCxnSpPr>
+        <p:spPr>
+          <a:xfrm>
+            <a:off x="9174301" y="2811599"/>
+            <a:ext cx="1551069" cy="0"/>
+          </a:xfrm>
+          <a:prstGeom prst="line">
+            <a:avLst/>
+          </a:prstGeom>
+          <a:ln w="19050">
+            <a:gradFill flip="none" rotWithShape="1">
+              <a:gsLst>
+                <a:gs pos="0">
+                  <a:srgbClr val="32416B">
+                    <a:alpha val="0"/>
+                  </a:srgbClr>
+                </a:gs>
+                <a:gs pos="50000">
+                  <a:srgbClr val="32416B"/>
+                </a:gs>
+                <a:gs pos="100000">
+                  <a:srgbClr val="32416B">
+                    <a:alpha val="0"/>
+                  </a:srgbClr>
+                </a:gs>
+              </a:gsLst>
+              <a:lin ang="0" scaled="1"/>
+              <a:tileRect/>
+            </a:gradFill>
+          </a:ln>
+        </p:spPr>
+        <p:style>
+          <a:lnRef idx="1">
+            <a:schemeClr val="accent1"/>
+          </a:lnRef>
+          <a:fillRef idx="0">
+            <a:schemeClr val="accent1"/>
+          </a:fillRef>
+          <a:effectRef idx="0">
+            <a:schemeClr val="accent1"/>
+          </a:effectRef>
+          <a:fontRef idx="minor">
+            <a:schemeClr val="tx1"/>
+          </a:fontRef>
+        </p:style>
+      </p:cxnSp>
+      <p:pic>
+        <p:nvPicPr>
+          <p:cNvPr id="27" name="图片 26" descr="图书馆"/>
+          <p:cNvPicPr>
+            <a:picLocks noChangeAspect="1"/>
+          </p:cNvPicPr>
+          <p:nvPr/>
+        </p:nvPicPr>
+        <p:blipFill>
+          <a:blip r:embed="rId1">
+            <a:alphaModFix amt="25000"/>
+          </a:blip>
+          <a:stretch>
+            <a:fillRect/>
+          </a:stretch>
+        </p:blipFill>
+        <p:spPr>
+          <a:xfrm>
+            <a:off x="8452485" y="5777865"/>
+            <a:ext cx="3739585" cy="1080000"/>
+          </a:xfrm>
+          <a:prstGeom prst="rect">
+            <a:avLst/>
+          </a:prstGeom>
+        </p:spPr>
+      </p:pic>
+    </p:spTree>
+    <p:custDataLst>
+      <p:tags r:id="rId2"/>
+    </p:custDataLst>
+  </p:cSld>
+  <p:clrMapOvr>
+    <a:masterClrMapping/>
+  </p:clrMapOvr>
+</p:sld>
+</file>
+
+<file path=ppt/slides/slide14.xml><?xml version="1.0" encoding="utf-8"?>
+<p:sld xmlns:a="http://schemas.openxmlformats.org/drawingml/2006/main" xmlns:r="http://schemas.openxmlformats.org/officeDocument/2006/relationships" xmlns:p="http://schemas.openxmlformats.org/presentationml/2006/main">
+  <p:cSld>
+    <p:spTree>
+      <p:nvGrpSpPr>
+        <p:cNvPr id="1" name=""/>
+        <p:cNvGrpSpPr/>
+        <p:nvPr/>
+      </p:nvGrpSpPr>
+      <p:grpSpPr>
+        <a:xfrm>
+          <a:off x="0" y="0"/>
+          <a:ext cx="0" cy="0"/>
+          <a:chOff x="0" y="0"/>
+          <a:chExt cx="0" cy="0"/>
+        </a:xfrm>
+      </p:grpSpPr>
+      <p:pic>
+        <p:nvPicPr>
+          <p:cNvPr id="9" name="图片 8" descr="1037"/>
+          <p:cNvPicPr>
+            <a:picLocks noChangeAspect="1"/>
+          </p:cNvPicPr>
+          <p:nvPr/>
+        </p:nvPicPr>
+        <p:blipFill>
+          <a:blip r:embed="rId1">
+            <a:alphaModFix amt="30000"/>
+          </a:blip>
+          <a:stretch>
+            <a:fillRect/>
+          </a:stretch>
+        </p:blipFill>
+        <p:spPr>
+          <a:xfrm>
+            <a:off x="9106535" y="5777865"/>
+            <a:ext cx="3085714" cy="1080000"/>
+          </a:xfrm>
+          <a:prstGeom prst="rect">
+            <a:avLst/>
+          </a:prstGeom>
+        </p:spPr>
+      </p:pic>
+      <p:grpSp>
+        <p:nvGrpSpPr>
+          <p:cNvPr id="11" name="组合 10"/>
+          <p:cNvGrpSpPr/>
+          <p:nvPr/>
+        </p:nvGrpSpPr>
+        <p:grpSpPr>
+          <a:xfrm>
+            <a:off x="2151380" y="2035175"/>
+            <a:ext cx="7889240" cy="2787650"/>
+            <a:chOff x="4143" y="4637"/>
+            <a:chExt cx="12424" cy="4390"/>
+          </a:xfrm>
+        </p:grpSpPr>
+        <p:sp>
+          <p:nvSpPr>
+            <p:cNvPr id="27" name="文本框 1"/>
+            <p:cNvSpPr txBox="1"/>
+            <p:nvPr/>
+          </p:nvSpPr>
+          <p:spPr>
+            <a:xfrm>
+              <a:off x="4143" y="4637"/>
+              <a:ext cx="12424" cy="1598"/>
+            </a:xfrm>
+            <a:prstGeom prst="rect">
+              <a:avLst/>
+            </a:prstGeom>
+            <a:noFill/>
+            <a:ln w="6350">
+              <a:noFill/>
+            </a:ln>
+            <a:effectLst/>
+          </p:spPr>
+          <p:txBody>
+            <a:bodyPr rot="0" spcFirstLastPara="0" vertOverflow="overflow" horzOverflow="overflow" vert="horz" wrap="square" lIns="91440" tIns="45720" rIns="91440" bIns="45720" numCol="1" spcCol="0" rtlCol="0" fromWordArt="0" anchor="t" anchorCtr="0" forceAA="0" compatLnSpc="1">
+              <a:spAutoFit/>
+            </a:bodyPr>
+            <a:p>
+              <a:pPr algn="ctr" rtl="0" eaLnBrk="1" fontAlgn="auto" latinLnBrk="0" hangingPunct="1"/>
+              <a:r>
+                <a:rPr lang="zh-CN" sz="6000" b="1" kern="100">
+                  <a:solidFill>
+                    <a:srgbClr val="25557A"/>
+                  </a:solidFill>
+                  <a:latin typeface="微软雅黑" panose="020B0503020204020204" charset="-122"/>
+                  <a:ea typeface="微软雅黑" panose="020B0503020204020204" charset="-122"/>
+                  <a:cs typeface="微软雅黑" panose="020B0503020204020204" charset="-122"/>
+                  <a:sym typeface="Times New Roman" panose="02020603050405020304"/>
+                </a:rPr>
+                <a:t>谢谢观看</a:t>
+              </a:r>
+              <a:endParaRPr lang="zh-CN" sz="6000" b="1" kern="100">
+                <a:solidFill>
+                  <a:srgbClr val="25557A"/>
+                </a:solidFill>
+                <a:latin typeface="微软雅黑" panose="020B0503020204020204" charset="-122"/>
+                <a:ea typeface="微软雅黑" panose="020B0503020204020204" charset="-122"/>
+                <a:cs typeface="微软雅黑" panose="020B0503020204020204" charset="-122"/>
+                <a:sym typeface="Times New Roman" panose="02020603050405020304"/>
+              </a:endParaRPr>
+            </a:p>
+          </p:txBody>
+        </p:sp>
+        <p:sp>
+          <p:nvSpPr>
+            <p:cNvPr id="28" name="文本框 1"/>
+            <p:cNvSpPr txBox="1"/>
+            <p:nvPr/>
+          </p:nvSpPr>
+          <p:spPr>
+            <a:xfrm>
+              <a:off x="7636" y="8530"/>
+              <a:ext cx="5913" cy="497"/>
+            </a:xfrm>
+            <a:prstGeom prst="rect">
+              <a:avLst/>
+            </a:prstGeom>
+            <a:noFill/>
+            <a:ln w="6350">
+              <a:noFill/>
+            </a:ln>
+            <a:effectLst/>
+          </p:spPr>
+          <p:txBody>
+            <a:bodyPr rot="0" spcFirstLastPara="0" vertOverflow="overflow" horzOverflow="overflow" vert="horz" wrap="square" lIns="91440" tIns="45720" rIns="91440" bIns="45720" numCol="1" spcCol="0" rtlCol="0" fromWordArt="0" anchor="t" anchorCtr="0" forceAA="0" compatLnSpc="1">
+              <a:noAutofit/>
+            </a:bodyPr>
+            <a:p>
+              <a:pPr algn="l" rtl="0" eaLnBrk="1" fontAlgn="auto" latinLnBrk="0" hangingPunct="1">
+                <a:lnSpc>
+                  <a:spcPts val="1800"/>
+                </a:lnSpc>
+              </a:pPr>
+              <a:r>
+                <a:rPr lang="zh-CN" altLang="en-US" sz="1600" kern="100">
+                  <a:solidFill>
+                    <a:schemeClr val="tx1">
+                      <a:lumMod val="65000"/>
+                      <a:lumOff val="35000"/>
+                    </a:schemeClr>
+                  </a:solidFill>
+                  <a:latin typeface="微软雅黑" panose="020B0503020204020204" charset="-122"/>
+                  <a:ea typeface="微软雅黑" panose="020B0503020204020204" charset="-122"/>
+                  <a:cs typeface="微软雅黑" panose="020B0503020204020204" charset="-122"/>
+                  <a:sym typeface="Times New Roman" panose="02020603050405020304"/>
+                </a:rPr>
+                <a:t>汇报人丨黄国宸 曹钧杰</a:t>
+              </a:r>
+              <a:r>
+                <a:rPr lang="en-US" altLang="zh-CN" sz="1600" kern="100">
+                  <a:solidFill>
+                    <a:schemeClr val="tx1">
+                      <a:lumMod val="65000"/>
+                      <a:lumOff val="35000"/>
+                    </a:schemeClr>
+                  </a:solidFill>
+                  <a:latin typeface="微软雅黑" panose="020B0503020204020204" charset="-122"/>
+                  <a:ea typeface="微软雅黑" panose="020B0503020204020204" charset="-122"/>
+                  <a:cs typeface="微软雅黑" panose="020B0503020204020204" charset="-122"/>
+                  <a:sym typeface="Times New Roman" panose="02020603050405020304"/>
+                </a:rPr>
+                <a:t>  </a:t>
+              </a:r>
+              <a:r>
+                <a:rPr lang="zh-CN" altLang="en-US" sz="1600" kern="100">
+                  <a:solidFill>
+                    <a:schemeClr val="tx1">
+                      <a:lumMod val="65000"/>
+                      <a:lumOff val="35000"/>
+                    </a:schemeClr>
+                  </a:solidFill>
+                  <a:latin typeface="微软雅黑" panose="020B0503020204020204" charset="-122"/>
+                  <a:ea typeface="微软雅黑" panose="020B0503020204020204" charset="-122"/>
+                  <a:cs typeface="微软雅黑" panose="020B0503020204020204" charset="-122"/>
+                  <a:sym typeface="Times New Roman" panose="02020603050405020304"/>
+                </a:rPr>
+                <a:t>时间丨</a:t>
+              </a:r>
+              <a:r>
+                <a:rPr lang="en-US" altLang="zh-CN" sz="1600" kern="100">
+                  <a:solidFill>
+                    <a:schemeClr val="tx1">
+                      <a:lumMod val="65000"/>
+                      <a:lumOff val="35000"/>
+                    </a:schemeClr>
+                  </a:solidFill>
+                  <a:latin typeface="微软雅黑" panose="020B0503020204020204" charset="-122"/>
+                  <a:ea typeface="微软雅黑" panose="020B0503020204020204" charset="-122"/>
+                  <a:cs typeface="微软雅黑" panose="020B0503020204020204" charset="-122"/>
+                  <a:sym typeface="Times New Roman" panose="02020603050405020304"/>
+                </a:rPr>
+                <a:t>2026</a:t>
+              </a:r>
+              <a:r>
+                <a:rPr lang="zh-CN" altLang="en-US" sz="1600" kern="100">
+                  <a:solidFill>
+                    <a:schemeClr val="tx1">
+                      <a:lumMod val="65000"/>
+                      <a:lumOff val="35000"/>
+                    </a:schemeClr>
+                  </a:solidFill>
+                  <a:latin typeface="微软雅黑" panose="020B0503020204020204" charset="-122"/>
+                  <a:ea typeface="微软雅黑" panose="020B0503020204020204" charset="-122"/>
+                  <a:cs typeface="微软雅黑" panose="020B0503020204020204" charset="-122"/>
+                  <a:sym typeface="Times New Roman" panose="02020603050405020304"/>
+                </a:rPr>
+                <a:t>.</a:t>
+              </a:r>
+              <a:r>
+                <a:rPr lang="en-US" altLang="zh-CN" sz="1600" kern="100">
+                  <a:solidFill>
+                    <a:schemeClr val="tx1">
+                      <a:lumMod val="65000"/>
+                      <a:lumOff val="35000"/>
+                    </a:schemeClr>
+                  </a:solidFill>
+                  <a:latin typeface="微软雅黑" panose="020B0503020204020204" charset="-122"/>
+                  <a:ea typeface="微软雅黑" panose="020B0503020204020204" charset="-122"/>
+                  <a:cs typeface="微软雅黑" panose="020B0503020204020204" charset="-122"/>
+                  <a:sym typeface="Times New Roman" panose="02020603050405020304"/>
+                </a:rPr>
+                <a:t>9</a:t>
+              </a:r>
+              <a:r>
+                <a:rPr lang="zh-CN" altLang="en-US" sz="1600" kern="100">
+                  <a:solidFill>
+                    <a:schemeClr val="tx1">
+                      <a:lumMod val="65000"/>
+                      <a:lumOff val="35000"/>
+                    </a:schemeClr>
+                  </a:solidFill>
+                  <a:latin typeface="微软雅黑" panose="020B0503020204020204" charset="-122"/>
+                  <a:ea typeface="微软雅黑" panose="020B0503020204020204" charset="-122"/>
+                  <a:cs typeface="微软雅黑" panose="020B0503020204020204" charset="-122"/>
+                  <a:sym typeface="Times New Roman" panose="02020603050405020304"/>
+                </a:rPr>
+                <a:t/>
+              </a:r>
+              <a:endParaRPr lang="zh-CN" altLang="en-US" sz="1600" kern="100">
+                <a:solidFill>
+                  <a:schemeClr val="tx1">
+                    <a:lumMod val="65000"/>
+                    <a:lumOff val="35000"/>
+                  </a:schemeClr>
+                </a:solidFill>
+                <a:latin typeface="微软雅黑" panose="020B0503020204020204" charset="-122"/>
+                <a:ea typeface="微软雅黑" panose="020B0503020204020204" charset="-122"/>
+                <a:cs typeface="微软雅黑" panose="020B0503020204020204" charset="-122"/>
+                <a:sym typeface="Times New Roman" panose="02020603050405020304"/>
+              </a:endParaRPr>
+            </a:p>
+          </p:txBody>
+        </p:sp>
+        <p:sp>
+          <p:nvSpPr>
+            <p:cNvPr id="29" name="文本框 32"/>
+            <p:cNvSpPr txBox="1"/>
+            <p:nvPr/>
+          </p:nvSpPr>
+          <p:spPr>
+            <a:xfrm>
+              <a:off x="5781" y="6564"/>
+              <a:ext cx="9129" cy="564"/>
+            </a:xfrm>
+            <a:prstGeom prst="rect">
+              <a:avLst/>
+            </a:prstGeom>
+            <a:noFill/>
+            <a:ln w="6350">
+              <a:noFill/>
+            </a:ln>
+            <a:effectLst/>
+          </p:spPr>
+          <p:txBody>
+            <a:bodyPr rot="0" spcFirstLastPara="0" vertOverflow="overflow" horzOverflow="overflow" vert="horz" wrap="square" lIns="91440" tIns="45720" rIns="91440" bIns="45720" numCol="1" spcCol="0" rtlCol="0" fromWordArt="0" anchor="t" anchorCtr="0" forceAA="0" compatLnSpc="1">
+              <a:noAutofit/>
+            </a:bodyPr>
+            <a:p>
+              <a:pPr algn="ctr" rtl="0" eaLnBrk="1" fontAlgn="auto" latinLnBrk="0" hangingPunct="1">
+                <a:lnSpc>
+                  <a:spcPts val="2000"/>
+                </a:lnSpc>
+              </a:pPr>
+              <a:r>
+                <a:rPr lang="zh-CN" altLang="en-US" sz="2000" b="1" kern="100">
+                  <a:solidFill>
+                    <a:srgbClr val="595959"/>
+                  </a:solidFill>
+                  <a:latin typeface="微软雅黑" panose="020B0503020204020204" charset="-122"/>
+                  <a:ea typeface="微软雅黑" panose="020B0503020204020204" charset="-122"/>
+                  <a:cs typeface="微软雅黑" panose="020B0503020204020204" charset="-122"/>
+                  <a:sym typeface="Times New Roman" panose="02020603050405020304"/>
+                </a:rPr>
+                <a:t>脱离权重单测</a:t>
+              </a:r>
+              <a:r>
+                <a:rPr lang="en-US" altLang="zh-CN" sz="2000" b="1" kern="100">
+                  <a:solidFill>
+                    <a:srgbClr val="595959"/>
+                  </a:solidFill>
+                  <a:latin typeface="微软雅黑" panose="020B0503020204020204" charset="-122"/>
+                  <a:ea typeface="微软雅黑" panose="020B0503020204020204" charset="-122"/>
+                  <a:cs typeface="微软雅黑" panose="020B0503020204020204" charset="-122"/>
+                  <a:sym typeface="Times New Roman" panose="02020603050405020304"/>
+                </a:rPr>
+                <a:t> | </a:t>
+              </a:r>
+              <a:r>
+                <a:rPr lang="zh-CN" altLang="en-US" sz="2000" b="1" kern="100">
+                  <a:solidFill>
+                    <a:srgbClr val="595959"/>
+                  </a:solidFill>
+                  <a:latin typeface="微软雅黑" panose="020B0503020204020204" charset="-122"/>
+                  <a:ea typeface="微软雅黑" panose="020B0503020204020204" charset="-122"/>
+                  <a:cs typeface="微软雅黑" panose="020B0503020204020204" charset="-122"/>
+                  <a:sym typeface="Times New Roman" panose="02020603050405020304"/>
+                </a:rPr>
+                <a:t>用例自动转绿</a:t>
+              </a:r>
+              <a:r>
+                <a:rPr lang="en-US" altLang="zh-CN" sz="2000" b="1" kern="100">
+                  <a:solidFill>
+                    <a:srgbClr val="595959"/>
+                  </a:solidFill>
+                  <a:latin typeface="微软雅黑" panose="020B0503020204020204" charset="-122"/>
+                  <a:ea typeface="微软雅黑" panose="020B0503020204020204" charset="-122"/>
+                  <a:cs typeface="微软雅黑" panose="020B0503020204020204" charset="-122"/>
+                  <a:sym typeface="Times New Roman" panose="02020603050405020304"/>
+                </a:rPr>
+                <a:t> | </a:t>
+              </a:r>
+              <a:r>
+                <a:rPr lang="zh-CN" altLang="en-US" sz="2000" b="1" kern="100">
+                  <a:solidFill>
+                    <a:srgbClr val="595959"/>
+                  </a:solidFill>
+                  <a:latin typeface="微软雅黑" panose="020B0503020204020204" charset="-122"/>
+                  <a:ea typeface="微软雅黑" panose="020B0503020204020204" charset="-122"/>
+                  <a:cs typeface="微软雅黑" panose="020B0503020204020204" charset="-122"/>
+                  <a:sym typeface="Times New Roman" panose="02020603050405020304"/>
+                </a:rPr>
+                <a:t>一条命令复现</a:t>
+              </a:r>
+              <a:endParaRPr lang="en-US" altLang="zh-CN" sz="2000" b="1" kern="100">
+                <a:solidFill>
+                  <a:srgbClr val="595959"/>
+                </a:solidFill>
+                <a:latin typeface="微软雅黑" panose="020B0503020204020204" charset="-122"/>
+                <a:ea typeface="微软雅黑" panose="020B0503020204020204" charset="-122"/>
+                <a:cs typeface="微软雅黑" panose="020B0503020204020204" charset="-122"/>
+                <a:sym typeface="Times New Roman" panose="02020603050405020304"/>
+              </a:endParaRPr>
+            </a:p>
+          </p:txBody>
+        </p:sp>
+      </p:grpSp>
+      <p:grpSp>
+        <p:nvGrpSpPr>
+          <p:cNvPr id="2" name="组合 1"/>
+          <p:cNvGrpSpPr/>
+          <p:nvPr/>
+        </p:nvGrpSpPr>
+        <p:grpSpPr>
+          <a:xfrm>
+            <a:off x="7454900" y="-1959610"/>
+            <a:ext cx="4737100" cy="5091430"/>
+            <a:chOff x="11740" y="-3086"/>
+            <a:chExt cx="7460" cy="8018"/>
+          </a:xfrm>
+        </p:grpSpPr>
+        <p:grpSp>
+          <p:nvGrpSpPr>
+            <p:cNvPr id="3" name="组合 2"/>
+            <p:cNvGrpSpPr/>
+            <p:nvPr/>
+          </p:nvGrpSpPr>
+          <p:grpSpPr>
+            <a:xfrm>
+              <a:off x="11740" y="-3086"/>
+              <a:ext cx="7460" cy="8018"/>
+              <a:chOff x="8135783" y="-1669981"/>
+              <a:chExt cx="4056217" cy="4359393"/>
+            </a:xfrm>
+          </p:grpSpPr>
+          <p:sp>
+            <p:nvSpPr>
+              <p:cNvPr id="7" name="任意多边形: 形状 12"/>
+              <p:cNvSpPr/>
+              <p:nvPr/>
+            </p:nvSpPr>
+            <p:spPr>
+              <a:xfrm rot="18900000">
+                <a:off x="8135783" y="-1669981"/>
+                <a:ext cx="3339963" cy="3339962"/>
+              </a:xfrm>
+              <a:custGeom>
+                <a:avLst/>
+                <a:gdLst>
+                  <a:gd name="connsiteX0" fmla="*/ 0 w 3339963"/>
+                  <a:gd name="connsiteY0" fmla="*/ 0 h 3339962"/>
+                  <a:gd name="connsiteX1" fmla="*/ 3339963 w 3339963"/>
+                  <a:gd name="connsiteY1" fmla="*/ 3339962 h 3339962"/>
+                  <a:gd name="connsiteX2" fmla="*/ 1099563 w 3339963"/>
+                  <a:gd name="connsiteY2" fmla="*/ 3339962 h 3339962"/>
+                </a:gdLst>
+                <a:ahLst/>
+                <a:cxnLst>
+                  <a:cxn ang="0">
+                    <a:pos x="connsiteX0" y="connsiteY0"/>
+                  </a:cxn>
+                  <a:cxn ang="0">
+                    <a:pos x="connsiteX1" y="connsiteY1"/>
+                  </a:cxn>
+                  <a:cxn ang="0">
+                    <a:pos x="connsiteX2" y="connsiteY2"/>
+                  </a:cxn>
+                </a:cxnLst>
+                <a:rect l="l" t="t" r="r" b="b"/>
+                <a:pathLst>
+                  <a:path w="3339963" h="3339962">
+                    <a:moveTo>
+                      <a:pt x="0" y="0"/>
+                    </a:moveTo>
+                    <a:lnTo>
+                      <a:pt x="3339963" y="3339962"/>
+                    </a:lnTo>
+                    <a:lnTo>
+                      <a:pt x="1099563" y="3339962"/>
+                    </a:lnTo>
+                    <a:close/>
+                  </a:path>
+                </a:pathLst>
+              </a:custGeom>
+              <a:solidFill>
+                <a:schemeClr val="accent1">
+                  <a:lumMod val="40000"/>
+                  <a:lumOff val="60000"/>
+                  <a:alpha val="60000"/>
+                </a:schemeClr>
+              </a:solidFill>
+              <a:ln>
+                <a:noFill/>
+              </a:ln>
+            </p:spPr>
+            <p:style>
+              <a:lnRef idx="2">
+                <a:schemeClr val="accent1">
+                  <a:shade val="50000"/>
+                </a:schemeClr>
+              </a:lnRef>
+              <a:fillRef idx="1">
+                <a:schemeClr val="accent1"/>
+              </a:fillRef>
+              <a:effectRef idx="0">
+                <a:schemeClr val="accent1"/>
+              </a:effectRef>
+              <a:fontRef idx="minor">
+                <a:schemeClr val="lt1"/>
+              </a:fontRef>
+            </p:style>
+            <p:txBody>
+              <a:bodyPr rtlCol="0" anchor="ctr"/>
+              <a:p>
+                <a:pPr algn="ctr"/>
+                <a:endParaRPr lang="zh-CN" altLang="en-US"/>
+              </a:p>
+            </p:txBody>
+          </p:sp>
+          <p:sp>
+            <p:nvSpPr>
+              <p:cNvPr id="8" name="直角三角形 7"/>
+              <p:cNvSpPr/>
+              <p:nvPr/>
+            </p:nvSpPr>
+            <p:spPr>
+              <a:xfrm rot="10800000">
+                <a:off x="9502588" y="0"/>
+                <a:ext cx="2689412" cy="2689412"/>
+              </a:xfrm>
+              <a:prstGeom prst="rtTriangle">
+                <a:avLst/>
+              </a:prstGeom>
+              <a:solidFill>
+                <a:srgbClr val="25557A"/>
+              </a:solidFill>
+              <a:ln>
+                <a:noFill/>
+              </a:ln>
+            </p:spPr>
+            <p:style>
+              <a:lnRef idx="2">
+                <a:schemeClr val="accent1">
+                  <a:shade val="50000"/>
+                </a:schemeClr>
+              </a:lnRef>
+              <a:fillRef idx="1">
+                <a:schemeClr val="accent1"/>
+              </a:fillRef>
+              <a:effectRef idx="0">
+                <a:schemeClr val="accent1"/>
+              </a:effectRef>
+              <a:fontRef idx="minor">
+                <a:schemeClr val="lt1"/>
+              </a:fontRef>
+            </p:style>
+            <p:txBody>
+              <a:bodyPr rtlCol="0" anchor="ctr"/>
+              <a:p>
+                <a:pPr algn="ctr"/>
+                <a:endParaRPr lang="zh-CN" altLang="en-US"/>
+              </a:p>
+            </p:txBody>
+          </p:sp>
+        </p:grpSp>
+        <p:pic>
+          <p:nvPicPr>
+            <p:cNvPr id="12" name="图片 11" descr="校徽"/>
+            <p:cNvPicPr>
+              <a:picLocks noChangeAspect="1"/>
+            </p:cNvPicPr>
+            <p:nvPr/>
+          </p:nvPicPr>
+          <p:blipFill>
+            <a:blip r:embed="rId2"/>
+            <a:stretch>
+              <a:fillRect/>
+            </a:stretch>
+          </p:blipFill>
+          <p:spPr>
+            <a:xfrm>
+              <a:off x="16399" y="293"/>
+              <a:ext cx="2240" cy="1701"/>
+            </a:xfrm>
+            <a:prstGeom prst="rect">
+              <a:avLst/>
+            </a:prstGeom>
+          </p:spPr>
+        </p:pic>
+      </p:grpSp>
+      <p:grpSp>
+        <p:nvGrpSpPr>
+          <p:cNvPr id="13" name="组合 12"/>
+          <p:cNvGrpSpPr/>
+          <p:nvPr/>
+        </p:nvGrpSpPr>
+        <p:grpSpPr>
+          <a:xfrm rot="10800000">
+            <a:off x="-28575" y="3766688"/>
+            <a:ext cx="4737100" cy="5091168"/>
+            <a:chOff x="8135783" y="-1669981"/>
+            <a:chExt cx="4056217" cy="4359393"/>
+          </a:xfrm>
+        </p:grpSpPr>
+        <p:sp>
+          <p:nvSpPr>
+            <p:cNvPr id="14" name="任意多边形: 形状 64"/>
+            <p:cNvSpPr/>
+            <p:nvPr/>
+          </p:nvSpPr>
+          <p:spPr>
+            <a:xfrm rot="18900000">
+              <a:off x="8135783" y="-1669981"/>
+              <a:ext cx="3339963" cy="3339962"/>
+            </a:xfrm>
+            <a:custGeom>
+              <a:avLst/>
+              <a:gdLst>
+                <a:gd name="connsiteX0" fmla="*/ 0 w 3339963"/>
+                <a:gd name="connsiteY0" fmla="*/ 0 h 3339962"/>
+                <a:gd name="connsiteX1" fmla="*/ 3339963 w 3339963"/>
+                <a:gd name="connsiteY1" fmla="*/ 3339962 h 3339962"/>
+                <a:gd name="connsiteX2" fmla="*/ 1099563 w 3339963"/>
+                <a:gd name="connsiteY2" fmla="*/ 3339962 h 3339962"/>
+              </a:gdLst>
+              <a:ahLst/>
+              <a:cxnLst>
+                <a:cxn ang="0">
+                  <a:pos x="connsiteX0" y="connsiteY0"/>
+                </a:cxn>
+                <a:cxn ang="0">
+                  <a:pos x="connsiteX1" y="connsiteY1"/>
+                </a:cxn>
+                <a:cxn ang="0">
+                  <a:pos x="connsiteX2" y="connsiteY2"/>
+                </a:cxn>
+              </a:cxnLst>
+              <a:rect l="l" t="t" r="r" b="b"/>
+              <a:pathLst>
+                <a:path w="3339963" h="3339962">
+                  <a:moveTo>
+                    <a:pt x="0" y="0"/>
+                  </a:moveTo>
+                  <a:lnTo>
+                    <a:pt x="3339963" y="3339962"/>
+                  </a:lnTo>
+                  <a:lnTo>
+                    <a:pt x="1099563" y="3339962"/>
+                  </a:lnTo>
+                  <a:close/>
+                </a:path>
+              </a:pathLst>
+            </a:custGeom>
+            <a:solidFill>
+              <a:schemeClr val="accent1">
+                <a:lumMod val="20000"/>
+                <a:lumOff val="80000"/>
+              </a:schemeClr>
+            </a:solidFill>
+            <a:ln>
+              <a:noFill/>
+            </a:ln>
+          </p:spPr>
+          <p:style>
+            <a:lnRef idx="2">
+              <a:schemeClr val="accent1">
+                <a:shade val="50000"/>
+              </a:schemeClr>
+            </a:lnRef>
+            <a:fillRef idx="1">
+              <a:schemeClr val="accent1"/>
+            </a:fillRef>
+            <a:effectRef idx="0">
+              <a:schemeClr val="accent1"/>
+            </a:effectRef>
+            <a:fontRef idx="minor">
+              <a:schemeClr val="lt1"/>
+            </a:fontRef>
+          </p:style>
+          <p:txBody>
+            <a:bodyPr rtlCol="0" anchor="ctr"/>
+            <a:p>
+              <a:pPr algn="ctr"/>
+              <a:endParaRPr lang="zh-CN" altLang="en-US"/>
+            </a:p>
+          </p:txBody>
+        </p:sp>
+        <p:sp>
+          <p:nvSpPr>
+            <p:cNvPr id="16" name="直角三角形 15"/>
+            <p:cNvSpPr/>
+            <p:nvPr/>
+          </p:nvSpPr>
+          <p:spPr>
+            <a:xfrm rot="10800000">
+              <a:off x="9502588" y="0"/>
+              <a:ext cx="2689412" cy="2689412"/>
+            </a:xfrm>
+            <a:prstGeom prst="rtTriangle">
+              <a:avLst/>
+            </a:prstGeom>
+            <a:solidFill>
+              <a:srgbClr val="25557A"/>
+            </a:solidFill>
+            <a:ln>
+              <a:noFill/>
+            </a:ln>
+          </p:spPr>
+          <p:style>
+            <a:lnRef idx="2">
+              <a:schemeClr val="accent1">
+                <a:shade val="50000"/>
+              </a:schemeClr>
+            </a:lnRef>
+            <a:fillRef idx="1">
+              <a:schemeClr val="accent1"/>
+            </a:fillRef>
+            <a:effectRef idx="0">
+              <a:schemeClr val="accent1"/>
+            </a:effectRef>
+            <a:fontRef idx="minor">
+              <a:schemeClr val="lt1"/>
+            </a:fontRef>
+          </p:style>
+          <p:txBody>
+            <a:bodyPr rtlCol="0" anchor="ctr"/>
+            <a:p>
+              <a:pPr algn="ctr"/>
+              <a:endParaRPr lang="zh-CN" altLang="en-US"/>
+            </a:p>
+          </p:txBody>
+        </p:sp>
+      </p:grpSp>
+    </p:spTree>
+    <p:custDataLst>
+      <p:tags r:id="rId3"/>
     </p:custDataLst>
   </p:cSld>
   <p:clrMapOvr>
@@ -8949,12 +11771,12 @@
             </a:bodyPr>
             <a:p>
               <a:r>
-                <a:rPr sz="1700" lang="zh-CN" altLang="en-US" spc="300" dirty="0">
+                <a:rPr lang="zh-CN" altLang="en-US" sz="2800" spc="300" dirty="0">
                   <a:latin typeface="+mn-ea"/>
                 </a:rPr>
-                <a:t>被测算法的独特性</a:t>
+                <a:t>被测对象</a:t>
               </a:r>
-              <a:endParaRPr sz="1700" lang="zh-CN" altLang="en-US" spc="300" dirty="0">
+              <a:endParaRPr lang="zh-CN" altLang="en-US" sz="2800" spc="300" dirty="0">
                 <a:latin typeface="+mn-ea"/>
               </a:endParaRPr>
             </a:p>
@@ -9098,12 +11920,12 @@
               </a:bodyPr>
               <a:p>
                 <a:r>
-                  <a:rPr sz="1700" lang="zh-CN" altLang="en-US" spc="300" dirty="0">
+                  <a:rPr lang="zh-CN" altLang="en-US" sz="2800" spc="300" dirty="0">
                     <a:latin typeface="+mn-ea"/>
                   </a:rPr>
-                  <a:t>测试方法的独特性</a:t>
+                  <a:t>测试策略</a:t>
                 </a:r>
-                <a:endParaRPr sz="1700" lang="zh-CN" altLang="en-US" spc="300" dirty="0">
+                <a:endParaRPr lang="zh-CN" altLang="en-US" sz="2800" spc="300" dirty="0">
                   <a:latin typeface="+mn-ea"/>
                 </a:endParaRPr>
               </a:p>
@@ -9248,12 +12070,12 @@
               </a:bodyPr>
               <a:p>
                 <a:r>
-                  <a:rPr sz="1700" lang="zh-CN" altLang="en-US" spc="300" dirty="0">
+                  <a:rPr lang="zh-CN" altLang="en-US" sz="2800" spc="300" dirty="0">
                     <a:latin typeface="+mn-ea"/>
                   </a:rPr>
-                  <a:t>测试样例的独特性</a:t>
+                  <a:t>自动化实施</a:t>
                 </a:r>
-                <a:endParaRPr sz="1700" lang="zh-CN" altLang="en-US" spc="300" dirty="0">
+                <a:endParaRPr lang="zh-CN" altLang="en-US" sz="2800" spc="300" dirty="0">
                   <a:latin typeface="+mn-ea"/>
                 </a:endParaRPr>
               </a:p>
@@ -9398,12 +12220,12 @@
               </a:bodyPr>
               <a:p>
                 <a:r>
-                  <a:rPr sz="1700" lang="zh-CN" altLang="en-US" spc="300" dirty="0">
+                  <a:rPr lang="zh-CN" altLang="en-US" sz="2800" spc="300" dirty="0">
                     <a:latin typeface="+mn-ea"/>
                   </a:rPr>
-                  <a:t>结果与缺陷</a:t>
+                  <a:t>结果与结论</a:t>
                 </a:r>
-                <a:endParaRPr sz="1700" lang="zh-CN" altLang="en-US" spc="300" dirty="0">
+                <a:endParaRPr lang="zh-CN" altLang="en-US" sz="2800" spc="300" dirty="0">
                   <a:latin typeface="+mn-ea"/>
                 </a:endParaRPr>
               </a:p>
@@ -10323,7 +13145,7 @@
                   <a:latin typeface="微软雅黑" panose="020B0503020204020204" charset="-122"/>
                   <a:ea typeface="微软雅黑" panose="020B0503020204020204" charset="-122"/>
                 </a:rPr>
-                <a:t>被测算法</a:t>
+                <a:t>被测对象核心功能</a:t>
               </a:r>
               <a:endParaRPr lang="zh-CN" altLang="en-US" sz="6600" b="1" spc="300" dirty="0">
                 <a:latin typeface="微软雅黑" panose="020B0503020204020204" charset="-122"/>
@@ -10374,7 +13196,7 @@
                   <a:latin typeface="微软雅黑" panose="020B0503020204020204" charset="-122"/>
                   <a:ea typeface="微软雅黑" panose="020B0503020204020204" charset="-122"/>
                 </a:rPr>
-                <a:t>UNIQUENESS OF THE ALGORITHM</a:t>
+                <a:t>TEST OBJECT &amp; CORE FUNCTIONS</a:t>
               </a:r>
               <a:endParaRPr lang="en-US" altLang="zh-CN" sz="900" spc="600" dirty="0">
                 <a:solidFill>
@@ -10809,7 +13631,7 @@
                   <a:latin typeface="微软雅黑" panose="020B0503020204020204" charset="-122"/>
                   <a:ea typeface="微软雅黑" panose="020B0503020204020204" charset="-122"/>
                 </a:rPr>
-                <a:t>大模型内部的一块确定性孤岛</a:t>
+                <a:t>被测对象：VGGT 的几何计算层</a:t>
               </a:r>
               <a:endParaRPr lang="zh-CN" altLang="en-US" sz="3200" b="1" spc="300" dirty="0">
                 <a:latin typeface="微软雅黑" panose="020B0503020204020204" charset="-122"/>
@@ -10860,7 +13682,7 @@
                   <a:latin typeface="微软雅黑" panose="020B0503020204020204" charset="-122"/>
                   <a:ea typeface="微软雅黑" panose="020B0503020204020204" charset="-122"/>
                 </a:rPr>
-                <a:t>THE ALGORITHM UNDER TEST</a:t>
+                <a:t>TEST OBJECT &amp; CORE FUNCTIONS</a:t>
               </a:r>
               <a:endParaRPr lang="en-US" altLang="zh-CN" sz="900" spc="300" dirty="0">
                 <a:solidFill>
@@ -11271,7 +14093,7 @@
                     <a:cs typeface="+mn-ea"/>
                     <a:sym typeface="+mn-lt"/>
                   </a:rPr>
-                  <a:t>唯一可单测的一层</a:t>
+                  <a:t>前馈式三维大模型</a:t>
                 </a:r>
                 <a:endParaRPr lang="zh-CN" altLang="en-US" b="1" dirty="0">
                   <a:solidFill>
@@ -11318,7 +14140,7 @@
                     <a:cs typeface="+mn-ea"/>
                     <a:sym typeface="+mn-lt"/>
                   </a:rPr>
-                  <a:t>PURE NUMPY</a:t>
+                  <a:t>FEED-FORWARD</a:t>
                 </a:r>
                 <a:r>
                   <a:rPr lang="en-US" altLang="zh-CN" sz="800" dirty="0">
@@ -11346,7 +14168,7 @@
                     <a:cs typeface="+mn-ea"/>
                     <a:sym typeface="+mn-lt"/>
                   </a:rPr>
-                  <a:t>NO WEIGHTS · NO GPU</a:t>
+                  <a:t>1B PARAMS</a:t>
                 </a:r>
                 <a:endParaRPr lang="zh-CN" altLang="en-US" sz="800" dirty="0">
                   <a:solidFill>
@@ -11399,7 +14221,7 @@
                     <a:latin typeface="微软雅黑" panose="020B0503020204020204" charset="-122"/>
                     <a:ea typeface="微软雅黑" panose="020B0503020204020204" charset="-122"/>
                   </a:rPr>
-                  <a:t>VGGT 是约 10 亿参数的三维重建大模型，权重约 5.0 GB、必须依赖 GPU。而这 8 个函数是纯 NumPy 确定性几何代码，是全模型唯一能脱离权重与推理流程单独测试的部分。</a:t>
+                  <a:t>VGGT 是 Meta AI 与牛津大学的三维视觉大模型、CVPR 2025 最佳论文；单次前向即可从一至数百张图像预测相机内外参、深度图、点图与三维轨迹，约 10 亿参数。</a:t>
                 </a:r>
                 <a:endParaRPr lang="zh-CN" altLang="en-US" sz="1400" dirty="0">
                   <a:solidFill>
@@ -11535,7 +14357,7 @@
                     <a:cs typeface="+mn-ea"/>
                     <a:sym typeface="+mn-lt"/>
                   </a:rPr>
-                  <a:t>缺陷沿调用链传播</a:t>
+                  <a:t>核心功能链</a:t>
                 </a:r>
                 <a:endParaRPr lang="zh-CN" altLang="en-US" dirty="0">
                   <a:solidFill>
@@ -11584,7 +14406,7 @@
                     <a:cs typeface="+mn-ea"/>
                     <a:sym typeface="+mn-lt"/>
                   </a:rPr>
-                  <a:t>CALL CHAIN</a:t>
+                  <a:t>COORDS CHAIN</a:t>
                 </a:r>
                 <a:r>
                   <a:rPr lang="en-US" altLang="zh-CN" sz="800" dirty="0">
@@ -11612,7 +14434,7 @@
                     <a:cs typeface="+mn-ea"/>
                     <a:sym typeface="+mn-lt"/>
                   </a:rPr>
-                  <a:t>3 LEVELS DEEP</a:t>
+                  <a:t>CAM · WORLD · PIXEL</a:t>
                 </a:r>
                 <a:endParaRPr lang="zh-CN" altLang="en-US" sz="800" dirty="0">
                   <a:solidFill>
@@ -11665,7 +14487,7 @@
                     <a:latin typeface="微软雅黑" panose="020B0503020204020204" charset="-122"/>
                     <a:ea typeface="微软雅黑" panose="020B0503020204020204" charset="-122"/>
                   </a:rPr>
-                  <a:t>unproject（第 15 行）→ depth_to_world（第 47 行）→ depth_to_cam（第 87 行），一次失败连穿三层调用栈，所以报错位置并不等于根因位置。</a:t>
+                  <a:t>geometry.py 324 行 8 个函数（NumPy/PyTorch 混合），做深度图/相机/世界/像素坐标互转：unproject → depth_to_world → depth_to_cam（L15/47/87）。</a:t>
                 </a:r>
                 <a:endParaRPr lang="zh-CN" altLang="en-US" sz="1400" dirty="0">
                   <a:solidFill>
@@ -12147,149 +14969,6 @@
       </p:grpSpPr>
       <p:grpSp>
         <p:nvGrpSpPr>
-          <p:cNvPr id="4" name="组合 3"/>
-          <p:cNvGrpSpPr/>
-          <p:nvPr userDrawn="1"/>
-        </p:nvGrpSpPr>
-        <p:grpSpPr>
-          <a:xfrm>
-            <a:off x="10289667" y="-801077"/>
-            <a:ext cx="1902333" cy="2044520"/>
-            <a:chOff x="8135783" y="-1669981"/>
-            <a:chExt cx="4056217" cy="4359393"/>
-          </a:xfrm>
-        </p:grpSpPr>
-        <p:sp>
-          <p:nvSpPr>
-            <p:cNvPr id="7" name="任意多边形: 形状 10"/>
-            <p:cNvSpPr/>
-            <p:nvPr/>
-          </p:nvSpPr>
-          <p:spPr>
-            <a:xfrm rot="18900000">
-              <a:off x="8135783" y="-1669981"/>
-              <a:ext cx="3339963" cy="3339962"/>
-            </a:xfrm>
-            <a:custGeom>
-              <a:avLst/>
-              <a:gdLst>
-                <a:gd name="connsiteX0" fmla="*/ 0 w 3339963"/>
-                <a:gd name="connsiteY0" fmla="*/ 0 h 3339962"/>
-                <a:gd name="connsiteX1" fmla="*/ 3339963 w 3339963"/>
-                <a:gd name="connsiteY1" fmla="*/ 3339962 h 3339962"/>
-                <a:gd name="connsiteX2" fmla="*/ 1099563 w 3339963"/>
-                <a:gd name="connsiteY2" fmla="*/ 3339962 h 3339962"/>
-              </a:gdLst>
-              <a:ahLst/>
-              <a:cxnLst>
-                <a:cxn ang="0">
-                  <a:pos x="connsiteX0" y="connsiteY0"/>
-                </a:cxn>
-                <a:cxn ang="0">
-                  <a:pos x="connsiteX1" y="connsiteY1"/>
-                </a:cxn>
-                <a:cxn ang="0">
-                  <a:pos x="connsiteX2" y="connsiteY2"/>
-                </a:cxn>
-              </a:cxnLst>
-              <a:rect l="l" t="t" r="r" b="b"/>
-              <a:pathLst>
-                <a:path w="3339963" h="3339962">
-                  <a:moveTo>
-                    <a:pt x="0" y="0"/>
-                  </a:moveTo>
-                  <a:lnTo>
-                    <a:pt x="3339963" y="3339962"/>
-                  </a:lnTo>
-                  <a:lnTo>
-                    <a:pt x="1099563" y="3339962"/>
-                  </a:lnTo>
-                  <a:close/>
-                </a:path>
-              </a:pathLst>
-            </a:custGeom>
-            <a:solidFill>
-              <a:schemeClr val="accent1">
-                <a:lumMod val="20000"/>
-                <a:lumOff val="80000"/>
-              </a:schemeClr>
-            </a:solidFill>
-            <a:ln>
-              <a:noFill/>
-            </a:ln>
-          </p:spPr>
-          <p:style>
-            <a:lnRef idx="2">
-              <a:schemeClr val="accent1">
-                <a:shade val="50000"/>
-              </a:schemeClr>
-            </a:lnRef>
-            <a:fillRef idx="1">
-              <a:schemeClr val="accent1"/>
-            </a:fillRef>
-            <a:effectRef idx="0">
-              <a:schemeClr val="accent1"/>
-            </a:effectRef>
-            <a:fontRef idx="minor">
-              <a:schemeClr val="lt1"/>
-            </a:fontRef>
-          </p:style>
-          <p:txBody>
-            <a:bodyPr rtlCol="0" anchor="ctr"/>
-            <a:p>
-              <a:pPr algn="ctr"/>
-              <a:endParaRPr lang="zh-CN" altLang="en-US"/>
-            </a:p>
-          </p:txBody>
-        </p:sp>
-        <p:sp>
-          <p:nvSpPr>
-            <p:cNvPr id="5" name="直角三角形 4"/>
-            <p:cNvSpPr/>
-            <p:nvPr/>
-          </p:nvSpPr>
-          <p:spPr>
-            <a:xfrm rot="10800000">
-              <a:off x="9502588" y="0"/>
-              <a:ext cx="2689412" cy="2689412"/>
-            </a:xfrm>
-            <a:prstGeom prst="rtTriangle">
-              <a:avLst/>
-            </a:prstGeom>
-            <a:solidFill>
-              <a:srgbClr val="25557A"/>
-            </a:solidFill>
-            <a:ln>
-              <a:noFill/>
-            </a:ln>
-          </p:spPr>
-          <p:style>
-            <a:lnRef idx="2">
-              <a:schemeClr val="accent1">
-                <a:shade val="50000"/>
-              </a:schemeClr>
-            </a:lnRef>
-            <a:fillRef idx="1">
-              <a:schemeClr val="accent1"/>
-            </a:fillRef>
-            <a:effectRef idx="0">
-              <a:schemeClr val="accent1"/>
-            </a:effectRef>
-            <a:fontRef idx="minor">
-              <a:schemeClr val="lt1"/>
-            </a:fontRef>
-          </p:style>
-          <p:txBody>
-            <a:bodyPr rtlCol="0" anchor="ctr"/>
-            <a:p>
-              <a:pPr algn="ctr"/>
-              <a:endParaRPr lang="zh-CN" altLang="en-US"/>
-            </a:p>
-          </p:txBody>
-        </p:sp>
-      </p:grpSp>
-      <p:grpSp>
-        <p:nvGrpSpPr>
           <p:cNvPr id="6" name="组合 5"/>
           <p:cNvGrpSpPr/>
           <p:nvPr/>
@@ -12505,7 +15184,7 @@
                   <a:latin typeface="微软雅黑" panose="020B0503020204020204" charset="-122"/>
                   <a:ea typeface="微软雅黑" panose="020B0503020204020204" charset="-122"/>
                 </a:rPr>
-                <a:t>测试方法的四项非常规选择</a:t>
+                <a:t>文档承诺与实现不一致，是最值得测的位置</a:t>
               </a:r>
               <a:endParaRPr lang="zh-CN" altLang="en-US" sz="3200" b="1" spc="300" dirty="0">
                 <a:latin typeface="微软雅黑" panose="020B0503020204020204" charset="-122"/>
@@ -12556,7 +15235,7 @@
                   <a:latin typeface="微软雅黑" panose="020B0503020204020204" charset="-122"/>
                   <a:ea typeface="微软雅黑" panose="020B0503020204020204" charset="-122"/>
                 </a:rPr>
-                <a:t>FOUR UNCONVENTIONAL CHOICES</a:t>
+                <a:t>DOC CONTRACT VS IMPLEMENTATION</a:t>
               </a:r>
               <a:endParaRPr lang="en-US" altLang="zh-CN" sz="900" spc="300" dirty="0">
                 <a:solidFill>
@@ -12571,787 +15250,9 @@
           </p:txBody>
         </p:sp>
       </p:grpSp>
-      <p:sp>
-        <p:nvSpPr>
-          <p:cNvPr id="2" name="矩形 1"/>
-          <p:cNvSpPr/>
-          <p:nvPr/>
-        </p:nvSpPr>
-        <p:spPr>
-          <a:xfrm>
-            <a:off x="1092200" y="1900980"/>
-            <a:ext cx="2299929" cy="3559277"/>
-          </a:xfrm>
-          <a:prstGeom prst="rect">
-            <a:avLst/>
-          </a:prstGeom>
-          <a:solidFill>
-            <a:srgbClr val="25557A"/>
-          </a:solidFill>
-          <a:ln>
-            <a:noFill/>
-          </a:ln>
-        </p:spPr>
-        <p:style>
-          <a:lnRef idx="2">
-            <a:schemeClr val="accent1">
-              <a:shade val="50000"/>
-            </a:schemeClr>
-          </a:lnRef>
-          <a:fillRef idx="1">
-            <a:schemeClr val="accent1"/>
-          </a:fillRef>
-          <a:effectRef idx="0">
-            <a:schemeClr val="accent1"/>
-          </a:effectRef>
-          <a:fontRef idx="minor">
-            <a:schemeClr val="lt1"/>
-          </a:fontRef>
-        </p:style>
-        <p:txBody>
-          <a:bodyPr rtlCol="0" anchor="ctr"/>
-          <a:p>
-            <a:pPr algn="ctr"/>
-            <a:endParaRPr lang="zh-CN" altLang="en-US">
-              <a:latin typeface="微软雅黑" panose="020B0503020204020204" charset="-122"/>
-              <a:ea typeface="微软雅黑" panose="020B0503020204020204" charset="-122"/>
-            </a:endParaRPr>
-          </a:p>
-        </p:txBody>
-      </p:sp>
-      <p:sp>
-        <p:nvSpPr>
-          <p:cNvPr id="3" name="文本框 2"/>
-          <p:cNvSpPr txBox="1"/>
-          <p:nvPr/>
-        </p:nvSpPr>
-        <p:spPr>
-          <a:xfrm>
-            <a:off x="1693522" y="2200283"/>
-            <a:ext cx="1097280" cy="460375"/>
-          </a:xfrm>
-          <a:prstGeom prst="rect">
-            <a:avLst/>
-          </a:prstGeom>
-          <a:noFill/>
-        </p:spPr>
-        <p:txBody>
-          <a:bodyPr wrap="none" rtlCol="0">
-            <a:spAutoFit/>
-          </a:bodyPr>
-          <a:p>
-            <a:pPr algn="ctr"/>
-            <a:r>
-              <a:rPr sz="2000" lang="zh-CN" altLang="en-US" b="1">
-                <a:solidFill>
-                  <a:schemeClr val="bg1"/>
-                </a:solidFill>
-                <a:latin typeface="微软雅黑" panose="020B0503020204020204" charset="-122"/>
-                <a:ea typeface="微软雅黑" panose="020B0503020204020204" charset="-122"/>
-              </a:rPr>
-              <a:t>实证探针</a:t>
-            </a:r>
-            <a:endParaRPr sz="2000" lang="zh-CN" altLang="en-US" b="1">
-              <a:solidFill>
-                <a:schemeClr val="bg1"/>
-              </a:solidFill>
-              <a:latin typeface="微软雅黑" panose="020B0503020204020204" charset="-122"/>
-              <a:ea typeface="微软雅黑" panose="020B0503020204020204" charset="-122"/>
-            </a:endParaRPr>
-          </a:p>
-        </p:txBody>
-      </p:sp>
-      <p:sp>
-        <p:nvSpPr>
-          <p:cNvPr id="17" name="文本框 16"/>
-          <p:cNvSpPr txBox="1"/>
-          <p:nvPr/>
-        </p:nvSpPr>
-        <p:spPr>
-          <a:xfrm>
-            <a:off x="1263853" y="2961251"/>
-            <a:ext cx="1956619" cy="2267865"/>
-          </a:xfrm>
-          <a:prstGeom prst="rect">
-            <a:avLst/>
-          </a:prstGeom>
-          <a:noFill/>
-        </p:spPr>
-        <p:txBody>
-          <a:bodyPr wrap="square" rtlCol="0">
-            <a:spAutoFit/>
-          </a:bodyPr>
-          <a:p>
-            <a:pPr algn="just">
-              <a:lnSpc>
-                <a:spcPct val="150000"/>
-              </a:lnSpc>
-            </a:pPr>
-            <a:r>
-              <a:rPr lang="zh-CN" altLang="en-US" sz="1600">
-                <a:solidFill>
-                  <a:schemeClr val="bg1"/>
-                </a:solidFill>
-                <a:latin typeface="微软雅黑" panose="020B0503020204020204" charset="-122"/>
-                <a:ea typeface="微软雅黑" panose="020B0503020204020204" charset="-122"/>
-              </a:rPr>
-              <a:t>32 条预期逐条跑真实基线校验，纠正了 3 条与实现不符的预期。</a:t>
-            </a:r>
-            <a:endParaRPr lang="zh-CN" altLang="en-US" sz="1600">
-              <a:solidFill>
-                <a:schemeClr val="bg1"/>
-              </a:solidFill>
-              <a:latin typeface="微软雅黑" panose="020B0503020204020204" charset="-122"/>
-              <a:ea typeface="微软雅黑" panose="020B0503020204020204" charset="-122"/>
-            </a:endParaRPr>
-          </a:p>
-        </p:txBody>
-      </p:sp>
-      <p:cxnSp>
-        <p:nvCxnSpPr>
-          <p:cNvPr id="14" name="直接连接符 13"/>
-          <p:cNvCxnSpPr/>
-          <p:nvPr/>
-        </p:nvCxnSpPr>
-        <p:spPr>
-          <a:xfrm>
-            <a:off x="1466630" y="2811599"/>
-            <a:ext cx="1551069" cy="0"/>
-          </a:xfrm>
-          <a:prstGeom prst="line">
-            <a:avLst/>
-          </a:prstGeom>
-          <a:ln w="19050">
-            <a:gradFill flip="none" rotWithShape="1">
-              <a:gsLst>
-                <a:gs pos="0">
-                  <a:srgbClr val="32416B">
-                    <a:alpha val="0"/>
-                  </a:srgbClr>
-                </a:gs>
-                <a:gs pos="50000">
-                  <a:schemeClr val="bg1"/>
-                </a:gs>
-                <a:gs pos="100000">
-                  <a:srgbClr val="32416B">
-                    <a:alpha val="0"/>
-                  </a:srgbClr>
-                </a:gs>
-              </a:gsLst>
-              <a:lin ang="0" scaled="1"/>
-              <a:tileRect/>
-            </a:gradFill>
-          </a:ln>
-        </p:spPr>
-        <p:style>
-          <a:lnRef idx="1">
-            <a:schemeClr val="accent1"/>
-          </a:lnRef>
-          <a:fillRef idx="0">
-            <a:schemeClr val="accent1"/>
-          </a:fillRef>
-          <a:effectRef idx="0">
-            <a:schemeClr val="accent1"/>
-          </a:effectRef>
-          <a:fontRef idx="minor">
-            <a:schemeClr val="tx1"/>
-          </a:fontRef>
-        </p:style>
-      </p:cxnSp>
-      <p:sp>
-        <p:nvSpPr>
-          <p:cNvPr id="16" name="矩形 15"/>
-          <p:cNvSpPr/>
-          <p:nvPr/>
-        </p:nvSpPr>
-        <p:spPr>
-          <a:xfrm>
-            <a:off x="3661424" y="1900980"/>
-            <a:ext cx="2299929" cy="3559277"/>
-          </a:xfrm>
-          <a:prstGeom prst="rect">
-            <a:avLst/>
-          </a:prstGeom>
-          <a:solidFill>
-            <a:schemeClr val="accent1">
-              <a:lumMod val="20000"/>
-              <a:lumOff val="80000"/>
-            </a:schemeClr>
-          </a:solidFill>
-          <a:ln>
-            <a:noFill/>
-          </a:ln>
-        </p:spPr>
-        <p:style>
-          <a:lnRef idx="2">
-            <a:schemeClr val="accent1">
-              <a:shade val="50000"/>
-            </a:schemeClr>
-          </a:lnRef>
-          <a:fillRef idx="1">
-            <a:schemeClr val="accent1"/>
-          </a:fillRef>
-          <a:effectRef idx="0">
-            <a:schemeClr val="accent1"/>
-          </a:effectRef>
-          <a:fontRef idx="minor">
-            <a:schemeClr val="lt1"/>
-          </a:fontRef>
-        </p:style>
-        <p:txBody>
-          <a:bodyPr rtlCol="0" anchor="ctr"/>
-          <a:p>
-            <a:pPr algn="ctr"/>
-            <a:endParaRPr lang="zh-CN" altLang="en-US">
-              <a:latin typeface="微软雅黑" panose="020B0503020204020204" charset="-122"/>
-              <a:ea typeface="微软雅黑" panose="020B0503020204020204" charset="-122"/>
-            </a:endParaRPr>
-          </a:p>
-        </p:txBody>
-      </p:sp>
-      <p:sp>
-        <p:nvSpPr>
-          <p:cNvPr id="20" name="文本框 19"/>
-          <p:cNvSpPr txBox="1"/>
-          <p:nvPr/>
-        </p:nvSpPr>
-        <p:spPr>
-          <a:xfrm>
-            <a:off x="4262745" y="2200283"/>
-            <a:ext cx="1097280" cy="460375"/>
-          </a:xfrm>
-          <a:prstGeom prst="rect">
-            <a:avLst/>
-          </a:prstGeom>
-          <a:noFill/>
-        </p:spPr>
-        <p:txBody>
-          <a:bodyPr wrap="none" rtlCol="0">
-            <a:spAutoFit/>
-          </a:bodyPr>
-          <a:p>
-            <a:pPr algn="ctr"/>
-            <a:r>
-              <a:rPr sz="2000" lang="zh-CN" altLang="en-US" b="1">
-                <a:solidFill>
-                  <a:schemeClr val="tx1">
-                    <a:lumMod val="85000"/>
-                    <a:lumOff val="15000"/>
-                  </a:schemeClr>
-                </a:solidFill>
-                <a:latin typeface="微软雅黑" panose="020B0503020204020204" charset="-122"/>
-                <a:ea typeface="微软雅黑" panose="020B0503020204020204" charset="-122"/>
-              </a:rPr>
-              <a:t>文档承诺</a:t>
-            </a:r>
-            <a:endParaRPr sz="2000" lang="zh-CN" altLang="en-US" b="1">
-              <a:solidFill>
-                <a:schemeClr val="tx1">
-                  <a:lumMod val="85000"/>
-                  <a:lumOff val="15000"/>
-                </a:schemeClr>
-              </a:solidFill>
-              <a:latin typeface="微软雅黑" panose="020B0503020204020204" charset="-122"/>
-              <a:ea typeface="微软雅黑" panose="020B0503020204020204" charset="-122"/>
-            </a:endParaRPr>
-          </a:p>
-        </p:txBody>
-      </p:sp>
-      <p:sp>
-        <p:nvSpPr>
-          <p:cNvPr id="42" name="文本框 41"/>
-          <p:cNvSpPr txBox="1"/>
-          <p:nvPr/>
-        </p:nvSpPr>
-        <p:spPr>
-          <a:xfrm>
-            <a:off x="3833077" y="2961251"/>
-            <a:ext cx="1956619" cy="2267865"/>
-          </a:xfrm>
-          <a:prstGeom prst="rect">
-            <a:avLst/>
-          </a:prstGeom>
-          <a:noFill/>
-        </p:spPr>
-        <p:txBody>
-          <a:bodyPr wrap="square" rtlCol="0">
-            <a:spAutoFit/>
-          </a:bodyPr>
-          <a:p>
-            <a:pPr algn="just">
-              <a:lnSpc>
-                <a:spcPct val="150000"/>
-              </a:lnSpc>
-            </a:pPr>
-            <a:r>
-              <a:rPr lang="zh-CN" altLang="en-US" sz="1600">
-                <a:solidFill>
-                  <a:schemeClr val="tx1">
-                    <a:lumMod val="85000"/>
-                    <a:lumOff val="15000"/>
-                  </a:schemeClr>
-                </a:solidFill>
-                <a:latin typeface="微软雅黑" panose="020B0503020204020204" charset="-122"/>
-                <a:ea typeface="微软雅黑" panose="020B0503020204020204" charset="-122"/>
-              </a:rPr>
-              <a:t>016 / 018 按 docstring 承诺断言，缺陷修复后自动转绿，用例无需改写。</a:t>
-            </a:r>
-            <a:endParaRPr lang="zh-CN" altLang="en-US" sz="1600">
-              <a:solidFill>
-                <a:schemeClr val="tx1">
-                  <a:lumMod val="85000"/>
-                  <a:lumOff val="15000"/>
-                </a:schemeClr>
-              </a:solidFill>
-              <a:latin typeface="微软雅黑" panose="020B0503020204020204" charset="-122"/>
-              <a:ea typeface="微软雅黑" panose="020B0503020204020204" charset="-122"/>
-            </a:endParaRPr>
-          </a:p>
-        </p:txBody>
-      </p:sp>
-      <p:cxnSp>
-        <p:nvCxnSpPr>
-          <p:cNvPr id="21" name="直接连接符 20"/>
-          <p:cNvCxnSpPr/>
-          <p:nvPr/>
-        </p:nvCxnSpPr>
-        <p:spPr>
-          <a:xfrm>
-            <a:off x="4035854" y="2811599"/>
-            <a:ext cx="1551069" cy="0"/>
-          </a:xfrm>
-          <a:prstGeom prst="line">
-            <a:avLst/>
-          </a:prstGeom>
-          <a:ln w="19050">
-            <a:gradFill flip="none" rotWithShape="1">
-              <a:gsLst>
-                <a:gs pos="0">
-                  <a:srgbClr val="32416B">
-                    <a:alpha val="0"/>
-                  </a:srgbClr>
-                </a:gs>
-                <a:gs pos="50000">
-                  <a:srgbClr val="32416B"/>
-                </a:gs>
-                <a:gs pos="100000">
-                  <a:srgbClr val="32416B">
-                    <a:alpha val="0"/>
-                  </a:srgbClr>
-                </a:gs>
-              </a:gsLst>
-              <a:lin ang="0" scaled="1"/>
-              <a:tileRect/>
-            </a:gradFill>
-          </a:ln>
-        </p:spPr>
-        <p:style>
-          <a:lnRef idx="1">
-            <a:schemeClr val="accent1"/>
-          </a:lnRef>
-          <a:fillRef idx="0">
-            <a:schemeClr val="accent1"/>
-          </a:fillRef>
-          <a:effectRef idx="0">
-            <a:schemeClr val="accent1"/>
-          </a:effectRef>
-          <a:fontRef idx="minor">
-            <a:schemeClr val="tx1"/>
-          </a:fontRef>
-        </p:style>
-      </p:cxnSp>
-      <p:sp>
-        <p:nvSpPr>
-          <p:cNvPr id="46" name="矩形 45"/>
-          <p:cNvSpPr/>
-          <p:nvPr/>
-        </p:nvSpPr>
-        <p:spPr>
-          <a:xfrm>
-            <a:off x="6230648" y="1900980"/>
-            <a:ext cx="2299929" cy="3559277"/>
-          </a:xfrm>
-          <a:prstGeom prst="rect">
-            <a:avLst/>
-          </a:prstGeom>
-          <a:solidFill>
-            <a:srgbClr val="25557A"/>
-          </a:solidFill>
-          <a:ln>
-            <a:noFill/>
-          </a:ln>
-        </p:spPr>
-        <p:style>
-          <a:lnRef idx="2">
-            <a:schemeClr val="accent1">
-              <a:shade val="50000"/>
-            </a:schemeClr>
-          </a:lnRef>
-          <a:fillRef idx="1">
-            <a:schemeClr val="accent1"/>
-          </a:fillRef>
-          <a:effectRef idx="0">
-            <a:schemeClr val="accent1"/>
-          </a:effectRef>
-          <a:fontRef idx="minor">
-            <a:schemeClr val="lt1"/>
-          </a:fontRef>
-        </p:style>
-        <p:txBody>
-          <a:bodyPr rtlCol="0" anchor="ctr"/>
-          <a:p>
-            <a:pPr algn="ctr"/>
-            <a:endParaRPr lang="zh-CN" altLang="en-US">
-              <a:latin typeface="微软雅黑" panose="020B0503020204020204" charset="-122"/>
-              <a:ea typeface="微软雅黑" panose="020B0503020204020204" charset="-122"/>
-            </a:endParaRPr>
-          </a:p>
-        </p:txBody>
-      </p:sp>
-      <p:sp>
-        <p:nvSpPr>
-          <p:cNvPr id="22" name="文本框 21"/>
-          <p:cNvSpPr txBox="1"/>
-          <p:nvPr/>
-        </p:nvSpPr>
-        <p:spPr>
-          <a:xfrm>
-            <a:off x="6831970" y="2200283"/>
-            <a:ext cx="1097280" cy="460375"/>
-          </a:xfrm>
-          <a:prstGeom prst="rect">
-            <a:avLst/>
-          </a:prstGeom>
-          <a:noFill/>
-        </p:spPr>
-        <p:txBody>
-          <a:bodyPr wrap="none" rtlCol="0">
-            <a:spAutoFit/>
-          </a:bodyPr>
-          <a:p>
-            <a:pPr algn="ctr"/>
-            <a:r>
-              <a:rPr sz="2000" lang="zh-CN" altLang="en-US" b="1">
-                <a:solidFill>
-                  <a:schemeClr val="bg1"/>
-                </a:solidFill>
-                <a:latin typeface="微软雅黑" panose="020B0503020204020204" charset="-122"/>
-                <a:ea typeface="微软雅黑" panose="020B0503020204020204" charset="-122"/>
-              </a:rPr>
-              <a:t>绕障对照</a:t>
-            </a:r>
-            <a:endParaRPr sz="2000" lang="zh-CN" altLang="en-US" b="1">
-              <a:solidFill>
-                <a:schemeClr val="bg1"/>
-              </a:solidFill>
-              <a:latin typeface="微软雅黑" panose="020B0503020204020204" charset="-122"/>
-              <a:ea typeface="微软雅黑" panose="020B0503020204020204" charset="-122"/>
-            </a:endParaRPr>
-          </a:p>
-        </p:txBody>
-      </p:sp>
-      <p:sp>
-        <p:nvSpPr>
-          <p:cNvPr id="48" name="文本框 47"/>
-          <p:cNvSpPr txBox="1"/>
-          <p:nvPr/>
-        </p:nvSpPr>
-        <p:spPr>
-          <a:xfrm>
-            <a:off x="6402301" y="2961251"/>
-            <a:ext cx="1956619" cy="2267865"/>
-          </a:xfrm>
-          <a:prstGeom prst="rect">
-            <a:avLst/>
-          </a:prstGeom>
-          <a:noFill/>
-        </p:spPr>
-        <p:txBody>
-          <a:bodyPr wrap="square" rtlCol="0">
-            <a:spAutoFit/>
-          </a:bodyPr>
-          <a:p>
-            <a:pPr algn="just">
-              <a:lnSpc>
-                <a:spcPct val="150000"/>
-              </a:lnSpc>
-            </a:pPr>
-            <a:r>
-              <a:rPr lang="zh-CN" altLang="en-US" sz="1600">
-                <a:solidFill>
-                  <a:schemeClr val="bg1"/>
-                </a:solidFill>
-                <a:latin typeface="微软雅黑" panose="020B0503020204020204" charset="-122"/>
-                <a:ea typeface="微软雅黑" panose="020B0503020204020204" charset="-122"/>
-              </a:rPr>
-              <a:t>019 改用四维输入绕开缺陷，独立验证帧数不一致应报错，不被连带击穿。</a:t>
-            </a:r>
-            <a:endParaRPr lang="zh-CN" altLang="en-US" sz="1600">
-              <a:solidFill>
-                <a:schemeClr val="bg1"/>
-              </a:solidFill>
-              <a:latin typeface="微软雅黑" panose="020B0503020204020204" charset="-122"/>
-              <a:ea typeface="微软雅黑" panose="020B0503020204020204" charset="-122"/>
-            </a:endParaRPr>
-          </a:p>
-        </p:txBody>
-      </p:sp>
-      <p:cxnSp>
-        <p:nvCxnSpPr>
-          <p:cNvPr id="49" name="直接连接符 48"/>
-          <p:cNvCxnSpPr/>
-          <p:nvPr/>
-        </p:nvCxnSpPr>
-        <p:spPr>
-          <a:xfrm>
-            <a:off x="6605078" y="2811599"/>
-            <a:ext cx="1551069" cy="0"/>
-          </a:xfrm>
-          <a:prstGeom prst="line">
-            <a:avLst/>
-          </a:prstGeom>
-          <a:ln w="19050">
-            <a:gradFill flip="none" rotWithShape="1">
-              <a:gsLst>
-                <a:gs pos="0">
-                  <a:srgbClr val="32416B">
-                    <a:alpha val="0"/>
-                  </a:srgbClr>
-                </a:gs>
-                <a:gs pos="50000">
-                  <a:schemeClr val="bg1"/>
-                </a:gs>
-                <a:gs pos="100000">
-                  <a:srgbClr val="32416B">
-                    <a:alpha val="0"/>
-                  </a:srgbClr>
-                </a:gs>
-              </a:gsLst>
-              <a:lin ang="0" scaled="1"/>
-              <a:tileRect/>
-            </a:gradFill>
-          </a:ln>
-        </p:spPr>
-        <p:style>
-          <a:lnRef idx="1">
-            <a:schemeClr val="accent1"/>
-          </a:lnRef>
-          <a:fillRef idx="0">
-            <a:schemeClr val="accent1"/>
-          </a:fillRef>
-          <a:effectRef idx="0">
-            <a:schemeClr val="accent1"/>
-          </a:effectRef>
-          <a:fontRef idx="minor">
-            <a:schemeClr val="tx1"/>
-          </a:fontRef>
-        </p:style>
-      </p:cxnSp>
-      <p:sp>
-        <p:nvSpPr>
-          <p:cNvPr id="51" name="矩形 50"/>
-          <p:cNvSpPr/>
-          <p:nvPr/>
-        </p:nvSpPr>
-        <p:spPr>
-          <a:xfrm>
-            <a:off x="8799871" y="1900980"/>
-            <a:ext cx="2299929" cy="3559277"/>
-          </a:xfrm>
-          <a:prstGeom prst="rect">
-            <a:avLst/>
-          </a:prstGeom>
-          <a:solidFill>
-            <a:schemeClr val="accent1">
-              <a:lumMod val="20000"/>
-              <a:lumOff val="80000"/>
-            </a:schemeClr>
-          </a:solidFill>
-          <a:ln>
-            <a:noFill/>
-          </a:ln>
-        </p:spPr>
-        <p:style>
-          <a:lnRef idx="2">
-            <a:schemeClr val="accent1">
-              <a:shade val="50000"/>
-            </a:schemeClr>
-          </a:lnRef>
-          <a:fillRef idx="1">
-            <a:schemeClr val="accent1"/>
-          </a:fillRef>
-          <a:effectRef idx="0">
-            <a:schemeClr val="accent1"/>
-          </a:effectRef>
-          <a:fontRef idx="minor">
-            <a:schemeClr val="lt1"/>
-          </a:fontRef>
-        </p:style>
-        <p:txBody>
-          <a:bodyPr rtlCol="0" anchor="ctr"/>
-          <a:p>
-            <a:pPr algn="ctr"/>
-            <a:endParaRPr lang="zh-CN" altLang="en-US">
-              <a:latin typeface="微软雅黑" panose="020B0503020204020204" charset="-122"/>
-              <a:ea typeface="微软雅黑" panose="020B0503020204020204" charset="-122"/>
-            </a:endParaRPr>
-          </a:p>
-        </p:txBody>
-      </p:sp>
-      <p:sp>
-        <p:nvSpPr>
-          <p:cNvPr id="52" name="文本框 51"/>
-          <p:cNvSpPr txBox="1"/>
-          <p:nvPr/>
-        </p:nvSpPr>
-        <p:spPr>
-          <a:xfrm>
-            <a:off x="9401193" y="2200283"/>
-            <a:ext cx="1097280" cy="460375"/>
-          </a:xfrm>
-          <a:prstGeom prst="rect">
-            <a:avLst/>
-          </a:prstGeom>
-          <a:noFill/>
-        </p:spPr>
-        <p:txBody>
-          <a:bodyPr wrap="none" rtlCol="0">
-            <a:spAutoFit/>
-          </a:bodyPr>
-          <a:p>
-            <a:pPr algn="ctr"/>
-            <a:r>
-              <a:rPr sz="2000" lang="zh-CN" altLang="en-US" b="1">
-                <a:solidFill>
-                  <a:schemeClr val="tx1">
-                    <a:lumMod val="85000"/>
-                    <a:lumOff val="15000"/>
-                  </a:schemeClr>
-                </a:solidFill>
-                <a:latin typeface="微软雅黑" panose="020B0503020204020204" charset="-122"/>
-                <a:ea typeface="微软雅黑" panose="020B0503020204020204" charset="-122"/>
-              </a:rPr>
-              <a:t>零改基线</a:t>
-            </a:r>
-            <a:endParaRPr sz="2000" lang="zh-CN" altLang="en-US" b="1">
-              <a:solidFill>
-                <a:schemeClr val="tx1">
-                  <a:lumMod val="85000"/>
-                  <a:lumOff val="15000"/>
-                </a:schemeClr>
-              </a:solidFill>
-              <a:latin typeface="微软雅黑" panose="020B0503020204020204" charset="-122"/>
-              <a:ea typeface="微软雅黑" panose="020B0503020204020204" charset="-122"/>
-            </a:endParaRPr>
-          </a:p>
-        </p:txBody>
-      </p:sp>
-      <p:sp>
-        <p:nvSpPr>
-          <p:cNvPr id="53" name="文本框 52"/>
-          <p:cNvSpPr txBox="1"/>
-          <p:nvPr/>
-        </p:nvSpPr>
-        <p:spPr>
-          <a:xfrm>
-            <a:off x="8971524" y="2961251"/>
-            <a:ext cx="1956619" cy="2267865"/>
-          </a:xfrm>
-          <a:prstGeom prst="rect">
-            <a:avLst/>
-          </a:prstGeom>
-          <a:noFill/>
-        </p:spPr>
-        <p:txBody>
-          <a:bodyPr wrap="square" rtlCol="0">
-            <a:spAutoFit/>
-          </a:bodyPr>
-          <a:p>
-            <a:pPr algn="just">
-              <a:lnSpc>
-                <a:spcPct val="150000"/>
-              </a:lnSpc>
-            </a:pPr>
-            <a:r>
-              <a:rPr lang="zh-CN" altLang="en-US" sz="1600">
-                <a:solidFill>
-                  <a:schemeClr val="tx1">
-                    <a:lumMod val="85000"/>
-                    <a:lumOff val="15000"/>
-                  </a:schemeClr>
-                </a:solidFill>
-                <a:latin typeface="微软雅黑" panose="020B0503020204020204" charset="-122"/>
-                <a:ea typeface="微软雅黑" panose="020B0503020204020204" charset="-122"/>
-              </a:rPr>
-              <a:t>全程未改 vggt-main 一行，从外层注入导入路径，退出码可被 CI 消费。</a:t>
-            </a:r>
-            <a:endParaRPr lang="zh-CN" altLang="en-US" sz="1600">
-              <a:solidFill>
-                <a:schemeClr val="tx1">
-                  <a:lumMod val="85000"/>
-                  <a:lumOff val="15000"/>
-                </a:schemeClr>
-              </a:solidFill>
-              <a:latin typeface="微软雅黑" panose="020B0503020204020204" charset="-122"/>
-              <a:ea typeface="微软雅黑" panose="020B0503020204020204" charset="-122"/>
-            </a:endParaRPr>
-          </a:p>
-        </p:txBody>
-      </p:sp>
-      <p:cxnSp>
-        <p:nvCxnSpPr>
-          <p:cNvPr id="54" name="直接连接符 53"/>
-          <p:cNvCxnSpPr/>
-          <p:nvPr/>
-        </p:nvCxnSpPr>
-        <p:spPr>
-          <a:xfrm>
-            <a:off x="9174301" y="2811599"/>
-            <a:ext cx="1551069" cy="0"/>
-          </a:xfrm>
-          <a:prstGeom prst="line">
-            <a:avLst/>
-          </a:prstGeom>
-          <a:ln w="19050">
-            <a:gradFill flip="none" rotWithShape="1">
-              <a:gsLst>
-                <a:gs pos="0">
-                  <a:srgbClr val="32416B">
-                    <a:alpha val="0"/>
-                  </a:srgbClr>
-                </a:gs>
-                <a:gs pos="50000">
-                  <a:srgbClr val="32416B"/>
-                </a:gs>
-                <a:gs pos="100000">
-                  <a:srgbClr val="32416B">
-                    <a:alpha val="0"/>
-                  </a:srgbClr>
-                </a:gs>
-              </a:gsLst>
-              <a:lin ang="0" scaled="1"/>
-              <a:tileRect/>
-            </a:gradFill>
-          </a:ln>
-        </p:spPr>
-        <p:style>
-          <a:lnRef idx="1">
-            <a:schemeClr val="accent1"/>
-          </a:lnRef>
-          <a:fillRef idx="0">
-            <a:schemeClr val="accent1"/>
-          </a:fillRef>
-          <a:effectRef idx="0">
-            <a:schemeClr val="accent1"/>
-          </a:effectRef>
-          <a:fontRef idx="minor">
-            <a:schemeClr val="tx1"/>
-          </a:fontRef>
-        </p:style>
-      </p:cxnSp>
       <p:pic>
         <p:nvPicPr>
-          <p:cNvPr id="27" name="图片 26" descr="图书馆"/>
+          <p:cNvPr id="51" name="图片 50" descr="图书馆"/>
           <p:cNvPicPr>
             <a:picLocks noChangeAspect="1"/>
           </p:cNvPicPr>
@@ -13375,9 +15276,761 @@
           </a:prstGeom>
         </p:spPr>
       </p:pic>
+      <p:grpSp>
+        <p:nvGrpSpPr>
+          <p:cNvPr id="15" name="组合 14"/>
+          <p:cNvGrpSpPr/>
+          <p:nvPr userDrawn="1"/>
+        </p:nvGrpSpPr>
+        <p:grpSpPr>
+          <a:xfrm>
+            <a:off x="10289667" y="-801077"/>
+            <a:ext cx="1902333" cy="2044520"/>
+            <a:chOff x="8135783" y="-1669981"/>
+            <a:chExt cx="4056217" cy="4359393"/>
+          </a:xfrm>
+        </p:grpSpPr>
+        <p:sp>
+          <p:nvSpPr>
+            <p:cNvPr id="16" name="任意多边形: 形状 10"/>
+            <p:cNvSpPr/>
+            <p:nvPr/>
+          </p:nvSpPr>
+          <p:spPr>
+            <a:xfrm rot="18900000">
+              <a:off x="8135783" y="-1669981"/>
+              <a:ext cx="3339963" cy="3339962"/>
+            </a:xfrm>
+            <a:custGeom>
+              <a:avLst/>
+              <a:gdLst>
+                <a:gd name="connsiteX0" fmla="*/ 0 w 3339963"/>
+                <a:gd name="connsiteY0" fmla="*/ 0 h 3339962"/>
+                <a:gd name="connsiteX1" fmla="*/ 3339963 w 3339963"/>
+                <a:gd name="connsiteY1" fmla="*/ 3339962 h 3339962"/>
+                <a:gd name="connsiteX2" fmla="*/ 1099563 w 3339963"/>
+                <a:gd name="connsiteY2" fmla="*/ 3339962 h 3339962"/>
+              </a:gdLst>
+              <a:ahLst/>
+              <a:cxnLst>
+                <a:cxn ang="0">
+                  <a:pos x="connsiteX0" y="connsiteY0"/>
+                </a:cxn>
+                <a:cxn ang="0">
+                  <a:pos x="connsiteX1" y="connsiteY1"/>
+                </a:cxn>
+                <a:cxn ang="0">
+                  <a:pos x="connsiteX2" y="connsiteY2"/>
+                </a:cxn>
+              </a:cxnLst>
+              <a:rect l="l" t="t" r="r" b="b"/>
+              <a:pathLst>
+                <a:path w="3339963" h="3339962">
+                  <a:moveTo>
+                    <a:pt x="0" y="0"/>
+                  </a:moveTo>
+                  <a:lnTo>
+                    <a:pt x="3339963" y="3339962"/>
+                  </a:lnTo>
+                  <a:lnTo>
+                    <a:pt x="1099563" y="3339962"/>
+                  </a:lnTo>
+                  <a:close/>
+                </a:path>
+              </a:pathLst>
+            </a:custGeom>
+            <a:solidFill>
+              <a:schemeClr val="accent1">
+                <a:lumMod val="20000"/>
+                <a:lumOff val="80000"/>
+              </a:schemeClr>
+            </a:solidFill>
+            <a:ln>
+              <a:noFill/>
+            </a:ln>
+          </p:spPr>
+          <p:style>
+            <a:lnRef idx="2">
+              <a:schemeClr val="accent1">
+                <a:shade val="50000"/>
+              </a:schemeClr>
+            </a:lnRef>
+            <a:fillRef idx="1">
+              <a:schemeClr val="accent1"/>
+            </a:fillRef>
+            <a:effectRef idx="0">
+              <a:schemeClr val="accent1"/>
+            </a:effectRef>
+            <a:fontRef idx="minor">
+              <a:schemeClr val="lt1"/>
+            </a:fontRef>
+          </p:style>
+          <p:txBody>
+            <a:bodyPr rtlCol="0" anchor="ctr"/>
+            <a:p>
+              <a:pPr algn="ctr"/>
+              <a:endParaRPr lang="zh-CN" altLang="en-US"/>
+            </a:p>
+          </p:txBody>
+        </p:sp>
+        <p:sp>
+          <p:nvSpPr>
+            <p:cNvPr id="17" name="直角三角形 16"/>
+            <p:cNvSpPr/>
+            <p:nvPr/>
+          </p:nvSpPr>
+          <p:spPr>
+            <a:xfrm rot="10800000">
+              <a:off x="9502588" y="0"/>
+              <a:ext cx="2689412" cy="2689412"/>
+            </a:xfrm>
+            <a:prstGeom prst="rtTriangle">
+              <a:avLst/>
+            </a:prstGeom>
+            <a:solidFill>
+              <a:srgbClr val="25557A"/>
+            </a:solidFill>
+            <a:ln>
+              <a:noFill/>
+            </a:ln>
+          </p:spPr>
+          <p:style>
+            <a:lnRef idx="2">
+              <a:schemeClr val="accent1">
+                <a:shade val="50000"/>
+              </a:schemeClr>
+            </a:lnRef>
+            <a:fillRef idx="1">
+              <a:schemeClr val="accent1"/>
+            </a:fillRef>
+            <a:effectRef idx="0">
+              <a:schemeClr val="accent1"/>
+            </a:effectRef>
+            <a:fontRef idx="minor">
+              <a:schemeClr val="lt1"/>
+            </a:fontRef>
+          </p:style>
+          <p:txBody>
+            <a:bodyPr rtlCol="0" anchor="ctr"/>
+            <a:p>
+              <a:pPr algn="ctr"/>
+              <a:endParaRPr lang="zh-CN" altLang="en-US"/>
+            </a:p>
+          </p:txBody>
+        </p:sp>
+      </p:grpSp>
+      <p:grpSp>
+        <p:nvGrpSpPr>
+          <p:cNvPr id="27" name="组合 26"/>
+          <p:cNvGrpSpPr/>
+          <p:nvPr/>
+        </p:nvGrpSpPr>
+        <p:grpSpPr>
+          <a:xfrm>
+            <a:off x="660400" y="1234440"/>
+            <a:ext cx="10858500" cy="4899660"/>
+            <a:chOff x="1040" y="1944"/>
+            <a:chExt cx="17100" cy="7716"/>
+          </a:xfrm>
+        </p:grpSpPr>
+        <p:sp>
+          <p:nvSpPr>
+            <p:cNvPr id="2" name="矩形 1"/>
+            <p:cNvSpPr/>
+            <p:nvPr/>
+          </p:nvSpPr>
+          <p:spPr>
+            <a:xfrm>
+              <a:off x="1040" y="2274"/>
+              <a:ext cx="17100" cy="3336"/>
+            </a:xfrm>
+            <a:prstGeom prst="rect">
+              <a:avLst/>
+            </a:prstGeom>
+            <a:solidFill>
+              <a:schemeClr val="accent1">
+                <a:lumMod val="20000"/>
+                <a:lumOff val="80000"/>
+              </a:schemeClr>
+            </a:solidFill>
+            <a:ln>
+              <a:noFill/>
+            </a:ln>
+          </p:spPr>
+          <p:style>
+            <a:lnRef idx="2">
+              <a:schemeClr val="accent1">
+                <a:shade val="50000"/>
+              </a:schemeClr>
+            </a:lnRef>
+            <a:fillRef idx="1">
+              <a:schemeClr val="accent1"/>
+            </a:fillRef>
+            <a:effectRef idx="0">
+              <a:schemeClr val="accent1"/>
+            </a:effectRef>
+            <a:fontRef idx="minor">
+              <a:schemeClr val="lt1"/>
+            </a:fontRef>
+          </p:style>
+          <p:txBody>
+            <a:bodyPr rtlCol="0" anchor="ctr"/>
+            <a:p>
+              <a:pPr algn="ctr"/>
+              <a:endParaRPr lang="zh-CN" altLang="en-US"/>
+            </a:p>
+          </p:txBody>
+        </p:sp>
+        <p:grpSp>
+          <p:nvGrpSpPr>
+            <p:cNvPr id="3" name="组合 2"/>
+            <p:cNvGrpSpPr/>
+            <p:nvPr/>
+          </p:nvGrpSpPr>
+          <p:grpSpPr>
+            <a:xfrm>
+              <a:off x="1346" y="2586"/>
+              <a:ext cx="11773" cy="2733"/>
+              <a:chOff x="1188085" y="4304453"/>
+              <a:chExt cx="4283710" cy="1735330"/>
+            </a:xfrm>
+          </p:grpSpPr>
+          <p:sp>
+            <p:nvSpPr>
+              <p:cNvPr id="19" name="文本框 18"/>
+              <p:cNvSpPr txBox="1"/>
+              <p:nvPr/>
+            </p:nvSpPr>
+            <p:spPr>
+              <a:xfrm>
+                <a:off x="1188085" y="4304453"/>
+                <a:ext cx="2730844" cy="461665"/>
+              </a:xfrm>
+              <a:prstGeom prst="rect">
+                <a:avLst/>
+              </a:prstGeom>
+              <a:noFill/>
+            </p:spPr>
+            <p:txBody>
+              <a:bodyPr wrap="square" rtlCol="0">
+                <a:spAutoFit/>
+              </a:bodyPr>
+              <a:p>
+                <a:r>
+                  <a:rPr lang="zh-CN" altLang="en-US" sz="2400" b="1" dirty="0">
+                    <a:solidFill>
+                      <a:srgbClr val="25557A"/>
+                    </a:solidFill>
+                  </a:rPr>
+                  <a:t>函数契约（第 22 行）</a:t>
+                </a:r>
+                <a:endParaRPr lang="zh-CN" altLang="en-US" sz="2400" b="1" dirty="0">
+                  <a:solidFill>
+                    <a:srgbClr val="25557A"/>
+                  </a:solidFill>
+                </a:endParaRPr>
+              </a:p>
+            </p:txBody>
+          </p:sp>
+          <p:cxnSp>
+            <p:nvCxnSpPr>
+              <p:cNvPr id="20" name="直接连接符 19"/>
+              <p:cNvCxnSpPr/>
+              <p:nvPr/>
+            </p:nvCxnSpPr>
+            <p:spPr>
+              <a:xfrm>
+                <a:off x="1248911" y="4856923"/>
+                <a:ext cx="4097913" cy="0"/>
+              </a:xfrm>
+              <a:prstGeom prst="line">
+                <a:avLst/>
+              </a:prstGeom>
+              <a:ln w="25400">
+                <a:solidFill>
+                  <a:schemeClr val="bg1">
+                    <a:lumMod val="50000"/>
+                  </a:schemeClr>
+                </a:solidFill>
+              </a:ln>
+            </p:spPr>
+            <p:style>
+              <a:lnRef idx="1">
+                <a:schemeClr val="accent1"/>
+              </a:lnRef>
+              <a:fillRef idx="0">
+                <a:schemeClr val="accent1"/>
+              </a:fillRef>
+              <a:effectRef idx="0">
+                <a:schemeClr val="accent1"/>
+              </a:effectRef>
+              <a:fontRef idx="minor">
+                <a:schemeClr val="tx1"/>
+              </a:fontRef>
+            </p:style>
+          </p:cxnSp>
+          <p:sp>
+            <p:nvSpPr>
+              <p:cNvPr id="21" name="文本框 20"/>
+              <p:cNvSpPr txBox="1"/>
+              <p:nvPr/>
+            </p:nvSpPr>
+            <p:spPr>
+              <a:xfrm>
+                <a:off x="1188085" y="4896457"/>
+                <a:ext cx="4283710" cy="1143326"/>
+              </a:xfrm>
+              <a:prstGeom prst="rect">
+                <a:avLst/>
+              </a:prstGeom>
+              <a:noFill/>
+            </p:spPr>
+            <p:txBody>
+              <a:bodyPr wrap="square">
+                <a:spAutoFit/>
+              </a:bodyPr>
+              <a:p>
+                <a:pPr algn="just">
+                  <a:lnSpc>
+                    <a:spcPct val="130000"/>
+                  </a:lnSpc>
+                </a:pPr>
+                <a:r>
+                  <a:rPr lang="zh-CN" altLang="en-US" dirty="0"/>
+                  <a:t>docstring 明文声明：depth_map 的形状可为 (S, H, W, 1) 或 (S, H, W)。</a:t>
+                </a:r>
+                <a:r>
+                  <a:rPr lang="en-US" altLang="zh-CN" dirty="0"/>
+                  <a:t/>
+                </a:r>
+                <a:r>
+                  <a:rPr lang="zh-CN" altLang="en-US" dirty="0"/>
+                  <a:t/>
+                </a:r>
+                <a:r>
+                  <a:rPr lang="en-US" altLang="zh-CN" dirty="0"/>
+                  <a:t/>
+                </a:r>
+                <a:r>
+                  <a:rPr lang="zh-CN" altLang="en-US" dirty="0"/>
+                  <a:t/>
+                </a:r>
+                <a:r>
+                  <a:rPr lang="en-US" altLang="zh-CN" dirty="0"/>
+                  <a:t/>
+                </a:r>
+                <a:r>
+                  <a:rPr lang="zh-CN" altLang="en-US" dirty="0"/>
+                  <a:t/>
+                </a:r>
+                <a:r>
+                  <a:rPr lang="en-US" altLang="zh-CN" dirty="0"/>
+                  <a:t/>
+                </a:r>
+                <a:r>
+                  <a:rPr lang="zh-CN" altLang="en-US" dirty="0"/>
+                  <a:t/>
+                </a:r>
+                <a:r>
+                  <a:rPr lang="en-US" altLang="zh-CN" dirty="0"/>
+                  <a:t/>
+                </a:r>
+                <a:r>
+                  <a:rPr lang="zh-CN" altLang="en-US" dirty="0"/>
+                  <a:t/>
+                </a:r>
+                <a:r>
+                  <a:rPr lang="en-US" altLang="zh-CN" dirty="0"/>
+                  <a:t/>
+                </a:r>
+                <a:r>
+                  <a:rPr lang="zh-CN" altLang="en-US" dirty="0"/>
+                  <a:t/>
+                </a:r>
+                <a:r>
+                  <a:rPr lang="en-US" altLang="zh-CN" dirty="0"/>
+                  <a:t/>
+                </a:r>
+                <a:r>
+                  <a:rPr lang="zh-CN" altLang="en-US" dirty="0"/>
+                  <a:t/>
+                </a:r>
+                <a:r>
+                  <a:rPr lang="en-US" altLang="zh-CN" dirty="0"/>
+                  <a:t/>
+                </a:r>
+                <a:r>
+                  <a:rPr lang="zh-CN" altLang="en-US" dirty="0"/>
+                  <a:t/>
+                </a:r>
+                <a:endParaRPr lang="zh-CN" altLang="en-US" dirty="0"/>
+              </a:p>
+            </p:txBody>
+          </p:sp>
+        </p:grpSp>
+        <p:grpSp>
+          <p:nvGrpSpPr>
+            <p:cNvPr id="22" name="组合 21"/>
+            <p:cNvGrpSpPr/>
+            <p:nvPr/>
+          </p:nvGrpSpPr>
+          <p:grpSpPr>
+            <a:xfrm>
+              <a:off x="1040" y="5994"/>
+              <a:ext cx="17100" cy="3666"/>
+              <a:chOff x="660400" y="1603756"/>
+              <a:chExt cx="10858500" cy="2328164"/>
+            </a:xfrm>
+          </p:grpSpPr>
+          <p:sp>
+            <p:nvSpPr>
+              <p:cNvPr id="23" name="矩形 22"/>
+              <p:cNvSpPr/>
+              <p:nvPr/>
+            </p:nvSpPr>
+            <p:spPr>
+              <a:xfrm>
+                <a:off x="660400" y="1813560"/>
+                <a:ext cx="10858500" cy="2118360"/>
+              </a:xfrm>
+              <a:prstGeom prst="rect">
+                <a:avLst/>
+              </a:prstGeom>
+              <a:solidFill>
+                <a:schemeClr val="accent1">
+                  <a:lumMod val="20000"/>
+                  <a:lumOff val="80000"/>
+                </a:schemeClr>
+              </a:solidFill>
+              <a:ln>
+                <a:noFill/>
+              </a:ln>
+            </p:spPr>
+            <p:style>
+              <a:lnRef idx="2">
+                <a:schemeClr val="accent1">
+                  <a:shade val="50000"/>
+                </a:schemeClr>
+              </a:lnRef>
+              <a:fillRef idx="1">
+                <a:schemeClr val="accent1"/>
+              </a:fillRef>
+              <a:effectRef idx="0">
+                <a:schemeClr val="accent1"/>
+              </a:effectRef>
+              <a:fontRef idx="minor">
+                <a:schemeClr val="lt1"/>
+              </a:fontRef>
+            </p:style>
+            <p:txBody>
+              <a:bodyPr rtlCol="0" anchor="ctr"/>
+              <a:p>
+                <a:pPr algn="ctr"/>
+                <a:endParaRPr lang="zh-CN" altLang="en-US"/>
+              </a:p>
+            </p:txBody>
+          </p:sp>
+          <p:pic>
+            <p:nvPicPr>
+              <p:cNvPr id="32" name="图片 31" descr="C:\Users\14638\Desktop\IMG_2588(20220923-102348).JPGIMG_2588(20220923-102348)"/>
+              <p:cNvPicPr/>
+              <p:nvPr/>
+            </p:nvPicPr>
+            <p:blipFill rotWithShape="1">
+              <a:blip r:embed="rId2"/>
+              <a:srcRect/>
+              <a:stretch>
+                <a:fillRect/>
+              </a:stretch>
+            </p:blipFill>
+            <p:spPr>
+              <a:xfrm>
+                <a:off x="989185" y="1603756"/>
+                <a:ext cx="2327910" cy="2328164"/>
+              </a:xfrm>
+              <a:prstGeom prst="rect">
+                <a:avLst/>
+              </a:prstGeom>
+            </p:spPr>
+          </p:pic>
+        </p:grpSp>
+        <p:grpSp>
+          <p:nvGrpSpPr>
+            <p:cNvPr id="35" name="组合 34"/>
+            <p:cNvGrpSpPr/>
+            <p:nvPr/>
+          </p:nvGrpSpPr>
+          <p:grpSpPr>
+            <a:xfrm>
+              <a:off x="5870" y="6635"/>
+              <a:ext cx="11773" cy="2744"/>
+              <a:chOff x="1188085" y="4304453"/>
+              <a:chExt cx="4283710" cy="1742315"/>
+            </a:xfrm>
+          </p:grpSpPr>
+          <p:sp>
+            <p:nvSpPr>
+              <p:cNvPr id="37" name="文本框 36"/>
+              <p:cNvSpPr txBox="1"/>
+              <p:nvPr/>
+            </p:nvSpPr>
+            <p:spPr>
+              <a:xfrm>
+                <a:off x="1188085" y="4304453"/>
+                <a:ext cx="2730844" cy="460375"/>
+              </a:xfrm>
+              <a:prstGeom prst="rect">
+                <a:avLst/>
+              </a:prstGeom>
+              <a:noFill/>
+            </p:spPr>
+            <p:txBody>
+              <a:bodyPr wrap="square" rtlCol="0">
+                <a:spAutoFit/>
+              </a:bodyPr>
+              <a:p>
+                <a:r>
+                  <a:rPr lang="zh-CN" altLang="en-US" sz="2400" b="1" dirty="0">
+                    <a:solidFill>
+                      <a:srgbClr val="25557A"/>
+                    </a:solidFill>
+                  </a:rPr>
+                  <a:t>实际实现（第 39 行）</a:t>
+                </a:r>
+                <a:endParaRPr lang="zh-CN" altLang="en-US" sz="2400" b="1" dirty="0">
+                  <a:solidFill>
+                    <a:schemeClr val="accent1"/>
+                  </a:solidFill>
+                </a:endParaRPr>
+              </a:p>
+            </p:txBody>
+          </p:sp>
+          <p:cxnSp>
+            <p:nvCxnSpPr>
+              <p:cNvPr id="38" name="直接连接符 37"/>
+              <p:cNvCxnSpPr/>
+              <p:nvPr/>
+            </p:nvCxnSpPr>
+            <p:spPr>
+              <a:xfrm>
+                <a:off x="1232903" y="4863908"/>
+                <a:ext cx="4097913" cy="0"/>
+              </a:xfrm>
+              <a:prstGeom prst="line">
+                <a:avLst/>
+              </a:prstGeom>
+              <a:ln w="25400">
+                <a:solidFill>
+                  <a:schemeClr val="bg1">
+                    <a:lumMod val="50000"/>
+                  </a:schemeClr>
+                </a:solidFill>
+              </a:ln>
+            </p:spPr>
+            <p:style>
+              <a:lnRef idx="1">
+                <a:schemeClr val="accent1"/>
+              </a:lnRef>
+              <a:fillRef idx="0">
+                <a:schemeClr val="accent1"/>
+              </a:fillRef>
+              <a:effectRef idx="0">
+                <a:schemeClr val="accent1"/>
+              </a:effectRef>
+              <a:fontRef idx="minor">
+                <a:schemeClr val="tx1"/>
+              </a:fontRef>
+            </p:style>
+          </p:cxnSp>
+          <p:sp>
+            <p:nvSpPr>
+              <p:cNvPr id="39" name="文本框 38"/>
+              <p:cNvSpPr txBox="1"/>
+              <p:nvPr/>
+            </p:nvSpPr>
+            <p:spPr>
+              <a:xfrm>
+                <a:off x="1188085" y="4903442"/>
+                <a:ext cx="4283710" cy="1143326"/>
+              </a:xfrm>
+              <a:prstGeom prst="rect">
+                <a:avLst/>
+              </a:prstGeom>
+              <a:noFill/>
+            </p:spPr>
+            <p:txBody>
+              <a:bodyPr wrap="square">
+                <a:spAutoFit/>
+              </a:bodyPr>
+              <a:p>
+                <a:pPr algn="just">
+                  <a:lnSpc>
+                    <a:spcPct val="130000"/>
+                  </a:lnSpc>
+                </a:pPr>
+                <a:r>
+                  <a:rPr lang="zh-CN" altLang="en-US" dirty="0"/>
+                  <a:t>但实现第 39 行对每一帧无条件执行 squeeze(-1)，实质只兼容四维输入。</a:t>
+                </a:r>
+                <a:r>
+                  <a:rPr lang="en-US" altLang="zh-CN" dirty="0"/>
+                  <a:t/>
+                </a:r>
+                <a:r>
+                  <a:rPr lang="zh-CN" altLang="en-US" dirty="0"/>
+                  <a:t/>
+                </a:r>
+                <a:r>
+                  <a:rPr lang="en-US" altLang="zh-CN" dirty="0"/>
+                  <a:t/>
+                </a:r>
+                <a:r>
+                  <a:rPr lang="zh-CN" altLang="en-US" dirty="0"/>
+                  <a:t/>
+                </a:r>
+                <a:r>
+                  <a:rPr lang="en-US" altLang="zh-CN" dirty="0"/>
+                  <a:t/>
+                </a:r>
+                <a:r>
+                  <a:rPr lang="zh-CN" altLang="en-US" dirty="0"/>
+                  <a:t/>
+                </a:r>
+                <a:r>
+                  <a:rPr lang="en-US" altLang="zh-CN" dirty="0"/>
+                  <a:t/>
+                </a:r>
+                <a:r>
+                  <a:rPr lang="zh-CN" altLang="en-US" dirty="0"/>
+                  <a:t/>
+                </a:r>
+                <a:r>
+                  <a:rPr lang="en-US" altLang="zh-CN" dirty="0"/>
+                  <a:t/>
+                </a:r>
+                <a:r>
+                  <a:rPr lang="zh-CN" altLang="en-US" dirty="0"/>
+                  <a:t/>
+                </a:r>
+                <a:r>
+                  <a:rPr lang="en-US" altLang="zh-CN" dirty="0"/>
+                  <a:t/>
+                </a:r>
+                <a:r>
+                  <a:rPr lang="zh-CN" altLang="en-US" dirty="0"/>
+                  <a:t/>
+                </a:r>
+                <a:r>
+                  <a:rPr lang="en-US" altLang="zh-CN" dirty="0"/>
+                  <a:t/>
+                </a:r>
+                <a:r>
+                  <a:rPr lang="zh-CN" altLang="en-US" dirty="0"/>
+                  <a:t/>
+                </a:r>
+                <a:r>
+                  <a:rPr lang="en-US" altLang="zh-CN" dirty="0"/>
+                  <a:t/>
+                </a:r>
+                <a:r>
+                  <a:rPr lang="zh-CN" altLang="en-US" dirty="0"/>
+                  <a:t/>
+                </a:r>
+                <a:endParaRPr lang="zh-CN" altLang="en-US" dirty="0"/>
+              </a:p>
+            </p:txBody>
+          </p:sp>
+        </p:grpSp>
+        <p:grpSp>
+          <p:nvGrpSpPr>
+            <p:cNvPr id="25" name="组合 24"/>
+            <p:cNvGrpSpPr/>
+            <p:nvPr/>
+          </p:nvGrpSpPr>
+          <p:grpSpPr>
+            <a:xfrm>
+              <a:off x="13940" y="1944"/>
+              <a:ext cx="3665" cy="3666"/>
+              <a:chOff x="13940" y="1944"/>
+              <a:chExt cx="3665" cy="3666"/>
+            </a:xfrm>
+          </p:grpSpPr>
+          <p:pic>
+            <p:nvPicPr>
+              <p:cNvPr id="40" name="图片 39" descr="C:\Users\14638\Desktop\IMG_2587(20220923-102336).JPGIMG_2587(20220923-102336)"/>
+              <p:cNvPicPr/>
+              <p:nvPr/>
+            </p:nvPicPr>
+            <p:blipFill rotWithShape="1">
+              <a:blip r:embed="rId3"/>
+              <a:srcRect/>
+              <a:stretch>
+                <a:fillRect/>
+              </a:stretch>
+            </p:blipFill>
+            <p:spPr>
+              <a:xfrm>
+                <a:off x="13940" y="1944"/>
+                <a:ext cx="3665" cy="3666"/>
+              </a:xfrm>
+              <a:prstGeom prst="rect">
+                <a:avLst/>
+              </a:prstGeom>
+            </p:spPr>
+          </p:pic>
+          <p:pic>
+            <p:nvPicPr>
+              <p:cNvPr id="18" name="图片 17" descr="小招logo"/>
+              <p:cNvPicPr>
+                <a:picLocks noChangeAspect="1"/>
+              </p:cNvPicPr>
+              <p:nvPr/>
+            </p:nvPicPr>
+            <p:blipFill>
+              <a:blip r:embed="rId4"/>
+              <a:stretch>
+                <a:fillRect/>
+              </a:stretch>
+            </p:blipFill>
+            <p:spPr>
+              <a:xfrm>
+                <a:off x="14922" y="4366"/>
+                <a:ext cx="1701" cy="952"/>
+              </a:xfrm>
+              <a:prstGeom prst="rect">
+                <a:avLst/>
+              </a:prstGeom>
+            </p:spPr>
+          </p:pic>
+        </p:grpSp>
+        <p:pic>
+          <p:nvPicPr>
+            <p:cNvPr id="24" name="图片 23" descr="小招logo"/>
+            <p:cNvPicPr>
+              <a:picLocks noChangeAspect="1"/>
+            </p:cNvPicPr>
+            <p:nvPr/>
+          </p:nvPicPr>
+          <p:blipFill>
+            <a:blip r:embed="rId4"/>
+            <a:stretch>
+              <a:fillRect/>
+            </a:stretch>
+          </p:blipFill>
+          <p:spPr>
+            <a:xfrm>
+              <a:off x="2541" y="8427"/>
+              <a:ext cx="1701" cy="952"/>
+            </a:xfrm>
+            <a:prstGeom prst="rect">
+              <a:avLst/>
+            </a:prstGeom>
+          </p:spPr>
+        </p:pic>
+      </p:grpSp>
     </p:spTree>
     <p:custDataLst>
-      <p:tags r:id="rId2"/>
+      <p:tags r:id="rId5"/>
     </p:custDataLst>
   </p:cSld>
   <p:clrMapOvr>
@@ -14125,7 +16778,7 @@
                   <a:latin typeface="微软雅黑" panose="020B0503020204020204" charset="-122"/>
                   <a:ea typeface="微软雅黑" panose="020B0503020204020204" charset="-122"/>
                 </a:rPr>
-                <a:t>测试方法</a:t>
+                <a:t>主要测试策略</a:t>
               </a:r>
               <a:endParaRPr lang="zh-CN" altLang="en-US" sz="6600" b="1" spc="300" dirty="0">
                 <a:latin typeface="微软雅黑" panose="020B0503020204020204" charset="-122"/>
@@ -14176,7 +16829,7 @@
                   <a:latin typeface="微软雅黑" panose="020B0503020204020204" charset="-122"/>
                   <a:ea typeface="微软雅黑" panose="020B0503020204020204" charset="-122"/>
                 </a:rPr>
-                <a:t>UNIQUENESS OF THE TEST METHOD</a:t>
+                <a:t>MAIN TEST STRATEGY</a:t>
               </a:r>
               <a:endParaRPr lang="en-US" altLang="zh-CN" sz="900" spc="600" dirty="0">
                 <a:solidFill>
@@ -14205,6 +16858,1272 @@
 <file path=ppt/slides/slide7.xml><?xml version="1.0" encoding="utf-8"?>
 <p:sld xmlns:a="http://schemas.openxmlformats.org/drawingml/2006/main" xmlns:r="http://schemas.openxmlformats.org/officeDocument/2006/relationships" xmlns:p="http://schemas.openxmlformats.org/presentationml/2006/main">
   <p:cSld>
+    <p:spTree>
+      <p:nvGrpSpPr>
+        <p:cNvPr id="1" name=""/>
+        <p:cNvGrpSpPr/>
+        <p:nvPr/>
+      </p:nvGrpSpPr>
+      <p:grpSpPr>
+        <a:xfrm>
+          <a:off x="0" y="0"/>
+          <a:ext cx="0" cy="0"/>
+          <a:chOff x="0" y="0"/>
+          <a:chExt cx="0" cy="0"/>
+        </a:xfrm>
+      </p:grpSpPr>
+      <p:grpSp>
+        <p:nvGrpSpPr>
+          <p:cNvPr id="4" name="组合 3"/>
+          <p:cNvGrpSpPr/>
+          <p:nvPr userDrawn="1"/>
+        </p:nvGrpSpPr>
+        <p:grpSpPr>
+          <a:xfrm>
+            <a:off x="10289667" y="-801077"/>
+            <a:ext cx="1902333" cy="2044520"/>
+            <a:chOff x="8135783" y="-1669981"/>
+            <a:chExt cx="4056217" cy="4359393"/>
+          </a:xfrm>
+        </p:grpSpPr>
+        <p:sp>
+          <p:nvSpPr>
+            <p:cNvPr id="7" name="任意多边形: 形状 10"/>
+            <p:cNvSpPr/>
+            <p:nvPr/>
+          </p:nvSpPr>
+          <p:spPr>
+            <a:xfrm rot="18900000">
+              <a:off x="8135783" y="-1669981"/>
+              <a:ext cx="3339963" cy="3339962"/>
+            </a:xfrm>
+            <a:custGeom>
+              <a:avLst/>
+              <a:gdLst>
+                <a:gd name="connsiteX0" fmla="*/ 0 w 3339963"/>
+                <a:gd name="connsiteY0" fmla="*/ 0 h 3339962"/>
+                <a:gd name="connsiteX1" fmla="*/ 3339963 w 3339963"/>
+                <a:gd name="connsiteY1" fmla="*/ 3339962 h 3339962"/>
+                <a:gd name="connsiteX2" fmla="*/ 1099563 w 3339963"/>
+                <a:gd name="connsiteY2" fmla="*/ 3339962 h 3339962"/>
+              </a:gdLst>
+              <a:ahLst/>
+              <a:cxnLst>
+                <a:cxn ang="0">
+                  <a:pos x="connsiteX0" y="connsiteY0"/>
+                </a:cxn>
+                <a:cxn ang="0">
+                  <a:pos x="connsiteX1" y="connsiteY1"/>
+                </a:cxn>
+                <a:cxn ang="0">
+                  <a:pos x="connsiteX2" y="connsiteY2"/>
+                </a:cxn>
+              </a:cxnLst>
+              <a:rect l="l" t="t" r="r" b="b"/>
+              <a:pathLst>
+                <a:path w="3339963" h="3339962">
+                  <a:moveTo>
+                    <a:pt x="0" y="0"/>
+                  </a:moveTo>
+                  <a:lnTo>
+                    <a:pt x="3339963" y="3339962"/>
+                  </a:lnTo>
+                  <a:lnTo>
+                    <a:pt x="1099563" y="3339962"/>
+                  </a:lnTo>
+                  <a:close/>
+                </a:path>
+              </a:pathLst>
+            </a:custGeom>
+            <a:solidFill>
+              <a:schemeClr val="accent1">
+                <a:lumMod val="20000"/>
+                <a:lumOff val="80000"/>
+              </a:schemeClr>
+            </a:solidFill>
+            <a:ln>
+              <a:noFill/>
+            </a:ln>
+          </p:spPr>
+          <p:style>
+            <a:lnRef idx="2">
+              <a:schemeClr val="accent1">
+                <a:shade val="50000"/>
+              </a:schemeClr>
+            </a:lnRef>
+            <a:fillRef idx="1">
+              <a:schemeClr val="accent1"/>
+            </a:fillRef>
+            <a:effectRef idx="0">
+              <a:schemeClr val="accent1"/>
+            </a:effectRef>
+            <a:fontRef idx="minor">
+              <a:schemeClr val="lt1"/>
+            </a:fontRef>
+          </p:style>
+          <p:txBody>
+            <a:bodyPr rtlCol="0" anchor="ctr"/>
+            <a:p>
+              <a:pPr algn="ctr"/>
+              <a:endParaRPr lang="zh-CN" altLang="en-US"/>
+            </a:p>
+          </p:txBody>
+        </p:sp>
+        <p:sp>
+          <p:nvSpPr>
+            <p:cNvPr id="5" name="直角三角形 4"/>
+            <p:cNvSpPr/>
+            <p:nvPr/>
+          </p:nvSpPr>
+          <p:spPr>
+            <a:xfrm rot="10800000">
+              <a:off x="9502588" y="0"/>
+              <a:ext cx="2689412" cy="2689412"/>
+            </a:xfrm>
+            <a:prstGeom prst="rtTriangle">
+              <a:avLst/>
+            </a:prstGeom>
+            <a:solidFill>
+              <a:srgbClr val="25557A"/>
+            </a:solidFill>
+            <a:ln>
+              <a:noFill/>
+            </a:ln>
+          </p:spPr>
+          <p:style>
+            <a:lnRef idx="2">
+              <a:schemeClr val="accent1">
+                <a:shade val="50000"/>
+              </a:schemeClr>
+            </a:lnRef>
+            <a:fillRef idx="1">
+              <a:schemeClr val="accent1"/>
+            </a:fillRef>
+            <a:effectRef idx="0">
+              <a:schemeClr val="accent1"/>
+            </a:effectRef>
+            <a:fontRef idx="minor">
+              <a:schemeClr val="lt1"/>
+            </a:fontRef>
+          </p:style>
+          <p:txBody>
+            <a:bodyPr rtlCol="0" anchor="ctr"/>
+            <a:p>
+              <a:pPr algn="ctr"/>
+              <a:endParaRPr lang="zh-CN" altLang="en-US"/>
+            </a:p>
+          </p:txBody>
+        </p:sp>
+      </p:grpSp>
+      <p:grpSp>
+        <p:nvGrpSpPr>
+          <p:cNvPr id="6" name="组合 5"/>
+          <p:cNvGrpSpPr/>
+          <p:nvPr/>
+        </p:nvGrpSpPr>
+        <p:grpSpPr>
+          <a:xfrm>
+            <a:off x="351155" y="325120"/>
+            <a:ext cx="4559300" cy="1015365"/>
+            <a:chOff x="1572" y="494"/>
+            <a:chExt cx="7180" cy="1599"/>
+          </a:xfrm>
+        </p:grpSpPr>
+        <p:grpSp>
+          <p:nvGrpSpPr>
+            <p:cNvPr id="8" name="组合 7"/>
+            <p:cNvGrpSpPr/>
+            <p:nvPr/>
+          </p:nvGrpSpPr>
+          <p:grpSpPr>
+            <a:xfrm>
+              <a:off x="1572" y="494"/>
+              <a:ext cx="2047" cy="1599"/>
+              <a:chOff x="2761095" y="2248418"/>
+              <a:chExt cx="1948563" cy="1522661"/>
+            </a:xfrm>
+          </p:grpSpPr>
+          <p:sp>
+            <p:nvSpPr>
+              <p:cNvPr id="9" name="矩形: 圆角 24"/>
+              <p:cNvSpPr/>
+              <p:nvPr/>
+            </p:nvSpPr>
+            <p:spPr>
+              <a:xfrm rot="2244181">
+                <a:off x="2903192" y="2466308"/>
+                <a:ext cx="1156758" cy="366949"/>
+              </a:xfrm>
+              <a:prstGeom prst="roundRect">
+                <a:avLst>
+                  <a:gd name="adj" fmla="val 33648"/>
+                </a:avLst>
+              </a:prstGeom>
+              <a:solidFill>
+                <a:srgbClr val="25557A"/>
+              </a:solidFill>
+              <a:ln>
+                <a:noFill/>
+              </a:ln>
+            </p:spPr>
+            <p:style>
+              <a:lnRef idx="2">
+                <a:schemeClr val="accent1">
+                  <a:shade val="50000"/>
+                </a:schemeClr>
+              </a:lnRef>
+              <a:fillRef idx="1">
+                <a:schemeClr val="accent1"/>
+              </a:fillRef>
+              <a:effectRef idx="0">
+                <a:schemeClr val="accent1"/>
+              </a:effectRef>
+              <a:fontRef idx="minor">
+                <a:schemeClr val="lt1"/>
+              </a:fontRef>
+            </p:style>
+            <p:txBody>
+              <a:bodyPr rot="0" spcFirstLastPara="0" vertOverflow="overflow" horzOverflow="overflow" vert="horz" wrap="square" lIns="91440" tIns="45720" rIns="91440" bIns="45720" numCol="1" spcCol="0" rtlCol="0" fromWordArt="0" anchor="ctr" anchorCtr="0" forceAA="0" compatLnSpc="1">
+                <a:noAutofit/>
+              </a:bodyPr>
+              <a:p>
+                <a:pPr algn="ctr"/>
+                <a:endParaRPr lang="zh-CN" altLang="en-US" sz="1100">
+                  <a:latin typeface="微软雅黑" panose="020B0503020204020204" charset="-122"/>
+                  <a:ea typeface="微软雅黑" panose="020B0503020204020204" charset="-122"/>
+                  <a:cs typeface="+mn-ea"/>
+                  <a:sym typeface="+mn-lt"/>
+                </a:endParaRPr>
+              </a:p>
+            </p:txBody>
+          </p:sp>
+          <p:sp>
+            <p:nvSpPr>
+              <p:cNvPr id="26" name="矩形: 圆角 25"/>
+              <p:cNvSpPr/>
+              <p:nvPr/>
+            </p:nvSpPr>
+            <p:spPr>
+              <a:xfrm rot="2244181">
+                <a:off x="2761095" y="2996622"/>
+                <a:ext cx="1156758" cy="366949"/>
+              </a:xfrm>
+              <a:prstGeom prst="roundRect">
+                <a:avLst>
+                  <a:gd name="adj" fmla="val 33648"/>
+                </a:avLst>
+              </a:prstGeom>
+              <a:solidFill>
+                <a:srgbClr val="25557A"/>
+              </a:solidFill>
+              <a:ln>
+                <a:noFill/>
+              </a:ln>
+            </p:spPr>
+            <p:style>
+              <a:lnRef idx="2">
+                <a:schemeClr val="accent1">
+                  <a:shade val="50000"/>
+                </a:schemeClr>
+              </a:lnRef>
+              <a:fillRef idx="1">
+                <a:schemeClr val="accent1"/>
+              </a:fillRef>
+              <a:effectRef idx="0">
+                <a:schemeClr val="accent1"/>
+              </a:effectRef>
+              <a:fontRef idx="minor">
+                <a:schemeClr val="lt1"/>
+              </a:fontRef>
+            </p:style>
+            <p:txBody>
+              <a:bodyPr rot="0" spcFirstLastPara="0" vertOverflow="overflow" horzOverflow="overflow" vert="horz" wrap="square" lIns="91440" tIns="45720" rIns="91440" bIns="45720" numCol="1" spcCol="0" rtlCol="0" fromWordArt="0" anchor="ctr" anchorCtr="0" forceAA="0" compatLnSpc="1">
+                <a:noAutofit/>
+              </a:bodyPr>
+              <a:p>
+                <a:pPr algn="ctr"/>
+                <a:endParaRPr lang="zh-CN" altLang="en-US" sz="1100">
+                  <a:latin typeface="微软雅黑" panose="020B0503020204020204" charset="-122"/>
+                  <a:ea typeface="微软雅黑" panose="020B0503020204020204" charset="-122"/>
+                  <a:cs typeface="+mn-ea"/>
+                  <a:sym typeface="+mn-lt"/>
+                </a:endParaRPr>
+              </a:p>
+            </p:txBody>
+          </p:sp>
+          <p:sp>
+            <p:nvSpPr>
+              <p:cNvPr id="10" name="文本框 9"/>
+              <p:cNvSpPr txBox="1"/>
+              <p:nvPr/>
+            </p:nvSpPr>
+            <p:spPr>
+              <a:xfrm>
+                <a:off x="2910670" y="2248418"/>
+                <a:ext cx="1798988" cy="1522661"/>
+              </a:xfrm>
+              <a:prstGeom prst="rect">
+                <a:avLst/>
+              </a:prstGeom>
+              <a:noFill/>
+            </p:spPr>
+            <p:txBody>
+              <a:bodyPr wrap="square" rtlCol="0">
+                <a:spAutoFit/>
+              </a:bodyPr>
+              <a:p>
+                <a:r>
+                  <a:rPr lang="en-US" altLang="zh-CN" sz="6000" dirty="0">
+                    <a:solidFill>
+                      <a:schemeClr val="bg1"/>
+                    </a:solidFill>
+                    <a:effectLst>
+                      <a:outerShdw blurRad="38100" dist="38100" dir="2700000" algn="tl">
+                        <a:srgbClr val="000000">
+                          <a:alpha val="43137"/>
+                        </a:srgbClr>
+                      </a:outerShdw>
+                    </a:effectLst>
+                    <a:latin typeface="微软雅黑" panose="020B0503020204020204" charset="-122"/>
+                    <a:ea typeface="微软雅黑" panose="020B0503020204020204" charset="-122"/>
+                  </a:rPr>
+                  <a:t>P</a:t>
+                </a:r>
+                <a:endParaRPr lang="en-US" altLang="zh-CN" sz="6000" dirty="0">
+                  <a:solidFill>
+                    <a:schemeClr val="bg1"/>
+                  </a:solidFill>
+                  <a:effectLst>
+                    <a:outerShdw blurRad="38100" dist="38100" dir="2700000" algn="tl">
+                      <a:srgbClr val="000000">
+                        <a:alpha val="43137"/>
+                      </a:srgbClr>
+                    </a:outerShdw>
+                  </a:effectLst>
+                  <a:latin typeface="微软雅黑" panose="020B0503020204020204" charset="-122"/>
+                  <a:ea typeface="微软雅黑" panose="020B0503020204020204" charset="-122"/>
+                </a:endParaRPr>
+              </a:p>
+            </p:txBody>
+          </p:sp>
+        </p:grpSp>
+        <p:sp>
+          <p:nvSpPr>
+            <p:cNvPr id="11" name="矩形 10"/>
+            <p:cNvSpPr/>
+            <p:nvPr/>
+          </p:nvSpPr>
+          <p:spPr>
+            <a:xfrm>
+              <a:off x="3078" y="751"/>
+              <a:ext cx="3788" cy="919"/>
+            </a:xfrm>
+            <a:prstGeom prst="rect">
+              <a:avLst/>
+            </a:prstGeom>
+          </p:spPr>
+          <p:txBody>
+            <a:bodyPr wrap="none">
+              <a:spAutoFit/>
+            </a:bodyPr>
+            <a:p>
+              <a:r>
+                <a:rPr lang="zh-CN" altLang="en-US" sz="3200" b="1" spc="300" dirty="0">
+                  <a:latin typeface="微软雅黑" panose="020B0503020204020204" charset="-122"/>
+                  <a:ea typeface="微软雅黑" panose="020B0503020204020204" charset="-122"/>
+                </a:rPr>
+                <a:t>等价类 + 边界值：两种经典方法打底</a:t>
+              </a:r>
+              <a:endParaRPr lang="zh-CN" altLang="en-US" sz="3200" b="1" spc="300" dirty="0">
+                <a:latin typeface="微软雅黑" panose="020B0503020204020204" charset="-122"/>
+                <a:ea typeface="微软雅黑" panose="020B0503020204020204" charset="-122"/>
+              </a:endParaRPr>
+            </a:p>
+          </p:txBody>
+        </p:sp>
+        <p:sp>
+          <p:nvSpPr>
+            <p:cNvPr id="29" name="文本框 28"/>
+            <p:cNvSpPr txBox="1"/>
+            <p:nvPr/>
+          </p:nvSpPr>
+          <p:spPr>
+            <a:xfrm>
+              <a:off x="3107" y="1365"/>
+              <a:ext cx="5645" cy="580"/>
+            </a:xfrm>
+            <a:prstGeom prst="rect">
+              <a:avLst/>
+            </a:prstGeom>
+            <a:noFill/>
+          </p:spPr>
+          <p:txBody>
+            <a:bodyPr wrap="square">
+              <a:spAutoFit/>
+            </a:bodyPr>
+            <a:p>
+              <a:endParaRPr lang="en-US" altLang="zh-CN" sz="900" spc="300" dirty="0">
+                <a:solidFill>
+                  <a:schemeClr val="bg1">
+                    <a:lumMod val="50000"/>
+                  </a:schemeClr>
+                </a:solidFill>
+                <a:latin typeface="微软雅黑" panose="020B0503020204020204" charset="-122"/>
+                <a:ea typeface="微软雅黑" panose="020B0503020204020204" charset="-122"/>
+              </a:endParaRPr>
+            </a:p>
+            <a:p>
+              <a:r>
+                <a:rPr lang="en-US" altLang="zh-CN" sz="900" spc="300" dirty="0">
+                  <a:solidFill>
+                    <a:schemeClr val="bg1">
+                      <a:lumMod val="50000"/>
+                    </a:schemeClr>
+                  </a:solidFill>
+                  <a:latin typeface="微软雅黑" panose="020B0503020204020204" charset="-122"/>
+                  <a:ea typeface="微软雅黑" panose="020B0503020204020204" charset="-122"/>
+                </a:rPr>
+                <a:t>TWO CORE METHODS</a:t>
+              </a:r>
+              <a:endParaRPr lang="en-US" altLang="zh-CN" sz="900" spc="300" dirty="0">
+                <a:solidFill>
+                  <a:schemeClr val="bg1">
+                    <a:lumMod val="50000"/>
+                  </a:schemeClr>
+                </a:solidFill>
+                <a:latin typeface="微软雅黑" panose="020B0503020204020204" charset="-122"/>
+                <a:ea typeface="微软雅黑" panose="020B0503020204020204" charset="-122"/>
+              </a:endParaRPr>
+            </a:p>
+          </p:txBody>
+        </p:sp>
+      </p:grpSp>
+      <p:sp>
+        <p:nvSpPr>
+          <p:cNvPr id="2" name="矩形 1"/>
+          <p:cNvSpPr/>
+          <p:nvPr/>
+        </p:nvSpPr>
+        <p:spPr>
+          <a:xfrm>
+            <a:off x="1092200" y="1900980"/>
+            <a:ext cx="2299929" cy="3559277"/>
+          </a:xfrm>
+          <a:prstGeom prst="rect">
+            <a:avLst/>
+          </a:prstGeom>
+          <a:solidFill>
+            <a:srgbClr val="25557A"/>
+          </a:solidFill>
+          <a:ln>
+            <a:noFill/>
+          </a:ln>
+        </p:spPr>
+        <p:style>
+          <a:lnRef idx="2">
+            <a:schemeClr val="accent1">
+              <a:shade val="50000"/>
+            </a:schemeClr>
+          </a:lnRef>
+          <a:fillRef idx="1">
+            <a:schemeClr val="accent1"/>
+          </a:fillRef>
+          <a:effectRef idx="0">
+            <a:schemeClr val="accent1"/>
+          </a:effectRef>
+          <a:fontRef idx="minor">
+            <a:schemeClr val="lt1"/>
+          </a:fontRef>
+        </p:style>
+        <p:txBody>
+          <a:bodyPr rtlCol="0" anchor="ctr"/>
+          <a:p>
+            <a:pPr algn="ctr"/>
+            <a:endParaRPr lang="zh-CN" altLang="en-US">
+              <a:latin typeface="微软雅黑" panose="020B0503020204020204" charset="-122"/>
+              <a:ea typeface="微软雅黑" panose="020B0503020204020204" charset="-122"/>
+            </a:endParaRPr>
+          </a:p>
+        </p:txBody>
+      </p:sp>
+      <p:sp>
+        <p:nvSpPr>
+          <p:cNvPr id="3" name="文本框 2"/>
+          <p:cNvSpPr txBox="1"/>
+          <p:nvPr/>
+        </p:nvSpPr>
+        <p:spPr>
+          <a:xfrm>
+            <a:off x="1693522" y="2200283"/>
+            <a:ext cx="1097280" cy="460375"/>
+          </a:xfrm>
+          <a:prstGeom prst="rect">
+            <a:avLst/>
+          </a:prstGeom>
+          <a:noFill/>
+        </p:spPr>
+        <p:txBody>
+          <a:bodyPr wrap="none" rtlCol="0">
+            <a:spAutoFit/>
+          </a:bodyPr>
+          <a:p>
+            <a:pPr algn="ctr"/>
+            <a:r>
+              <a:rPr lang="zh-CN" altLang="en-US" sz="2400" b="1">
+                <a:solidFill>
+                  <a:schemeClr val="bg1"/>
+                </a:solidFill>
+                <a:latin typeface="微软雅黑" panose="020B0503020204020204" charset="-122"/>
+                <a:ea typeface="微软雅黑" panose="020B0503020204020204" charset="-122"/>
+              </a:rPr>
+              <a:t>等价类划分</a:t>
+            </a:r>
+            <a:endParaRPr lang="zh-CN" altLang="en-US" sz="2400" b="1">
+              <a:solidFill>
+                <a:schemeClr val="bg1"/>
+              </a:solidFill>
+              <a:latin typeface="微软雅黑" panose="020B0503020204020204" charset="-122"/>
+              <a:ea typeface="微软雅黑" panose="020B0503020204020204" charset="-122"/>
+            </a:endParaRPr>
+          </a:p>
+        </p:txBody>
+      </p:sp>
+      <p:sp>
+        <p:nvSpPr>
+          <p:cNvPr id="17" name="文本框 16"/>
+          <p:cNvSpPr txBox="1"/>
+          <p:nvPr/>
+        </p:nvSpPr>
+        <p:spPr>
+          <a:xfrm>
+            <a:off x="1263853" y="2961251"/>
+            <a:ext cx="1956619" cy="2267865"/>
+          </a:xfrm>
+          <a:prstGeom prst="rect">
+            <a:avLst/>
+          </a:prstGeom>
+          <a:noFill/>
+        </p:spPr>
+        <p:txBody>
+          <a:bodyPr wrap="square" rtlCol="0">
+            <a:spAutoFit/>
+          </a:bodyPr>
+          <a:p>
+            <a:pPr algn="just">
+              <a:lnSpc>
+                <a:spcPct val="150000"/>
+              </a:lnSpc>
+            </a:pPr>
+            <a:r>
+              <a:rPr lang="zh-CN" altLang="en-US" sz="1600">
+                <a:solidFill>
+                  <a:schemeClr val="bg1"/>
+                </a:solidFill>
+                <a:latin typeface="微软雅黑" panose="020B0503020204020204" charset="-122"/>
+                <a:ea typeface="微软雅黑" panose="020B0503020204020204" charset="-122"/>
+              </a:rPr>
+              <a:t>按输入维度切有效/无效类：尺寸、帧数、坐标系、类型，共 19 条。</a:t>
+            </a:r>
+            <a:endParaRPr lang="zh-CN" altLang="en-US" sz="1600">
+              <a:solidFill>
+                <a:schemeClr val="bg1"/>
+              </a:solidFill>
+              <a:latin typeface="微软雅黑" panose="020B0503020204020204" charset="-122"/>
+              <a:ea typeface="微软雅黑" panose="020B0503020204020204" charset="-122"/>
+            </a:endParaRPr>
+          </a:p>
+        </p:txBody>
+      </p:sp>
+      <p:cxnSp>
+        <p:nvCxnSpPr>
+          <p:cNvPr id="14" name="直接连接符 13"/>
+          <p:cNvCxnSpPr/>
+          <p:nvPr/>
+        </p:nvCxnSpPr>
+        <p:spPr>
+          <a:xfrm>
+            <a:off x="1466630" y="2811599"/>
+            <a:ext cx="1551069" cy="0"/>
+          </a:xfrm>
+          <a:prstGeom prst="line">
+            <a:avLst/>
+          </a:prstGeom>
+          <a:ln w="19050">
+            <a:gradFill flip="none" rotWithShape="1">
+              <a:gsLst>
+                <a:gs pos="0">
+                  <a:srgbClr val="32416B">
+                    <a:alpha val="0"/>
+                  </a:srgbClr>
+                </a:gs>
+                <a:gs pos="50000">
+                  <a:schemeClr val="bg1"/>
+                </a:gs>
+                <a:gs pos="100000">
+                  <a:srgbClr val="32416B">
+                    <a:alpha val="0"/>
+                  </a:srgbClr>
+                </a:gs>
+              </a:gsLst>
+              <a:lin ang="0" scaled="1"/>
+              <a:tileRect/>
+            </a:gradFill>
+          </a:ln>
+        </p:spPr>
+        <p:style>
+          <a:lnRef idx="1">
+            <a:schemeClr val="accent1"/>
+          </a:lnRef>
+          <a:fillRef idx="0">
+            <a:schemeClr val="accent1"/>
+          </a:fillRef>
+          <a:effectRef idx="0">
+            <a:schemeClr val="accent1"/>
+          </a:effectRef>
+          <a:fontRef idx="minor">
+            <a:schemeClr val="tx1"/>
+          </a:fontRef>
+        </p:style>
+      </p:cxnSp>
+      <p:sp>
+        <p:nvSpPr>
+          <p:cNvPr id="16" name="矩形 15"/>
+          <p:cNvSpPr/>
+          <p:nvPr/>
+        </p:nvSpPr>
+        <p:spPr>
+          <a:xfrm>
+            <a:off x="3661424" y="1900980"/>
+            <a:ext cx="2299929" cy="3559277"/>
+          </a:xfrm>
+          <a:prstGeom prst="rect">
+            <a:avLst/>
+          </a:prstGeom>
+          <a:solidFill>
+            <a:schemeClr val="accent1">
+              <a:lumMod val="20000"/>
+              <a:lumOff val="80000"/>
+            </a:schemeClr>
+          </a:solidFill>
+          <a:ln>
+            <a:noFill/>
+          </a:ln>
+        </p:spPr>
+        <p:style>
+          <a:lnRef idx="2">
+            <a:schemeClr val="accent1">
+              <a:shade val="50000"/>
+            </a:schemeClr>
+          </a:lnRef>
+          <a:fillRef idx="1">
+            <a:schemeClr val="accent1"/>
+          </a:fillRef>
+          <a:effectRef idx="0">
+            <a:schemeClr val="accent1"/>
+          </a:effectRef>
+          <a:fontRef idx="minor">
+            <a:schemeClr val="lt1"/>
+          </a:fontRef>
+        </p:style>
+        <p:txBody>
+          <a:bodyPr rtlCol="0" anchor="ctr"/>
+          <a:p>
+            <a:pPr algn="ctr"/>
+            <a:endParaRPr lang="zh-CN" altLang="en-US">
+              <a:latin typeface="微软雅黑" panose="020B0503020204020204" charset="-122"/>
+              <a:ea typeface="微软雅黑" panose="020B0503020204020204" charset="-122"/>
+            </a:endParaRPr>
+          </a:p>
+        </p:txBody>
+      </p:sp>
+      <p:sp>
+        <p:nvSpPr>
+          <p:cNvPr id="20" name="文本框 19"/>
+          <p:cNvSpPr txBox="1"/>
+          <p:nvPr/>
+        </p:nvSpPr>
+        <p:spPr>
+          <a:xfrm>
+            <a:off x="4262745" y="2200283"/>
+            <a:ext cx="1097280" cy="460375"/>
+          </a:xfrm>
+          <a:prstGeom prst="rect">
+            <a:avLst/>
+          </a:prstGeom>
+          <a:noFill/>
+        </p:spPr>
+        <p:txBody>
+          <a:bodyPr wrap="none" rtlCol="0">
+            <a:spAutoFit/>
+          </a:bodyPr>
+          <a:p>
+            <a:pPr algn="ctr"/>
+            <a:r>
+              <a:rPr lang="zh-CN" altLang="en-US" sz="2400" b="1">
+                <a:solidFill>
+                  <a:schemeClr val="tx1">
+                    <a:lumMod val="85000"/>
+                    <a:lumOff val="15000"/>
+                  </a:schemeClr>
+                </a:solidFill>
+                <a:latin typeface="微软雅黑" panose="020B0503020204020204" charset="-122"/>
+                <a:ea typeface="微软雅黑" panose="020B0503020204020204" charset="-122"/>
+              </a:rPr>
+              <a:t>边界值分析</a:t>
+            </a:r>
+            <a:endParaRPr lang="zh-CN" altLang="en-US" sz="2400" b="1">
+              <a:solidFill>
+                <a:schemeClr val="tx1">
+                  <a:lumMod val="85000"/>
+                  <a:lumOff val="15000"/>
+                </a:schemeClr>
+              </a:solidFill>
+              <a:latin typeface="微软雅黑" panose="020B0503020204020204" charset="-122"/>
+              <a:ea typeface="微软雅黑" panose="020B0503020204020204" charset="-122"/>
+            </a:endParaRPr>
+          </a:p>
+        </p:txBody>
+      </p:sp>
+      <p:sp>
+        <p:nvSpPr>
+          <p:cNvPr id="42" name="文本框 41"/>
+          <p:cNvSpPr txBox="1"/>
+          <p:nvPr/>
+        </p:nvSpPr>
+        <p:spPr>
+          <a:xfrm>
+            <a:off x="3833077" y="2961251"/>
+            <a:ext cx="1956619" cy="2267865"/>
+          </a:xfrm>
+          <a:prstGeom prst="rect">
+            <a:avLst/>
+          </a:prstGeom>
+          <a:noFill/>
+        </p:spPr>
+        <p:txBody>
+          <a:bodyPr wrap="square" rtlCol="0">
+            <a:spAutoFit/>
+          </a:bodyPr>
+          <a:p>
+            <a:pPr algn="just">
+              <a:lnSpc>
+                <a:spcPct val="150000"/>
+              </a:lnSpc>
+            </a:pPr>
+            <a:r>
+              <a:rPr lang="zh-CN" altLang="en-US" sz="1600">
+                <a:solidFill>
+                  <a:schemeClr val="tx1">
+                    <a:lumMod val="85000"/>
+                    <a:lumOff val="15000"/>
+                  </a:schemeClr>
+                </a:solidFill>
+                <a:latin typeface="微软雅黑" panose="020B0503020204020204" charset="-122"/>
+                <a:ea typeface="微软雅黑" panose="020B0503020204020204" charset="-122"/>
+              </a:rPr>
+              <a:t>专攻临界点：图像四角、深度 0、矩阵尺寸、eps±、Z=0，共 5 条。</a:t>
+            </a:r>
+            <a:endParaRPr lang="zh-CN" altLang="en-US" sz="1600">
+              <a:solidFill>
+                <a:schemeClr val="tx1">
+                  <a:lumMod val="85000"/>
+                  <a:lumOff val="15000"/>
+                </a:schemeClr>
+              </a:solidFill>
+              <a:latin typeface="微软雅黑" panose="020B0503020204020204" charset="-122"/>
+              <a:ea typeface="微软雅黑" panose="020B0503020204020204" charset="-122"/>
+            </a:endParaRPr>
+          </a:p>
+        </p:txBody>
+      </p:sp>
+      <p:cxnSp>
+        <p:nvCxnSpPr>
+          <p:cNvPr id="21" name="直接连接符 20"/>
+          <p:cNvCxnSpPr/>
+          <p:nvPr/>
+        </p:nvCxnSpPr>
+        <p:spPr>
+          <a:xfrm>
+            <a:off x="4035854" y="2811599"/>
+            <a:ext cx="1551069" cy="0"/>
+          </a:xfrm>
+          <a:prstGeom prst="line">
+            <a:avLst/>
+          </a:prstGeom>
+          <a:ln w="19050">
+            <a:gradFill flip="none" rotWithShape="1">
+              <a:gsLst>
+                <a:gs pos="0">
+                  <a:srgbClr val="32416B">
+                    <a:alpha val="0"/>
+                  </a:srgbClr>
+                </a:gs>
+                <a:gs pos="50000">
+                  <a:srgbClr val="32416B"/>
+                </a:gs>
+                <a:gs pos="100000">
+                  <a:srgbClr val="32416B">
+                    <a:alpha val="0"/>
+                  </a:srgbClr>
+                </a:gs>
+              </a:gsLst>
+              <a:lin ang="0" scaled="1"/>
+              <a:tileRect/>
+            </a:gradFill>
+          </a:ln>
+        </p:spPr>
+        <p:style>
+          <a:lnRef idx="1">
+            <a:schemeClr val="accent1"/>
+          </a:lnRef>
+          <a:fillRef idx="0">
+            <a:schemeClr val="accent1"/>
+          </a:fillRef>
+          <a:effectRef idx="0">
+            <a:schemeClr val="accent1"/>
+          </a:effectRef>
+          <a:fontRef idx="minor">
+            <a:schemeClr val="tx1"/>
+          </a:fontRef>
+        </p:style>
+      </p:cxnSp>
+      <p:sp>
+        <p:nvSpPr>
+          <p:cNvPr id="46" name="矩形 45"/>
+          <p:cNvSpPr/>
+          <p:nvPr/>
+        </p:nvSpPr>
+        <p:spPr>
+          <a:xfrm>
+            <a:off x="6230648" y="1900980"/>
+            <a:ext cx="2299929" cy="3559277"/>
+          </a:xfrm>
+          <a:prstGeom prst="rect">
+            <a:avLst/>
+          </a:prstGeom>
+          <a:solidFill>
+            <a:srgbClr val="25557A"/>
+          </a:solidFill>
+          <a:ln>
+            <a:noFill/>
+          </a:ln>
+        </p:spPr>
+        <p:style>
+          <a:lnRef idx="2">
+            <a:schemeClr val="accent1">
+              <a:shade val="50000"/>
+            </a:schemeClr>
+          </a:lnRef>
+          <a:fillRef idx="1">
+            <a:schemeClr val="accent1"/>
+          </a:fillRef>
+          <a:effectRef idx="0">
+            <a:schemeClr val="accent1"/>
+          </a:effectRef>
+          <a:fontRef idx="minor">
+            <a:schemeClr val="lt1"/>
+          </a:fontRef>
+        </p:style>
+        <p:txBody>
+          <a:bodyPr rtlCol="0" anchor="ctr"/>
+          <a:p>
+            <a:pPr algn="ctr"/>
+            <a:endParaRPr lang="zh-CN" altLang="en-US">
+              <a:latin typeface="微软雅黑" panose="020B0503020204020204" charset="-122"/>
+              <a:ea typeface="微软雅黑" panose="020B0503020204020204" charset="-122"/>
+            </a:endParaRPr>
+          </a:p>
+        </p:txBody>
+      </p:sp>
+      <p:sp>
+        <p:nvSpPr>
+          <p:cNvPr id="22" name="文本框 21"/>
+          <p:cNvSpPr txBox="1"/>
+          <p:nvPr/>
+        </p:nvSpPr>
+        <p:spPr>
+          <a:xfrm>
+            <a:off x="6831970" y="2200283"/>
+            <a:ext cx="1097280" cy="460375"/>
+          </a:xfrm>
+          <a:prstGeom prst="rect">
+            <a:avLst/>
+          </a:prstGeom>
+          <a:noFill/>
+        </p:spPr>
+        <p:txBody>
+          <a:bodyPr wrap="none" rtlCol="0">
+            <a:spAutoFit/>
+          </a:bodyPr>
+          <a:p>
+            <a:pPr algn="ctr"/>
+            <a:r>
+              <a:rPr lang="zh-CN" altLang="en-US" sz="2400" b="1">
+                <a:solidFill>
+                  <a:schemeClr val="bg1"/>
+                </a:solidFill>
+                <a:latin typeface="微软雅黑" panose="020B0503020204020204" charset="-122"/>
+                <a:ea typeface="微软雅黑" panose="020B0503020204020204" charset="-122"/>
+              </a:rPr>
+              <a:t>组合覆盖</a:t>
+            </a:r>
+            <a:endParaRPr lang="zh-CN" altLang="en-US" sz="2400" b="1">
+              <a:solidFill>
+                <a:schemeClr val="bg1"/>
+              </a:solidFill>
+              <a:latin typeface="微软雅黑" panose="020B0503020204020204" charset="-122"/>
+              <a:ea typeface="微软雅黑" panose="020B0503020204020204" charset="-122"/>
+            </a:endParaRPr>
+          </a:p>
+        </p:txBody>
+      </p:sp>
+      <p:sp>
+        <p:nvSpPr>
+          <p:cNvPr id="48" name="文本框 47"/>
+          <p:cNvSpPr txBox="1"/>
+          <p:nvPr/>
+        </p:nvSpPr>
+        <p:spPr>
+          <a:xfrm>
+            <a:off x="6402301" y="2961251"/>
+            <a:ext cx="1956619" cy="2267865"/>
+          </a:xfrm>
+          <a:prstGeom prst="rect">
+            <a:avLst/>
+          </a:prstGeom>
+          <a:noFill/>
+        </p:spPr>
+        <p:txBody>
+          <a:bodyPr wrap="square" rtlCol="0">
+            <a:spAutoFit/>
+          </a:bodyPr>
+          <a:p>
+            <a:pPr algn="just">
+              <a:lnSpc>
+                <a:spcPct val="150000"/>
+              </a:lnSpc>
+            </a:pPr>
+            <a:r>
+              <a:rPr lang="zh-CN" altLang="en-US" sz="1600">
+                <a:solidFill>
+                  <a:schemeClr val="bg1"/>
+                </a:solidFill>
+                <a:latin typeface="微软雅黑" panose="020B0503020204020204" charset="-122"/>
+                <a:ea typeface="微软雅黑" panose="020B0503020204020204" charset="-122"/>
+              </a:rPr>
+              <a:t>多维叠加出题：深度×旋转、帧广播、平移×内参、批量内参，共 4 条。</a:t>
+            </a:r>
+            <a:endParaRPr lang="zh-CN" altLang="en-US" sz="1600">
+              <a:solidFill>
+                <a:schemeClr val="bg1"/>
+              </a:solidFill>
+              <a:latin typeface="微软雅黑" panose="020B0503020204020204" charset="-122"/>
+              <a:ea typeface="微软雅黑" panose="020B0503020204020204" charset="-122"/>
+            </a:endParaRPr>
+          </a:p>
+        </p:txBody>
+      </p:sp>
+      <p:cxnSp>
+        <p:nvCxnSpPr>
+          <p:cNvPr id="49" name="直接连接符 48"/>
+          <p:cNvCxnSpPr/>
+          <p:nvPr/>
+        </p:nvCxnSpPr>
+        <p:spPr>
+          <a:xfrm>
+            <a:off x="6605078" y="2811599"/>
+            <a:ext cx="1551069" cy="0"/>
+          </a:xfrm>
+          <a:prstGeom prst="line">
+            <a:avLst/>
+          </a:prstGeom>
+          <a:ln w="19050">
+            <a:gradFill flip="none" rotWithShape="1">
+              <a:gsLst>
+                <a:gs pos="0">
+                  <a:srgbClr val="32416B">
+                    <a:alpha val="0"/>
+                  </a:srgbClr>
+                </a:gs>
+                <a:gs pos="50000">
+                  <a:schemeClr val="bg1"/>
+                </a:gs>
+                <a:gs pos="100000">
+                  <a:srgbClr val="32416B">
+                    <a:alpha val="0"/>
+                  </a:srgbClr>
+                </a:gs>
+              </a:gsLst>
+              <a:lin ang="0" scaled="1"/>
+              <a:tileRect/>
+            </a:gradFill>
+          </a:ln>
+        </p:spPr>
+        <p:style>
+          <a:lnRef idx="1">
+            <a:schemeClr val="accent1"/>
+          </a:lnRef>
+          <a:fillRef idx="0">
+            <a:schemeClr val="accent1"/>
+          </a:fillRef>
+          <a:effectRef idx="0">
+            <a:schemeClr val="accent1"/>
+          </a:effectRef>
+          <a:fontRef idx="minor">
+            <a:schemeClr val="tx1"/>
+          </a:fontRef>
+        </p:style>
+      </p:cxnSp>
+      <p:sp>
+        <p:nvSpPr>
+          <p:cNvPr id="51" name="矩形 50"/>
+          <p:cNvSpPr/>
+          <p:nvPr/>
+        </p:nvSpPr>
+        <p:spPr>
+          <a:xfrm>
+            <a:off x="8799871" y="1900980"/>
+            <a:ext cx="2299929" cy="3559277"/>
+          </a:xfrm>
+          <a:prstGeom prst="rect">
+            <a:avLst/>
+          </a:prstGeom>
+          <a:solidFill>
+            <a:schemeClr val="accent1">
+              <a:lumMod val="20000"/>
+              <a:lumOff val="80000"/>
+            </a:schemeClr>
+          </a:solidFill>
+          <a:ln>
+            <a:noFill/>
+          </a:ln>
+        </p:spPr>
+        <p:style>
+          <a:lnRef idx="2">
+            <a:schemeClr val="accent1">
+              <a:shade val="50000"/>
+            </a:schemeClr>
+          </a:lnRef>
+          <a:fillRef idx="1">
+            <a:schemeClr val="accent1"/>
+          </a:fillRef>
+          <a:effectRef idx="0">
+            <a:schemeClr val="accent1"/>
+          </a:effectRef>
+          <a:fontRef idx="minor">
+            <a:schemeClr val="lt1"/>
+          </a:fontRef>
+        </p:style>
+        <p:txBody>
+          <a:bodyPr rtlCol="0" anchor="ctr"/>
+          <a:p>
+            <a:pPr algn="ctr"/>
+            <a:endParaRPr lang="zh-CN" altLang="en-US">
+              <a:latin typeface="微软雅黑" panose="020B0503020204020204" charset="-122"/>
+              <a:ea typeface="微软雅黑" panose="020B0503020204020204" charset="-122"/>
+            </a:endParaRPr>
+          </a:p>
+        </p:txBody>
+      </p:sp>
+      <p:sp>
+        <p:nvSpPr>
+          <p:cNvPr id="52" name="文本框 51"/>
+          <p:cNvSpPr txBox="1"/>
+          <p:nvPr/>
+        </p:nvSpPr>
+        <p:spPr>
+          <a:xfrm>
+            <a:off x="9401193" y="2200283"/>
+            <a:ext cx="1097280" cy="460375"/>
+          </a:xfrm>
+          <a:prstGeom prst="rect">
+            <a:avLst/>
+          </a:prstGeom>
+          <a:noFill/>
+        </p:spPr>
+        <p:txBody>
+          <a:bodyPr wrap="none" rtlCol="0">
+            <a:spAutoFit/>
+          </a:bodyPr>
+          <a:p>
+            <a:pPr algn="ctr"/>
+            <a:r>
+              <a:rPr lang="zh-CN" altLang="en-US" sz="2400" b="1">
+                <a:solidFill>
+                  <a:schemeClr val="tx1">
+                    <a:lumMod val="85000"/>
+                    <a:lumOff val="15000"/>
+                  </a:schemeClr>
+                </a:solidFill>
+                <a:latin typeface="微软雅黑" panose="020B0503020204020204" charset="-122"/>
+                <a:ea typeface="微软雅黑" panose="020B0503020204020204" charset="-122"/>
+              </a:rPr>
+              <a:t>错误推测</a:t>
+            </a:r>
+            <a:endParaRPr lang="zh-CN" altLang="en-US" sz="2400" b="1">
+              <a:solidFill>
+                <a:schemeClr val="tx1">
+                  <a:lumMod val="85000"/>
+                  <a:lumOff val="15000"/>
+                </a:schemeClr>
+              </a:solidFill>
+              <a:latin typeface="微软雅黑" panose="020B0503020204020204" charset="-122"/>
+              <a:ea typeface="微软雅黑" panose="020B0503020204020204" charset="-122"/>
+            </a:endParaRPr>
+          </a:p>
+        </p:txBody>
+      </p:sp>
+      <p:sp>
+        <p:nvSpPr>
+          <p:cNvPr id="53" name="文本框 52"/>
+          <p:cNvSpPr txBox="1"/>
+          <p:nvPr/>
+        </p:nvSpPr>
+        <p:spPr>
+          <a:xfrm>
+            <a:off x="8971524" y="2961251"/>
+            <a:ext cx="1956619" cy="2267865"/>
+          </a:xfrm>
+          <a:prstGeom prst="rect">
+            <a:avLst/>
+          </a:prstGeom>
+          <a:noFill/>
+        </p:spPr>
+        <p:txBody>
+          <a:bodyPr wrap="square" rtlCol="0">
+            <a:spAutoFit/>
+          </a:bodyPr>
+          <a:p>
+            <a:pPr algn="just">
+              <a:lnSpc>
+                <a:spcPct val="150000"/>
+              </a:lnSpc>
+            </a:pPr>
+            <a:r>
+              <a:rPr lang="zh-CN" altLang="en-US" sz="1600">
+                <a:solidFill>
+                  <a:schemeClr val="tx1">
+                    <a:lumMod val="85000"/>
+                    <a:lumOff val="15000"/>
+                  </a:schemeClr>
+                </a:solidFill>
+                <a:latin typeface="微软雅黑" panose="020B0503020204020204" charset="-122"/>
+                <a:ea typeface="微软雅黑" panose="020B0503020204020204" charset="-122"/>
+              </a:rPr>
+              <a:t>凭怀疑补刀：非零 skew、批量长度不一致；判定表另固化 2 条。</a:t>
+            </a:r>
+            <a:endParaRPr lang="zh-CN" altLang="en-US" sz="1600">
+              <a:solidFill>
+                <a:schemeClr val="tx1">
+                  <a:lumMod val="85000"/>
+                  <a:lumOff val="15000"/>
+                </a:schemeClr>
+              </a:solidFill>
+              <a:latin typeface="微软雅黑" panose="020B0503020204020204" charset="-122"/>
+              <a:ea typeface="微软雅黑" panose="020B0503020204020204" charset="-122"/>
+            </a:endParaRPr>
+          </a:p>
+        </p:txBody>
+      </p:sp>
+      <p:cxnSp>
+        <p:nvCxnSpPr>
+          <p:cNvPr id="54" name="直接连接符 53"/>
+          <p:cNvCxnSpPr/>
+          <p:nvPr/>
+        </p:nvCxnSpPr>
+        <p:spPr>
+          <a:xfrm>
+            <a:off x="9174301" y="2811599"/>
+            <a:ext cx="1551069" cy="0"/>
+          </a:xfrm>
+          <a:prstGeom prst="line">
+            <a:avLst/>
+          </a:prstGeom>
+          <a:ln w="19050">
+            <a:gradFill flip="none" rotWithShape="1">
+              <a:gsLst>
+                <a:gs pos="0">
+                  <a:srgbClr val="32416B">
+                    <a:alpha val="0"/>
+                  </a:srgbClr>
+                </a:gs>
+                <a:gs pos="50000">
+                  <a:srgbClr val="32416B"/>
+                </a:gs>
+                <a:gs pos="100000">
+                  <a:srgbClr val="32416B">
+                    <a:alpha val="0"/>
+                  </a:srgbClr>
+                </a:gs>
+              </a:gsLst>
+              <a:lin ang="0" scaled="1"/>
+              <a:tileRect/>
+            </a:gradFill>
+          </a:ln>
+        </p:spPr>
+        <p:style>
+          <a:lnRef idx="1">
+            <a:schemeClr val="accent1"/>
+          </a:lnRef>
+          <a:fillRef idx="0">
+            <a:schemeClr val="accent1"/>
+          </a:fillRef>
+          <a:effectRef idx="0">
+            <a:schemeClr val="accent1"/>
+          </a:effectRef>
+          <a:fontRef idx="minor">
+            <a:schemeClr val="tx1"/>
+          </a:fontRef>
+        </p:style>
+      </p:cxnSp>
+      <p:pic>
+        <p:nvPicPr>
+          <p:cNvPr id="27" name="图片 26" descr="图书馆"/>
+          <p:cNvPicPr>
+            <a:picLocks noChangeAspect="1"/>
+          </p:cNvPicPr>
+          <p:nvPr/>
+        </p:nvPicPr>
+        <p:blipFill>
+          <a:blip r:embed="rId1">
+            <a:alphaModFix amt="25000"/>
+          </a:blip>
+          <a:stretch>
+            <a:fillRect/>
+          </a:stretch>
+        </p:blipFill>
+        <p:spPr>
+          <a:xfrm>
+            <a:off x="8452485" y="5777865"/>
+            <a:ext cx="3739585" cy="1080000"/>
+          </a:xfrm>
+          <a:prstGeom prst="rect">
+            <a:avLst/>
+          </a:prstGeom>
+        </p:spPr>
+      </p:pic>
+    </p:spTree>
+    <p:custDataLst>
+      <p:tags r:id="rId2"/>
+    </p:custDataLst>
+  </p:cSld>
+  <p:clrMapOvr>
+    <a:masterClrMapping/>
+  </p:clrMapOvr>
+</p:sld>
+</file>
+
+<file path=ppt/slides/slide8.xml><?xml version="1.0" encoding="utf-8"?>
+<p:sld xmlns:a="http://schemas.openxmlformats.org/drawingml/2006/main" xmlns:r="http://schemas.openxmlformats.org/officeDocument/2006/relationships" xmlns:p="http://schemas.openxmlformats.org/presentationml/2006/main">
+  <p:cSld>
+    <p:bg>
+      <p:bgPr>
+        <a:solidFill>
+          <a:schemeClr val="bg1"/>
+        </a:solidFill>
+        <a:effectLst/>
+      </p:bgPr>
+    </p:bg>
     <p:spTree>
       <p:nvGrpSpPr>
         <p:cNvPr id="1" name=""/>
@@ -14436,7 +18355,7 @@
                   <a:latin typeface="微软雅黑" panose="020B0503020204020204" charset="-122"/>
                   <a:ea typeface="微软雅黑" panose="020B0503020204020204" charset="-122"/>
                 </a:rPr>
-                <a:t>文档承诺与实现不一致，是最值得测的位置</a:t>
+                <a:t>每条用例都标了方法，可以逐条对账</a:t>
               </a:r>
               <a:endParaRPr lang="zh-CN" altLang="en-US" sz="3200" b="1" spc="300" dirty="0">
                 <a:latin typeface="微软雅黑" panose="020B0503020204020204" charset="-122"/>
@@ -14487,7 +18406,7 @@
                   <a:latin typeface="微软雅黑" panose="020B0503020204020204" charset="-122"/>
                   <a:ea typeface="微软雅黑" panose="020B0503020204020204" charset="-122"/>
                 </a:rPr>
-                <a:t>DOC CONTRACT VS IMPLEMENTATION</a:t>
+                <a:t>CASE TO METHOD MAPPING</a:t>
               </a:r>
               <a:endParaRPr lang="en-US" altLang="zh-CN" sz="900" spc="300" dirty="0">
                 <a:solidFill>
@@ -14502,9 +18421,1082 @@
           </p:txBody>
         </p:sp>
       </p:grpSp>
+      <p:sp>
+        <p:nvSpPr>
+          <p:cNvPr id="19" name="矩形: 圆角 18"/>
+          <p:cNvSpPr/>
+          <p:nvPr/>
+        </p:nvSpPr>
+        <p:spPr>
+          <a:xfrm>
+            <a:off x="977900" y="1648460"/>
+            <a:ext cx="10236200" cy="4583430"/>
+          </a:xfrm>
+          <a:prstGeom prst="roundRect">
+            <a:avLst>
+              <a:gd name="adj" fmla="val 0"/>
+            </a:avLst>
+          </a:prstGeom>
+          <a:solidFill>
+            <a:schemeClr val="bg1"/>
+          </a:solidFill>
+          <a:ln>
+            <a:solidFill>
+              <a:schemeClr val="bg1">
+                <a:lumMod val="85000"/>
+              </a:schemeClr>
+            </a:solidFill>
+          </a:ln>
+        </p:spPr>
+        <p:style>
+          <a:lnRef idx="2">
+            <a:schemeClr val="accent1">
+              <a:shade val="50000"/>
+            </a:schemeClr>
+          </a:lnRef>
+          <a:fillRef idx="1">
+            <a:schemeClr val="accent1"/>
+          </a:fillRef>
+          <a:effectRef idx="0">
+            <a:schemeClr val="accent1"/>
+          </a:effectRef>
+          <a:fontRef idx="minor">
+            <a:schemeClr val="lt1"/>
+          </a:fontRef>
+        </p:style>
+        <p:txBody>
+          <a:bodyPr rtlCol="0" anchor="ctr"/>
+          <a:p>
+            <a:pPr algn="ctr"/>
+            <a:endParaRPr lang="zh-CN" altLang="en-US" dirty="0">
+              <a:latin typeface="微软雅黑" panose="020B0503020204020204" charset="-122"/>
+              <a:ea typeface="微软雅黑" panose="020B0503020204020204" charset="-122"/>
+              <a:sym typeface="+mn-lt"/>
+            </a:endParaRPr>
+          </a:p>
+        </p:txBody>
+      </p:sp>
+      <p:sp>
+        <p:nvSpPr>
+          <p:cNvPr id="13" name="任意多边形: 形状 21"/>
+          <p:cNvSpPr/>
+          <p:nvPr/>
+        </p:nvSpPr>
+        <p:spPr>
+          <a:xfrm>
+            <a:off x="977900" y="2575560"/>
+            <a:ext cx="1675765" cy="2781300"/>
+          </a:xfrm>
+          <a:custGeom>
+            <a:avLst/>
+            <a:gdLst>
+              <a:gd name="connsiteX0" fmla="*/ 284837 w 1675487"/>
+              <a:gd name="connsiteY0" fmla="*/ 0 h 2781300"/>
+              <a:gd name="connsiteX1" fmla="*/ 1675487 w 1675487"/>
+              <a:gd name="connsiteY1" fmla="*/ 1390650 h 2781300"/>
+              <a:gd name="connsiteX2" fmla="*/ 284837 w 1675487"/>
+              <a:gd name="connsiteY2" fmla="*/ 2781300 h 2781300"/>
+              <a:gd name="connsiteX3" fmla="*/ 4573 w 1675487"/>
+              <a:gd name="connsiteY3" fmla="*/ 2753047 h 2781300"/>
+              <a:gd name="connsiteX4" fmla="*/ 0 w 1675487"/>
+              <a:gd name="connsiteY4" fmla="*/ 2751872 h 2781300"/>
+              <a:gd name="connsiteX5" fmla="*/ 0 w 1675487"/>
+              <a:gd name="connsiteY5" fmla="*/ 29429 h 2781300"/>
+              <a:gd name="connsiteX6" fmla="*/ 4573 w 1675487"/>
+              <a:gd name="connsiteY6" fmla="*/ 28253 h 2781300"/>
+              <a:gd name="connsiteX7" fmla="*/ 284837 w 1675487"/>
+              <a:gd name="connsiteY7" fmla="*/ 0 h 2781300"/>
+            </a:gdLst>
+            <a:ahLst/>
+            <a:cxnLst>
+              <a:cxn ang="0">
+                <a:pos x="connsiteX0" y="connsiteY0"/>
+              </a:cxn>
+              <a:cxn ang="0">
+                <a:pos x="connsiteX1" y="connsiteY1"/>
+              </a:cxn>
+              <a:cxn ang="0">
+                <a:pos x="connsiteX2" y="connsiteY2"/>
+              </a:cxn>
+              <a:cxn ang="0">
+                <a:pos x="connsiteX3" y="connsiteY3"/>
+              </a:cxn>
+              <a:cxn ang="0">
+                <a:pos x="connsiteX4" y="connsiteY4"/>
+              </a:cxn>
+              <a:cxn ang="0">
+                <a:pos x="connsiteX5" y="connsiteY5"/>
+              </a:cxn>
+              <a:cxn ang="0">
+                <a:pos x="connsiteX6" y="connsiteY6"/>
+              </a:cxn>
+              <a:cxn ang="0">
+                <a:pos x="connsiteX7" y="connsiteY7"/>
+              </a:cxn>
+            </a:cxnLst>
+            <a:rect l="l" t="t" r="r" b="b"/>
+            <a:pathLst>
+              <a:path w="1675487" h="2781300">
+                <a:moveTo>
+                  <a:pt x="284837" y="0"/>
+                </a:moveTo>
+                <a:cubicBezTo>
+                  <a:pt x="1052872" y="0"/>
+                  <a:pt x="1675487" y="622615"/>
+                  <a:pt x="1675487" y="1390650"/>
+                </a:cubicBezTo>
+                <a:cubicBezTo>
+                  <a:pt x="1675487" y="2158685"/>
+                  <a:pt x="1052872" y="2781300"/>
+                  <a:pt x="284837" y="2781300"/>
+                </a:cubicBezTo>
+                <a:cubicBezTo>
+                  <a:pt x="188833" y="2781300"/>
+                  <a:pt x="95101" y="2771572"/>
+                  <a:pt x="4573" y="2753047"/>
+                </a:cubicBezTo>
+                <a:lnTo>
+                  <a:pt x="0" y="2751872"/>
+                </a:lnTo>
+                <a:lnTo>
+                  <a:pt x="0" y="29429"/>
+                </a:lnTo>
+                <a:lnTo>
+                  <a:pt x="4573" y="28253"/>
+                </a:lnTo>
+                <a:cubicBezTo>
+                  <a:pt x="95101" y="9729"/>
+                  <a:pt x="188833" y="0"/>
+                  <a:pt x="284837" y="0"/>
+                </a:cubicBezTo>
+                <a:close/>
+              </a:path>
+            </a:pathLst>
+          </a:custGeom>
+          <a:solidFill>
+            <a:srgbClr val="25557A"/>
+          </a:solidFill>
+          <a:ln>
+            <a:noFill/>
+          </a:ln>
+        </p:spPr>
+        <p:style>
+          <a:lnRef idx="2">
+            <a:schemeClr val="accent1">
+              <a:shade val="50000"/>
+            </a:schemeClr>
+          </a:lnRef>
+          <a:fillRef idx="1">
+            <a:schemeClr val="accent1"/>
+          </a:fillRef>
+          <a:effectRef idx="0">
+            <a:schemeClr val="accent1"/>
+          </a:effectRef>
+          <a:fontRef idx="minor">
+            <a:schemeClr val="lt1"/>
+          </a:fontRef>
+        </p:style>
+        <p:txBody>
+          <a:bodyPr rot="0" spcFirstLastPara="0" vertOverflow="overflow" horzOverflow="overflow" vert="horz" wrap="square" lIns="91440" tIns="45720" rIns="91440" bIns="45720" numCol="1" spcCol="0" rtlCol="0" fromWordArt="0" anchor="ctr" anchorCtr="0" forceAA="0" compatLnSpc="1">
+            <a:noAutofit/>
+          </a:bodyPr>
+          <a:p>
+            <a:pPr algn="ctr"/>
+            <a:endParaRPr lang="zh-CN" altLang="en-US">
+              <a:latin typeface="微软雅黑" panose="020B0503020204020204" charset="-122"/>
+              <a:ea typeface="微软雅黑" panose="020B0503020204020204" charset="-122"/>
+              <a:cs typeface="+mn-ea"/>
+              <a:sym typeface="+mn-lt"/>
+            </a:endParaRPr>
+          </a:p>
+        </p:txBody>
+      </p:sp>
+      <p:sp>
+        <p:nvSpPr>
+          <p:cNvPr id="30" name="矩形 29"/>
+          <p:cNvSpPr/>
+          <p:nvPr/>
+        </p:nvSpPr>
+        <p:spPr>
+          <a:xfrm>
+            <a:off x="1169035" y="3429000"/>
+            <a:ext cx="1071880" cy="1076325"/>
+          </a:xfrm>
+          <a:prstGeom prst="rect">
+            <a:avLst/>
+          </a:prstGeom>
+        </p:spPr>
+        <p:txBody>
+          <a:bodyPr wrap="none">
+            <a:spAutoFit/>
+          </a:bodyPr>
+          <a:p>
+            <a:r>
+              <a:rPr lang="zh-CN" sz="3200" b="1" spc="300" dirty="0">
+                <a:solidFill>
+                  <a:schemeClr val="bg1"/>
+                </a:solidFill>
+                <a:effectLst>
+                  <a:outerShdw blurRad="38100" dist="38100" dir="2700000" algn="tl">
+                    <a:srgbClr val="000000">
+                      <a:alpha val="43137"/>
+                    </a:srgbClr>
+                  </a:outerShdw>
+                </a:effectLst>
+                <a:latin typeface="微软雅黑" panose="020B0503020204020204" charset="-122"/>
+                <a:ea typeface="微软雅黑" panose="020B0503020204020204" charset="-122"/>
+              </a:rPr>
+              <a:t>测试</a:t>
+            </a:r>
+            <a:endParaRPr lang="zh-CN" sz="3200" b="1" spc="300" dirty="0">
+              <a:solidFill>
+                <a:schemeClr val="bg1"/>
+              </a:solidFill>
+              <a:effectLst>
+                <a:outerShdw blurRad="38100" dist="38100" dir="2700000" algn="tl">
+                  <a:srgbClr val="000000">
+                    <a:alpha val="43137"/>
+                  </a:srgbClr>
+                </a:outerShdw>
+              </a:effectLst>
+              <a:latin typeface="微软雅黑" panose="020B0503020204020204" charset="-122"/>
+              <a:ea typeface="微软雅黑" panose="020B0503020204020204" charset="-122"/>
+            </a:endParaRPr>
+          </a:p>
+          <a:p>
+            <a:r>
+              <a:rPr lang="zh-CN" sz="3200" b="1" spc="300" dirty="0">
+                <a:solidFill>
+                  <a:schemeClr val="bg1"/>
+                </a:solidFill>
+                <a:effectLst>
+                  <a:outerShdw blurRad="38100" dist="38100" dir="2700000" algn="tl">
+                    <a:srgbClr val="000000">
+                      <a:alpha val="43137"/>
+                    </a:srgbClr>
+                  </a:outerShdw>
+                </a:effectLst>
+                <a:latin typeface="微软雅黑" panose="020B0503020204020204" charset="-122"/>
+                <a:ea typeface="微软雅黑" panose="020B0503020204020204" charset="-122"/>
+              </a:rPr>
+              <a:t>方法</a:t>
+            </a:r>
+            <a:endParaRPr lang="zh-CN" sz="3200" b="1" spc="300" dirty="0">
+              <a:solidFill>
+                <a:schemeClr val="bg1"/>
+              </a:solidFill>
+              <a:effectLst>
+                <a:outerShdw blurRad="38100" dist="38100" dir="2700000" algn="tl">
+                  <a:srgbClr val="000000">
+                    <a:alpha val="43137"/>
+                  </a:srgbClr>
+                </a:outerShdw>
+              </a:effectLst>
+              <a:latin typeface="微软雅黑" panose="020B0503020204020204" charset="-122"/>
+              <a:ea typeface="微软雅黑" panose="020B0503020204020204" charset="-122"/>
+            </a:endParaRPr>
+          </a:p>
+        </p:txBody>
+      </p:sp>
+      <p:grpSp>
+        <p:nvGrpSpPr>
+          <p:cNvPr id="15" name="组合 14"/>
+          <p:cNvGrpSpPr/>
+          <p:nvPr/>
+        </p:nvGrpSpPr>
+        <p:grpSpPr>
+          <a:xfrm rot="0">
+            <a:off x="2890520" y="2061845"/>
+            <a:ext cx="7985125" cy="1217930"/>
+            <a:chOff x="3134969" y="2228849"/>
+            <a:chExt cx="7984866" cy="1218108"/>
+          </a:xfrm>
+        </p:grpSpPr>
+        <p:sp>
+          <p:nvSpPr>
+            <p:cNvPr id="18" name="椭圆 17"/>
+            <p:cNvSpPr/>
+            <p:nvPr/>
+          </p:nvSpPr>
+          <p:spPr>
+            <a:xfrm>
+              <a:off x="3134969" y="2228849"/>
+              <a:ext cx="435661" cy="435661"/>
+            </a:xfrm>
+            <a:prstGeom prst="ellipse">
+              <a:avLst/>
+            </a:prstGeom>
+            <a:solidFill>
+              <a:srgbClr val="25557A"/>
+            </a:solidFill>
+            <a:ln>
+              <a:noFill/>
+            </a:ln>
+          </p:spPr>
+          <p:style>
+            <a:lnRef idx="2">
+              <a:schemeClr val="accent1">
+                <a:shade val="50000"/>
+              </a:schemeClr>
+            </a:lnRef>
+            <a:fillRef idx="1">
+              <a:schemeClr val="accent1"/>
+            </a:fillRef>
+            <a:effectRef idx="0">
+              <a:schemeClr val="accent1"/>
+            </a:effectRef>
+            <a:fontRef idx="minor">
+              <a:schemeClr val="lt1"/>
+            </a:fontRef>
+          </p:style>
+          <p:txBody>
+            <a:bodyPr rot="0" spcFirstLastPara="0" vertOverflow="overflow" horzOverflow="overflow" vert="horz" wrap="square" lIns="91440" tIns="45720" rIns="91440" bIns="45720" numCol="1" spcCol="0" rtlCol="0" fromWordArt="0" anchor="ctr" anchorCtr="0" forceAA="0" compatLnSpc="1">
+              <a:noAutofit/>
+            </a:bodyPr>
+            <a:p>
+              <a:pPr algn="ctr"/>
+              <a:r>
+                <a:rPr lang="en-US" altLang="zh-CN" sz="1600" dirty="0">
+                  <a:latin typeface="微软雅黑" panose="020B0503020204020204" charset="-122"/>
+                  <a:ea typeface="微软雅黑" panose="020B0503020204020204" charset="-122"/>
+                  <a:cs typeface="+mn-ea"/>
+                  <a:sym typeface="+mn-lt"/>
+                </a:rPr>
+                <a:t>1</a:t>
+              </a:r>
+              <a:endParaRPr lang="en-US" altLang="zh-CN" sz="1600" dirty="0">
+                <a:latin typeface="微软雅黑" panose="020B0503020204020204" charset="-122"/>
+                <a:ea typeface="微软雅黑" panose="020B0503020204020204" charset="-122"/>
+                <a:cs typeface="+mn-ea"/>
+                <a:sym typeface="+mn-lt"/>
+              </a:endParaRPr>
+            </a:p>
+          </p:txBody>
+        </p:sp>
+        <p:grpSp>
+          <p:nvGrpSpPr>
+            <p:cNvPr id="31" name="组合 30"/>
+            <p:cNvGrpSpPr/>
+            <p:nvPr/>
+          </p:nvGrpSpPr>
+          <p:grpSpPr>
+            <a:xfrm>
+              <a:off x="3765265" y="2243632"/>
+              <a:ext cx="7354570" cy="1203325"/>
+              <a:chOff x="7893455" y="4126834"/>
+              <a:chExt cx="7354570" cy="1203325"/>
+            </a:xfrm>
+          </p:grpSpPr>
+          <p:sp>
+            <p:nvSpPr>
+              <p:cNvPr id="32" name="矩形 31"/>
+              <p:cNvSpPr/>
+              <p:nvPr/>
+            </p:nvSpPr>
+            <p:spPr>
+              <a:xfrm>
+                <a:off x="7893455" y="4126834"/>
+                <a:ext cx="2240242" cy="368300"/>
+              </a:xfrm>
+              <a:prstGeom prst="rect">
+                <a:avLst/>
+              </a:prstGeom>
+            </p:spPr>
+            <p:txBody>
+              <a:bodyPr wrap="square">
+                <a:spAutoFit/>
+              </a:bodyPr>
+              <a:p>
+                <a:r>
+                  <a:rPr lang="zh-CN" altLang="en-US" b="1" dirty="0">
+                    <a:solidFill>
+                      <a:srgbClr val="25557A"/>
+                    </a:solidFill>
+                    <a:latin typeface="微软雅黑" panose="020B0503020204020204" charset="-122"/>
+                    <a:ea typeface="微软雅黑" panose="020B0503020204020204" charset="-122"/>
+                    <a:cs typeface="+mn-ea"/>
+                    <a:sym typeface="+mn-lt"/>
+                  </a:rPr>
+                  <a:t>等价类划分</a:t>
+                </a:r>
+                <a:endParaRPr lang="zh-CN" altLang="en-US" b="1" dirty="0">
+                  <a:solidFill>
+                    <a:srgbClr val="25557A"/>
+                  </a:solidFill>
+                  <a:latin typeface="微软雅黑" panose="020B0503020204020204" charset="-122"/>
+                  <a:ea typeface="微软雅黑" panose="020B0503020204020204" charset="-122"/>
+                  <a:cs typeface="+mn-ea"/>
+                  <a:sym typeface="+mn-lt"/>
+                </a:endParaRPr>
+              </a:p>
+            </p:txBody>
+          </p:sp>
+          <p:sp>
+            <p:nvSpPr>
+              <p:cNvPr id="33" name="文本框 32"/>
+              <p:cNvSpPr txBox="1"/>
+              <p:nvPr/>
+            </p:nvSpPr>
+            <p:spPr>
+              <a:xfrm>
+                <a:off x="9465708" y="4220231"/>
+                <a:ext cx="2665723" cy="215444"/>
+              </a:xfrm>
+              <a:prstGeom prst="rect">
+                <a:avLst/>
+              </a:prstGeom>
+              <a:noFill/>
+            </p:spPr>
+            <p:txBody>
+              <a:bodyPr wrap="square">
+                <a:spAutoFit/>
+              </a:bodyPr>
+              <a:p>
+                <a:r>
+                  <a:rPr lang="zh-CN" altLang="en-US" sz="800" dirty="0">
+                    <a:solidFill>
+                      <a:schemeClr val="bg1">
+                        <a:lumMod val="65000"/>
+                      </a:schemeClr>
+                    </a:solidFill>
+                    <a:latin typeface="微软雅黑" panose="020B0503020204020204" charset="-122"/>
+                    <a:ea typeface="微软雅黑" panose="020B0503020204020204" charset="-122"/>
+                    <a:cs typeface="+mn-ea"/>
+                    <a:sym typeface="+mn-lt"/>
+                  </a:rPr>
+                  <a:t>EQUIVALENCE · 19 CASES</a:t>
+                </a:r>
+                <a:r>
+                  <a:rPr lang="en-US" altLang="zh-CN" sz="800" dirty="0">
+                    <a:solidFill>
+                      <a:schemeClr val="bg1">
+                        <a:lumMod val="65000"/>
+                      </a:schemeClr>
+                    </a:solidFill>
+                    <a:latin typeface="微软雅黑" panose="020B0503020204020204" charset="-122"/>
+                    <a:ea typeface="微软雅黑" panose="020B0503020204020204" charset="-122"/>
+                    <a:cs typeface="+mn-ea"/>
+                    <a:sym typeface="+mn-lt"/>
+                  </a:rPr>
+                  <a:t> | </a:t>
+                </a:r>
+                <a:r>
+                  <a:rPr lang="zh-CN" altLang="en-US" sz="800" dirty="0">
+                    <a:solidFill>
+                      <a:schemeClr val="bg1">
+                        <a:lumMod val="65000"/>
+                      </a:schemeClr>
+                    </a:solidFill>
+                    <a:latin typeface="微软雅黑" panose="020B0503020204020204" charset="-122"/>
+                    <a:ea typeface="微软雅黑" panose="020B0503020204020204" charset="-122"/>
+                    <a:cs typeface="+mn-ea"/>
+                    <a:sym typeface="+mn-lt"/>
+                  </a:rPr>
+                  <a:t>M1-GEO-001~030</a:t>
+                </a:r>
+                <a:endParaRPr lang="zh-CN" altLang="en-US" sz="800" dirty="0">
+                  <a:solidFill>
+                    <a:schemeClr val="bg1">
+                      <a:lumMod val="65000"/>
+                    </a:schemeClr>
+                  </a:solidFill>
+                  <a:latin typeface="微软雅黑" panose="020B0503020204020204" charset="-122"/>
+                  <a:ea typeface="微软雅黑" panose="020B0503020204020204" charset="-122"/>
+                  <a:cs typeface="+mn-ea"/>
+                  <a:sym typeface="+mn-lt"/>
+                </a:endParaRPr>
+              </a:p>
+            </p:txBody>
+          </p:sp>
+          <p:sp>
+            <p:nvSpPr>
+              <p:cNvPr id="34" name="文本框 33"/>
+              <p:cNvSpPr txBox="1"/>
+              <p:nvPr/>
+            </p:nvSpPr>
+            <p:spPr>
+              <a:xfrm>
+                <a:off x="7893455" y="4377024"/>
+                <a:ext cx="7354570" cy="953135"/>
+              </a:xfrm>
+              <a:prstGeom prst="rect">
+                <a:avLst/>
+              </a:prstGeom>
+              <a:noFill/>
+            </p:spPr>
+            <p:txBody>
+              <a:bodyPr wrap="square">
+                <a:spAutoFit/>
+              </a:bodyPr>
+              <a:p>
+                <a:pPr>
+                  <a:lnSpc>
+                    <a:spcPct val="200000"/>
+                  </a:lnSpc>
+                </a:pPr>
+                <a:r>
+                  <a:rPr lang="zh-CN" altLang="en-US" sz="1400" dirty="0">
+                    <a:solidFill>
+                      <a:schemeClr val="tx1">
+                        <a:lumMod val="75000"/>
+                        <a:lumOff val="25000"/>
+                      </a:schemeClr>
+                    </a:solidFill>
+                    <a:latin typeface="微软雅黑" panose="020B0503020204020204" charset="-122"/>
+                    <a:ea typeface="微软雅黑" panose="020B0503020204020204" charset="-122"/>
+                  </a:rPr>
+                  <a:t>切割依据是输入维度、坐标系、输入类型与合法性四组维度。001/004/006/007/008/009/011/012/013/016/017/018 等 19 条。</a:t>
+                </a:r>
+                <a:endParaRPr lang="zh-CN" altLang="en-US" sz="1400" dirty="0">
+                  <a:solidFill>
+                    <a:schemeClr val="tx1">
+                      <a:lumMod val="75000"/>
+                      <a:lumOff val="25000"/>
+                    </a:schemeClr>
+                  </a:solidFill>
+                  <a:latin typeface="微软雅黑" panose="020B0503020204020204" charset="-122"/>
+                  <a:ea typeface="微软雅黑" panose="020B0503020204020204" charset="-122"/>
+                </a:endParaRPr>
+              </a:p>
+            </p:txBody>
+          </p:sp>
+        </p:grpSp>
+      </p:grpSp>
+      <p:grpSp>
+        <p:nvGrpSpPr>
+          <p:cNvPr id="35" name="组合 34"/>
+          <p:cNvGrpSpPr/>
+          <p:nvPr/>
+        </p:nvGrpSpPr>
+        <p:grpSpPr>
+          <a:xfrm rot="0">
+            <a:off x="3521075" y="3430905"/>
+            <a:ext cx="7355205" cy="1217930"/>
+            <a:chOff x="3134969" y="2228849"/>
+            <a:chExt cx="7354946" cy="1218108"/>
+          </a:xfrm>
+        </p:grpSpPr>
+        <p:sp>
+          <p:nvSpPr>
+            <p:cNvPr id="36" name="椭圆 35"/>
+            <p:cNvSpPr/>
+            <p:nvPr/>
+          </p:nvSpPr>
+          <p:spPr>
+            <a:xfrm>
+              <a:off x="3134969" y="2228849"/>
+              <a:ext cx="435661" cy="435661"/>
+            </a:xfrm>
+            <a:prstGeom prst="ellipse">
+              <a:avLst/>
+            </a:prstGeom>
+            <a:solidFill>
+              <a:srgbClr val="25557A"/>
+            </a:solidFill>
+            <a:ln>
+              <a:noFill/>
+            </a:ln>
+          </p:spPr>
+          <p:style>
+            <a:lnRef idx="2">
+              <a:schemeClr val="accent1">
+                <a:shade val="50000"/>
+              </a:schemeClr>
+            </a:lnRef>
+            <a:fillRef idx="1">
+              <a:schemeClr val="accent1"/>
+            </a:fillRef>
+            <a:effectRef idx="0">
+              <a:schemeClr val="accent1"/>
+            </a:effectRef>
+            <a:fontRef idx="minor">
+              <a:schemeClr val="lt1"/>
+            </a:fontRef>
+          </p:style>
+          <p:txBody>
+            <a:bodyPr rot="0" spcFirstLastPara="0" vertOverflow="overflow" horzOverflow="overflow" vert="horz" wrap="square" lIns="91440" tIns="45720" rIns="91440" bIns="45720" numCol="1" spcCol="0" rtlCol="0" fromWordArt="0" anchor="ctr" anchorCtr="0" forceAA="0" compatLnSpc="1">
+              <a:noAutofit/>
+            </a:bodyPr>
+            <a:p>
+              <a:pPr algn="ctr"/>
+              <a:r>
+                <a:rPr lang="en-US" altLang="zh-CN" sz="1600" dirty="0">
+                  <a:latin typeface="微软雅黑" panose="020B0503020204020204" charset="-122"/>
+                  <a:ea typeface="微软雅黑" panose="020B0503020204020204" charset="-122"/>
+                  <a:cs typeface="+mn-ea"/>
+                  <a:sym typeface="+mn-lt"/>
+                </a:rPr>
+                <a:t>2</a:t>
+              </a:r>
+              <a:endParaRPr lang="en-US" altLang="zh-CN" sz="1600" dirty="0">
+                <a:latin typeface="微软雅黑" panose="020B0503020204020204" charset="-122"/>
+                <a:ea typeface="微软雅黑" panose="020B0503020204020204" charset="-122"/>
+                <a:cs typeface="+mn-ea"/>
+                <a:sym typeface="+mn-lt"/>
+              </a:endParaRPr>
+            </a:p>
+          </p:txBody>
+        </p:sp>
+        <p:grpSp>
+          <p:nvGrpSpPr>
+            <p:cNvPr id="37" name="组合 36"/>
+            <p:cNvGrpSpPr/>
+            <p:nvPr/>
+          </p:nvGrpSpPr>
+          <p:grpSpPr>
+            <a:xfrm>
+              <a:off x="3765265" y="2243632"/>
+              <a:ext cx="6724650" cy="1203325"/>
+              <a:chOff x="7893455" y="4126834"/>
+              <a:chExt cx="6724650" cy="1203325"/>
+            </a:xfrm>
+          </p:grpSpPr>
+          <p:sp>
+            <p:nvSpPr>
+              <p:cNvPr id="38" name="矩形 37"/>
+              <p:cNvSpPr/>
+              <p:nvPr/>
+            </p:nvSpPr>
+            <p:spPr>
+              <a:xfrm>
+                <a:off x="7893455" y="4126834"/>
+                <a:ext cx="2240242" cy="368300"/>
+              </a:xfrm>
+              <a:prstGeom prst="rect">
+                <a:avLst/>
+              </a:prstGeom>
+            </p:spPr>
+            <p:txBody>
+              <a:bodyPr wrap="square">
+                <a:spAutoFit/>
+              </a:bodyPr>
+              <a:p>
+                <a:r>
+                  <a:rPr lang="zh-CN" altLang="en-US" b="1" dirty="0">
+                    <a:solidFill>
+                      <a:srgbClr val="25557A"/>
+                    </a:solidFill>
+                    <a:latin typeface="微软雅黑" panose="020B0503020204020204" charset="-122"/>
+                    <a:ea typeface="微软雅黑" panose="020B0503020204020204" charset="-122"/>
+                    <a:cs typeface="+mn-ea"/>
+                    <a:sym typeface="+mn-lt"/>
+                  </a:rPr>
+                  <a:t>边界值分析</a:t>
+                </a:r>
+                <a:endParaRPr lang="zh-CN" altLang="en-US" dirty="0">
+                  <a:solidFill>
+                    <a:schemeClr val="accent5">
+                      <a:lumMod val="50000"/>
+                    </a:schemeClr>
+                  </a:solidFill>
+                  <a:latin typeface="微软雅黑" panose="020B0503020204020204" charset="-122"/>
+                  <a:ea typeface="微软雅黑" panose="020B0503020204020204" charset="-122"/>
+                  <a:cs typeface="+mn-ea"/>
+                  <a:sym typeface="+mn-lt"/>
+                </a:endParaRPr>
+              </a:p>
+            </p:txBody>
+          </p:sp>
+          <p:sp>
+            <p:nvSpPr>
+              <p:cNvPr id="39" name="文本框 38"/>
+              <p:cNvSpPr txBox="1"/>
+              <p:nvPr/>
+            </p:nvSpPr>
+            <p:spPr>
+              <a:xfrm>
+                <a:off x="9465708" y="4220231"/>
+                <a:ext cx="2665723" cy="215444"/>
+              </a:xfrm>
+              <a:prstGeom prst="rect">
+                <a:avLst/>
+              </a:prstGeom>
+              <a:noFill/>
+            </p:spPr>
+            <p:txBody>
+              <a:bodyPr wrap="square">
+                <a:spAutoFit/>
+              </a:bodyPr>
+              <a:p>
+                <a:r>
+                  <a:rPr lang="zh-CN" altLang="en-US" sz="800" dirty="0">
+                    <a:solidFill>
+                      <a:schemeClr val="bg1">
+                        <a:lumMod val="65000"/>
+                      </a:schemeClr>
+                    </a:solidFill>
+                    <a:latin typeface="微软雅黑" panose="020B0503020204020204" charset="-122"/>
+                    <a:ea typeface="微软雅黑" panose="020B0503020204020204" charset="-122"/>
+                    <a:cs typeface="+mn-ea"/>
+                    <a:sym typeface="+mn-lt"/>
+                  </a:rPr>
+                  <a:t>BOUNDARY · 5 CASES</a:t>
+                </a:r>
+                <a:r>
+                  <a:rPr lang="en-US" altLang="zh-CN" sz="800" dirty="0">
+                    <a:solidFill>
+                      <a:schemeClr val="bg1">
+                        <a:lumMod val="65000"/>
+                      </a:schemeClr>
+                    </a:solidFill>
+                    <a:latin typeface="微软雅黑" panose="020B0503020204020204" charset="-122"/>
+                    <a:ea typeface="微软雅黑" panose="020B0503020204020204" charset="-122"/>
+                    <a:cs typeface="+mn-ea"/>
+                    <a:sym typeface="+mn-lt"/>
+                  </a:rPr>
+                  <a:t> | </a:t>
+                </a:r>
+                <a:r>
+                  <a:rPr lang="zh-CN" altLang="en-US" sz="800" dirty="0">
+                    <a:solidFill>
+                      <a:schemeClr val="bg1">
+                        <a:lumMod val="65000"/>
+                      </a:schemeClr>
+                    </a:solidFill>
+                    <a:latin typeface="微软雅黑" panose="020B0503020204020204" charset="-122"/>
+                    <a:ea typeface="微软雅黑" panose="020B0503020204020204" charset="-122"/>
+                    <a:cs typeface="+mn-ea"/>
+                    <a:sym typeface="+mn-lt"/>
+                  </a:rPr>
+                  <a:t>M1-GEO-002~025</a:t>
+                </a:r>
+                <a:endParaRPr lang="zh-CN" altLang="en-US" sz="800" dirty="0">
+                  <a:solidFill>
+                    <a:schemeClr val="bg1">
+                      <a:lumMod val="65000"/>
+                    </a:schemeClr>
+                  </a:solidFill>
+                  <a:latin typeface="微软雅黑" panose="020B0503020204020204" charset="-122"/>
+                  <a:ea typeface="微软雅黑" panose="020B0503020204020204" charset="-122"/>
+                  <a:cs typeface="+mn-ea"/>
+                  <a:sym typeface="+mn-lt"/>
+                </a:endParaRPr>
+              </a:p>
+            </p:txBody>
+          </p:sp>
+          <p:sp>
+            <p:nvSpPr>
+              <p:cNvPr id="40" name="文本框 39"/>
+              <p:cNvSpPr txBox="1"/>
+              <p:nvPr/>
+            </p:nvSpPr>
+            <p:spPr>
+              <a:xfrm>
+                <a:off x="7893455" y="4377024"/>
+                <a:ext cx="6724650" cy="953135"/>
+              </a:xfrm>
+              <a:prstGeom prst="rect">
+                <a:avLst/>
+              </a:prstGeom>
+              <a:noFill/>
+            </p:spPr>
+            <p:txBody>
+              <a:bodyPr wrap="square">
+                <a:spAutoFit/>
+              </a:bodyPr>
+              <a:p>
+                <a:pPr>
+                  <a:lnSpc>
+                    <a:spcPct val="200000"/>
+                  </a:lnSpc>
+                </a:pPr>
+                <a:r>
+                  <a:rPr lang="zh-CN" altLang="en-US" sz="1400" dirty="0">
+                    <a:solidFill>
+                      <a:schemeClr val="tx1">
+                        <a:lumMod val="75000"/>
+                        <a:lumOff val="25000"/>
+                      </a:schemeClr>
+                    </a:solidFill>
+                    <a:latin typeface="微软雅黑" panose="020B0503020204020204" charset="-122"/>
+                    <a:ea typeface="微软雅黑" panose="020B0503020204020204" charset="-122"/>
+                  </a:rPr>
+                  <a:t>取每个等价类的上下界与临界点：002 图像四角、003 深度下界 0、010 矩阵尺寸、014 eps−/eps/eps+ 三点夹逼、025 Z=0 除零。</a:t>
+                </a:r>
+                <a:endParaRPr lang="zh-CN" altLang="en-US" sz="1400" dirty="0">
+                  <a:solidFill>
+                    <a:schemeClr val="tx1">
+                      <a:lumMod val="75000"/>
+                      <a:lumOff val="25000"/>
+                    </a:schemeClr>
+                  </a:solidFill>
+                  <a:latin typeface="微软雅黑" panose="020B0503020204020204" charset="-122"/>
+                  <a:ea typeface="微软雅黑" panose="020B0503020204020204" charset="-122"/>
+                </a:endParaRPr>
+              </a:p>
+            </p:txBody>
+          </p:sp>
+        </p:grpSp>
+      </p:grpSp>
+      <p:grpSp>
+        <p:nvGrpSpPr>
+          <p:cNvPr id="41" name="组合 40"/>
+          <p:cNvGrpSpPr/>
+          <p:nvPr/>
+        </p:nvGrpSpPr>
+        <p:grpSpPr>
+          <a:xfrm rot="0">
+            <a:off x="2890520" y="4800600"/>
+            <a:ext cx="7985125" cy="1217930"/>
+            <a:chOff x="3134969" y="2228849"/>
+            <a:chExt cx="7984866" cy="1218108"/>
+          </a:xfrm>
+        </p:grpSpPr>
+        <p:sp>
+          <p:nvSpPr>
+            <p:cNvPr id="28" name="椭圆 27"/>
+            <p:cNvSpPr/>
+            <p:nvPr/>
+          </p:nvSpPr>
+          <p:spPr>
+            <a:xfrm>
+              <a:off x="3134969" y="2228849"/>
+              <a:ext cx="435661" cy="435661"/>
+            </a:xfrm>
+            <a:prstGeom prst="ellipse">
+              <a:avLst/>
+            </a:prstGeom>
+            <a:solidFill>
+              <a:srgbClr val="25557A"/>
+            </a:solidFill>
+            <a:ln>
+              <a:noFill/>
+            </a:ln>
+          </p:spPr>
+          <p:style>
+            <a:lnRef idx="2">
+              <a:schemeClr val="accent1">
+                <a:shade val="50000"/>
+              </a:schemeClr>
+            </a:lnRef>
+            <a:fillRef idx="1">
+              <a:schemeClr val="accent1"/>
+            </a:fillRef>
+            <a:effectRef idx="0">
+              <a:schemeClr val="accent1"/>
+            </a:effectRef>
+            <a:fontRef idx="minor">
+              <a:schemeClr val="lt1"/>
+            </a:fontRef>
+          </p:style>
+          <p:txBody>
+            <a:bodyPr rot="0" spcFirstLastPara="0" vertOverflow="overflow" horzOverflow="overflow" vert="horz" wrap="square" lIns="91440" tIns="45720" rIns="91440" bIns="45720" numCol="1" spcCol="0" rtlCol="0" fromWordArt="0" anchor="ctr" anchorCtr="0" forceAA="0" compatLnSpc="1">
+              <a:noAutofit/>
+            </a:bodyPr>
+            <a:p>
+              <a:pPr algn="ctr"/>
+              <a:r>
+                <a:rPr lang="en-US" altLang="zh-CN" sz="1600" dirty="0">
+                  <a:latin typeface="微软雅黑" panose="020B0503020204020204" charset="-122"/>
+                  <a:ea typeface="微软雅黑" panose="020B0503020204020204" charset="-122"/>
+                  <a:cs typeface="+mn-ea"/>
+                  <a:sym typeface="+mn-lt"/>
+                </a:rPr>
+                <a:t>3</a:t>
+              </a:r>
+              <a:endParaRPr lang="en-US" altLang="zh-CN" sz="1600" dirty="0">
+                <a:latin typeface="微软雅黑" panose="020B0503020204020204" charset="-122"/>
+                <a:ea typeface="微软雅黑" panose="020B0503020204020204" charset="-122"/>
+                <a:cs typeface="+mn-ea"/>
+                <a:sym typeface="+mn-lt"/>
+              </a:endParaRPr>
+            </a:p>
+          </p:txBody>
+        </p:sp>
+        <p:grpSp>
+          <p:nvGrpSpPr>
+            <p:cNvPr id="43" name="组合 42"/>
+            <p:cNvGrpSpPr/>
+            <p:nvPr/>
+          </p:nvGrpSpPr>
+          <p:grpSpPr>
+            <a:xfrm>
+              <a:off x="3765265" y="2243632"/>
+              <a:ext cx="7354570" cy="1203325"/>
+              <a:chOff x="7893455" y="4126834"/>
+              <a:chExt cx="7354570" cy="1203325"/>
+            </a:xfrm>
+          </p:grpSpPr>
+          <p:sp>
+            <p:nvSpPr>
+              <p:cNvPr id="44" name="矩形 43"/>
+              <p:cNvSpPr/>
+              <p:nvPr/>
+            </p:nvSpPr>
+            <p:spPr>
+              <a:xfrm>
+                <a:off x="7893455" y="4126834"/>
+                <a:ext cx="2240242" cy="368300"/>
+              </a:xfrm>
+              <a:prstGeom prst="rect">
+                <a:avLst/>
+              </a:prstGeom>
+            </p:spPr>
+            <p:txBody>
+              <a:bodyPr wrap="square">
+                <a:spAutoFit/>
+              </a:bodyPr>
+              <a:p>
+                <a:r>
+                  <a:rPr lang="zh-CN" altLang="en-US" b="1" dirty="0">
+                    <a:solidFill>
+                      <a:srgbClr val="25557A"/>
+                    </a:solidFill>
+                    <a:latin typeface="微软雅黑" panose="020B0503020204020204" charset="-122"/>
+                    <a:ea typeface="微软雅黑" panose="020B0503020204020204" charset="-122"/>
+                    <a:cs typeface="+mn-ea"/>
+                    <a:sym typeface="+mn-lt"/>
+                  </a:rPr>
+                  <a:t>其余标注</a:t>
+                </a:r>
+                <a:endParaRPr lang="zh-CN" altLang="en-US" dirty="0">
+                  <a:solidFill>
+                    <a:schemeClr val="accent5">
+                      <a:lumMod val="50000"/>
+                    </a:schemeClr>
+                  </a:solidFill>
+                  <a:latin typeface="微软雅黑" panose="020B0503020204020204" charset="-122"/>
+                  <a:ea typeface="微软雅黑" panose="020B0503020204020204" charset="-122"/>
+                  <a:cs typeface="+mn-ea"/>
+                  <a:sym typeface="+mn-lt"/>
+                </a:endParaRPr>
+              </a:p>
+            </p:txBody>
+          </p:sp>
+          <p:sp>
+            <p:nvSpPr>
+              <p:cNvPr id="45" name="文本框 44"/>
+              <p:cNvSpPr txBox="1"/>
+              <p:nvPr/>
+            </p:nvSpPr>
+            <p:spPr>
+              <a:xfrm>
+                <a:off x="9465708" y="4220231"/>
+                <a:ext cx="2665723" cy="215444"/>
+              </a:xfrm>
+              <a:prstGeom prst="rect">
+                <a:avLst/>
+              </a:prstGeom>
+              <a:noFill/>
+            </p:spPr>
+            <p:txBody>
+              <a:bodyPr wrap="square">
+                <a:spAutoFit/>
+              </a:bodyPr>
+              <a:p>
+                <a:r>
+                  <a:rPr lang="zh-CN" altLang="en-US" sz="800" dirty="0">
+                    <a:solidFill>
+                      <a:schemeClr val="bg1">
+                        <a:lumMod val="65000"/>
+                      </a:schemeClr>
+                    </a:solidFill>
+                    <a:latin typeface="微软雅黑" panose="020B0503020204020204" charset="-122"/>
+                    <a:ea typeface="微软雅黑" panose="020B0503020204020204" charset="-122"/>
+                    <a:cs typeface="+mn-ea"/>
+                    <a:sym typeface="+mn-lt"/>
+                  </a:rPr>
+                  <a:t>OTHER · 8 CASES</a:t>
+                </a:r>
+                <a:r>
+                  <a:rPr lang="en-US" altLang="zh-CN" sz="800" dirty="0">
+                    <a:solidFill>
+                      <a:schemeClr val="bg1">
+                        <a:lumMod val="65000"/>
+                      </a:schemeClr>
+                    </a:solidFill>
+                    <a:latin typeface="微软雅黑" panose="020B0503020204020204" charset="-122"/>
+                    <a:ea typeface="微软雅黑" panose="020B0503020204020204" charset="-122"/>
+                    <a:cs typeface="+mn-ea"/>
+                    <a:sym typeface="+mn-lt"/>
+                  </a:rPr>
+                  <a:t> | </a:t>
+                </a:r>
+                <a:r>
+                  <a:rPr lang="zh-CN" altLang="en-US" sz="800" dirty="0">
+                    <a:solidFill>
+                      <a:schemeClr val="bg1">
+                        <a:lumMod val="65000"/>
+                      </a:schemeClr>
+                    </a:solidFill>
+                    <a:latin typeface="微软雅黑" panose="020B0503020204020204" charset="-122"/>
+                    <a:ea typeface="微软雅黑" panose="020B0503020204020204" charset="-122"/>
+                    <a:cs typeface="+mn-ea"/>
+                    <a:sym typeface="+mn-lt"/>
+                  </a:rPr>
+                  <a:t>M1-GEO-005~032</a:t>
+                </a:r>
+                <a:endParaRPr lang="zh-CN" altLang="en-US" sz="800" dirty="0">
+                  <a:solidFill>
+                    <a:schemeClr val="bg1">
+                      <a:lumMod val="65000"/>
+                    </a:schemeClr>
+                  </a:solidFill>
+                  <a:latin typeface="微软雅黑" panose="020B0503020204020204" charset="-122"/>
+                  <a:ea typeface="微软雅黑" panose="020B0503020204020204" charset="-122"/>
+                  <a:cs typeface="+mn-ea"/>
+                  <a:sym typeface="+mn-lt"/>
+                </a:endParaRPr>
+              </a:p>
+            </p:txBody>
+          </p:sp>
+          <p:sp>
+            <p:nvSpPr>
+              <p:cNvPr id="47" name="文本框 46"/>
+              <p:cNvSpPr txBox="1"/>
+              <p:nvPr/>
+            </p:nvSpPr>
+            <p:spPr>
+              <a:xfrm>
+                <a:off x="7893455" y="4377024"/>
+                <a:ext cx="7354570" cy="953135"/>
+              </a:xfrm>
+              <a:prstGeom prst="rect">
+                <a:avLst/>
+              </a:prstGeom>
+              <a:noFill/>
+            </p:spPr>
+            <p:txBody>
+              <a:bodyPr wrap="square">
+                <a:spAutoFit/>
+              </a:bodyPr>
+              <a:p>
+                <a:pPr>
+                  <a:lnSpc>
+                    <a:spcPct val="200000"/>
+                  </a:lnSpc>
+                </a:pPr>
+                <a:r>
+                  <a:rPr lang="zh-CN" altLang="en-US" sz="1400" dirty="0">
+                    <a:solidFill>
+                      <a:schemeClr val="tx1">
+                        <a:lumMod val="75000"/>
+                        <a:lumOff val="25000"/>
+                      </a:schemeClr>
+                    </a:solidFill>
+                    <a:latin typeface="微软雅黑" panose="020B0503020204020204" charset="-122"/>
+                    <a:ea typeface="微软雅黑" panose="020B0503020204020204" charset="-122"/>
+                  </a:rPr>
+                  <a:t>组合覆盖 4 条：015/022/028/031；错误推测 2 条：005/019；判定表 2 条：029/032。32 条全部有方法标注，与清单备注列一致。</a:t>
+                </a:r>
+                <a:endParaRPr lang="zh-CN" altLang="en-US" sz="1400" dirty="0">
+                  <a:solidFill>
+                    <a:schemeClr val="tx1">
+                      <a:lumMod val="75000"/>
+                      <a:lumOff val="25000"/>
+                    </a:schemeClr>
+                  </a:solidFill>
+                  <a:latin typeface="微软雅黑" panose="020B0503020204020204" charset="-122"/>
+                  <a:ea typeface="微软雅黑" panose="020B0503020204020204" charset="-122"/>
+                </a:endParaRPr>
+              </a:p>
+            </p:txBody>
+          </p:sp>
+        </p:grpSp>
+      </p:grpSp>
       <p:pic>
         <p:nvPicPr>
-          <p:cNvPr id="51" name="图片 50" descr="图书馆"/>
+          <p:cNvPr id="12" name="图片 11" descr="图书馆"/>
           <p:cNvPicPr>
             <a:picLocks noChangeAspect="1"/>
           </p:cNvPicPr>
@@ -14530,7 +19522,7 @@
       </p:pic>
       <p:grpSp>
         <p:nvGrpSpPr>
-          <p:cNvPr id="15" name="组合 14"/>
+          <p:cNvPr id="16" name="组合 15"/>
           <p:cNvGrpSpPr/>
           <p:nvPr userDrawn="1"/>
         </p:nvGrpSpPr>
@@ -14544,7 +19536,7 @@
         </p:grpSpPr>
         <p:sp>
           <p:nvSpPr>
-            <p:cNvPr id="16" name="任意多边形: 形状 10"/>
+            <p:cNvPr id="17" name="任意多边形: 形状 10"/>
             <p:cNvSpPr/>
             <p:nvPr/>
           </p:nvSpPr>
@@ -14627,7 +19619,7 @@
         </p:sp>
         <p:sp>
           <p:nvSpPr>
-            <p:cNvPr id="17" name="直角三角形 16"/>
+            <p:cNvPr id="20" name="直角三角形 19"/>
             <p:cNvSpPr/>
             <p:nvPr/>
           </p:nvSpPr>
@@ -14671,618 +19663,9 @@
           </p:txBody>
         </p:sp>
       </p:grpSp>
-      <p:grpSp>
-        <p:nvGrpSpPr>
-          <p:cNvPr id="27" name="组合 26"/>
-          <p:cNvGrpSpPr/>
-          <p:nvPr/>
-        </p:nvGrpSpPr>
-        <p:grpSpPr>
-          <a:xfrm>
-            <a:off x="660400" y="1234440"/>
-            <a:ext cx="10858500" cy="4899660"/>
-            <a:chOff x="1040" y="1944"/>
-            <a:chExt cx="17100" cy="7716"/>
-          </a:xfrm>
-        </p:grpSpPr>
-        <p:sp>
-          <p:nvSpPr>
-            <p:cNvPr id="2" name="矩形 1"/>
-            <p:cNvSpPr/>
-            <p:nvPr/>
-          </p:nvSpPr>
-          <p:spPr>
-            <a:xfrm>
-              <a:off x="1040" y="2274"/>
-              <a:ext cx="17100" cy="3336"/>
-            </a:xfrm>
-            <a:prstGeom prst="rect">
-              <a:avLst/>
-            </a:prstGeom>
-            <a:solidFill>
-              <a:schemeClr val="accent1">
-                <a:lumMod val="20000"/>
-                <a:lumOff val="80000"/>
-              </a:schemeClr>
-            </a:solidFill>
-            <a:ln>
-              <a:noFill/>
-            </a:ln>
-          </p:spPr>
-          <p:style>
-            <a:lnRef idx="2">
-              <a:schemeClr val="accent1">
-                <a:shade val="50000"/>
-              </a:schemeClr>
-            </a:lnRef>
-            <a:fillRef idx="1">
-              <a:schemeClr val="accent1"/>
-            </a:fillRef>
-            <a:effectRef idx="0">
-              <a:schemeClr val="accent1"/>
-            </a:effectRef>
-            <a:fontRef idx="minor">
-              <a:schemeClr val="lt1"/>
-            </a:fontRef>
-          </p:style>
-          <p:txBody>
-            <a:bodyPr rtlCol="0" anchor="ctr"/>
-            <a:p>
-              <a:pPr algn="ctr"/>
-              <a:endParaRPr lang="zh-CN" altLang="en-US"/>
-            </a:p>
-          </p:txBody>
-        </p:sp>
-        <p:grpSp>
-          <p:nvGrpSpPr>
-            <p:cNvPr id="3" name="组合 2"/>
-            <p:cNvGrpSpPr/>
-            <p:nvPr/>
-          </p:nvGrpSpPr>
-          <p:grpSpPr>
-            <a:xfrm>
-              <a:off x="1346" y="2586"/>
-              <a:ext cx="11773" cy="2733"/>
-              <a:chOff x="1188085" y="4304453"/>
-              <a:chExt cx="4283710" cy="1735330"/>
-            </a:xfrm>
-          </p:grpSpPr>
-          <p:sp>
-            <p:nvSpPr>
-              <p:cNvPr id="19" name="文本框 18"/>
-              <p:cNvSpPr txBox="1"/>
-              <p:nvPr/>
-            </p:nvSpPr>
-            <p:spPr>
-              <a:xfrm>
-                <a:off x="1188085" y="4304453"/>
-                <a:ext cx="2730844" cy="461665"/>
-              </a:xfrm>
-              <a:prstGeom prst="rect">
-                <a:avLst/>
-              </a:prstGeom>
-              <a:noFill/>
-            </p:spPr>
-            <p:txBody>
-              <a:bodyPr wrap="square" rtlCol="0">
-                <a:spAutoFit/>
-              </a:bodyPr>
-              <a:p>
-                <a:r>
-                  <a:rPr lang="zh-CN" altLang="en-US" sz="2400" b="1" dirty="0">
-                    <a:solidFill>
-                      <a:srgbClr val="25557A"/>
-                    </a:solidFill>
-                  </a:rPr>
-                  <a:t>函数契约（第 22 行）</a:t>
-                </a:r>
-                <a:endParaRPr lang="zh-CN" altLang="en-US" sz="2400" b="1" dirty="0">
-                  <a:solidFill>
-                    <a:srgbClr val="25557A"/>
-                  </a:solidFill>
-                </a:endParaRPr>
-              </a:p>
-            </p:txBody>
-          </p:sp>
-          <p:cxnSp>
-            <p:nvCxnSpPr>
-              <p:cNvPr id="20" name="直接连接符 19"/>
-              <p:cNvCxnSpPr/>
-              <p:nvPr/>
-            </p:nvCxnSpPr>
-            <p:spPr>
-              <a:xfrm>
-                <a:off x="1248911" y="4856923"/>
-                <a:ext cx="4097913" cy="0"/>
-              </a:xfrm>
-              <a:prstGeom prst="line">
-                <a:avLst/>
-              </a:prstGeom>
-              <a:ln w="25400">
-                <a:solidFill>
-                  <a:schemeClr val="bg1">
-                    <a:lumMod val="50000"/>
-                  </a:schemeClr>
-                </a:solidFill>
-              </a:ln>
-            </p:spPr>
-            <p:style>
-              <a:lnRef idx="1">
-                <a:schemeClr val="accent1"/>
-              </a:lnRef>
-              <a:fillRef idx="0">
-                <a:schemeClr val="accent1"/>
-              </a:fillRef>
-              <a:effectRef idx="0">
-                <a:schemeClr val="accent1"/>
-              </a:effectRef>
-              <a:fontRef idx="minor">
-                <a:schemeClr val="tx1"/>
-              </a:fontRef>
-            </p:style>
-          </p:cxnSp>
-          <p:sp>
-            <p:nvSpPr>
-              <p:cNvPr id="21" name="文本框 20"/>
-              <p:cNvSpPr txBox="1"/>
-              <p:nvPr/>
-            </p:nvSpPr>
-            <p:spPr>
-              <a:xfrm>
-                <a:off x="1188085" y="4896457"/>
-                <a:ext cx="4283710" cy="1143326"/>
-              </a:xfrm>
-              <a:prstGeom prst="rect">
-                <a:avLst/>
-              </a:prstGeom>
-              <a:noFill/>
-            </p:spPr>
-            <p:txBody>
-              <a:bodyPr wrap="square">
-                <a:spAutoFit/>
-              </a:bodyPr>
-              <a:p>
-                <a:pPr algn="just">
-                  <a:lnSpc>
-                    <a:spcPct val="130000"/>
-                  </a:lnSpc>
-                </a:pPr>
-                <a:r>
-                  <a:rPr sz="1400" lang="zh-CN" altLang="en-US" dirty="0"/>
-                  <a:t>docstring 明文声明：depth_map 的形状可为 (S, H, W, 1) 或 (S, H, W)。</a:t>
-                </a:r>
-                <a:r>
-                  <a:rPr sz="1400" lang="en-US" altLang="zh-CN" dirty="0"/>
-                  <a:t/>
-                </a:r>
-                <a:r>
-                  <a:rPr sz="1400" lang="zh-CN" altLang="en-US" dirty="0"/>
-                  <a:t/>
-                </a:r>
-                <a:r>
-                  <a:rPr sz="1400" lang="en-US" altLang="zh-CN" dirty="0"/>
-                  <a:t/>
-                </a:r>
-                <a:r>
-                  <a:rPr sz="1400" lang="zh-CN" altLang="en-US" dirty="0"/>
-                  <a:t/>
-                </a:r>
-                <a:r>
-                  <a:rPr sz="1400" lang="en-US" altLang="zh-CN" dirty="0"/>
-                  <a:t/>
-                </a:r>
-                <a:r>
-                  <a:rPr sz="1400" lang="zh-CN" altLang="en-US" dirty="0"/>
-                  <a:t/>
-                </a:r>
-                <a:r>
-                  <a:rPr sz="1400" lang="en-US" altLang="zh-CN" dirty="0"/>
-                  <a:t/>
-                </a:r>
-                <a:r>
-                  <a:rPr sz="1400" lang="zh-CN" altLang="en-US" dirty="0"/>
-                  <a:t/>
-                </a:r>
-                <a:r>
-                  <a:rPr sz="1400" lang="en-US" altLang="zh-CN" dirty="0"/>
-                  <a:t/>
-                </a:r>
-                <a:r>
-                  <a:rPr sz="1400" lang="zh-CN" altLang="en-US" dirty="0"/>
-                  <a:t/>
-                </a:r>
-                <a:r>
-                  <a:rPr sz="1400" lang="en-US" altLang="zh-CN" dirty="0"/>
-                  <a:t/>
-                </a:r>
-                <a:r>
-                  <a:rPr sz="1400" lang="zh-CN" altLang="en-US" dirty="0"/>
-                  <a:t/>
-                </a:r>
-                <a:r>
-                  <a:rPr sz="1400" lang="en-US" altLang="zh-CN" dirty="0"/>
-                  <a:t/>
-                </a:r>
-                <a:r>
-                  <a:rPr sz="1400" lang="zh-CN" altLang="en-US" dirty="0"/>
-                  <a:t/>
-                </a:r>
-                <a:r>
-                  <a:rPr sz="1400" lang="en-US" altLang="zh-CN" dirty="0"/>
-                  <a:t/>
-                </a:r>
-                <a:r>
-                  <a:rPr sz="1400" lang="zh-CN" altLang="en-US" dirty="0"/>
-                  <a:t/>
-                </a:r>
-                <a:endParaRPr sz="1400" lang="zh-CN" altLang="en-US" dirty="0"/>
-              </a:p>
-            </p:txBody>
-          </p:sp>
-        </p:grpSp>
-        <p:grpSp>
-          <p:nvGrpSpPr>
-            <p:cNvPr id="22" name="组合 21"/>
-            <p:cNvGrpSpPr/>
-            <p:nvPr/>
-          </p:nvGrpSpPr>
-          <p:grpSpPr>
-            <a:xfrm>
-              <a:off x="1040" y="5994"/>
-              <a:ext cx="17100" cy="3666"/>
-              <a:chOff x="660400" y="1603756"/>
-              <a:chExt cx="10858500" cy="2328164"/>
-            </a:xfrm>
-          </p:grpSpPr>
-          <p:sp>
-            <p:nvSpPr>
-              <p:cNvPr id="23" name="矩形 22"/>
-              <p:cNvSpPr/>
-              <p:nvPr/>
-            </p:nvSpPr>
-            <p:spPr>
-              <a:xfrm>
-                <a:off x="660400" y="1813560"/>
-                <a:ext cx="10858500" cy="2118360"/>
-              </a:xfrm>
-              <a:prstGeom prst="rect">
-                <a:avLst/>
-              </a:prstGeom>
-              <a:solidFill>
-                <a:schemeClr val="accent1">
-                  <a:lumMod val="20000"/>
-                  <a:lumOff val="80000"/>
-                </a:schemeClr>
-              </a:solidFill>
-              <a:ln>
-                <a:noFill/>
-              </a:ln>
-            </p:spPr>
-            <p:style>
-              <a:lnRef idx="2">
-                <a:schemeClr val="accent1">
-                  <a:shade val="50000"/>
-                </a:schemeClr>
-              </a:lnRef>
-              <a:fillRef idx="1">
-                <a:schemeClr val="accent1"/>
-              </a:fillRef>
-              <a:effectRef idx="0">
-                <a:schemeClr val="accent1"/>
-              </a:effectRef>
-              <a:fontRef idx="minor">
-                <a:schemeClr val="lt1"/>
-              </a:fontRef>
-            </p:style>
-            <p:txBody>
-              <a:bodyPr rtlCol="0" anchor="ctr"/>
-              <a:p>
-                <a:pPr algn="ctr"/>
-                <a:endParaRPr lang="zh-CN" altLang="en-US"/>
-              </a:p>
-            </p:txBody>
-          </p:sp>
-          <p:pic>
-            <p:nvPicPr>
-              <p:cNvPr id="32" name="图片 31" descr="C:\Users\14638\Desktop\IMG_2588(20220923-102348).JPGIMG_2588(20220923-102348)"/>
-              <p:cNvPicPr/>
-              <p:nvPr/>
-            </p:nvPicPr>
-            <p:blipFill rotWithShape="1">
-              <a:blip r:embed="rId2"/>
-              <a:srcRect/>
-              <a:stretch>
-                <a:fillRect/>
-              </a:stretch>
-            </p:blipFill>
-            <p:spPr>
-              <a:xfrm>
-                <a:off x="989185" y="1603756"/>
-                <a:ext cx="2327910" cy="2328164"/>
-              </a:xfrm>
-              <a:prstGeom prst="rect">
-                <a:avLst/>
-              </a:prstGeom>
-            </p:spPr>
-          </p:pic>
-        </p:grpSp>
-        <p:grpSp>
-          <p:nvGrpSpPr>
-            <p:cNvPr id="35" name="组合 34"/>
-            <p:cNvGrpSpPr/>
-            <p:nvPr/>
-          </p:nvGrpSpPr>
-          <p:grpSpPr>
-            <a:xfrm>
-              <a:off x="5870" y="6635"/>
-              <a:ext cx="11773" cy="2744"/>
-              <a:chOff x="1188085" y="4304453"/>
-              <a:chExt cx="4283710" cy="1742315"/>
-            </a:xfrm>
-          </p:grpSpPr>
-          <p:sp>
-            <p:nvSpPr>
-              <p:cNvPr id="37" name="文本框 36"/>
-              <p:cNvSpPr txBox="1"/>
-              <p:nvPr/>
-            </p:nvSpPr>
-            <p:spPr>
-              <a:xfrm>
-                <a:off x="1188085" y="4304453"/>
-                <a:ext cx="2730844" cy="460375"/>
-              </a:xfrm>
-              <a:prstGeom prst="rect">
-                <a:avLst/>
-              </a:prstGeom>
-              <a:noFill/>
-            </p:spPr>
-            <p:txBody>
-              <a:bodyPr wrap="square" rtlCol="0">
-                <a:spAutoFit/>
-              </a:bodyPr>
-              <a:p>
-                <a:r>
-                  <a:rPr lang="zh-CN" altLang="en-US" sz="2400" b="1" dirty="0">
-                    <a:solidFill>
-                      <a:srgbClr val="25557A"/>
-                    </a:solidFill>
-                  </a:rPr>
-                  <a:t>实际实现（第 39 行）</a:t>
-                </a:r>
-                <a:endParaRPr lang="zh-CN" altLang="en-US" sz="2400" b="1" dirty="0">
-                  <a:solidFill>
-                    <a:schemeClr val="accent1"/>
-                  </a:solidFill>
-                </a:endParaRPr>
-              </a:p>
-            </p:txBody>
-          </p:sp>
-          <p:cxnSp>
-            <p:nvCxnSpPr>
-              <p:cNvPr id="38" name="直接连接符 37"/>
-              <p:cNvCxnSpPr/>
-              <p:nvPr/>
-            </p:nvCxnSpPr>
-            <p:spPr>
-              <a:xfrm>
-                <a:off x="1232903" y="4863908"/>
-                <a:ext cx="4097913" cy="0"/>
-              </a:xfrm>
-              <a:prstGeom prst="line">
-                <a:avLst/>
-              </a:prstGeom>
-              <a:ln w="25400">
-                <a:solidFill>
-                  <a:schemeClr val="bg1">
-                    <a:lumMod val="50000"/>
-                  </a:schemeClr>
-                </a:solidFill>
-              </a:ln>
-            </p:spPr>
-            <p:style>
-              <a:lnRef idx="1">
-                <a:schemeClr val="accent1"/>
-              </a:lnRef>
-              <a:fillRef idx="0">
-                <a:schemeClr val="accent1"/>
-              </a:fillRef>
-              <a:effectRef idx="0">
-                <a:schemeClr val="accent1"/>
-              </a:effectRef>
-              <a:fontRef idx="minor">
-                <a:schemeClr val="tx1"/>
-              </a:fontRef>
-            </p:style>
-          </p:cxnSp>
-          <p:sp>
-            <p:nvSpPr>
-              <p:cNvPr id="39" name="文本框 38"/>
-              <p:cNvSpPr txBox="1"/>
-              <p:nvPr/>
-            </p:nvSpPr>
-            <p:spPr>
-              <a:xfrm>
-                <a:off x="1188085" y="4903442"/>
-                <a:ext cx="4283710" cy="1143326"/>
-              </a:xfrm>
-              <a:prstGeom prst="rect">
-                <a:avLst/>
-              </a:prstGeom>
-              <a:noFill/>
-            </p:spPr>
-            <p:txBody>
-              <a:bodyPr wrap="square">
-                <a:spAutoFit/>
-              </a:bodyPr>
-              <a:p>
-                <a:pPr algn="just">
-                  <a:lnSpc>
-                    <a:spcPct val="130000"/>
-                  </a:lnSpc>
-                </a:pPr>
-                <a:r>
-                  <a:rPr sz="1400" lang="zh-CN" altLang="en-US" dirty="0"/>
-                  <a:t>但实现第 39 行对每一帧无条件执行 squeeze(-1)，实质只兼容四维输入。</a:t>
-                </a:r>
-                <a:r>
-                  <a:rPr sz="1400" lang="en-US" altLang="zh-CN" dirty="0"/>
-                  <a:t/>
-                </a:r>
-                <a:r>
-                  <a:rPr sz="1400" lang="zh-CN" altLang="en-US" dirty="0"/>
-                  <a:t/>
-                </a:r>
-                <a:r>
-                  <a:rPr sz="1400" lang="en-US" altLang="zh-CN" dirty="0"/>
-                  <a:t/>
-                </a:r>
-                <a:r>
-                  <a:rPr sz="1400" lang="zh-CN" altLang="en-US" dirty="0"/>
-                  <a:t/>
-                </a:r>
-                <a:r>
-                  <a:rPr sz="1400" lang="en-US" altLang="zh-CN" dirty="0"/>
-                  <a:t/>
-                </a:r>
-                <a:r>
-                  <a:rPr sz="1400" lang="zh-CN" altLang="en-US" dirty="0"/>
-                  <a:t/>
-                </a:r>
-                <a:r>
-                  <a:rPr sz="1400" lang="en-US" altLang="zh-CN" dirty="0"/>
-                  <a:t/>
-                </a:r>
-                <a:r>
-                  <a:rPr sz="1400" lang="zh-CN" altLang="en-US" dirty="0"/>
-                  <a:t/>
-                </a:r>
-                <a:r>
-                  <a:rPr sz="1400" lang="en-US" altLang="zh-CN" dirty="0"/>
-                  <a:t/>
-                </a:r>
-                <a:r>
-                  <a:rPr sz="1400" lang="zh-CN" altLang="en-US" dirty="0"/>
-                  <a:t/>
-                </a:r>
-                <a:r>
-                  <a:rPr sz="1400" lang="en-US" altLang="zh-CN" dirty="0"/>
-                  <a:t/>
-                </a:r>
-                <a:r>
-                  <a:rPr sz="1400" lang="zh-CN" altLang="en-US" dirty="0"/>
-                  <a:t/>
-                </a:r>
-                <a:r>
-                  <a:rPr sz="1400" lang="en-US" altLang="zh-CN" dirty="0"/>
-                  <a:t/>
-                </a:r>
-                <a:r>
-                  <a:rPr sz="1400" lang="zh-CN" altLang="en-US" dirty="0"/>
-                  <a:t/>
-                </a:r>
-                <a:r>
-                  <a:rPr sz="1400" lang="en-US" altLang="zh-CN" dirty="0"/>
-                  <a:t/>
-                </a:r>
-                <a:r>
-                  <a:rPr sz="1400" lang="zh-CN" altLang="en-US" dirty="0"/>
-                  <a:t/>
-                </a:r>
-                <a:endParaRPr sz="1400" lang="zh-CN" altLang="en-US" dirty="0"/>
-              </a:p>
-            </p:txBody>
-          </p:sp>
-        </p:grpSp>
-        <p:grpSp>
-          <p:nvGrpSpPr>
-            <p:cNvPr id="25" name="组合 24"/>
-            <p:cNvGrpSpPr/>
-            <p:nvPr/>
-          </p:nvGrpSpPr>
-          <p:grpSpPr>
-            <a:xfrm>
-              <a:off x="13940" y="1944"/>
-              <a:ext cx="3665" cy="3666"/>
-              <a:chOff x="13940" y="1944"/>
-              <a:chExt cx="3665" cy="3666"/>
-            </a:xfrm>
-          </p:grpSpPr>
-          <p:pic>
-            <p:nvPicPr>
-              <p:cNvPr id="40" name="图片 39" descr="C:\Users\14638\Desktop\IMG_2587(20220923-102336).JPGIMG_2587(20220923-102336)"/>
-              <p:cNvPicPr/>
-              <p:nvPr/>
-            </p:nvPicPr>
-            <p:blipFill rotWithShape="1">
-              <a:blip r:embed="rId3"/>
-              <a:srcRect/>
-              <a:stretch>
-                <a:fillRect/>
-              </a:stretch>
-            </p:blipFill>
-            <p:spPr>
-              <a:xfrm>
-                <a:off x="13940" y="1944"/>
-                <a:ext cx="3665" cy="3666"/>
-              </a:xfrm>
-              <a:prstGeom prst="rect">
-                <a:avLst/>
-              </a:prstGeom>
-            </p:spPr>
-          </p:pic>
-          <p:pic>
-            <p:nvPicPr>
-              <p:cNvPr id="18" name="图片 17" descr="小招logo"/>
-              <p:cNvPicPr>
-                <a:picLocks noChangeAspect="1"/>
-              </p:cNvPicPr>
-              <p:nvPr/>
-            </p:nvPicPr>
-            <p:blipFill>
-              <a:blip r:embed="rId4"/>
-              <a:stretch>
-                <a:fillRect/>
-              </a:stretch>
-            </p:blipFill>
-            <p:spPr>
-              <a:xfrm>
-                <a:off x="14922" y="4366"/>
-                <a:ext cx="1701" cy="952"/>
-              </a:xfrm>
-              <a:prstGeom prst="rect">
-                <a:avLst/>
-              </a:prstGeom>
-            </p:spPr>
-          </p:pic>
-        </p:grpSp>
-        <p:pic>
-          <p:nvPicPr>
-            <p:cNvPr id="24" name="图片 23" descr="小招logo"/>
-            <p:cNvPicPr>
-              <a:picLocks noChangeAspect="1"/>
-            </p:cNvPicPr>
-            <p:nvPr/>
-          </p:nvPicPr>
-          <p:blipFill>
-            <a:blip r:embed="rId4"/>
-            <a:stretch>
-              <a:fillRect/>
-            </a:stretch>
-          </p:blipFill>
-          <p:spPr>
-            <a:xfrm>
-              <a:off x="2541" y="8427"/>
-              <a:ext cx="1701" cy="952"/>
-            </a:xfrm>
-            <a:prstGeom prst="rect">
-              <a:avLst/>
-            </a:prstGeom>
-          </p:spPr>
-        </p:pic>
-      </p:grpSp>
     </p:spTree>
     <p:custDataLst>
-      <p:tags r:id="rId5"/>
+      <p:tags r:id="rId2"/>
     </p:custDataLst>
   </p:cSld>
   <p:clrMapOvr>
@@ -15291,7 +19674,7 @@
 </p:sld>
 </file>
 
-<file path=ppt/slides/slide8.xml><?xml version="1.0" encoding="utf-8"?>
+<file path=ppt/slides/slide9.xml><?xml version="1.0" encoding="utf-8"?>
 <p:sld xmlns:a="http://schemas.openxmlformats.org/drawingml/2006/main" xmlns:r="http://schemas.openxmlformats.org/officeDocument/2006/relationships" xmlns:p="http://schemas.openxmlformats.org/presentationml/2006/main">
   <p:cSld>
     <p:spTree>
@@ -15858,14 +20241,14 @@
                   </a:lnSpc>
                 </a:pPr>
                 <a:r>
-                  <a:rPr sz="1200" lang="zh-CN" altLang="en-US">
+                  <a:rPr lang="zh-CN" altLang="en-US">
                     <a:latin typeface="微软雅黑" panose="020B0503020204020204" charset="-122"/>
                     <a:ea typeface="微软雅黑" panose="020B0503020204020204" charset="-122"/>
                     <a:sym typeface="+mn-ea"/>
                   </a:rPr>
                   <a:t>失败②：W &gt; 1 时对非单位轴 squeeze，直接抛错。</a:t>
                 </a:r>
-                <a:endParaRPr sz="1200" lang="zh-CN" altLang="en-US">
+                <a:endParaRPr lang="zh-CN" altLang="en-US">
                   <a:solidFill>
                     <a:schemeClr val="tx1"/>
                   </a:solidFill>
@@ -15880,7 +20263,7 @@
                     <a:spcPct val="120000"/>
                   </a:lnSpc>
                 </a:pPr>
-                <a:endParaRPr sz="1200" lang="zh-CN" altLang="en-US" kern="0" dirty="0">
+                <a:endParaRPr lang="zh-CN" altLang="en-US" kern="0" dirty="0">
                   <a:solidFill>
                     <a:srgbClr val="779B5E"/>
                   </a:solidFill>
@@ -15976,14 +20359,14 @@
                   </a:lnSpc>
                 </a:pPr>
                 <a:r>
-                  <a:rPr sz="1200" lang="zh-CN" altLang="en-US">
+                  <a:rPr lang="zh-CN" altLang="en-US">
                     <a:latin typeface="微软雅黑" panose="020B0503020204020204" charset="-122"/>
                     <a:ea typeface="微软雅黑" panose="020B0503020204020204" charset="-122"/>
                     <a:sym typeface="+mn-ea"/>
                   </a:rPr>
                   <a:t>通过：正常返回 (2, 1, 1, 3)。这是声明的另一种形状。</a:t>
                 </a:r>
-                <a:endParaRPr sz="1200" lang="zh-CN" altLang="en-US" kern="0" dirty="0">
+                <a:endParaRPr lang="zh-CN" altLang="en-US" kern="0" dirty="0">
                   <a:solidFill>
                     <a:srgbClr val="779B5E"/>
                   </a:solidFill>
@@ -16079,14 +20462,14 @@
                   </a:lnSpc>
                 </a:pPr>
                 <a:r>
-                  <a:rPr sz="1200" lang="zh-CN" altLang="en-US">
+                  <a:rPr lang="zh-CN" altLang="en-US">
                     <a:latin typeface="微软雅黑" panose="020B0503020204020204" charset="-122"/>
                     <a:ea typeface="微软雅黑" panose="020B0503020204020204" charset="-122"/>
                     <a:sym typeface="+mn-ea"/>
                   </a:rPr>
                   <a:t>通过：正常返回 (2, 1, 2, 3)。与左格同源，缺陷只在三维分支。</a:t>
                 </a:r>
-                <a:endParaRPr sz="1200" lang="zh-CN" altLang="en-US" kern="0" dirty="0">
+                <a:endParaRPr lang="zh-CN" altLang="en-US" kern="0" dirty="0">
                   <a:solidFill>
                     <a:srgbClr val="779B5E"/>
                   </a:solidFill>
@@ -16183,14 +20566,14 @@
                   </a:lnSpc>
                 </a:pPr>
                 <a:r>
-                  <a:rPr sz="1200" lang="zh-CN" altLang="en-US">
+                  <a:rPr lang="zh-CN" altLang="en-US">
                     <a:latin typeface="微软雅黑" panose="020B0503020204020204" charset="-122"/>
                     <a:ea typeface="微软雅黑" panose="020B0503020204020204" charset="-122"/>
                     <a:sym typeface="+mn-ea"/>
                   </a:rPr>
                   <a:t>失败①：W = 1 时宽度维被删，H, W 解包失败。</a:t>
                 </a:r>
-                <a:endParaRPr sz="1200" lang="zh-CN" altLang="en-US">
+                <a:endParaRPr lang="zh-CN" altLang="en-US">
                   <a:solidFill>
                     <a:schemeClr val="tx1"/>
                   </a:solidFill>
@@ -16205,7 +20588,7 @@
                     <a:spcPct val="120000"/>
                   </a:lnSpc>
                 </a:pPr>
-                <a:endParaRPr sz="1200" lang="zh-CN" altLang="en-US" b="1" kern="0" dirty="0">
+                <a:endParaRPr lang="zh-CN" altLang="en-US" b="1" kern="0" dirty="0">
                   <a:solidFill>
                     <a:srgbClr val="2E7030"/>
                   </a:solidFill>
@@ -16399,7 +20782,7 @@
             <a:p>
               <a:pPr algn="ctr"/>
               <a:r>
-                <a:rPr sz="2000" lang="zh-CN" altLang="en-US" b="1" kern="0" dirty="0">
+                <a:rPr lang="zh-CN" altLang="en-US" sz="2000" b="1" kern="0" dirty="0">
                   <a:solidFill>
                     <a:schemeClr val="bg1"/>
                   </a:solidFill>
@@ -16409,7 +20792,7 @@
                 </a:rPr>
                 <a:t>(2,1,1)</a:t>
               </a:r>
-              <a:endParaRPr sz="2000" lang="zh-CN" altLang="en-US" b="1" kern="0" dirty="0">
+              <a:endParaRPr lang="zh-CN" altLang="en-US" sz="2000" b="1" kern="0" dirty="0">
                 <a:solidFill>
                   <a:schemeClr val="bg1"/>
                 </a:solidFill>
@@ -16461,7 +20844,7 @@
             <a:p>
               <a:pPr algn="ctr"/>
               <a:r>
-                <a:rPr sz="2000" lang="zh-CN" altLang="en-US" b="1" kern="0" dirty="0">
+                <a:rPr lang="zh-CN" altLang="en-US" sz="2000" b="1" kern="0" dirty="0">
                   <a:solidFill>
                     <a:schemeClr val="bg1"/>
                   </a:solidFill>
@@ -16472,7 +20855,7 @@
                 </a:rPr>
                 <a:t>(2,1,2)</a:t>
               </a:r>
-              <a:endParaRPr sz="2000" lang="zh-CN" altLang="en-US" b="1" kern="0" dirty="0">
+              <a:endParaRPr lang="zh-CN" altLang="en-US" sz="2000" b="1" kern="0" dirty="0">
                 <a:solidFill>
                   <a:schemeClr val="bg1"/>
                 </a:solidFill>
@@ -16525,7 +20908,7 @@
             <a:p>
               <a:pPr algn="ctr"/>
               <a:r>
-                <a:rPr sz="2000" lang="zh-CN" altLang="en-US" b="1" kern="0" dirty="0">
+                <a:rPr lang="zh-CN" altLang="en-US" sz="2000" b="1" kern="0" dirty="0">
                   <a:solidFill>
                     <a:schemeClr val="bg1"/>
                   </a:solidFill>
@@ -16535,7 +20918,7 @@
                 </a:rPr>
                 <a:t>(2,1,1,1)</a:t>
               </a:r>
-              <a:endParaRPr sz="2000" lang="zh-CN" altLang="en-US" b="1" kern="0" dirty="0">
+              <a:endParaRPr lang="zh-CN" altLang="en-US" sz="2000" b="1" kern="0" dirty="0">
                 <a:solidFill>
                   <a:schemeClr val="bg1"/>
                 </a:solidFill>
@@ -16587,7 +20970,7 @@
             <a:p>
               <a:pPr algn="ctr"/>
               <a:r>
-                <a:rPr sz="2000" lang="zh-CN" altLang="en-US" b="1" kern="0" dirty="0">
+                <a:rPr lang="zh-CN" altLang="en-US" sz="2000" b="1" kern="0" dirty="0">
                   <a:solidFill>
                     <a:schemeClr val="bg1"/>
                   </a:solidFill>
@@ -16597,7 +20980,7 @@
                 </a:rPr>
                 <a:t>(2,1,2,1)</a:t>
               </a:r>
-              <a:endParaRPr sz="2000" lang="zh-CN" altLang="en-US" b="1" kern="0" dirty="0">
+              <a:endParaRPr lang="zh-CN" altLang="en-US" sz="2000" b="1" kern="0" dirty="0">
                 <a:solidFill>
                   <a:schemeClr val="bg1"/>
                 </a:solidFill>
@@ -16714,48 +21097,6 @@
     <a:masterClrMapping/>
   </p:clrMapOvr>
 </p:sld>
-</file>
-
-<file path=ppt/tags/dup1.xml><?xml version="1.0" encoding="utf-8"?>
-<p:tagLst xmlns:p="http://schemas.openxmlformats.org/presentationml/2006/main">
-  <p:tag name="KSO_WM_SLIDE_ID" val="custom20205081_1"/>
-  <p:tag name="KSO_WM_TEMPLATE_SUBCATEGORY" val="19"/>
-  <p:tag name="KSO_WM_TEMPLATE_MASTER_TYPE" val="0"/>
-  <p:tag name="KSO_WM_TEMPLATE_COLOR_TYPE" val="1"/>
-  <p:tag name="KSO_WM_SLIDE_TYPE" val="title"/>
-  <p:tag name="KSO_WM_SLIDE_SUBTYPE" val="defaultBlank"/>
-  <p:tag name="KSO_WM_SLIDE_ITEM_CNT" val="0"/>
-  <p:tag name="KSO_WM_SLIDE_INDEX" val="1"/>
-  <p:tag name="KSO_WM_TAG_VERSION" val="1.0"/>
-  <p:tag name="KSO_WM_BEAUTIFY_FLAG" val="#wm#"/>
-  <p:tag name="KSO_WM_TEMPLATE_CATEGORY" val="custom"/>
-  <p:tag name="KSO_WM_TEMPLATE_INDEX" val="20205081"/>
-  <p:tag name="KSO_WM_SLIDE_LAYOUT" val="a_b"/>
-  <p:tag name="KSO_WM_SLIDE_LAYOUT_CNT" val="1_1"/>
-  <p:tag name="KSO_WM_UNIT_SHOW_EDIT_AREA_INDICATION" val="1"/>
-  <p:tag name="KSO_WM_TEMPLATE_THUMBS_INDEX" val="1、4、7、12、13、14、15、16、17、18、20、24、25、28、33、36、40、43、44"/>
-</p:tagLst>
-</file>
-
-<file path=ppt/tags/dup2.xml><?xml version="1.0" encoding="utf-8"?>
-<p:tagLst xmlns:p="http://schemas.openxmlformats.org/presentationml/2006/main">
-  <p:tag name="KSO_WM_SLIDE_ID" val="custom20205081_1"/>
-  <p:tag name="KSO_WM_TEMPLATE_SUBCATEGORY" val="19"/>
-  <p:tag name="KSO_WM_TEMPLATE_MASTER_TYPE" val="0"/>
-  <p:tag name="KSO_WM_TEMPLATE_COLOR_TYPE" val="1"/>
-  <p:tag name="KSO_WM_SLIDE_TYPE" val="title"/>
-  <p:tag name="KSO_WM_SLIDE_SUBTYPE" val="defaultBlank"/>
-  <p:tag name="KSO_WM_SLIDE_ITEM_CNT" val="0"/>
-  <p:tag name="KSO_WM_SLIDE_INDEX" val="1"/>
-  <p:tag name="KSO_WM_TAG_VERSION" val="1.0"/>
-  <p:tag name="KSO_WM_BEAUTIFY_FLAG" val="#wm#"/>
-  <p:tag name="KSO_WM_TEMPLATE_CATEGORY" val="custom"/>
-  <p:tag name="KSO_WM_TEMPLATE_INDEX" val="20205081"/>
-  <p:tag name="KSO_WM_SLIDE_LAYOUT" val="a_b"/>
-  <p:tag name="KSO_WM_SLIDE_LAYOUT_CNT" val="1_1"/>
-  <p:tag name="KSO_WM_UNIT_SHOW_EDIT_AREA_INDICATION" val="1"/>
-  <p:tag name="KSO_WM_TEMPLATE_THUMBS_INDEX" val="1、4、7、12、13、14、15、16、17、18、20、24、25、28、33、36、40、43、44"/>
-</p:tagLst>
 </file>
 
 <file path=ppt/tags/tag1.xml><?xml version="1.0" encoding="utf-8"?>
@@ -17889,6 +22230,111 @@
 </p:tagLst>
 </file>
 
+<file path=ppt/tags/tag81.xml><?xml version="1.0" encoding="utf-8"?>
+<p:tagLst xmlns:p="http://schemas.openxmlformats.org/presentationml/2006/main">
+  <p:tag name="KSO_WM_SLIDE_ID" val="custom20205081_1"/>
+  <p:tag name="KSO_WM_TEMPLATE_SUBCATEGORY" val="19"/>
+  <p:tag name="KSO_WM_TEMPLATE_MASTER_TYPE" val="0"/>
+  <p:tag name="KSO_WM_TEMPLATE_COLOR_TYPE" val="1"/>
+  <p:tag name="KSO_WM_SLIDE_TYPE" val="title"/>
+  <p:tag name="KSO_WM_SLIDE_SUBTYPE" val="defaultBlank"/>
+  <p:tag name="KSO_WM_SLIDE_ITEM_CNT" val="0"/>
+  <p:tag name="KSO_WM_SLIDE_INDEX" val="1"/>
+  <p:tag name="KSO_WM_TAG_VERSION" val="1.0"/>
+  <p:tag name="KSO_WM_BEAUTIFY_FLAG" val="#wm#"/>
+  <p:tag name="KSO_WM_TEMPLATE_CATEGORY" val="custom"/>
+  <p:tag name="KSO_WM_TEMPLATE_INDEX" val="20205081"/>
+  <p:tag name="KSO_WM_SLIDE_LAYOUT" val="a_b"/>
+  <p:tag name="KSO_WM_SLIDE_LAYOUT_CNT" val="1_1"/>
+  <p:tag name="KSO_WM_UNIT_SHOW_EDIT_AREA_INDICATION" val="1"/>
+  <p:tag name="KSO_WM_TEMPLATE_THUMBS_INDEX" val="1、4、7、12、13、14、15、16、17、18、20、24、25、28、33、36、40、43、44"/>
+</p:tagLst>
+</file>
+
+<file path=ppt/tags/tag82.xml><?xml version="1.0" encoding="utf-8"?>
+<p:tagLst xmlns:p="http://schemas.openxmlformats.org/presentationml/2006/main">
+  <p:tag name="KSO_WM_SLIDE_ID" val="custom20205081_1"/>
+  <p:tag name="KSO_WM_TEMPLATE_SUBCATEGORY" val="19"/>
+  <p:tag name="KSO_WM_TEMPLATE_MASTER_TYPE" val="0"/>
+  <p:tag name="KSO_WM_TEMPLATE_COLOR_TYPE" val="1"/>
+  <p:tag name="KSO_WM_SLIDE_TYPE" val="title"/>
+  <p:tag name="KSO_WM_SLIDE_SUBTYPE" val="defaultBlank"/>
+  <p:tag name="KSO_WM_SLIDE_ITEM_CNT" val="0"/>
+  <p:tag name="KSO_WM_SLIDE_INDEX" val="1"/>
+  <p:tag name="KSO_WM_TAG_VERSION" val="1.0"/>
+  <p:tag name="KSO_WM_BEAUTIFY_FLAG" val="#wm#"/>
+  <p:tag name="KSO_WM_TEMPLATE_CATEGORY" val="custom"/>
+  <p:tag name="KSO_WM_TEMPLATE_INDEX" val="20205081"/>
+  <p:tag name="KSO_WM_SLIDE_LAYOUT" val="a_b"/>
+  <p:tag name="KSO_WM_SLIDE_LAYOUT_CNT" val="1_1"/>
+  <p:tag name="KSO_WM_UNIT_SHOW_EDIT_AREA_INDICATION" val="1"/>
+  <p:tag name="KSO_WM_TEMPLATE_THUMBS_INDEX" val="1、4、7、12、13、14、15、16、17、18、20、24、25、28、33、36、40、43、44"/>
+</p:tagLst>
+</file>
+
+<file path=ppt/tags/tag83.xml><?xml version="1.0" encoding="utf-8"?>
+<p:tagLst xmlns:p="http://schemas.openxmlformats.org/presentationml/2006/main">
+  <p:tag name="KSO_WM_SLIDE_ID" val="custom20205081_1"/>
+  <p:tag name="KSO_WM_TEMPLATE_SUBCATEGORY" val="19"/>
+  <p:tag name="KSO_WM_TEMPLATE_MASTER_TYPE" val="0"/>
+  <p:tag name="KSO_WM_TEMPLATE_COLOR_TYPE" val="1"/>
+  <p:tag name="KSO_WM_SLIDE_TYPE" val="title"/>
+  <p:tag name="KSO_WM_SLIDE_SUBTYPE" val="defaultBlank"/>
+  <p:tag name="KSO_WM_SLIDE_ITEM_CNT" val="0"/>
+  <p:tag name="KSO_WM_SLIDE_INDEX" val="1"/>
+  <p:tag name="KSO_WM_TAG_VERSION" val="1.0"/>
+  <p:tag name="KSO_WM_BEAUTIFY_FLAG" val="#wm#"/>
+  <p:tag name="KSO_WM_TEMPLATE_CATEGORY" val="custom"/>
+  <p:tag name="KSO_WM_TEMPLATE_INDEX" val="20205081"/>
+  <p:tag name="KSO_WM_SLIDE_LAYOUT" val="a_b"/>
+  <p:tag name="KSO_WM_SLIDE_LAYOUT_CNT" val="1_1"/>
+  <p:tag name="KSO_WM_UNIT_SHOW_EDIT_AREA_INDICATION" val="1"/>
+  <p:tag name="KSO_WM_TEMPLATE_THUMBS_INDEX" val="1、4、7、12、13、14、15、16、17、18、20、24、25、28、33、36、40、43、44"/>
+</p:tagLst>
+</file>
+
+<file path=ppt/tags/tag84.xml><?xml version="1.0" encoding="utf-8"?>
+<p:tagLst xmlns:p="http://schemas.openxmlformats.org/presentationml/2006/main">
+  <p:tag name="KSO_WM_SLIDE_ID" val="custom20205081_1"/>
+  <p:tag name="KSO_WM_TEMPLATE_SUBCATEGORY" val="19"/>
+  <p:tag name="KSO_WM_TEMPLATE_MASTER_TYPE" val="0"/>
+  <p:tag name="KSO_WM_TEMPLATE_COLOR_TYPE" val="1"/>
+  <p:tag name="KSO_WM_SLIDE_TYPE" val="title"/>
+  <p:tag name="KSO_WM_SLIDE_SUBTYPE" val="defaultBlank"/>
+  <p:tag name="KSO_WM_SLIDE_ITEM_CNT" val="0"/>
+  <p:tag name="KSO_WM_SLIDE_INDEX" val="1"/>
+  <p:tag name="KSO_WM_TAG_VERSION" val="1.0"/>
+  <p:tag name="KSO_WM_BEAUTIFY_FLAG" val="#wm#"/>
+  <p:tag name="KSO_WM_TEMPLATE_CATEGORY" val="custom"/>
+  <p:tag name="KSO_WM_TEMPLATE_INDEX" val="20205081"/>
+  <p:tag name="KSO_WM_SLIDE_LAYOUT" val="a_b"/>
+  <p:tag name="KSO_WM_SLIDE_LAYOUT_CNT" val="1_1"/>
+  <p:tag name="KSO_WM_UNIT_SHOW_EDIT_AREA_INDICATION" val="1"/>
+  <p:tag name="KSO_WM_TEMPLATE_THUMBS_INDEX" val="1、4、7、12、13、14、15、16、17、18、20、24、25、28、33、36、40、43、44"/>
+</p:tagLst>
+</file>
+
+<file path=ppt/tags/tag85.xml><?xml version="1.0" encoding="utf-8"?>
+<p:tagLst xmlns:p="http://schemas.openxmlformats.org/presentationml/2006/main">
+  <p:tag name="KSO_WM_SLIDE_ID" val="custom20205081_1"/>
+  <p:tag name="KSO_WM_TEMPLATE_SUBCATEGORY" val="19"/>
+  <p:tag name="KSO_WM_TEMPLATE_MASTER_TYPE" val="0"/>
+  <p:tag name="KSO_WM_TEMPLATE_COLOR_TYPE" val="1"/>
+  <p:tag name="KSO_WM_SLIDE_TYPE" val="title"/>
+  <p:tag name="KSO_WM_SLIDE_SUBTYPE" val="defaultBlank"/>
+  <p:tag name="KSO_WM_SLIDE_ITEM_CNT" val="0"/>
+  <p:tag name="KSO_WM_SLIDE_INDEX" val="1"/>
+  <p:tag name="KSO_WM_TAG_VERSION" val="1.0"/>
+  <p:tag name="KSO_WM_BEAUTIFY_FLAG" val="#wm#"/>
+  <p:tag name="KSO_WM_TEMPLATE_CATEGORY" val="custom"/>
+  <p:tag name="KSO_WM_TEMPLATE_INDEX" val="20205081"/>
+  <p:tag name="KSO_WM_SLIDE_LAYOUT" val="a_b"/>
+  <p:tag name="KSO_WM_SLIDE_LAYOUT_CNT" val="1_1"/>
+  <p:tag name="KSO_WM_UNIT_SHOW_EDIT_AREA_INDICATION" val="1"/>
+  <p:tag name="KSO_WM_TEMPLATE_THUMBS_INDEX" val="1、4、7、12、13、14、15、16、17、18、20、24、25、28、33、36、40、43、44"/>
+</p:tagLst>
+</file>
+
 <file path=ppt/tags/tag9.xml><?xml version="1.0" encoding="utf-8"?>
 <p:tagLst xmlns:p="http://schemas.openxmlformats.org/presentationml/2006/main">
   <p:tag name="KSO_WM_UNIT_HIGHLIGHT" val="0"/>

--- a/deliverables/模块一测试工作汇报/模块一测试工作汇报.pptx
+++ b/deliverables/模块一测试工作汇报/模块一测试工作汇报.pptx
@@ -19,6 +19,7 @@
     <p:sldId id="268" r:id="rIdSlide12"/>
     <p:sldId id="269" r:id="rIdSlide13"/>
     <p:sldId id="270" r:id="rIdSlide14"/>
+    <p:sldId id="271" r:id="rIdSlide15"/>
   </p:sldIdLst>
   <p:sldSz cx="12192000" cy="6858000"/>
   <p:notesSz cx="6858000" cy="9144000"/>
@@ -9583,6 +9584,1567 @@
 <file path=ppt/slides/slide13.xml><?xml version="1.0" encoding="utf-8"?>
 <p:sld xmlns:a="http://schemas.openxmlformats.org/drawingml/2006/main" xmlns:r="http://schemas.openxmlformats.org/officeDocument/2006/relationships" xmlns:p="http://schemas.openxmlformats.org/presentationml/2006/main">
   <p:cSld>
+    <p:bg>
+      <p:bgPr>
+        <a:solidFill>
+          <a:schemeClr val="bg1"/>
+        </a:solidFill>
+        <a:effectLst/>
+      </p:bgPr>
+    </p:bg>
+    <p:spTree>
+      <p:nvGrpSpPr>
+        <p:cNvPr id="1" name=""/>
+        <p:cNvGrpSpPr/>
+        <p:nvPr/>
+      </p:nvGrpSpPr>
+      <p:grpSpPr>
+        <a:xfrm>
+          <a:off x="0" y="0"/>
+          <a:ext cx="0" cy="0"/>
+          <a:chOff x="0" y="0"/>
+          <a:chExt cx="0" cy="0"/>
+        </a:xfrm>
+      </p:grpSpPr>
+      <p:grpSp>
+        <p:nvGrpSpPr>
+          <p:cNvPr id="6" name="组合 5"/>
+          <p:cNvGrpSpPr/>
+          <p:nvPr/>
+        </p:nvGrpSpPr>
+        <p:grpSpPr>
+          <a:xfrm>
+            <a:off x="351155" y="325120"/>
+            <a:ext cx="4559300" cy="1015365"/>
+            <a:chOff x="1572" y="494"/>
+            <a:chExt cx="7180" cy="1599"/>
+          </a:xfrm>
+        </p:grpSpPr>
+        <p:grpSp>
+          <p:nvGrpSpPr>
+            <p:cNvPr id="8" name="组合 7"/>
+            <p:cNvGrpSpPr/>
+            <p:nvPr/>
+          </p:nvGrpSpPr>
+          <p:grpSpPr>
+            <a:xfrm>
+              <a:off x="1572" y="494"/>
+              <a:ext cx="2047" cy="1599"/>
+              <a:chOff x="2761095" y="2248418"/>
+              <a:chExt cx="1948563" cy="1522661"/>
+            </a:xfrm>
+          </p:grpSpPr>
+          <p:sp>
+            <p:nvSpPr>
+              <p:cNvPr id="9" name="矩形: 圆角 24"/>
+              <p:cNvSpPr/>
+              <p:nvPr/>
+            </p:nvSpPr>
+            <p:spPr>
+              <a:xfrm rot="2244181">
+                <a:off x="2903192" y="2466308"/>
+                <a:ext cx="1156758" cy="366949"/>
+              </a:xfrm>
+              <a:prstGeom prst="roundRect">
+                <a:avLst>
+                  <a:gd name="adj" fmla="val 33648"/>
+                </a:avLst>
+              </a:prstGeom>
+              <a:solidFill>
+                <a:srgbClr val="25557A"/>
+              </a:solidFill>
+              <a:ln>
+                <a:noFill/>
+              </a:ln>
+            </p:spPr>
+            <p:style>
+              <a:lnRef idx="2">
+                <a:schemeClr val="accent1">
+                  <a:shade val="50000"/>
+                </a:schemeClr>
+              </a:lnRef>
+              <a:fillRef idx="1">
+                <a:schemeClr val="accent1"/>
+              </a:fillRef>
+              <a:effectRef idx="0">
+                <a:schemeClr val="accent1"/>
+              </a:effectRef>
+              <a:fontRef idx="minor">
+                <a:schemeClr val="lt1"/>
+              </a:fontRef>
+            </p:style>
+            <p:txBody>
+              <a:bodyPr rot="0" spcFirstLastPara="0" vertOverflow="overflow" horzOverflow="overflow" vert="horz" wrap="square" lIns="91440" tIns="45720" rIns="91440" bIns="45720" numCol="1" spcCol="0" rtlCol="0" fromWordArt="0" anchor="ctr" anchorCtr="0" forceAA="0" compatLnSpc="1">
+                <a:noAutofit/>
+              </a:bodyPr>
+              <a:p>
+                <a:pPr algn="ctr"/>
+                <a:endParaRPr lang="zh-CN" altLang="en-US" sz="1100">
+                  <a:latin typeface="微软雅黑" panose="020B0503020204020204" charset="-122"/>
+                  <a:ea typeface="微软雅黑" panose="020B0503020204020204" charset="-122"/>
+                  <a:cs typeface="+mn-ea"/>
+                  <a:sym typeface="+mn-lt"/>
+                </a:endParaRPr>
+              </a:p>
+            </p:txBody>
+          </p:sp>
+          <p:sp>
+            <p:nvSpPr>
+              <p:cNvPr id="26" name="矩形: 圆角 25"/>
+              <p:cNvSpPr/>
+              <p:nvPr/>
+            </p:nvSpPr>
+            <p:spPr>
+              <a:xfrm rot="2244181">
+                <a:off x="2761095" y="2996622"/>
+                <a:ext cx="1156758" cy="366949"/>
+              </a:xfrm>
+              <a:prstGeom prst="roundRect">
+                <a:avLst>
+                  <a:gd name="adj" fmla="val 33648"/>
+                </a:avLst>
+              </a:prstGeom>
+              <a:solidFill>
+                <a:srgbClr val="25557A"/>
+              </a:solidFill>
+              <a:ln>
+                <a:noFill/>
+              </a:ln>
+            </p:spPr>
+            <p:style>
+              <a:lnRef idx="2">
+                <a:schemeClr val="accent1">
+                  <a:shade val="50000"/>
+                </a:schemeClr>
+              </a:lnRef>
+              <a:fillRef idx="1">
+                <a:schemeClr val="accent1"/>
+              </a:fillRef>
+              <a:effectRef idx="0">
+                <a:schemeClr val="accent1"/>
+              </a:effectRef>
+              <a:fontRef idx="minor">
+                <a:schemeClr val="lt1"/>
+              </a:fontRef>
+            </p:style>
+            <p:txBody>
+              <a:bodyPr rot="0" spcFirstLastPara="0" vertOverflow="overflow" horzOverflow="overflow" vert="horz" wrap="square" lIns="91440" tIns="45720" rIns="91440" bIns="45720" numCol="1" spcCol="0" rtlCol="0" fromWordArt="0" anchor="ctr" anchorCtr="0" forceAA="0" compatLnSpc="1">
+                <a:noAutofit/>
+              </a:bodyPr>
+              <a:p>
+                <a:pPr algn="ctr"/>
+                <a:endParaRPr lang="zh-CN" altLang="en-US" sz="1100">
+                  <a:latin typeface="微软雅黑" panose="020B0503020204020204" charset="-122"/>
+                  <a:ea typeface="微软雅黑" panose="020B0503020204020204" charset="-122"/>
+                  <a:cs typeface="+mn-ea"/>
+                  <a:sym typeface="+mn-lt"/>
+                </a:endParaRPr>
+              </a:p>
+            </p:txBody>
+          </p:sp>
+          <p:sp>
+            <p:nvSpPr>
+              <p:cNvPr id="10" name="文本框 9"/>
+              <p:cNvSpPr txBox="1"/>
+              <p:nvPr/>
+            </p:nvSpPr>
+            <p:spPr>
+              <a:xfrm>
+                <a:off x="2910670" y="2248418"/>
+                <a:ext cx="1798988" cy="1522661"/>
+              </a:xfrm>
+              <a:prstGeom prst="rect">
+                <a:avLst/>
+              </a:prstGeom>
+              <a:noFill/>
+            </p:spPr>
+            <p:txBody>
+              <a:bodyPr wrap="square" rtlCol="0">
+                <a:spAutoFit/>
+              </a:bodyPr>
+              <a:p>
+                <a:r>
+                  <a:rPr lang="en-US" altLang="zh-CN" sz="6000" dirty="0">
+                    <a:solidFill>
+                      <a:schemeClr val="bg1"/>
+                    </a:solidFill>
+                    <a:effectLst>
+                      <a:outerShdw blurRad="38100" dist="38100" dir="2700000" algn="tl">
+                        <a:srgbClr val="000000">
+                          <a:alpha val="43137"/>
+                        </a:srgbClr>
+                      </a:outerShdw>
+                    </a:effectLst>
+                    <a:latin typeface="微软雅黑" panose="020B0503020204020204" charset="-122"/>
+                    <a:ea typeface="微软雅黑" panose="020B0503020204020204" charset="-122"/>
+                  </a:rPr>
+                  <a:t>P</a:t>
+                </a:r>
+                <a:endParaRPr lang="en-US" altLang="zh-CN" sz="6000" dirty="0">
+                  <a:solidFill>
+                    <a:schemeClr val="bg1"/>
+                  </a:solidFill>
+                  <a:effectLst>
+                    <a:outerShdw blurRad="38100" dist="38100" dir="2700000" algn="tl">
+                      <a:srgbClr val="000000">
+                        <a:alpha val="43137"/>
+                      </a:srgbClr>
+                    </a:outerShdw>
+                  </a:effectLst>
+                  <a:latin typeface="微软雅黑" panose="020B0503020204020204" charset="-122"/>
+                  <a:ea typeface="微软雅黑" panose="020B0503020204020204" charset="-122"/>
+                </a:endParaRPr>
+              </a:p>
+            </p:txBody>
+          </p:sp>
+        </p:grpSp>
+        <p:sp>
+          <p:nvSpPr>
+            <p:cNvPr id="11" name="矩形 10"/>
+            <p:cNvSpPr/>
+            <p:nvPr/>
+          </p:nvSpPr>
+          <p:spPr>
+            <a:xfrm>
+              <a:off x="3078" y="751"/>
+              <a:ext cx="3788" cy="919"/>
+            </a:xfrm>
+            <a:prstGeom prst="rect">
+              <a:avLst/>
+            </a:prstGeom>
+          </p:spPr>
+          <p:txBody>
+            <a:bodyPr wrap="none">
+              <a:spAutoFit/>
+            </a:bodyPr>
+            <a:p>
+              <a:r>
+                <a:rPr lang="zh-CN" altLang="en-US" sz="3200" b="1" spc="300" dirty="0">
+                  <a:latin typeface="微软雅黑" panose="020B0503020204020204" charset="-122"/>
+                  <a:ea typeface="微软雅黑" panose="020B0503020204020204" charset="-122"/>
+                </a:rPr>
+                <a:t>修复建议：文档与实现必须有一个让步</a:t>
+              </a:r>
+              <a:endParaRPr lang="zh-CN" altLang="en-US" sz="3200" b="1" spc="300" dirty="0">
+                <a:latin typeface="微软雅黑" panose="020B0503020204020204" charset="-122"/>
+                <a:ea typeface="微软雅黑" panose="020B0503020204020204" charset="-122"/>
+              </a:endParaRPr>
+            </a:p>
+          </p:txBody>
+        </p:sp>
+        <p:sp>
+          <p:nvSpPr>
+            <p:cNvPr id="29" name="文本框 28"/>
+            <p:cNvSpPr txBox="1"/>
+            <p:nvPr/>
+          </p:nvSpPr>
+          <p:spPr>
+            <a:xfrm>
+              <a:off x="3107" y="1365"/>
+              <a:ext cx="5645" cy="580"/>
+            </a:xfrm>
+            <a:prstGeom prst="rect">
+              <a:avLst/>
+            </a:prstGeom>
+            <a:noFill/>
+          </p:spPr>
+          <p:txBody>
+            <a:bodyPr wrap="square">
+              <a:spAutoFit/>
+            </a:bodyPr>
+            <a:p>
+              <a:endParaRPr lang="en-US" altLang="zh-CN" sz="900" spc="300" dirty="0">
+                <a:solidFill>
+                  <a:schemeClr val="bg1">
+                    <a:lumMod val="50000"/>
+                  </a:schemeClr>
+                </a:solidFill>
+                <a:latin typeface="微软雅黑" panose="020B0503020204020204" charset="-122"/>
+                <a:ea typeface="微软雅黑" panose="020B0503020204020204" charset="-122"/>
+              </a:endParaRPr>
+            </a:p>
+            <a:p>
+              <a:r>
+                <a:rPr lang="en-US" altLang="zh-CN" sz="900" spc="300" dirty="0">
+                  <a:solidFill>
+                    <a:schemeClr val="bg1">
+                      <a:lumMod val="50000"/>
+                    </a:schemeClr>
+                  </a:solidFill>
+                  <a:latin typeface="微软雅黑" panose="020B0503020204020204" charset="-122"/>
+                  <a:ea typeface="微软雅黑" panose="020B0503020204020204" charset="-122"/>
+                </a:rPr>
+                <a:t>FIX SUGGESTION &amp; REGRESSION</a:t>
+              </a:r>
+              <a:endParaRPr lang="en-US" altLang="zh-CN" sz="900" spc="300" dirty="0">
+                <a:solidFill>
+                  <a:schemeClr val="bg1">
+                    <a:lumMod val="50000"/>
+                  </a:schemeClr>
+                </a:solidFill>
+                <a:latin typeface="微软雅黑" panose="020B0503020204020204" charset="-122"/>
+                <a:ea typeface="微软雅黑" panose="020B0503020204020204" charset="-122"/>
+              </a:endParaRPr>
+            </a:p>
+          </p:txBody>
+        </p:sp>
+      </p:grpSp>
+      <p:sp>
+        <p:nvSpPr>
+          <p:cNvPr id="19" name="矩形: 圆角 18"/>
+          <p:cNvSpPr/>
+          <p:nvPr/>
+        </p:nvSpPr>
+        <p:spPr>
+          <a:xfrm>
+            <a:off x="977900" y="1648460"/>
+            <a:ext cx="10236200" cy="4583430"/>
+          </a:xfrm>
+          <a:prstGeom prst="roundRect">
+            <a:avLst>
+              <a:gd name="adj" fmla="val 0"/>
+            </a:avLst>
+          </a:prstGeom>
+          <a:solidFill>
+            <a:schemeClr val="bg1"/>
+          </a:solidFill>
+          <a:ln>
+            <a:solidFill>
+              <a:schemeClr val="bg1">
+                <a:lumMod val="85000"/>
+              </a:schemeClr>
+            </a:solidFill>
+          </a:ln>
+        </p:spPr>
+        <p:style>
+          <a:lnRef idx="2">
+            <a:schemeClr val="accent1">
+              <a:shade val="50000"/>
+            </a:schemeClr>
+          </a:lnRef>
+          <a:fillRef idx="1">
+            <a:schemeClr val="accent1"/>
+          </a:fillRef>
+          <a:effectRef idx="0">
+            <a:schemeClr val="accent1"/>
+          </a:effectRef>
+          <a:fontRef idx="minor">
+            <a:schemeClr val="lt1"/>
+          </a:fontRef>
+        </p:style>
+        <p:txBody>
+          <a:bodyPr rtlCol="0" anchor="ctr"/>
+          <a:p>
+            <a:pPr algn="ctr"/>
+            <a:endParaRPr lang="zh-CN" altLang="en-US" dirty="0">
+              <a:latin typeface="微软雅黑" panose="020B0503020204020204" charset="-122"/>
+              <a:ea typeface="微软雅黑" panose="020B0503020204020204" charset="-122"/>
+              <a:sym typeface="+mn-lt"/>
+            </a:endParaRPr>
+          </a:p>
+        </p:txBody>
+      </p:sp>
+      <p:sp>
+        <p:nvSpPr>
+          <p:cNvPr id="13" name="任意多边形: 形状 21"/>
+          <p:cNvSpPr/>
+          <p:nvPr/>
+        </p:nvSpPr>
+        <p:spPr>
+          <a:xfrm>
+            <a:off x="977900" y="2575560"/>
+            <a:ext cx="1675765" cy="2781300"/>
+          </a:xfrm>
+          <a:custGeom>
+            <a:avLst/>
+            <a:gdLst>
+              <a:gd name="connsiteX0" fmla="*/ 284837 w 1675487"/>
+              <a:gd name="connsiteY0" fmla="*/ 0 h 2781300"/>
+              <a:gd name="connsiteX1" fmla="*/ 1675487 w 1675487"/>
+              <a:gd name="connsiteY1" fmla="*/ 1390650 h 2781300"/>
+              <a:gd name="connsiteX2" fmla="*/ 284837 w 1675487"/>
+              <a:gd name="connsiteY2" fmla="*/ 2781300 h 2781300"/>
+              <a:gd name="connsiteX3" fmla="*/ 4573 w 1675487"/>
+              <a:gd name="connsiteY3" fmla="*/ 2753047 h 2781300"/>
+              <a:gd name="connsiteX4" fmla="*/ 0 w 1675487"/>
+              <a:gd name="connsiteY4" fmla="*/ 2751872 h 2781300"/>
+              <a:gd name="connsiteX5" fmla="*/ 0 w 1675487"/>
+              <a:gd name="connsiteY5" fmla="*/ 29429 h 2781300"/>
+              <a:gd name="connsiteX6" fmla="*/ 4573 w 1675487"/>
+              <a:gd name="connsiteY6" fmla="*/ 28253 h 2781300"/>
+              <a:gd name="connsiteX7" fmla="*/ 284837 w 1675487"/>
+              <a:gd name="connsiteY7" fmla="*/ 0 h 2781300"/>
+            </a:gdLst>
+            <a:ahLst/>
+            <a:cxnLst>
+              <a:cxn ang="0">
+                <a:pos x="connsiteX0" y="connsiteY0"/>
+              </a:cxn>
+              <a:cxn ang="0">
+                <a:pos x="connsiteX1" y="connsiteY1"/>
+              </a:cxn>
+              <a:cxn ang="0">
+                <a:pos x="connsiteX2" y="connsiteY2"/>
+              </a:cxn>
+              <a:cxn ang="0">
+                <a:pos x="connsiteX3" y="connsiteY3"/>
+              </a:cxn>
+              <a:cxn ang="0">
+                <a:pos x="connsiteX4" y="connsiteY4"/>
+              </a:cxn>
+              <a:cxn ang="0">
+                <a:pos x="connsiteX5" y="connsiteY5"/>
+              </a:cxn>
+              <a:cxn ang="0">
+                <a:pos x="connsiteX6" y="connsiteY6"/>
+              </a:cxn>
+              <a:cxn ang="0">
+                <a:pos x="connsiteX7" y="connsiteY7"/>
+              </a:cxn>
+            </a:cxnLst>
+            <a:rect l="l" t="t" r="r" b="b"/>
+            <a:pathLst>
+              <a:path w="1675487" h="2781300">
+                <a:moveTo>
+                  <a:pt x="284837" y="0"/>
+                </a:moveTo>
+                <a:cubicBezTo>
+                  <a:pt x="1052872" y="0"/>
+                  <a:pt x="1675487" y="622615"/>
+                  <a:pt x="1675487" y="1390650"/>
+                </a:cubicBezTo>
+                <a:cubicBezTo>
+                  <a:pt x="1675487" y="2158685"/>
+                  <a:pt x="1052872" y="2781300"/>
+                  <a:pt x="284837" y="2781300"/>
+                </a:cubicBezTo>
+                <a:cubicBezTo>
+                  <a:pt x="188833" y="2781300"/>
+                  <a:pt x="95101" y="2771572"/>
+                  <a:pt x="4573" y="2753047"/>
+                </a:cubicBezTo>
+                <a:lnTo>
+                  <a:pt x="0" y="2751872"/>
+                </a:lnTo>
+                <a:lnTo>
+                  <a:pt x="0" y="29429"/>
+                </a:lnTo>
+                <a:lnTo>
+                  <a:pt x="4573" y="28253"/>
+                </a:lnTo>
+                <a:cubicBezTo>
+                  <a:pt x="95101" y="9729"/>
+                  <a:pt x="188833" y="0"/>
+                  <a:pt x="284837" y="0"/>
+                </a:cubicBezTo>
+                <a:close/>
+              </a:path>
+            </a:pathLst>
+          </a:custGeom>
+          <a:solidFill>
+            <a:srgbClr val="25557A"/>
+          </a:solidFill>
+          <a:ln>
+            <a:noFill/>
+          </a:ln>
+        </p:spPr>
+        <p:style>
+          <a:lnRef idx="2">
+            <a:schemeClr val="accent1">
+              <a:shade val="50000"/>
+            </a:schemeClr>
+          </a:lnRef>
+          <a:fillRef idx="1">
+            <a:schemeClr val="accent1"/>
+          </a:fillRef>
+          <a:effectRef idx="0">
+            <a:schemeClr val="accent1"/>
+          </a:effectRef>
+          <a:fontRef idx="minor">
+            <a:schemeClr val="lt1"/>
+          </a:fontRef>
+        </p:style>
+        <p:txBody>
+          <a:bodyPr rot="0" spcFirstLastPara="0" vertOverflow="overflow" horzOverflow="overflow" vert="horz" wrap="square" lIns="91440" tIns="45720" rIns="91440" bIns="45720" numCol="1" spcCol="0" rtlCol="0" fromWordArt="0" anchor="ctr" anchorCtr="0" forceAA="0" compatLnSpc="1">
+            <a:noAutofit/>
+          </a:bodyPr>
+          <a:p>
+            <a:pPr algn="ctr"/>
+            <a:endParaRPr lang="zh-CN" altLang="en-US">
+              <a:latin typeface="微软雅黑" panose="020B0503020204020204" charset="-122"/>
+              <a:ea typeface="微软雅黑" panose="020B0503020204020204" charset="-122"/>
+              <a:cs typeface="+mn-ea"/>
+              <a:sym typeface="+mn-lt"/>
+            </a:endParaRPr>
+          </a:p>
+        </p:txBody>
+      </p:sp>
+      <p:sp>
+        <p:nvSpPr>
+          <p:cNvPr id="30" name="矩形 29"/>
+          <p:cNvSpPr/>
+          <p:nvPr/>
+        </p:nvSpPr>
+        <p:spPr>
+          <a:xfrm>
+            <a:off x="1169035" y="3429000"/>
+            <a:ext cx="1071880" cy="1076325"/>
+          </a:xfrm>
+          <a:prstGeom prst="rect">
+            <a:avLst/>
+          </a:prstGeom>
+        </p:spPr>
+        <p:txBody>
+          <a:bodyPr wrap="none">
+            <a:spAutoFit/>
+          </a:bodyPr>
+          <a:p>
+            <a:r>
+              <a:rPr lang="zh-CN" sz="3200" b="1" spc="300" dirty="0">
+                <a:solidFill>
+                  <a:schemeClr val="bg1"/>
+                </a:solidFill>
+                <a:effectLst>
+                  <a:outerShdw blurRad="38100" dist="38100" dir="2700000" algn="tl">
+                    <a:srgbClr val="000000">
+                      <a:alpha val="43137"/>
+                    </a:srgbClr>
+                  </a:outerShdw>
+                </a:effectLst>
+                <a:latin typeface="微软雅黑" panose="020B0503020204020204" charset="-122"/>
+                <a:ea typeface="微软雅黑" panose="020B0503020204020204" charset="-122"/>
+              </a:rPr>
+              <a:t>修复</a:t>
+            </a:r>
+            <a:endParaRPr lang="zh-CN" sz="3200" b="1" spc="300" dirty="0">
+              <a:solidFill>
+                <a:schemeClr val="bg1"/>
+              </a:solidFill>
+              <a:effectLst>
+                <a:outerShdw blurRad="38100" dist="38100" dir="2700000" algn="tl">
+                  <a:srgbClr val="000000">
+                    <a:alpha val="43137"/>
+                  </a:srgbClr>
+                </a:outerShdw>
+              </a:effectLst>
+              <a:latin typeface="微软雅黑" panose="020B0503020204020204" charset="-122"/>
+              <a:ea typeface="微软雅黑" panose="020B0503020204020204" charset="-122"/>
+            </a:endParaRPr>
+          </a:p>
+          <a:p>
+            <a:r>
+              <a:rPr lang="zh-CN" sz="3200" b="1" spc="300" dirty="0">
+                <a:solidFill>
+                  <a:schemeClr val="bg1"/>
+                </a:solidFill>
+                <a:effectLst>
+                  <a:outerShdw blurRad="38100" dist="38100" dir="2700000" algn="tl">
+                    <a:srgbClr val="000000">
+                      <a:alpha val="43137"/>
+                    </a:srgbClr>
+                  </a:outerShdw>
+                </a:effectLst>
+                <a:latin typeface="微软雅黑" panose="020B0503020204020204" charset="-122"/>
+                <a:ea typeface="微软雅黑" panose="020B0503020204020204" charset="-122"/>
+              </a:rPr>
+              <a:t>方案</a:t>
+            </a:r>
+            <a:endParaRPr lang="zh-CN" sz="3200" b="1" spc="300" dirty="0">
+              <a:solidFill>
+                <a:schemeClr val="bg1"/>
+              </a:solidFill>
+              <a:effectLst>
+                <a:outerShdw blurRad="38100" dist="38100" dir="2700000" algn="tl">
+                  <a:srgbClr val="000000">
+                    <a:alpha val="43137"/>
+                  </a:srgbClr>
+                </a:outerShdw>
+              </a:effectLst>
+              <a:latin typeface="微软雅黑" panose="020B0503020204020204" charset="-122"/>
+              <a:ea typeface="微软雅黑" panose="020B0503020204020204" charset="-122"/>
+            </a:endParaRPr>
+          </a:p>
+        </p:txBody>
+      </p:sp>
+      <p:grpSp>
+        <p:nvGrpSpPr>
+          <p:cNvPr id="15" name="组合 14"/>
+          <p:cNvGrpSpPr/>
+          <p:nvPr/>
+        </p:nvGrpSpPr>
+        <p:grpSpPr>
+          <a:xfrm rot="0">
+            <a:off x="2890520" y="2061845"/>
+            <a:ext cx="7985125" cy="1217930"/>
+            <a:chOff x="3134969" y="2228849"/>
+            <a:chExt cx="7984866" cy="1218108"/>
+          </a:xfrm>
+        </p:grpSpPr>
+        <p:sp>
+          <p:nvSpPr>
+            <p:cNvPr id="18" name="椭圆 17"/>
+            <p:cNvSpPr/>
+            <p:nvPr/>
+          </p:nvSpPr>
+          <p:spPr>
+            <a:xfrm>
+              <a:off x="3134969" y="2228849"/>
+              <a:ext cx="435661" cy="435661"/>
+            </a:xfrm>
+            <a:prstGeom prst="ellipse">
+              <a:avLst/>
+            </a:prstGeom>
+            <a:solidFill>
+              <a:srgbClr val="25557A"/>
+            </a:solidFill>
+            <a:ln>
+              <a:noFill/>
+            </a:ln>
+          </p:spPr>
+          <p:style>
+            <a:lnRef idx="2">
+              <a:schemeClr val="accent1">
+                <a:shade val="50000"/>
+              </a:schemeClr>
+            </a:lnRef>
+            <a:fillRef idx="1">
+              <a:schemeClr val="accent1"/>
+            </a:fillRef>
+            <a:effectRef idx="0">
+              <a:schemeClr val="accent1"/>
+            </a:effectRef>
+            <a:fontRef idx="minor">
+              <a:schemeClr val="lt1"/>
+            </a:fontRef>
+          </p:style>
+          <p:txBody>
+            <a:bodyPr rot="0" spcFirstLastPara="0" vertOverflow="overflow" horzOverflow="overflow" vert="horz" wrap="square" lIns="91440" tIns="45720" rIns="91440" bIns="45720" numCol="1" spcCol="0" rtlCol="0" fromWordArt="0" anchor="ctr" anchorCtr="0" forceAA="0" compatLnSpc="1">
+              <a:noAutofit/>
+            </a:bodyPr>
+            <a:p>
+              <a:pPr algn="ctr"/>
+              <a:r>
+                <a:rPr lang="en-US" altLang="zh-CN" sz="1600" dirty="0">
+                  <a:latin typeface="微软雅黑" panose="020B0503020204020204" charset="-122"/>
+                  <a:ea typeface="微软雅黑" panose="020B0503020204020204" charset="-122"/>
+                  <a:cs typeface="+mn-ea"/>
+                  <a:sym typeface="+mn-lt"/>
+                </a:rPr>
+                <a:t>1</a:t>
+              </a:r>
+              <a:endParaRPr lang="en-US" altLang="zh-CN" sz="1600" dirty="0">
+                <a:latin typeface="微软雅黑" panose="020B0503020204020204" charset="-122"/>
+                <a:ea typeface="微软雅黑" panose="020B0503020204020204" charset="-122"/>
+                <a:cs typeface="+mn-ea"/>
+                <a:sym typeface="+mn-lt"/>
+              </a:endParaRPr>
+            </a:p>
+          </p:txBody>
+        </p:sp>
+        <p:grpSp>
+          <p:nvGrpSpPr>
+            <p:cNvPr id="31" name="组合 30"/>
+            <p:cNvGrpSpPr/>
+            <p:nvPr/>
+          </p:nvGrpSpPr>
+          <p:grpSpPr>
+            <a:xfrm>
+              <a:off x="3765265" y="2243632"/>
+              <a:ext cx="7354570" cy="1203325"/>
+              <a:chOff x="7893455" y="4126834"/>
+              <a:chExt cx="7354570" cy="1203325"/>
+            </a:xfrm>
+          </p:grpSpPr>
+          <p:sp>
+            <p:nvSpPr>
+              <p:cNvPr id="32" name="矩形 31"/>
+              <p:cNvSpPr/>
+              <p:nvPr/>
+            </p:nvSpPr>
+            <p:spPr>
+              <a:xfrm>
+                <a:off x="7893455" y="4126834"/>
+                <a:ext cx="2240242" cy="368300"/>
+              </a:xfrm>
+              <a:prstGeom prst="rect">
+                <a:avLst/>
+              </a:prstGeom>
+            </p:spPr>
+            <p:txBody>
+              <a:bodyPr wrap="square">
+                <a:spAutoFit/>
+              </a:bodyPr>
+              <a:p>
+                <a:r>
+                  <a:rPr lang="zh-CN" altLang="en-US" b="1" dirty="0">
+                    <a:solidFill>
+                      <a:srgbClr val="25557A"/>
+                    </a:solidFill>
+                    <a:latin typeface="微软雅黑" panose="020B0503020204020204" charset="-122"/>
+                    <a:ea typeface="微软雅黑" panose="020B0503020204020204" charset="-122"/>
+                    <a:cs typeface="+mn-ea"/>
+                    <a:sym typeface="+mn-lt"/>
+                  </a:rPr>
+                  <a:t>条件式 squeeze</a:t>
+                </a:r>
+                <a:endParaRPr lang="zh-CN" altLang="en-US" b="1" dirty="0">
+                  <a:solidFill>
+                    <a:srgbClr val="25557A"/>
+                  </a:solidFill>
+                  <a:latin typeface="微软雅黑" panose="020B0503020204020204" charset="-122"/>
+                  <a:ea typeface="微软雅黑" panose="020B0503020204020204" charset="-122"/>
+                  <a:cs typeface="+mn-ea"/>
+                  <a:sym typeface="+mn-lt"/>
+                </a:endParaRPr>
+              </a:p>
+            </p:txBody>
+          </p:sp>
+          <p:sp>
+            <p:nvSpPr>
+              <p:cNvPr id="33" name="文本框 32"/>
+              <p:cNvSpPr txBox="1"/>
+              <p:nvPr/>
+            </p:nvSpPr>
+            <p:spPr>
+              <a:xfrm>
+                <a:off x="9465708" y="4220231"/>
+                <a:ext cx="2665723" cy="215444"/>
+              </a:xfrm>
+              <a:prstGeom prst="rect">
+                <a:avLst/>
+              </a:prstGeom>
+              <a:noFill/>
+            </p:spPr>
+            <p:txBody>
+              <a:bodyPr wrap="square">
+                <a:spAutoFit/>
+              </a:bodyPr>
+              <a:p>
+                <a:r>
+                  <a:rPr lang="zh-CN" altLang="en-US" sz="800" dirty="0">
+                    <a:solidFill>
+                      <a:schemeClr val="bg1">
+                        <a:lumMod val="65000"/>
+                      </a:schemeClr>
+                    </a:solidFill>
+                    <a:latin typeface="微软雅黑" panose="020B0503020204020204" charset="-122"/>
+                    <a:ea typeface="微软雅黑" panose="020B0503020204020204" charset="-122"/>
+                    <a:cs typeface="+mn-ea"/>
+                    <a:sym typeface="+mn-lt"/>
+                  </a:rPr>
+                  <a:t>NDIM-AWARE</a:t>
+                </a:r>
+                <a:r>
+                  <a:rPr lang="en-US" altLang="zh-CN" sz="800" dirty="0">
+                    <a:solidFill>
+                      <a:schemeClr val="bg1">
+                        <a:lumMod val="65000"/>
+                      </a:schemeClr>
+                    </a:solidFill>
+                    <a:latin typeface="微软雅黑" panose="020B0503020204020204" charset="-122"/>
+                    <a:ea typeface="微软雅黑" panose="020B0503020204020204" charset="-122"/>
+                    <a:cs typeface="+mn-ea"/>
+                    <a:sym typeface="+mn-lt"/>
+                  </a:rPr>
+                  <a:t> | </a:t>
+                </a:r>
+                <a:r>
+                  <a:rPr lang="zh-CN" altLang="en-US" sz="800" dirty="0">
+                    <a:solidFill>
+                      <a:schemeClr val="bg1">
+                        <a:lumMod val="65000"/>
+                      </a:schemeClr>
+                    </a:solidFill>
+                    <a:latin typeface="微软雅黑" panose="020B0503020204020204" charset="-122"/>
+                    <a:ea typeface="微软雅黑" panose="020B0503020204020204" charset="-122"/>
+                    <a:cs typeface="+mn-ea"/>
+                    <a:sym typeface="+mn-lt"/>
+                  </a:rPr>
+                  <a:t>1-LINE FIX</a:t>
+                </a:r>
+                <a:endParaRPr lang="zh-CN" altLang="en-US" sz="800" dirty="0">
+                  <a:solidFill>
+                    <a:schemeClr val="bg1">
+                      <a:lumMod val="65000"/>
+                    </a:schemeClr>
+                  </a:solidFill>
+                  <a:latin typeface="微软雅黑" panose="020B0503020204020204" charset="-122"/>
+                  <a:ea typeface="微软雅黑" panose="020B0503020204020204" charset="-122"/>
+                  <a:cs typeface="+mn-ea"/>
+                  <a:sym typeface="+mn-lt"/>
+                </a:endParaRPr>
+              </a:p>
+            </p:txBody>
+          </p:sp>
+          <p:sp>
+            <p:nvSpPr>
+              <p:cNvPr id="34" name="文本框 33"/>
+              <p:cNvSpPr txBox="1"/>
+              <p:nvPr/>
+            </p:nvSpPr>
+            <p:spPr>
+              <a:xfrm>
+                <a:off x="7893455" y="4377024"/>
+                <a:ext cx="7354570" cy="953135"/>
+              </a:xfrm>
+              <a:prstGeom prst="rect">
+                <a:avLst/>
+              </a:prstGeom>
+              <a:noFill/>
+            </p:spPr>
+            <p:txBody>
+              <a:bodyPr wrap="square">
+                <a:spAutoFit/>
+              </a:bodyPr>
+              <a:p>
+                <a:pPr>
+                  <a:lnSpc>
+                    <a:spcPct val="200000"/>
+                  </a:lnSpc>
+                </a:pPr>
+                <a:r>
+                  <a:rPr lang="zh-CN" altLang="en-US" sz="1400" dirty="0">
+                    <a:solidFill>
+                      <a:schemeClr val="tx1">
+                        <a:lumMod val="75000"/>
+                        <a:lumOff val="25000"/>
+                      </a:schemeClr>
+                    </a:solidFill>
+                    <a:latin typeface="微软雅黑" panose="020B0503020204020204" charset="-122"/>
+                    <a:ea typeface="微软雅黑" panose="020B0503020204020204" charset="-122"/>
+                  </a:rPr>
+                  <a:t>第 39 行前判断 ndim==4 且末维为 1 再取 [..., 0]；用 ndim 判断而非看末维是否为 1，避免误伤 W=1 的合法三维输入。</a:t>
+                </a:r>
+                <a:endParaRPr lang="zh-CN" altLang="en-US" sz="1400" dirty="0">
+                  <a:solidFill>
+                    <a:schemeClr val="tx1">
+                      <a:lumMod val="75000"/>
+                      <a:lumOff val="25000"/>
+                    </a:schemeClr>
+                  </a:solidFill>
+                  <a:latin typeface="微软雅黑" panose="020B0503020204020204" charset="-122"/>
+                  <a:ea typeface="微软雅黑" panose="020B0503020204020204" charset="-122"/>
+                </a:endParaRPr>
+              </a:p>
+            </p:txBody>
+          </p:sp>
+        </p:grpSp>
+      </p:grpSp>
+      <p:grpSp>
+        <p:nvGrpSpPr>
+          <p:cNvPr id="35" name="组合 34"/>
+          <p:cNvGrpSpPr/>
+          <p:nvPr/>
+        </p:nvGrpSpPr>
+        <p:grpSpPr>
+          <a:xfrm rot="0">
+            <a:off x="3521075" y="3430905"/>
+            <a:ext cx="7355205" cy="1217930"/>
+            <a:chOff x="3134969" y="2228849"/>
+            <a:chExt cx="7354946" cy="1218108"/>
+          </a:xfrm>
+        </p:grpSpPr>
+        <p:sp>
+          <p:nvSpPr>
+            <p:cNvPr id="36" name="椭圆 35"/>
+            <p:cNvSpPr/>
+            <p:nvPr/>
+          </p:nvSpPr>
+          <p:spPr>
+            <a:xfrm>
+              <a:off x="3134969" y="2228849"/>
+              <a:ext cx="435661" cy="435661"/>
+            </a:xfrm>
+            <a:prstGeom prst="ellipse">
+              <a:avLst/>
+            </a:prstGeom>
+            <a:solidFill>
+              <a:srgbClr val="25557A"/>
+            </a:solidFill>
+            <a:ln>
+              <a:noFill/>
+            </a:ln>
+          </p:spPr>
+          <p:style>
+            <a:lnRef idx="2">
+              <a:schemeClr val="accent1">
+                <a:shade val="50000"/>
+              </a:schemeClr>
+            </a:lnRef>
+            <a:fillRef idx="1">
+              <a:schemeClr val="accent1"/>
+            </a:fillRef>
+            <a:effectRef idx="0">
+              <a:schemeClr val="accent1"/>
+            </a:effectRef>
+            <a:fontRef idx="minor">
+              <a:schemeClr val="lt1"/>
+            </a:fontRef>
+          </p:style>
+          <p:txBody>
+            <a:bodyPr rot="0" spcFirstLastPara="0" vertOverflow="overflow" horzOverflow="overflow" vert="horz" wrap="square" lIns="91440" tIns="45720" rIns="91440" bIns="45720" numCol="1" spcCol="0" rtlCol="0" fromWordArt="0" anchor="ctr" anchorCtr="0" forceAA="0" compatLnSpc="1">
+              <a:noAutofit/>
+            </a:bodyPr>
+            <a:p>
+              <a:pPr algn="ctr"/>
+              <a:r>
+                <a:rPr lang="en-US" altLang="zh-CN" sz="1600" dirty="0">
+                  <a:latin typeface="微软雅黑" panose="020B0503020204020204" charset="-122"/>
+                  <a:ea typeface="微软雅黑" panose="020B0503020204020204" charset="-122"/>
+                  <a:cs typeface="+mn-ea"/>
+                  <a:sym typeface="+mn-lt"/>
+                </a:rPr>
+                <a:t>2</a:t>
+              </a:r>
+              <a:endParaRPr lang="en-US" altLang="zh-CN" sz="1600" dirty="0">
+                <a:latin typeface="微软雅黑" panose="020B0503020204020204" charset="-122"/>
+                <a:ea typeface="微软雅黑" panose="020B0503020204020204" charset="-122"/>
+                <a:cs typeface="+mn-ea"/>
+                <a:sym typeface="+mn-lt"/>
+              </a:endParaRPr>
+            </a:p>
+          </p:txBody>
+        </p:sp>
+        <p:grpSp>
+          <p:nvGrpSpPr>
+            <p:cNvPr id="37" name="组合 36"/>
+            <p:cNvGrpSpPr/>
+            <p:nvPr/>
+          </p:nvGrpSpPr>
+          <p:grpSpPr>
+            <a:xfrm>
+              <a:off x="3765265" y="2243632"/>
+              <a:ext cx="6724650" cy="1203325"/>
+              <a:chOff x="7893455" y="4126834"/>
+              <a:chExt cx="6724650" cy="1203325"/>
+            </a:xfrm>
+          </p:grpSpPr>
+          <p:sp>
+            <p:nvSpPr>
+              <p:cNvPr id="38" name="矩形 37"/>
+              <p:cNvSpPr/>
+              <p:nvPr/>
+            </p:nvSpPr>
+            <p:spPr>
+              <a:xfrm>
+                <a:off x="7893455" y="4126834"/>
+                <a:ext cx="2240242" cy="368300"/>
+              </a:xfrm>
+              <a:prstGeom prst="rect">
+                <a:avLst/>
+              </a:prstGeom>
+            </p:spPr>
+            <p:txBody>
+              <a:bodyPr wrap="square">
+                <a:spAutoFit/>
+              </a:bodyPr>
+              <a:p>
+                <a:r>
+                  <a:rPr lang="zh-CN" altLang="en-US" b="1" dirty="0">
+                    <a:solidFill>
+                      <a:srgbClr val="25557A"/>
+                    </a:solidFill>
+                    <a:latin typeface="微软雅黑" panose="020B0503020204020204" charset="-122"/>
+                    <a:ea typeface="微软雅黑" panose="020B0503020204020204" charset="-122"/>
+                    <a:cs typeface="+mn-ea"/>
+                    <a:sym typeface="+mn-lt"/>
+                  </a:rPr>
+                  <a:t>入口防御</a:t>
+                </a:r>
+                <a:endParaRPr lang="zh-CN" altLang="en-US" dirty="0">
+                  <a:solidFill>
+                    <a:schemeClr val="accent5">
+                      <a:lumMod val="50000"/>
+                    </a:schemeClr>
+                  </a:solidFill>
+                  <a:latin typeface="微软雅黑" panose="020B0503020204020204" charset="-122"/>
+                  <a:ea typeface="微软雅黑" panose="020B0503020204020204" charset="-122"/>
+                  <a:cs typeface="+mn-ea"/>
+                  <a:sym typeface="+mn-lt"/>
+                </a:endParaRPr>
+              </a:p>
+            </p:txBody>
+          </p:sp>
+          <p:sp>
+            <p:nvSpPr>
+              <p:cNvPr id="39" name="文本框 38"/>
+              <p:cNvSpPr txBox="1"/>
+              <p:nvPr/>
+            </p:nvSpPr>
+            <p:spPr>
+              <a:xfrm>
+                <a:off x="9465708" y="4220231"/>
+                <a:ext cx="2665723" cy="215444"/>
+              </a:xfrm>
+              <a:prstGeom prst="rect">
+                <a:avLst/>
+              </a:prstGeom>
+              <a:noFill/>
+            </p:spPr>
+            <p:txBody>
+              <a:bodyPr wrap="square">
+                <a:spAutoFit/>
+              </a:bodyPr>
+              <a:p>
+                <a:r>
+                  <a:rPr lang="zh-CN" altLang="en-US" sz="800" dirty="0">
+                    <a:solidFill>
+                      <a:schemeClr val="bg1">
+                        <a:lumMod val="65000"/>
+                      </a:schemeClr>
+                    </a:solidFill>
+                    <a:latin typeface="微软雅黑" panose="020B0503020204020204" charset="-122"/>
+                    <a:ea typeface="微软雅黑" panose="020B0503020204020204" charset="-122"/>
+                    <a:cs typeface="+mn-ea"/>
+                    <a:sym typeface="+mn-lt"/>
+                  </a:rPr>
+                  <a:t>INPUT VALIDATION</a:t>
+                </a:r>
+                <a:r>
+                  <a:rPr lang="en-US" altLang="zh-CN" sz="800" dirty="0">
+                    <a:solidFill>
+                      <a:schemeClr val="bg1">
+                        <a:lumMod val="65000"/>
+                      </a:schemeClr>
+                    </a:solidFill>
+                    <a:latin typeface="微软雅黑" panose="020B0503020204020204" charset="-122"/>
+                    <a:ea typeface="微软雅黑" panose="020B0503020204020204" charset="-122"/>
+                    <a:cs typeface="+mn-ea"/>
+                    <a:sym typeface="+mn-lt"/>
+                  </a:rPr>
+                  <a:t> | </a:t>
+                </a:r>
+                <a:r>
+                  <a:rPr lang="zh-CN" altLang="en-US" sz="800" dirty="0">
+                    <a:solidFill>
+                      <a:schemeClr val="bg1">
+                        <a:lumMod val="65000"/>
+                      </a:schemeClr>
+                    </a:solidFill>
+                    <a:latin typeface="微软雅黑" panose="020B0503020204020204" charset="-122"/>
+                    <a:ea typeface="微软雅黑" panose="020B0503020204020204" charset="-122"/>
+                    <a:cs typeface="+mn-ea"/>
+                    <a:sym typeface="+mn-lt"/>
+                  </a:rPr>
+                  <a:t>CONTRACT ALIGN</a:t>
+                </a:r>
+                <a:endParaRPr lang="zh-CN" altLang="en-US" sz="800" dirty="0">
+                  <a:solidFill>
+                    <a:schemeClr val="bg1">
+                      <a:lumMod val="65000"/>
+                    </a:schemeClr>
+                  </a:solidFill>
+                  <a:latin typeface="微软雅黑" panose="020B0503020204020204" charset="-122"/>
+                  <a:ea typeface="微软雅黑" panose="020B0503020204020204" charset="-122"/>
+                  <a:cs typeface="+mn-ea"/>
+                  <a:sym typeface="+mn-lt"/>
+                </a:endParaRPr>
+              </a:p>
+            </p:txBody>
+          </p:sp>
+          <p:sp>
+            <p:nvSpPr>
+              <p:cNvPr id="40" name="文本框 39"/>
+              <p:cNvSpPr txBox="1"/>
+              <p:nvPr/>
+            </p:nvSpPr>
+            <p:spPr>
+              <a:xfrm>
+                <a:off x="7893455" y="4377024"/>
+                <a:ext cx="6724650" cy="953135"/>
+              </a:xfrm>
+              <a:prstGeom prst="rect">
+                <a:avLst/>
+              </a:prstGeom>
+              <a:noFill/>
+            </p:spPr>
+            <p:txBody>
+              <a:bodyPr wrap="square">
+                <a:spAutoFit/>
+              </a:bodyPr>
+              <a:p>
+                <a:pPr>
+                  <a:lnSpc>
+                    <a:spcPct val="200000"/>
+                  </a:lnSpc>
+                </a:pPr>
+                <a:r>
+                  <a:rPr lang="zh-CN" altLang="en-US" sz="1400" dirty="0">
+                    <a:solidFill>
+                      <a:schemeClr val="tx1">
+                        <a:lumMod val="75000"/>
+                        <a:lumOff val="25000"/>
+                      </a:schemeClr>
+                    </a:solidFill>
+                    <a:latin typeface="微软雅黑" panose="020B0503020204020204" charset="-122"/>
+                    <a:ea typeface="微软雅黑" panose="020B0503020204020204" charset="-122"/>
+                  </a:rPr>
+                  <a:t>入口校验 ndim∈{3,4}，非法形状抛出带形状信息的明确错误；若不改代码则须把 docstring 收窄为仅 (S, H, W, 1)，文档与实现二者必居其一。</a:t>
+                </a:r>
+                <a:endParaRPr lang="zh-CN" altLang="en-US" sz="1400" dirty="0">
+                  <a:solidFill>
+                    <a:schemeClr val="tx1">
+                      <a:lumMod val="75000"/>
+                      <a:lumOff val="25000"/>
+                    </a:schemeClr>
+                  </a:solidFill>
+                  <a:latin typeface="微软雅黑" panose="020B0503020204020204" charset="-122"/>
+                  <a:ea typeface="微软雅黑" panose="020B0503020204020204" charset="-122"/>
+                </a:endParaRPr>
+              </a:p>
+            </p:txBody>
+          </p:sp>
+        </p:grpSp>
+      </p:grpSp>
+      <p:grpSp>
+        <p:nvGrpSpPr>
+          <p:cNvPr id="41" name="组合 40"/>
+          <p:cNvGrpSpPr/>
+          <p:nvPr/>
+        </p:nvGrpSpPr>
+        <p:grpSpPr>
+          <a:xfrm rot="0">
+            <a:off x="2890520" y="4800600"/>
+            <a:ext cx="7985125" cy="1217930"/>
+            <a:chOff x="3134969" y="2228849"/>
+            <a:chExt cx="7984866" cy="1218108"/>
+          </a:xfrm>
+        </p:grpSpPr>
+        <p:sp>
+          <p:nvSpPr>
+            <p:cNvPr id="28" name="椭圆 27"/>
+            <p:cNvSpPr/>
+            <p:nvPr/>
+          </p:nvSpPr>
+          <p:spPr>
+            <a:xfrm>
+              <a:off x="3134969" y="2228849"/>
+              <a:ext cx="435661" cy="435661"/>
+            </a:xfrm>
+            <a:prstGeom prst="ellipse">
+              <a:avLst/>
+            </a:prstGeom>
+            <a:solidFill>
+              <a:srgbClr val="25557A"/>
+            </a:solidFill>
+            <a:ln>
+              <a:noFill/>
+            </a:ln>
+          </p:spPr>
+          <p:style>
+            <a:lnRef idx="2">
+              <a:schemeClr val="accent1">
+                <a:shade val="50000"/>
+              </a:schemeClr>
+            </a:lnRef>
+            <a:fillRef idx="1">
+              <a:schemeClr val="accent1"/>
+            </a:fillRef>
+            <a:effectRef idx="0">
+              <a:schemeClr val="accent1"/>
+            </a:effectRef>
+            <a:fontRef idx="minor">
+              <a:schemeClr val="lt1"/>
+            </a:fontRef>
+          </p:style>
+          <p:txBody>
+            <a:bodyPr rot="0" spcFirstLastPara="0" vertOverflow="overflow" horzOverflow="overflow" vert="horz" wrap="square" lIns="91440" tIns="45720" rIns="91440" bIns="45720" numCol="1" spcCol="0" rtlCol="0" fromWordArt="0" anchor="ctr" anchorCtr="0" forceAA="0" compatLnSpc="1">
+              <a:noAutofit/>
+            </a:bodyPr>
+            <a:p>
+              <a:pPr algn="ctr"/>
+              <a:r>
+                <a:rPr lang="en-US" altLang="zh-CN" sz="1600" dirty="0">
+                  <a:latin typeface="微软雅黑" panose="020B0503020204020204" charset="-122"/>
+                  <a:ea typeface="微软雅黑" panose="020B0503020204020204" charset="-122"/>
+                  <a:cs typeface="+mn-ea"/>
+                  <a:sym typeface="+mn-lt"/>
+                </a:rPr>
+                <a:t>3</a:t>
+              </a:r>
+              <a:endParaRPr lang="en-US" altLang="zh-CN" sz="1600" dirty="0">
+                <a:latin typeface="微软雅黑" panose="020B0503020204020204" charset="-122"/>
+                <a:ea typeface="微软雅黑" panose="020B0503020204020204" charset="-122"/>
+                <a:cs typeface="+mn-ea"/>
+                <a:sym typeface="+mn-lt"/>
+              </a:endParaRPr>
+            </a:p>
+          </p:txBody>
+        </p:sp>
+        <p:grpSp>
+          <p:nvGrpSpPr>
+            <p:cNvPr id="43" name="组合 42"/>
+            <p:cNvGrpSpPr/>
+            <p:nvPr/>
+          </p:nvGrpSpPr>
+          <p:grpSpPr>
+            <a:xfrm>
+              <a:off x="3765265" y="2243632"/>
+              <a:ext cx="7354570" cy="1203325"/>
+              <a:chOff x="7893455" y="4126834"/>
+              <a:chExt cx="7354570" cy="1203325"/>
+            </a:xfrm>
+          </p:grpSpPr>
+          <p:sp>
+            <p:nvSpPr>
+              <p:cNvPr id="44" name="矩形 43"/>
+              <p:cNvSpPr/>
+              <p:nvPr/>
+            </p:nvSpPr>
+            <p:spPr>
+              <a:xfrm>
+                <a:off x="7893455" y="4126834"/>
+                <a:ext cx="2240242" cy="368300"/>
+              </a:xfrm>
+              <a:prstGeom prst="rect">
+                <a:avLst/>
+              </a:prstGeom>
+            </p:spPr>
+            <p:txBody>
+              <a:bodyPr wrap="square">
+                <a:spAutoFit/>
+              </a:bodyPr>
+              <a:p>
+                <a:r>
+                  <a:rPr lang="zh-CN" altLang="en-US" b="1" dirty="0">
+                    <a:solidFill>
+                      <a:srgbClr val="25557A"/>
+                    </a:solidFill>
+                    <a:latin typeface="微软雅黑" panose="020B0503020204020204" charset="-122"/>
+                    <a:ea typeface="微软雅黑" panose="020B0503020204020204" charset="-122"/>
+                    <a:cs typeface="+mn-ea"/>
+                    <a:sym typeface="+mn-lt"/>
+                  </a:rPr>
+                  <a:t>回归验证</a:t>
+                </a:r>
+                <a:endParaRPr lang="zh-CN" altLang="en-US" dirty="0">
+                  <a:solidFill>
+                    <a:schemeClr val="accent5">
+                      <a:lumMod val="50000"/>
+                    </a:schemeClr>
+                  </a:solidFill>
+                  <a:latin typeface="微软雅黑" panose="020B0503020204020204" charset="-122"/>
+                  <a:ea typeface="微软雅黑" panose="020B0503020204020204" charset="-122"/>
+                  <a:cs typeface="+mn-ea"/>
+                  <a:sym typeface="+mn-lt"/>
+                </a:endParaRPr>
+              </a:p>
+            </p:txBody>
+          </p:sp>
+          <p:sp>
+            <p:nvSpPr>
+              <p:cNvPr id="45" name="文本框 44"/>
+              <p:cNvSpPr txBox="1"/>
+              <p:nvPr/>
+            </p:nvSpPr>
+            <p:spPr>
+              <a:xfrm>
+                <a:off x="9465708" y="4220231"/>
+                <a:ext cx="2665723" cy="215444"/>
+              </a:xfrm>
+              <a:prstGeom prst="rect">
+                <a:avLst/>
+              </a:prstGeom>
+              <a:noFill/>
+            </p:spPr>
+            <p:txBody>
+              <a:bodyPr wrap="square">
+                <a:spAutoFit/>
+              </a:bodyPr>
+              <a:p>
+                <a:r>
+                  <a:rPr lang="zh-CN" altLang="en-US" sz="800" dirty="0">
+                    <a:solidFill>
+                      <a:schemeClr val="bg1">
+                        <a:lumMod val="65000"/>
+                      </a:schemeClr>
+                    </a:solidFill>
+                    <a:latin typeface="微软雅黑" panose="020B0503020204020204" charset="-122"/>
+                    <a:ea typeface="微软雅黑" panose="020B0503020204020204" charset="-122"/>
+                    <a:cs typeface="+mn-ea"/>
+                    <a:sym typeface="+mn-lt"/>
+                  </a:rPr>
+                  <a:t>REGRESSION</a:t>
+                </a:r>
+                <a:r>
+                  <a:rPr lang="en-US" altLang="zh-CN" sz="800" dirty="0">
+                    <a:solidFill>
+                      <a:schemeClr val="bg1">
+                        <a:lumMod val="65000"/>
+                      </a:schemeClr>
+                    </a:solidFill>
+                    <a:latin typeface="微软雅黑" panose="020B0503020204020204" charset="-122"/>
+                    <a:ea typeface="微软雅黑" panose="020B0503020204020204" charset="-122"/>
+                    <a:cs typeface="+mn-ea"/>
+                    <a:sym typeface="+mn-lt"/>
+                  </a:rPr>
+                  <a:t> | </a:t>
+                </a:r>
+                <a:r>
+                  <a:rPr lang="zh-CN" altLang="en-US" sz="800" dirty="0">
+                    <a:solidFill>
+                      <a:schemeClr val="bg1">
+                        <a:lumMod val="65000"/>
+                      </a:schemeClr>
+                    </a:solidFill>
+                    <a:latin typeface="微软雅黑" panose="020B0503020204020204" charset="-122"/>
+                    <a:ea typeface="微软雅黑" panose="020B0503020204020204" charset="-122"/>
+                    <a:cs typeface="+mn-ea"/>
+                    <a:sym typeface="+mn-lt"/>
+                  </a:rPr>
+                  <a:t>33 ALL GREEN</a:t>
+                </a:r>
+                <a:endParaRPr lang="zh-CN" altLang="en-US" sz="800" dirty="0">
+                  <a:solidFill>
+                    <a:schemeClr val="bg1">
+                      <a:lumMod val="65000"/>
+                    </a:schemeClr>
+                  </a:solidFill>
+                  <a:latin typeface="微软雅黑" panose="020B0503020204020204" charset="-122"/>
+                  <a:ea typeface="微软雅黑" panose="020B0503020204020204" charset="-122"/>
+                  <a:cs typeface="+mn-ea"/>
+                  <a:sym typeface="+mn-lt"/>
+                </a:endParaRPr>
+              </a:p>
+            </p:txBody>
+          </p:sp>
+          <p:sp>
+            <p:nvSpPr>
+              <p:cNvPr id="47" name="文本框 46"/>
+              <p:cNvSpPr txBox="1"/>
+              <p:nvPr/>
+            </p:nvSpPr>
+            <p:spPr>
+              <a:xfrm>
+                <a:off x="7893455" y="4377024"/>
+                <a:ext cx="7354570" cy="953135"/>
+              </a:xfrm>
+              <a:prstGeom prst="rect">
+                <a:avLst/>
+              </a:prstGeom>
+              <a:noFill/>
+            </p:spPr>
+            <p:txBody>
+              <a:bodyPr wrap="square">
+                <a:spAutoFit/>
+              </a:bodyPr>
+              <a:p>
+                <a:pPr>
+                  <a:lnSpc>
+                    <a:spcPct val="200000"/>
+                  </a:lnSpc>
+                </a:pPr>
+                <a:r>
+                  <a:rPr lang="zh-CN" altLang="en-US" sz="1400" dirty="0">
+                    <a:solidFill>
+                      <a:schemeClr val="tx1">
+                        <a:lumMod val="75000"/>
+                        <a:lumOff val="25000"/>
+                      </a:schemeClr>
+                    </a:solidFill>
+                    <a:latin typeface="微软雅黑" panose="020B0503020204020204" charset="-122"/>
+                    <a:ea typeface="微软雅黑" panose="020B0503020204020204" charset="-122"/>
+                  </a:rPr>
+                  <a:t>修复后重跑一键测试：33 条应全部通过（016/018 转绿、017 不回归）；按课程约定基线未改，本页仅作修复方案留档演示。</a:t>
+                </a:r>
+                <a:endParaRPr lang="zh-CN" altLang="en-US" sz="1400" dirty="0">
+                  <a:solidFill>
+                    <a:schemeClr val="tx1">
+                      <a:lumMod val="75000"/>
+                      <a:lumOff val="25000"/>
+                    </a:schemeClr>
+                  </a:solidFill>
+                  <a:latin typeface="微软雅黑" panose="020B0503020204020204" charset="-122"/>
+                  <a:ea typeface="微软雅黑" panose="020B0503020204020204" charset="-122"/>
+                </a:endParaRPr>
+              </a:p>
+            </p:txBody>
+          </p:sp>
+        </p:grpSp>
+      </p:grpSp>
+      <p:pic>
+        <p:nvPicPr>
+          <p:cNvPr id="12" name="图片 11" descr="图书馆"/>
+          <p:cNvPicPr>
+            <a:picLocks noChangeAspect="1"/>
+          </p:cNvPicPr>
+          <p:nvPr/>
+        </p:nvPicPr>
+        <p:blipFill>
+          <a:blip r:embed="rId1">
+            <a:alphaModFix amt="25000"/>
+          </a:blip>
+          <a:stretch>
+            <a:fillRect/>
+          </a:stretch>
+        </p:blipFill>
+        <p:spPr>
+          <a:xfrm>
+            <a:off x="8452485" y="5777865"/>
+            <a:ext cx="3739585" cy="1080000"/>
+          </a:xfrm>
+          <a:prstGeom prst="rect">
+            <a:avLst/>
+          </a:prstGeom>
+        </p:spPr>
+      </p:pic>
+      <p:grpSp>
+        <p:nvGrpSpPr>
+          <p:cNvPr id="16" name="组合 15"/>
+          <p:cNvGrpSpPr/>
+          <p:nvPr userDrawn="1"/>
+        </p:nvGrpSpPr>
+        <p:grpSpPr>
+          <a:xfrm>
+            <a:off x="10289667" y="-801077"/>
+            <a:ext cx="1902333" cy="2044520"/>
+            <a:chOff x="8135783" y="-1669981"/>
+            <a:chExt cx="4056217" cy="4359393"/>
+          </a:xfrm>
+        </p:grpSpPr>
+        <p:sp>
+          <p:nvSpPr>
+            <p:cNvPr id="17" name="任意多边形: 形状 10"/>
+            <p:cNvSpPr/>
+            <p:nvPr/>
+          </p:nvSpPr>
+          <p:spPr>
+            <a:xfrm rot="18900000">
+              <a:off x="8135783" y="-1669981"/>
+              <a:ext cx="3339963" cy="3339962"/>
+            </a:xfrm>
+            <a:custGeom>
+              <a:avLst/>
+              <a:gdLst>
+                <a:gd name="connsiteX0" fmla="*/ 0 w 3339963"/>
+                <a:gd name="connsiteY0" fmla="*/ 0 h 3339962"/>
+                <a:gd name="connsiteX1" fmla="*/ 3339963 w 3339963"/>
+                <a:gd name="connsiteY1" fmla="*/ 3339962 h 3339962"/>
+                <a:gd name="connsiteX2" fmla="*/ 1099563 w 3339963"/>
+                <a:gd name="connsiteY2" fmla="*/ 3339962 h 3339962"/>
+              </a:gdLst>
+              <a:ahLst/>
+              <a:cxnLst>
+                <a:cxn ang="0">
+                  <a:pos x="connsiteX0" y="connsiteY0"/>
+                </a:cxn>
+                <a:cxn ang="0">
+                  <a:pos x="connsiteX1" y="connsiteY1"/>
+                </a:cxn>
+                <a:cxn ang="0">
+                  <a:pos x="connsiteX2" y="connsiteY2"/>
+                </a:cxn>
+              </a:cxnLst>
+              <a:rect l="l" t="t" r="r" b="b"/>
+              <a:pathLst>
+                <a:path w="3339963" h="3339962">
+                  <a:moveTo>
+                    <a:pt x="0" y="0"/>
+                  </a:moveTo>
+                  <a:lnTo>
+                    <a:pt x="3339963" y="3339962"/>
+                  </a:lnTo>
+                  <a:lnTo>
+                    <a:pt x="1099563" y="3339962"/>
+                  </a:lnTo>
+                  <a:close/>
+                </a:path>
+              </a:pathLst>
+            </a:custGeom>
+            <a:solidFill>
+              <a:schemeClr val="accent1">
+                <a:lumMod val="20000"/>
+                <a:lumOff val="80000"/>
+              </a:schemeClr>
+            </a:solidFill>
+            <a:ln>
+              <a:noFill/>
+            </a:ln>
+          </p:spPr>
+          <p:style>
+            <a:lnRef idx="2">
+              <a:schemeClr val="accent1">
+                <a:shade val="50000"/>
+              </a:schemeClr>
+            </a:lnRef>
+            <a:fillRef idx="1">
+              <a:schemeClr val="accent1"/>
+            </a:fillRef>
+            <a:effectRef idx="0">
+              <a:schemeClr val="accent1"/>
+            </a:effectRef>
+            <a:fontRef idx="minor">
+              <a:schemeClr val="lt1"/>
+            </a:fontRef>
+          </p:style>
+          <p:txBody>
+            <a:bodyPr rtlCol="0" anchor="ctr"/>
+            <a:p>
+              <a:pPr algn="ctr"/>
+              <a:endParaRPr lang="zh-CN" altLang="en-US"/>
+            </a:p>
+          </p:txBody>
+        </p:sp>
+        <p:sp>
+          <p:nvSpPr>
+            <p:cNvPr id="20" name="直角三角形 19"/>
+            <p:cNvSpPr/>
+            <p:nvPr/>
+          </p:nvSpPr>
+          <p:spPr>
+            <a:xfrm rot="10800000">
+              <a:off x="9502588" y="0"/>
+              <a:ext cx="2689412" cy="2689412"/>
+            </a:xfrm>
+            <a:prstGeom prst="rtTriangle">
+              <a:avLst/>
+            </a:prstGeom>
+            <a:solidFill>
+              <a:srgbClr val="25557A"/>
+            </a:solidFill>
+            <a:ln>
+              <a:noFill/>
+            </a:ln>
+          </p:spPr>
+          <p:style>
+            <a:lnRef idx="2">
+              <a:schemeClr val="accent1">
+                <a:shade val="50000"/>
+              </a:schemeClr>
+            </a:lnRef>
+            <a:fillRef idx="1">
+              <a:schemeClr val="accent1"/>
+            </a:fillRef>
+            <a:effectRef idx="0">
+              <a:schemeClr val="accent1"/>
+            </a:effectRef>
+            <a:fontRef idx="minor">
+              <a:schemeClr val="lt1"/>
+            </a:fontRef>
+          </p:style>
+          <p:txBody>
+            <a:bodyPr rtlCol="0" anchor="ctr"/>
+            <a:p>
+              <a:pPr algn="ctr"/>
+              <a:endParaRPr lang="zh-CN" altLang="en-US"/>
+            </a:p>
+          </p:txBody>
+        </p:sp>
+      </p:grpSp>
+    </p:spTree>
+    <p:custDataLst>
+      <p:tags r:id="rId2"/>
+    </p:custDataLst>
+  </p:cSld>
+  <p:clrMapOvr>
+    <a:masterClrMapping/>
+  </p:clrMapOvr>
+</p:sld>
+</file>
+
+<file path=ppt/slides/slide14.xml><?xml version="1.0" encoding="utf-8"?>
+<p:sld xmlns:a="http://schemas.openxmlformats.org/drawingml/2006/main" xmlns:r="http://schemas.openxmlformats.org/officeDocument/2006/relationships" xmlns:p="http://schemas.openxmlformats.org/presentationml/2006/main">
+  <p:cSld>
     <p:spTree>
       <p:nvGrpSpPr>
         <p:cNvPr id="1" name=""/>
@@ -10838,7 +12400,7 @@
 </p:sld>
 </file>
 
-<file path=ppt/slides/slide14.xml><?xml version="1.0" encoding="utf-8"?>
+<file path=ppt/slides/slide15.xml><?xml version="1.0" encoding="utf-8"?>
 <p:sld xmlns:a="http://schemas.openxmlformats.org/drawingml/2006/main" xmlns:r="http://schemas.openxmlformats.org/officeDocument/2006/relationships" xmlns:p="http://schemas.openxmlformats.org/presentationml/2006/main">
   <p:cSld>
     <p:spTree>
@@ -17415,16 +18977,16 @@
               </a:lnSpc>
             </a:pPr>
             <a:r>
-              <a:rPr lang="zh-CN" altLang="en-US" sz="1600">
+              <a:rPr lang="zh-CN" altLang="en-US" sz="1200">
                 <a:solidFill>
                   <a:schemeClr val="bg1"/>
                 </a:solidFill>
                 <a:latin typeface="微软雅黑" panose="020B0503020204020204" charset="-122"/>
                 <a:ea typeface="微软雅黑" panose="020B0503020204020204" charset="-122"/>
               </a:rPr>
-              <a:t>按输入维度切有效/无效类：尺寸、帧数、坐标系、类型，共 19 条。</a:t>
+              <a:t>例 001：单像素深度反投影，应精确回到原像素；例 004：内参尺寸非法应抛错。合法/非法各成一类，共 19 条。</a:t>
             </a:r>
-            <a:endParaRPr lang="zh-CN" altLang="en-US" sz="1600">
+            <a:endParaRPr lang="zh-CN" altLang="en-US" sz="1200">
               <a:solidFill>
                 <a:schemeClr val="bg1"/>
               </a:solidFill>
@@ -17611,7 +19173,7 @@
               </a:lnSpc>
             </a:pPr>
             <a:r>
-              <a:rPr lang="zh-CN" altLang="en-US" sz="1600">
+              <a:rPr lang="zh-CN" altLang="en-US" sz="1200">
                 <a:solidFill>
                   <a:schemeClr val="tx1">
                     <a:lumMod val="85000"/>
@@ -17621,9 +19183,9 @@
                 <a:latin typeface="微软雅黑" panose="020B0503020204020204" charset="-122"/>
                 <a:ea typeface="微软雅黑" panose="020B0503020204020204" charset="-122"/>
               </a:rPr>
-              <a:t>专攻临界点：图像四角、深度 0、矩阵尺寸、eps±、Z=0，共 5 条。</a:t>
+              <a:t>例 003：全零深度图即深度下界；例 014：深度恰等于 eps 无效、大于才有效；例 025：z=0。共 5 条。</a:t>
             </a:r>
-            <a:endParaRPr lang="zh-CN" altLang="en-US" sz="1600">
+            <a:endParaRPr lang="zh-CN" altLang="en-US" sz="1200">
               <a:solidFill>
                 <a:schemeClr val="tx1">
                   <a:lumMod val="85000"/>
@@ -17804,16 +19366,16 @@
               </a:lnSpc>
             </a:pPr>
             <a:r>
-              <a:rPr lang="zh-CN" altLang="en-US" sz="1600">
+              <a:rPr lang="zh-CN" altLang="en-US" sz="1200">
                 <a:solidFill>
                   <a:schemeClr val="bg1"/>
                 </a:solidFill>
                 <a:latin typeface="微软雅黑" panose="020B0503020204020204" charset="-122"/>
                 <a:ea typeface="微软雅黑" panose="020B0503020204020204" charset="-122"/>
               </a:rPr>
-              <a:t>多维叠加出题：深度×旋转、帧广播、平移×内参、批量内参，共 4 条。</a:t>
+              <a:t>例 022：同一世界点经两帧外参投影得不同坐标；例 028：平移 (1,2,0)×非单位内参叠加。共 4 条。</a:t>
             </a:r>
-            <a:endParaRPr lang="zh-CN" altLang="en-US" sz="1600">
+            <a:endParaRPr lang="zh-CN" altLang="en-US" sz="1200">
               <a:solidFill>
                 <a:schemeClr val="bg1"/>
               </a:solidFill>
@@ -18000,7 +19562,7 @@
               </a:lnSpc>
             </a:pPr>
             <a:r>
-              <a:rPr lang="zh-CN" altLang="en-US" sz="1600">
+              <a:rPr lang="zh-CN" altLang="en-US" sz="1200">
                 <a:solidFill>
                   <a:schemeClr val="tx1">
                     <a:lumMod val="85000"/>
@@ -18010,9 +19572,9 @@
                 <a:latin typeface="微软雅黑" panose="020B0503020204020204" charset="-122"/>
                 <a:ea typeface="微软雅黑" panose="020B0503020204020204" charset="-122"/>
               </a:rPr>
-              <a:t>凭怀疑补刀：非零 skew、批量长度不一致；判定表另固化 2 条。</a:t>
+              <a:t>例 019：帧数多于外参应抛错而非部分结果；例 005：非零 skew。判定表另固化 2 条。</a:t>
             </a:r>
-            <a:endParaRPr lang="zh-CN" altLang="en-US" sz="1600">
+            <a:endParaRPr lang="zh-CN" altLang="en-US" sz="1200">
               <a:solidFill>
                 <a:schemeClr val="tx1">
                   <a:lumMod val="85000"/>
@@ -22335,6 +23897,27 @@
 </p:tagLst>
 </file>
 
+<file path=ppt/tags/tag86.xml><?xml version="1.0" encoding="utf-8"?>
+<p:tagLst xmlns:p="http://schemas.openxmlformats.org/presentationml/2006/main">
+  <p:tag name="KSO_WM_SLIDE_ID" val="custom20205081_1"/>
+  <p:tag name="KSO_WM_TEMPLATE_SUBCATEGORY" val="19"/>
+  <p:tag name="KSO_WM_TEMPLATE_MASTER_TYPE" val="0"/>
+  <p:tag name="KSO_WM_TEMPLATE_COLOR_TYPE" val="1"/>
+  <p:tag name="KSO_WM_SLIDE_TYPE" val="title"/>
+  <p:tag name="KSO_WM_SLIDE_SUBTYPE" val="defaultBlank"/>
+  <p:tag name="KSO_WM_SLIDE_ITEM_CNT" val="0"/>
+  <p:tag name="KSO_WM_SLIDE_INDEX" val="1"/>
+  <p:tag name="KSO_WM_TAG_VERSION" val="1.0"/>
+  <p:tag name="KSO_WM_BEAUTIFY_FLAG" val="#wm#"/>
+  <p:tag name="KSO_WM_TEMPLATE_CATEGORY" val="custom"/>
+  <p:tag name="KSO_WM_TEMPLATE_INDEX" val="20205081"/>
+  <p:tag name="KSO_WM_SLIDE_LAYOUT" val="a_b"/>
+  <p:tag name="KSO_WM_SLIDE_LAYOUT_CNT" val="1_1"/>
+  <p:tag name="KSO_WM_UNIT_SHOW_EDIT_AREA_INDICATION" val="1"/>
+  <p:tag name="KSO_WM_TEMPLATE_THUMBS_INDEX" val="1、4、7、12、13、14、15、16、17、18、20、24、25、28、33、36、40、43、44"/>
+</p:tagLst>
+</file>
+
 <file path=ppt/tags/tag9.xml><?xml version="1.0" encoding="utf-8"?>
 <p:tagLst xmlns:p="http://schemas.openxmlformats.org/presentationml/2006/main">
   <p:tag name="KSO_WM_UNIT_HIGHLIGHT" val="0"/>
